--- a/deck/The_Education_Exception.pptx
+++ b/deck/The_Education_Exception.pptx
@@ -3373,7 +3373,7 @@
                 </a:solidFill>
                 <a:latin typeface="Consolas"/>
               </a:rPr>
-              <a:t>SDG: 151 countries · HDI &amp; SHDI × World Happiness Report: 150 countries, 2011–2023 · European Social Survey: 36 countries, 351,023 respondents, rounds 5–11 (2010–2023)</a:t>
+              <a:t>SDG: 42 countries, 661 series · HDI &amp; SHDI × World Happiness Report: 148–151 countries, 2011–2023 · European Social Survey: 36 countries, 351,023 respondents, rounds 5–11 (2010–2023)</a:t>
             </a:r>
           </a:p>
         </p:txBody>
@@ -3531,7 +3531,7 @@
                 </a:solidFill>
                 <a:latin typeface="Calibri"/>
               </a:rPr>
-              <a:t>Ranking all 609 SDG series by the share of countries in which they are FDR-significant puts child mortality, stunting, water and sanitation, and access to financial services at the top. These are survival and basic infrastructure — the steep part of the development curve, not the 2030 Agenda's institutional superstructure.</a:t>
+              <a:t>Ranking the 632 SDG series with usable coverage by the share of countries in which they are FDR-significant puts child mortality, stunting, water and sanitation, and access to financial services at the top. These are survival and basic infrastructure — the steep part of the development curve, not the 2030 Agenda's institutional superstructure.</a:t>
             </a:r>
           </a:p>
           <a:p>
@@ -3553,7 +3553,7 @@
                 </a:solidFill>
                 <a:latin typeface="Calibri"/>
               </a:rPr>
-              <a:t>The best-performing education indicator ranks about hundredth. In first differences, only 9 of 609 series have even one significant country, which is why there is no differences ranking to report at all.</a:t>
+              <a:t>The best-performing education indicator ranks about 101st of 632 — and it is participation in organized learning before primary entry, an access measure, which is the same construct Act II turns on. In first differences, only 9 of the 661 series have even one significant country, which is why there is no differences ranking to report at all.</a:t>
             </a:r>
           </a:p>
         </p:txBody>
@@ -3664,7 +3664,7 @@
                 </a:solidFill>
                 <a:latin typeface="Calibri"/>
               </a:rPr>
-              <a:t>The 20 highest-ranking SDG series of 609, by share of countries FDR-significant in levels.</a:t>
+              <a:t>The 20 highest-ranking SDG series of 632, by share of countries FDR-significant in levels.</a:t>
             </a:r>
           </a:p>
         </p:txBody>
@@ -3822,7 +3822,7 @@
                 </a:solidFill>
                 <a:latin typeface="Calibri"/>
               </a:rPr>
-              <a:t>Mean years of schooling is FDR-significant against World Happiness Report happiness in 40.9% of countries and expected years of schooling in 33.6%, against 40.0% for GNI per capita and 19.3% for life expectancy. Education supplies two of the HDI's three strongest components; pooled SDG4 sits at 3.3%. This is the sharpest disagreement between the two frameworks anywhere in the project.</a:t>
+              <a:t>Mean years of schooling is FDR-significant against World Happiness Report happiness in 61 of 150 countries (40.7%) and expected years of schooling in 51 of 150 (34.0%), against 61 of 151 (40.4%) for GNI per capita and 30 of 151 (19.9%) for life expectancy. Education supplies two of the HDI's three strongest components; pooled SDG4 sits at 3.3%. This is the sharpest disagreement between the two frameworks anywhere in the project.</a:t>
             </a:r>
           </a:p>
         </p:txBody>
@@ -6342,7 +6342,7 @@
                 </a:solidFill>
                 <a:latin typeface="Calibri"/>
               </a:rPr>
-              <a:t>The SDG paper now under review makes a narrow, awkward claim: the association between development indicators and happiness is strong when countries are compared with one another, and close to absent when each country is compared with its own past. Sixty-four of 151 countries show a significant SDG–happiness association in levels. Three do in year-to-year changes.</a:t>
+              <a:t>The SDG paper now under review makes a narrow, awkward claim: the association between development indicators and happiness is strong when countries are compared with one another, and close to absent when each country is compared with its own past. Thirty of the 42 countries with usable SDG coverage show a significant SDG–happiness association in levels. Two do in year-to-year changes.</a:t>
             </a:r>
           </a:p>
           <a:p>
@@ -8492,7 +8492,7 @@
                 </a:solidFill>
                 <a:latin typeface="Calibri"/>
               </a:rPr>
-              <a:t>Every level of aggregation we can test points the other way. Attainment and access carry the wellbeing signal — 12.7% for SDG4 access, 33.6% and 40.9% for the HDI's schooling components, 32 of 36 countries at the individual level — while measured learning outcomes sit at 0.9% and parity ratios at 2.5%.</a:t>
+              <a:t>Every level of aggregation we can test points the other way. Attainment and access carry the wellbeing signal — 12.7% for SDG4 access, 34.0% and 40.7% for the HDI's schooling components, 32 of 36 countries at the individual level — while measured learning outcomes sit at 0.9% and parity ratios at 2.5%.</a:t>
             </a:r>
           </a:p>
         </p:txBody>
@@ -10070,7 +10070,7 @@
                 </a:solidFill>
                 <a:latin typeface="Consolas"/>
               </a:rPr>
-              <a:t>67 → 6</a:t>
+              <a:t>71% → 5%</a:t>
             </a:r>
           </a:p>
           <a:p>
@@ -10092,7 +10092,7 @@
                 </a:solidFill>
                 <a:latin typeface="Calibri"/>
               </a:rPr>
-              <a:t>of 150 countries significant, HDI levels → differences</a:t>
+              <a:t>of countries significant, SDG levels → differences</a:t>
             </a:r>
           </a:p>
         </p:txBody>
@@ -10134,7 +10134,7 @@
                 </a:solidFill>
                 <a:latin typeface="Consolas"/>
               </a:rPr>
-              <a:t>66 → 6</a:t>
+              <a:t>42% → 2%</a:t>
             </a:r>
           </a:p>
           <a:p>
@@ -10156,7 +10156,7 @@
                 </a:solidFill>
                 <a:latin typeface="Calibri"/>
               </a:rPr>
-              <a:t>of 148, subnational HDI</a:t>
+              <a:t>the same collapse under the HDI composite</a:t>
             </a:r>
           </a:p>
         </p:txBody>
@@ -10198,7 +10198,7 @@
                 </a:solidFill>
                 <a:latin typeface="Consolas"/>
               </a:rPr>
-              <a:t>3 × 2</a:t>
+              <a:t>45% → 4%</a:t>
             </a:r>
           </a:p>
           <a:p>
@@ -10220,7 +10220,7 @@
                 </a:solidFill>
                 <a:latin typeface="Calibri"/>
               </a:rPr>
-              <a:t>spatial scales × wellbeing instruments</a:t>
+              <a:t>and under the subnational HDI</a:t>
             </a:r>
           </a:p>
         </p:txBody>
@@ -10465,7 +10465,7 @@
                 </a:solidFill>
                 <a:latin typeface="Calibri"/>
               </a:rPr>
-              <a:t>The leading goal (Energy, 16.0%) clears FDR significance in barely one country-test in six; pooled Education ranks 11th of 16.</a:t>
+              <a:t>The leading goal (Energy, 16.0%) clears FDR significance in barely one country-test in six; pooled Education ranks 12th of 17.</a:t>
             </a:r>
           </a:p>
         </p:txBody>
@@ -12079,7 +12079,7 @@
                 </a:solidFill>
                 <a:latin typeface="Calibri"/>
               </a:rPr>
-              <a:t>The Human Development Index is the opposite of the SDG framework in every way that the dismissal relies on: three dimensions rather than seventeen goals, a single custodian, a stable definition, near-universal coverage. Substituting it for the SDG indicators and holding everything else fixed gives 67 of 150 countries FDR-significant in levels and 6 of 150 in first differences.</a:t>
+              <a:t>The Human Development Index is the opposite of the SDG framework in every way that the dismissal relies on: three dimensions rather than seventeen goals, a single custodian, a stable definition, near-universal coverage. Substituting it for the SDG indicators and holding everything else fixed gives 64 of 151 countries FDR-significant in levels and 3 of 151 in first differences — 42% down to 2%.</a:t>
             </a:r>
           </a:p>
           <a:p>
@@ -12101,7 +12101,7 @@
                 </a:solidFill>
                 <a:latin typeface="Calibri"/>
               </a:rPr>
-              <a:t>The original SDG result was 64 of 151 and 3 of 151. Whatever produces the asymmetry, it is not the design of the SDG indicator set.</a:t>
+              <a:t>The SDG framework collapsed from 71% of countries to 5%. The two rates are not directly comparable, because the SDG test asks whether any of a country's several hundred series is significant while the HDI test asks about one composite; that difference is exactly why the SDG levels rate is higher. What compares is the collapse itself, and it is an order of magnitude in both. Whatever produces the asymmetry, it is not the design of the SDG indicator set.</a:t>
             </a:r>
           </a:p>
         </p:txBody>
@@ -12164,8 +12164,8 @@
         </p:blipFill>
         <p:spPr>
           <a:xfrm>
-            <a:off x="5572501" y="658368"/>
-            <a:ext cx="5634238" cy="5074920"/>
+            <a:off x="5120640" y="1353312"/>
+            <a:ext cx="6537960" cy="3685032"/>
           </a:xfrm>
           <a:prstGeom prst="rect">
             <a:avLst/>
@@ -12212,7 +12212,7 @@
                 </a:solidFill>
                 <a:latin typeface="Calibri"/>
               </a:rPr>
-              <a:t>Countries with an FDR-significant development–happiness association, levels versus first differences, for the HDI and for the Global Data Lab's subnational HDI aggregated to the national level.</a:t>
+              <a:t>Countries with an FDR-significant development–happiness association, levels versus first differences, for the HDI and for the Global Data Lab's subnational HDI aggregated to the national level. One test per country per index.</a:t>
             </a:r>
           </a:p>
         </p:txBody>
@@ -13086,7 +13086,7 @@
                 </a:solidFill>
                 <a:latin typeface="Calibri"/>
               </a:rPr>
-              <a:t>The Global Data Lab constructs its subnational HDI from household surveys rather than from the national accounts and administrative series the UNDP uses. Aggregated back to the national level it gives 66 of 148 in levels and 6 of 148 in differences — within sampling noise of both the HDI and the SDG results.</a:t>
+              <a:t>The Global Data Lab constructs its subnational HDI from household surveys rather than from the national accounts and administrative series the UNDP uses. Aggregated back to the national level it gives 66 of 148 in levels and 6 of 148 in differences — 45% down to 4%, statistically indistinguishable from the HDI's 42% down to 2%.</a:t>
             </a:r>
           </a:p>
         </p:txBody>

--- a/deck/The_Education_Exception.pptx
+++ b/deck/The_Education_Exception.pptx
@@ -48,6 +48,7 @@
     <p:sldId id="296" r:id="rId47"/>
     <p:sldId id="297" r:id="rId48"/>
     <p:sldId id="298" r:id="rId49"/>
+    <p:sldId id="299" r:id="rId50"/>
   </p:sldIdLst>
   <p:sldSz cx="12191695" cy="6858000" type="screen4x3"/>
   <p:notesSz cx="6858000" cy="9144000"/>
@@ -3392,7 +3393,7 @@
     <p:bg>
       <p:bgPr>
         <a:solidFill>
-          <a:srgbClr val="FCFCFB"/>
+          <a:srgbClr val="14171C"/>
         </a:solidFill>
         <a:effectLst/>
       </p:bgPr>
@@ -3412,21 +3413,261 @@
         </p:nvSpPr>
         <p:spPr>
           <a:xfrm>
-            <a:off x="566928" y="502920"/>
-            <a:ext cx="4160520" cy="274320"/>
-          </a:xfrm>
-          <a:prstGeom prst="rect">
-            <a:avLst/>
-          </a:prstGeom>
-          <a:noFill/>
-        </p:spPr>
-        <p:txBody>
-          <a:bodyPr wrap="square" lIns="0" rIns="0" tIns="0" bIns="0">
-            <a:spAutoFit/>
-          </a:bodyPr>
-          <a:lstStyle/>
-          <a:p>
-            <a:pPr>
+            <a:off x="8229600" y="822960"/>
+            <a:ext cx="3291840" cy="4114800"/>
+          </a:xfrm>
+          <a:prstGeom prst="rect">
+            <a:avLst/>
+          </a:prstGeom>
+          <a:noFill/>
+        </p:spPr>
+        <p:txBody>
+          <a:bodyPr wrap="square" lIns="0" rIns="0" tIns="0" bIns="0">
+            <a:spAutoFit/>
+          </a:bodyPr>
+          <a:lstStyle/>
+          <a:p>
+            <a:pPr algn="r">
+              <a:spcBef>
+                <a:spcPts val="0"/>
+              </a:spcBef>
+              <a:spcAft>
+                <a:spcPts val="0"/>
+              </a:spcAft>
+            </a:pPr>
+            <a:r>
+              <a:rPr sz="20000" b="0" i="0">
+                <a:solidFill>
+                  <a:srgbClr val="2A3340"/>
+                </a:solidFill>
+                <a:latin typeface="Georgia"/>
+              </a:rPr>
+              <a:t>II</a:t>
+            </a:r>
+          </a:p>
+        </p:txBody>
+      </p:sp>
+      <p:sp>
+        <p:nvSpPr>
+          <p:cNvPr id="3" name="Rectangle 2"/>
+          <p:cNvSpPr/>
+          <p:nvPr/>
+        </p:nvSpPr>
+        <p:spPr>
+          <a:xfrm>
+            <a:off x="566928" y="1371600"/>
+            <a:ext cx="7315200" cy="25400"/>
+          </a:xfrm>
+          <a:prstGeom prst="rect">
+            <a:avLst/>
+          </a:prstGeom>
+          <a:solidFill>
+            <a:srgbClr val="C9D8EC"/>
+          </a:solidFill>
+          <a:ln>
+            <a:noFill/>
+          </a:ln>
+          <a:effectLst/>
+        </p:spPr>
+        <p:style>
+          <a:lnRef idx="1">
+            <a:schemeClr val="accent1"/>
+          </a:lnRef>
+          <a:fillRef idx="3">
+            <a:schemeClr val="accent1"/>
+          </a:fillRef>
+          <a:effectRef idx="2">
+            <a:schemeClr val="accent1"/>
+          </a:effectRef>
+          <a:fontRef idx="minor">
+            <a:schemeClr val="lt1"/>
+          </a:fontRef>
+        </p:style>
+        <p:txBody>
+          <a:bodyPr rtlCol="0" anchor="ctr"/>
+          <a:lstStyle/>
+          <a:p>
+            <a:pPr algn="ctr"/>
+          </a:p>
+        </p:txBody>
+      </p:sp>
+      <p:sp>
+        <p:nvSpPr>
+          <p:cNvPr id="4" name="TextBox 3"/>
+          <p:cNvSpPr txBox="1"/>
+          <p:nvPr/>
+        </p:nvSpPr>
+        <p:spPr>
+          <a:xfrm>
+            <a:off x="566928" y="960120"/>
+            <a:ext cx="5486400" cy="274320"/>
+          </a:xfrm>
+          <a:prstGeom prst="rect">
+            <a:avLst/>
+          </a:prstGeom>
+          <a:noFill/>
+        </p:spPr>
+        <p:txBody>
+          <a:bodyPr wrap="square" lIns="0" rIns="0" tIns="0" bIns="0">
+            <a:spAutoFit/>
+          </a:bodyPr>
+          <a:lstStyle/>
+          <a:p>
+            <a:pPr>
+              <a:spcBef>
+                <a:spcPts val="0"/>
+              </a:spcBef>
+              <a:spcAft>
+                <a:spcPts val="0"/>
+              </a:spcAft>
+            </a:pPr>
+            <a:r>
+              <a:rPr sz="1100" b="0" i="0">
+                <a:solidFill>
+                  <a:srgbClr val="C9D8EC"/>
+                </a:solidFill>
+                <a:latin typeface="Consolas"/>
+              </a:rPr>
+              <a:t>ACT II</a:t>
+            </a:r>
+          </a:p>
+        </p:txBody>
+      </p:sp>
+      <p:sp>
+        <p:nvSpPr>
+          <p:cNvPr id="5" name="TextBox 4"/>
+          <p:cNvSpPr txBox="1"/>
+          <p:nvPr/>
+        </p:nvSpPr>
+        <p:spPr>
+          <a:xfrm>
+            <a:off x="566928" y="1783080"/>
+            <a:ext cx="7223760" cy="1828800"/>
+          </a:xfrm>
+          <a:prstGeom prst="rect">
+            <a:avLst/>
+          </a:prstGeom>
+          <a:noFill/>
+        </p:spPr>
+        <p:txBody>
+          <a:bodyPr wrap="square" lIns="0" rIns="0" tIns="0" bIns="0">
+            <a:spAutoFit/>
+          </a:bodyPr>
+          <a:lstStyle/>
+          <a:p>
+            <a:pPr>
+              <a:lnSpc>
+                <a:spcPct val="102000"/>
+              </a:lnSpc>
+              <a:spcBef>
+                <a:spcPts val="0"/>
+              </a:spcBef>
+              <a:spcAft>
+                <a:spcPts val="0"/>
+              </a:spcAft>
+            </a:pPr>
+            <a:r>
+              <a:rPr sz="4000" b="0" i="0">
+                <a:solidFill>
+                  <a:srgbClr val="FCFCFB"/>
+                </a:solidFill>
+                <a:latin typeface="Georgia"/>
+              </a:rPr>
+              <a:t>Education is the odd one out — under one specific measurement</a:t>
+            </a:r>
+          </a:p>
+        </p:txBody>
+      </p:sp>
+      <p:sp>
+        <p:nvSpPr>
+          <p:cNvPr id="6" name="TextBox 5"/>
+          <p:cNvSpPr txBox="1"/>
+          <p:nvPr/>
+        </p:nvSpPr>
+        <p:spPr>
+          <a:xfrm>
+            <a:off x="566928" y="3886200"/>
+            <a:ext cx="6766560" cy="1463040"/>
+          </a:xfrm>
+          <a:prstGeom prst="rect">
+            <a:avLst/>
+          </a:prstGeom>
+          <a:noFill/>
+        </p:spPr>
+        <p:txBody>
+          <a:bodyPr wrap="square" lIns="0" rIns="0" tIns="0" bIns="0">
+            <a:spAutoFit/>
+          </a:bodyPr>
+          <a:lstStyle/>
+          <a:p>
+            <a:pPr>
+              <a:lnSpc>
+                <a:spcPct val="135000"/>
+              </a:lnSpc>
+              <a:spcBef>
+                <a:spcPts val="0"/>
+              </a:spcBef>
+              <a:spcAft>
+                <a:spcPts val="0"/>
+              </a:spcAft>
+            </a:pPr>
+            <a:r>
+              <a:rPr sz="1600" b="0" i="1">
+                <a:solidFill>
+                  <a:srgbClr val="9AA4B0"/>
+                </a:solidFill>
+                <a:latin typeface="Georgia"/>
+              </a:rPr>
+              <a:t>Ranked indicator by indicator, what predicts happiness in levels is survival and basic infrastructure. Education looks like the SDG framework's weakest domain and the HDI's strongest. Both readings are correct, because the two frameworks are not measuring the same thing.</a:t>
+            </a:r>
+          </a:p>
+        </p:txBody>
+      </p:sp>
+      <p:sp>
+        <p:nvSpPr>
+          <p:cNvPr id="7" name="TextBox 6"/>
+          <p:cNvSpPr txBox="1"/>
+          <p:nvPr/>
+        </p:nvSpPr>
+        <p:spPr>
+          <a:xfrm>
+            <a:off x="566928" y="5623560"/>
+            <a:ext cx="3503066" cy="914400"/>
+          </a:xfrm>
+          <a:prstGeom prst="rect">
+            <a:avLst/>
+          </a:prstGeom>
+          <a:noFill/>
+        </p:spPr>
+        <p:txBody>
+          <a:bodyPr wrap="square" lIns="0" rIns="0" tIns="0" bIns="0">
+            <a:spAutoFit/>
+          </a:bodyPr>
+          <a:lstStyle/>
+          <a:p>
+            <a:pPr>
+              <a:spcBef>
+                <a:spcPts val="0"/>
+              </a:spcBef>
+              <a:spcAft>
+                <a:spcPts val="400"/>
+              </a:spcAft>
+            </a:pPr>
+            <a:r>
+              <a:rPr sz="2200" b="0" i="0">
+                <a:solidFill>
+                  <a:srgbClr val="FCFCFB"/>
+                </a:solidFill>
+                <a:latin typeface="Consolas"/>
+              </a:rPr>
+              <a:t>12.7%</a:t>
+            </a:r>
+          </a:p>
+          <a:p>
+            <a:pPr>
+              <a:lnSpc>
+                <a:spcPct val="120000"/>
+              </a:lnSpc>
               <a:spcBef>
                 <a:spcPts val="0"/>
               </a:spcBef>
@@ -3437,40 +3678,59 @@
             <a:r>
               <a:rPr sz="1000" b="0" i="0">
                 <a:solidFill>
-                  <a:srgbClr val="A63A30"/>
+                  <a:srgbClr val="8A94A0"/>
+                </a:solidFill>
+                <a:latin typeface="Calibri"/>
+              </a:rPr>
+              <a:t>SDG4 access &amp; participation, un-pooled from 3.3%</a:t>
+            </a:r>
+          </a:p>
+        </p:txBody>
+      </p:sp>
+      <p:sp>
+        <p:nvSpPr>
+          <p:cNvPr id="8" name="TextBox 7"/>
+          <p:cNvSpPr txBox="1"/>
+          <p:nvPr/>
+        </p:nvSpPr>
+        <p:spPr>
+          <a:xfrm>
+            <a:off x="4344314" y="5623560"/>
+            <a:ext cx="3503066" cy="914400"/>
+          </a:xfrm>
+          <a:prstGeom prst="rect">
+            <a:avLst/>
+          </a:prstGeom>
+          <a:noFill/>
+        </p:spPr>
+        <p:txBody>
+          <a:bodyPr wrap="square" lIns="0" rIns="0" tIns="0" bIns="0">
+            <a:spAutoFit/>
+          </a:bodyPr>
+          <a:lstStyle/>
+          <a:p>
+            <a:pPr>
+              <a:spcBef>
+                <a:spcPts val="0"/>
+              </a:spcBef>
+              <a:spcAft>
+                <a:spcPts val="400"/>
+              </a:spcAft>
+            </a:pPr>
+            <a:r>
+              <a:rPr sz="2200" b="0" i="0">
+                <a:solidFill>
+                  <a:srgbClr val="FCFCFB"/>
                 </a:solidFill>
                 <a:latin typeface="Consolas"/>
               </a:rPr>
-              <a:t>THE AUTOPSY</a:t>
-            </a:r>
-          </a:p>
-        </p:txBody>
-      </p:sp>
-      <p:sp>
-        <p:nvSpPr>
-          <p:cNvPr id="3" name="TextBox 2"/>
-          <p:cNvSpPr txBox="1"/>
-          <p:nvPr/>
-        </p:nvSpPr>
-        <p:spPr>
-          <a:xfrm>
-            <a:off x="566928" y="914400"/>
-            <a:ext cx="4160520" cy="1371600"/>
-          </a:xfrm>
-          <a:prstGeom prst="rect">
-            <a:avLst/>
-          </a:prstGeom>
-          <a:noFill/>
-        </p:spPr>
-        <p:txBody>
-          <a:bodyPr wrap="square" lIns="0" rIns="0" tIns="0" bIns="0">
-            <a:spAutoFit/>
-          </a:bodyPr>
-          <a:lstStyle/>
+              <a:t>40.9%</a:t>
+            </a:r>
+          </a:p>
           <a:p>
             <a:pPr>
               <a:lnSpc>
-                <a:spcPct val="108000"/>
+                <a:spcPct val="120000"/>
               </a:lnSpc>
               <a:spcBef>
                 <a:spcPts val="0"/>
@@ -3480,191 +3740,77 @@
               </a:spcAft>
             </a:pPr>
             <a:r>
-              <a:rPr sz="2300" b="0" i="0">
-                <a:solidFill>
-                  <a:srgbClr val="14171C"/>
-                </a:solidFill>
-                <a:latin typeface="Georgia"/>
-              </a:rPr>
-              <a:t>What survives in levels is the raw development gradient</a:t>
-            </a:r>
-          </a:p>
-        </p:txBody>
-      </p:sp>
-      <p:sp>
-        <p:nvSpPr>
-          <p:cNvPr id="4" name="TextBox 3"/>
-          <p:cNvSpPr txBox="1"/>
-          <p:nvPr/>
-        </p:nvSpPr>
-        <p:spPr>
-          <a:xfrm>
-            <a:off x="566928" y="2331720"/>
-            <a:ext cx="4160520" cy="3840480"/>
-          </a:xfrm>
-          <a:prstGeom prst="rect">
-            <a:avLst/>
-          </a:prstGeom>
-          <a:noFill/>
-        </p:spPr>
-        <p:txBody>
-          <a:bodyPr wrap="square" lIns="0" rIns="0" tIns="0" bIns="0">
-            <a:spAutoFit/>
-          </a:bodyPr>
-          <a:lstStyle/>
+              <a:rPr sz="1000" b="0" i="0">
+                <a:solidFill>
+                  <a:srgbClr val="8A94A0"/>
+                </a:solidFill>
+                <a:latin typeface="Calibri"/>
+              </a:rPr>
+              <a:t>of countries, HDI mean years of schooling</a:t>
+            </a:r>
+          </a:p>
+        </p:txBody>
+      </p:sp>
+      <p:sp>
+        <p:nvSpPr>
+          <p:cNvPr id="9" name="TextBox 8"/>
+          <p:cNvSpPr txBox="1"/>
+          <p:nvPr/>
+        </p:nvSpPr>
+        <p:spPr>
+          <a:xfrm>
+            <a:off x="8121700" y="5623560"/>
+            <a:ext cx="3503066" cy="914400"/>
+          </a:xfrm>
+          <a:prstGeom prst="rect">
+            <a:avLst/>
+          </a:prstGeom>
+          <a:noFill/>
+        </p:spPr>
+        <p:txBody>
+          <a:bodyPr wrap="square" lIns="0" rIns="0" tIns="0" bIns="0">
+            <a:spAutoFit/>
+          </a:bodyPr>
+          <a:lstStyle/>
+          <a:p>
+            <a:pPr>
+              <a:spcBef>
+                <a:spcPts val="0"/>
+              </a:spcBef>
+              <a:spcAft>
+                <a:spcPts val="400"/>
+              </a:spcAft>
+            </a:pPr>
+            <a:r>
+              <a:rPr sz="2200" b="0" i="0">
+                <a:solidFill>
+                  <a:srgbClr val="FCFCFB"/>
+                </a:solidFill>
+                <a:latin typeface="Consolas"/>
+              </a:rPr>
+              <a:t>32 / 36</a:t>
+            </a:r>
+          </a:p>
           <a:p>
             <a:pPr>
               <a:lnSpc>
-                <a:spcPct val="132000"/>
+                <a:spcPct val="120000"/>
               </a:lnSpc>
               <a:spcBef>
                 <a:spcPts val="0"/>
               </a:spcBef>
               <a:spcAft>
-                <a:spcPts val="1100"/>
-              </a:spcAft>
-            </a:pPr>
-            <a:r>
-              <a:rPr sz="1150" b="0" i="0">
-                <a:solidFill>
-                  <a:srgbClr val="5A6068"/>
+                <a:spcPts val="0"/>
+              </a:spcAft>
+            </a:pPr>
+            <a:r>
+              <a:rPr sz="1000" b="0" i="0">
+                <a:solidFill>
+                  <a:srgbClr val="8A94A0"/>
                 </a:solidFill>
                 <a:latin typeface="Calibri"/>
               </a:rPr>
-              <a:t>Ranking the 632 SDG series with usable coverage by the share of countries in which they are FDR-significant puts child mortality, stunting, water and sanitation, and access to financial services at the top. These are survival and basic infrastructure — the steep part of the development curve, not the 2030 Agenda's institutional superstructure.</a:t>
-            </a:r>
-          </a:p>
-          <a:p>
-            <a:pPr>
-              <a:lnSpc>
-                <a:spcPct val="132000"/>
-              </a:lnSpc>
-              <a:spcBef>
-                <a:spcPts val="0"/>
-              </a:spcBef>
-              <a:spcAft>
-                <a:spcPts val="1100"/>
-              </a:spcAft>
-            </a:pPr>
-            <a:r>
-              <a:rPr sz="1150" b="0" i="0">
-                <a:solidFill>
-                  <a:srgbClr val="5A6068"/>
-                </a:solidFill>
-                <a:latin typeface="Calibri"/>
-              </a:rPr>
-              <a:t>The best-performing education indicator ranks about 101st of 632 — and it is participation in organized learning before primary entry, an access measure, which is the same construct Act II turns on. In first differences, only 9 of the 661 series have even one significant country, which is why there is no differences ranking to report at all.</a:t>
-            </a:r>
-          </a:p>
-        </p:txBody>
-      </p:sp>
-      <p:sp>
-        <p:nvSpPr>
-          <p:cNvPr id="5" name="TextBox 4"/>
-          <p:cNvSpPr txBox="1"/>
-          <p:nvPr/>
-        </p:nvSpPr>
-        <p:spPr>
-          <a:xfrm>
-            <a:off x="11338560" y="6263640"/>
-            <a:ext cx="548640" cy="274320"/>
-          </a:xfrm>
-          <a:prstGeom prst="rect">
-            <a:avLst/>
-          </a:prstGeom>
-          <a:noFill/>
-        </p:spPr>
-        <p:txBody>
-          <a:bodyPr wrap="square" lIns="0" rIns="0" tIns="0" bIns="0">
-            <a:spAutoFit/>
-          </a:bodyPr>
-          <a:lstStyle/>
-          <a:p>
-            <a:pPr algn="r">
-              <a:spcBef>
-                <a:spcPts val="0"/>
-              </a:spcBef>
-              <a:spcAft>
-                <a:spcPts val="0"/>
-              </a:spcAft>
-            </a:pPr>
-            <a:r>
-              <a:rPr sz="1100" b="0" i="0">
-                <a:solidFill>
-                  <a:srgbClr val="868D96"/>
-                </a:solidFill>
-                <a:latin typeface="Consolas"/>
-              </a:rPr>
-              <a:t>II</a:t>
-            </a:r>
-          </a:p>
-        </p:txBody>
-      </p:sp>
-      <p:pic>
-        <p:nvPicPr>
-          <p:cNvPr id="6" name="Picture 5" descr="sdg_indicator_top20.png"/>
-          <p:cNvPicPr>
-            <a:picLocks noChangeAspect="1"/>
-          </p:cNvPicPr>
-          <p:nvPr/>
-        </p:nvPicPr>
-        <p:blipFill>
-          <a:blip r:embed="rId2"/>
-          <a:stretch>
-            <a:fillRect/>
-          </a:stretch>
-        </p:blipFill>
-        <p:spPr>
-          <a:xfrm>
-            <a:off x="5279547" y="658368"/>
-            <a:ext cx="6220145" cy="5074920"/>
-          </a:xfrm>
-          <a:prstGeom prst="rect">
-            <a:avLst/>
-          </a:prstGeom>
-        </p:spPr>
-      </p:pic>
-      <p:sp>
-        <p:nvSpPr>
-          <p:cNvPr id="7" name="TextBox 6"/>
-          <p:cNvSpPr txBox="1"/>
-          <p:nvPr/>
-        </p:nvSpPr>
-        <p:spPr>
-          <a:xfrm>
-            <a:off x="5120640" y="5897880"/>
-            <a:ext cx="6537960" cy="731520"/>
-          </a:xfrm>
-          <a:prstGeom prst="rect">
-            <a:avLst/>
-          </a:prstGeom>
-          <a:noFill/>
-        </p:spPr>
-        <p:txBody>
-          <a:bodyPr wrap="square" lIns="0" rIns="0" tIns="0" bIns="0">
-            <a:spAutoFit/>
-          </a:bodyPr>
-          <a:lstStyle/>
-          <a:p>
-            <a:pPr>
-              <a:lnSpc>
-                <a:spcPct val="125000"/>
-              </a:lnSpc>
-              <a:spcBef>
-                <a:spcPts val="0"/>
-              </a:spcBef>
-              <a:spcAft>
-                <a:spcPts val="0"/>
-              </a:spcAft>
-            </a:pPr>
-            <a:r>
-              <a:rPr sz="900" b="0" i="0">
-                <a:solidFill>
-                  <a:srgbClr val="868D96"/>
-                </a:solidFill>
-                <a:latin typeface="Calibri"/>
-              </a:rPr>
-              <a:t>The 20 highest-ranking SDG series of 632, by share of countries FDR-significant in levels.</a:t>
+              <a:t>countries, ESS respondents' own attainment</a:t>
             </a:r>
           </a:p>
         </p:txBody>
@@ -3732,7 +3878,7 @@
                 </a:solidFill>
                 <a:latin typeface="Consolas"/>
               </a:rPr>
-              <a:t>THE CONTRADICTION</a:t>
+              <a:t>THE AUTOPSY</a:t>
             </a:r>
           </a:p>
         </p:txBody>
@@ -3777,7 +3923,7 @@
                 </a:solidFill>
                 <a:latin typeface="Georgia"/>
               </a:rPr>
-              <a:t>Yet inside the HDI, education is the strongest domain</a:t>
+              <a:t>What survives in levels is the raw development gradient</a:t>
             </a:r>
           </a:p>
         </p:txBody>
@@ -3822,7 +3968,29 @@
                 </a:solidFill>
                 <a:latin typeface="Calibri"/>
               </a:rPr>
-              <a:t>Mean years of schooling is FDR-significant against World Happiness Report happiness in 61 of 150 countries (40.7%) and expected years of schooling in 51 of 150 (34.0%), against 61 of 151 (40.4%) for GNI per capita and 30 of 151 (19.9%) for life expectancy. Education supplies two of the HDI's three strongest components; pooled SDG4 sits at 3.3%. This is the sharpest disagreement between the two frameworks anywhere in the project.</a:t>
+              <a:t>Ranking the 632 SDG series with usable coverage by the share of countries in which they are FDR-significant puts child mortality, stunting, water and sanitation, and access to financial services at the top. These are survival and basic infrastructure — the steep part of the development curve, not the 2030 Agenda's institutional superstructure.</a:t>
+            </a:r>
+          </a:p>
+          <a:p>
+            <a:pPr>
+              <a:lnSpc>
+                <a:spcPct val="132000"/>
+              </a:lnSpc>
+              <a:spcBef>
+                <a:spcPts val="0"/>
+              </a:spcBef>
+              <a:spcAft>
+                <a:spcPts val="1100"/>
+              </a:spcAft>
+            </a:pPr>
+            <a:r>
+              <a:rPr sz="1150" b="0" i="0">
+                <a:solidFill>
+                  <a:srgbClr val="5A6068"/>
+                </a:solidFill>
+                <a:latin typeface="Calibri"/>
+              </a:rPr>
+              <a:t>The best-performing education indicator ranks about 101st of 632 — and it is participation in organized learning before primary entry, an access measure, which is the same construct Act II turns on. In first differences, only 9 of the 661 series have even one significant country, which is why there is no differences ranking to report at all.</a:t>
             </a:r>
           </a:p>
         </p:txBody>
@@ -3871,7 +4039,7 @@
       </p:sp>
       <p:pic>
         <p:nvPicPr>
-          <p:cNvPr id="6" name="Picture 5" descr="hdi_vs_sdg_frameworks.png"/>
+          <p:cNvPr id="6" name="Picture 5" descr="sdg_indicator_top20.png"/>
           <p:cNvPicPr>
             <a:picLocks noChangeAspect="1"/>
           </p:cNvPicPr>
@@ -3885,8 +4053,8 @@
         </p:blipFill>
         <p:spPr>
           <a:xfrm>
-            <a:off x="5120640" y="1604774"/>
-            <a:ext cx="6537960" cy="3182107"/>
+            <a:off x="5279547" y="658368"/>
+            <a:ext cx="6220145" cy="5074920"/>
           </a:xfrm>
           <a:prstGeom prst="rect">
             <a:avLst/>
@@ -3933,7 +4101,7 @@
                 </a:solidFill>
                 <a:latin typeface="Calibri"/>
               </a:rPr>
-              <a:t>The same domains under both frameworks. Absolute levels are not directly comparable across frameworks; the within-framework rankings are the safer read.</a:t>
+              <a:t>The 20 highest-ranking SDG series of 632, by share of countries FDR-significant in levels.</a:t>
             </a:r>
           </a:p>
         </p:txBody>
@@ -4001,7 +4169,7 @@
                 </a:solidFill>
                 <a:latin typeface="Consolas"/>
               </a:rPr>
-              <a:t>THE RESOLUTION</a:t>
+              <a:t>THE CONTRADICTION</a:t>
             </a:r>
           </a:p>
         </p:txBody>
@@ -4046,7 +4214,7 @@
                 </a:solidFill>
                 <a:latin typeface="Georgia"/>
               </a:rPr>
-              <a:t>SDG4's 3.3% describes no construct that exists</a:t>
+              <a:t>Yet inside the HDI, education is the strongest domain</a:t>
             </a:r>
           </a:p>
         </p:txBody>
@@ -4091,7 +4259,7 @@
                 </a:solidFill>
                 <a:latin typeface="Calibri"/>
               </a:rPr>
-              <a:t>SDG4's 35 official series do not measure one thing. Eighteen of them are equity or parity ratios — gender, location, or wealth parity indices — which is a different quantity from the level of access. Six measure learning outcomes, seven measure infrastructure and inputs, and only two measure access and participation directly.</a:t>
+              <a:t>Mean years of schooling is FDR-significant against World Happiness Report happiness in 61 of 150 countries (40.7%) and expected years of schooling in 51 of 150 (34.0%), against 61 of 151 (40.4%) for GNI per capita and 30 of 151 (19.9%) for life expectancy. Education supplies two of the HDI's three strongest components; pooled SDG4 sits at 3.3%. This is the sharpest disagreement between the two frameworks anywhere in the project.</a:t>
             </a:r>
           </a:p>
           <a:p>
@@ -4113,7 +4281,7 @@
                 </a:solidFill>
                 <a:latin typeface="Calibri"/>
               </a:rPr>
-              <a:t>Split by construct, access and participation reaches 12.7%, comparable to SDG3 health at 11.5%, while learning outcomes sit at 0.9% and parity ratios at 2.5%. The pooled 3.3% is an average across constructs that point in different directions, and it describes none of them. That is a methodological finding in its own right: pooling within a goal can manufacture a null.</a:t>
+              <a:t>The education pair also leads in first differences, where expected years of schooling is significant in 7 of 150 countries against the composite's 3 (Act I). Education is ahead under both specifications, not only in the cross-section.</a:t>
             </a:r>
           </a:p>
         </p:txBody>
@@ -4162,7 +4330,7 @@
       </p:sp>
       <p:pic>
         <p:nvPicPr>
-          <p:cNvPr id="6" name="Picture 5" descr="sdg4_unpooled.png"/>
+          <p:cNvPr id="6" name="Picture 5" descr="hdi_vs_sdg_frameworks.png"/>
           <p:cNvPicPr>
             <a:picLocks noChangeAspect="1"/>
           </p:cNvPicPr>
@@ -4176,8 +4344,8 @@
         </p:blipFill>
         <p:spPr>
           <a:xfrm>
-            <a:off x="5120640" y="1103208"/>
-            <a:ext cx="6537960" cy="4185240"/>
+            <a:off x="5120640" y="1604774"/>
+            <a:ext cx="6537960" cy="3182107"/>
           </a:xfrm>
           <a:prstGeom prst="rect">
             <a:avLst/>
@@ -4224,7 +4392,7 @@
                 </a:solidFill>
                 <a:latin typeface="Calibri"/>
               </a:rPr>
-              <a:t>SDG4 split by what each indicator actually measures, with the pooled figure marked.</a:t>
+              <a:t>The same domains under both frameworks. Absolute levels are not directly comparable across frameworks; the within-framework rankings are the safer read.</a:t>
             </a:r>
           </a:p>
         </p:txBody>
@@ -4292,7 +4460,7 @@
                 </a:solidFill>
                 <a:latin typeface="Consolas"/>
               </a:rPr>
-              <a:t>ALL THE WAY DOWN</a:t>
+              <a:t>THE RESOLUTION</a:t>
             </a:r>
           </a:p>
         </p:txBody>
@@ -4337,7 +4505,7 @@
                 </a:solidFill>
                 <a:latin typeface="Georgia"/>
               </a:rPr>
-              <a:t>The signal survives to the individual respondent</a:t>
+              <a:t>SDG4's 3.3% describes no construct that exists</a:t>
             </a:r>
           </a:p>
         </p:txBody>
@@ -4382,7 +4550,29 @@
                 </a:solidFill>
                 <a:latin typeface="Calibri"/>
               </a:rPr>
-              <a:t>ESS respondents' own educational attainment predicts their own life satisfaction in 32 to 34 of 36 countries, depending on whether attainment is measured as the harmonised ISCED category or as years completed. The effects are small — median R² around 0.01 — but nothing else in this project is that consistent across countries.</a:t>
+              <a:t>SDG4's 35 official series do not measure one thing. Eighteen of them are equity or parity ratios — gender, location, or wealth parity indices — which is a different quantity from the level of access. Six measure learning outcomes, seven measure infrastructure and inputs, and only two measure access and participation directly.</a:t>
+            </a:r>
+          </a:p>
+          <a:p>
+            <a:pPr>
+              <a:lnSpc>
+                <a:spcPct val="132000"/>
+              </a:lnSpc>
+              <a:spcBef>
+                <a:spcPts val="0"/>
+              </a:spcBef>
+              <a:spcAft>
+                <a:spcPts val="1100"/>
+              </a:spcAft>
+            </a:pPr>
+            <a:r>
+              <a:rPr sz="1150" b="0" i="0">
+                <a:solidFill>
+                  <a:srgbClr val="5A6068"/>
+                </a:solidFill>
+                <a:latin typeface="Calibri"/>
+              </a:rPr>
+              <a:t>Split by construct, access and participation reaches 12.7%, comparable to SDG3 health at 11.5%, while learning outcomes sit at 0.9% and parity ratios at 2.5%. The pooled 3.3% is an average across constructs that point in different directions, and it describes none of them. That is a methodological finding in its own right: pooling within a goal can manufacture a null.</a:t>
             </a:r>
           </a:p>
         </p:txBody>
@@ -4431,7 +4621,7 @@
       </p:sp>
       <p:pic>
         <p:nvPicPr>
-          <p:cNvPr id="6" name="Picture 5" descr="ess_individual_education.png"/>
+          <p:cNvPr id="6" name="Picture 5" descr="sdg4_unpooled.png"/>
           <p:cNvPicPr>
             <a:picLocks noChangeAspect="1"/>
           </p:cNvPicPr>
@@ -4445,8 +4635,8 @@
         </p:blipFill>
         <p:spPr>
           <a:xfrm>
-            <a:off x="5120640" y="1213595"/>
-            <a:ext cx="6537960" cy="3964465"/>
+            <a:off x="5120640" y="1103208"/>
+            <a:ext cx="6537960" cy="4185240"/>
           </a:xfrm>
           <a:prstGeom prst="rect">
             <a:avLst/>
@@ -4493,7 +4683,7 @@
                 </a:solidFill>
                 <a:latin typeface="Calibri"/>
               </a:rPr>
-              <a:t>Per-country tests of respondents' own attainment against their own life satisfaction, 36 ESS countries.</a:t>
+              <a:t>SDG4 split by what each indicator actually measures, with the pooled figure marked.</a:t>
             </a:r>
           </a:p>
         </p:txBody>
@@ -4561,7 +4751,7 @@
                 </a:solidFill>
                 <a:latin typeface="Consolas"/>
               </a:rPr>
-              <a:t>TRIANGULATION</a:t>
+              <a:t>ALL THE WAY DOWN</a:t>
             </a:r>
           </a:p>
         </p:txBody>
@@ -4606,7 +4796,7 @@
                 </a:solidFill>
                 <a:latin typeface="Georgia"/>
               </a:rPr>
-              <a:t>Two surveys, two outcomes, one answer</a:t>
+              <a:t>The signal survives to the individual respondent</a:t>
             </a:r>
           </a:p>
         </p:txBody>
@@ -4651,7 +4841,7 @@
                 </a:solidFill>
                 <a:latin typeface="Calibri"/>
               </a:rPr>
-              <a:t>Aggregating ESS respondents' reported years of schooling to the country level and regressing World Happiness Report happiness on it gives R² = 0.308, against 0.326 for the HDI's own mean-years-of-schooling series. Changing both the education source and the wellbeing outcome leaves the relationship essentially where it was.</a:t>
+              <a:t>ESS respondents' own educational attainment predicts their own life satisfaction in 32 to 34 of 36 countries, depending on whether attainment is measured as the harmonised ISCED category or as years completed. The effects are small — median R² around 0.01 — but nothing else in this project is that consistent across countries.</a:t>
             </a:r>
           </a:p>
         </p:txBody>
@@ -4700,7 +4890,7 @@
       </p:sp>
       <p:pic>
         <p:nvPicPr>
-          <p:cNvPr id="6" name="Picture 5" descr="ess_triangulation.png"/>
+          <p:cNvPr id="6" name="Picture 5" descr="ess_individual_education.png"/>
           <p:cNvPicPr>
             <a:picLocks noChangeAspect="1"/>
           </p:cNvPicPr>
@@ -4714,8 +4904,8 @@
         </p:blipFill>
         <p:spPr>
           <a:xfrm>
-            <a:off x="5120640" y="1993514"/>
-            <a:ext cx="6537960" cy="2404627"/>
+            <a:off x="5120640" y="1213595"/>
+            <a:ext cx="6537960" cy="3964465"/>
           </a:xfrm>
           <a:prstGeom prst="rect">
             <a:avLst/>
@@ -4762,7 +4952,7 @@
                 </a:solidFill>
                 <a:latin typeface="Calibri"/>
               </a:rPr>
-              <a:t>Country-aggregated ESS schooling against WHR happiness, beside the HDI's own schooling component.</a:t>
+              <a:t>Per-country tests of respondents' own attainment against their own life satisfaction, 36 ESS countries.</a:t>
             </a:r>
           </a:p>
         </p:txBody>
@@ -4830,7 +5020,7 @@
                 </a:solidFill>
                 <a:latin typeface="Consolas"/>
               </a:rPr>
-              <a:t>THE COMPOSITE</a:t>
+              <a:t>TRIANGULATION</a:t>
             </a:r>
           </a:p>
         </p:txBody>
@@ -4875,7 +5065,7 @@
                 </a:solidFill>
                 <a:latin typeface="Georgia"/>
               </a:rPr>
-              <a:t>The three panels the commentary needs</a:t>
+              <a:t>Two surveys, two outcomes, one answer</a:t>
             </a:r>
           </a:p>
         </p:txBody>
@@ -4920,29 +5110,7 @@
                 </a:solidFill>
                 <a:latin typeface="Calibri"/>
               </a:rPr>
-              <a:t>Commentaries carry one or two display items, so the three results that carry the argument have to share a figure: the replicated collapse, SDG4 un-pooled, and education's signal as the unit of measurement moves from pooled indicators down to individual respondents.</a:t>
-            </a:r>
-          </a:p>
-          <a:p>
-            <a:pPr>
-              <a:lnSpc>
-                <a:spcPct val="132000"/>
-              </a:lnSpc>
-              <a:spcBef>
-                <a:spcPts val="0"/>
-              </a:spcBef>
-              <a:spcAft>
-                <a:spcPts val="1100"/>
-              </a:spcAft>
-            </a:pPr>
-            <a:r>
-              <a:rPr sz="1150" b="0" i="0">
-                <a:solidFill>
-                  <a:srgbClr val="5A6068"/>
-                </a:solidFill>
-                <a:latin typeface="Calibri"/>
-              </a:rPr>
-              <a:t>One caution to keep in the caption: panel c's rows do not share a denominator. It shows that the construct holds at every level of aggregation, not that the effect grows.</a:t>
+              <a:t>Aggregating ESS respondents' reported years of schooling to the country level and regressing World Happiness Report happiness on it gives R² = 0.308, against 0.326 for the HDI's own mean-years-of-schooling series. Changing both the education source and the wellbeing outcome leaves the relationship essentially where it was.</a:t>
             </a:r>
           </a:p>
         </p:txBody>
@@ -4991,7 +5159,7 @@
       </p:sp>
       <p:pic>
         <p:nvPicPr>
-          <p:cNvPr id="6" name="Picture 5" descr="Figure1_commentary.png"/>
+          <p:cNvPr id="6" name="Picture 5" descr="ess_triangulation.png"/>
           <p:cNvPicPr>
             <a:picLocks noChangeAspect="1"/>
           </p:cNvPicPr>
@@ -5005,8 +5173,8 @@
         </p:blipFill>
         <p:spPr>
           <a:xfrm>
-            <a:off x="5120640" y="808954"/>
-            <a:ext cx="6537960" cy="4773748"/>
+            <a:off x="5120640" y="1993514"/>
+            <a:ext cx="6537960" cy="2404627"/>
           </a:xfrm>
           <a:prstGeom prst="rect">
             <a:avLst/>
@@ -5053,7 +5221,7 @@
                 </a:solidFill>
                 <a:latin typeface="Calibri"/>
               </a:rPr>
-              <a:t>Proposed Figure 1 for submission. Draft — panel c's denominators differ by row and are labelled at right.</a:t>
+              <a:t>Country-aggregated ESS schooling against WHR happiness, beside the HDI's own schooling component.</a:t>
             </a:r>
           </a:p>
         </p:txBody>
@@ -5067,6 +5235,297 @@
 </file>
 
 <file path=ppt/slides/slide16.xml><?xml version="1.0" encoding="utf-8"?>
+<p:sld xmlns:a="http://schemas.openxmlformats.org/drawingml/2006/main" xmlns:p="http://schemas.openxmlformats.org/presentationml/2006/main" xmlns:r="http://schemas.openxmlformats.org/officeDocument/2006/relationships">
+  <p:cSld>
+    <p:bg>
+      <p:bgPr>
+        <a:solidFill>
+          <a:srgbClr val="FCFCFB"/>
+        </a:solidFill>
+        <a:effectLst/>
+      </p:bgPr>
+    </p:bg>
+    <p:spTree>
+      <p:nvGrpSpPr>
+        <p:cNvPr id="1" name=""/>
+        <p:cNvGrpSpPr/>
+        <p:nvPr/>
+      </p:nvGrpSpPr>
+      <p:grpSpPr/>
+      <p:sp>
+        <p:nvSpPr>
+          <p:cNvPr id="2" name="TextBox 1"/>
+          <p:cNvSpPr txBox="1"/>
+          <p:nvPr/>
+        </p:nvSpPr>
+        <p:spPr>
+          <a:xfrm>
+            <a:off x="566928" y="502920"/>
+            <a:ext cx="4160520" cy="274320"/>
+          </a:xfrm>
+          <a:prstGeom prst="rect">
+            <a:avLst/>
+          </a:prstGeom>
+          <a:noFill/>
+        </p:spPr>
+        <p:txBody>
+          <a:bodyPr wrap="square" lIns="0" rIns="0" tIns="0" bIns="0">
+            <a:spAutoFit/>
+          </a:bodyPr>
+          <a:lstStyle/>
+          <a:p>
+            <a:pPr>
+              <a:spcBef>
+                <a:spcPts val="0"/>
+              </a:spcBef>
+              <a:spcAft>
+                <a:spcPts val="0"/>
+              </a:spcAft>
+            </a:pPr>
+            <a:r>
+              <a:rPr sz="1000" b="0" i="0">
+                <a:solidFill>
+                  <a:srgbClr val="A63A30"/>
+                </a:solidFill>
+                <a:latin typeface="Consolas"/>
+              </a:rPr>
+              <a:t>THE COMPOSITE</a:t>
+            </a:r>
+          </a:p>
+        </p:txBody>
+      </p:sp>
+      <p:sp>
+        <p:nvSpPr>
+          <p:cNvPr id="3" name="TextBox 2"/>
+          <p:cNvSpPr txBox="1"/>
+          <p:nvPr/>
+        </p:nvSpPr>
+        <p:spPr>
+          <a:xfrm>
+            <a:off x="566928" y="914400"/>
+            <a:ext cx="4160520" cy="1371600"/>
+          </a:xfrm>
+          <a:prstGeom prst="rect">
+            <a:avLst/>
+          </a:prstGeom>
+          <a:noFill/>
+        </p:spPr>
+        <p:txBody>
+          <a:bodyPr wrap="square" lIns="0" rIns="0" tIns="0" bIns="0">
+            <a:spAutoFit/>
+          </a:bodyPr>
+          <a:lstStyle/>
+          <a:p>
+            <a:pPr>
+              <a:lnSpc>
+                <a:spcPct val="108000"/>
+              </a:lnSpc>
+              <a:spcBef>
+                <a:spcPts val="0"/>
+              </a:spcBef>
+              <a:spcAft>
+                <a:spcPts val="0"/>
+              </a:spcAft>
+            </a:pPr>
+            <a:r>
+              <a:rPr sz="2300" b="0" i="0">
+                <a:solidFill>
+                  <a:srgbClr val="14171C"/>
+                </a:solidFill>
+                <a:latin typeface="Georgia"/>
+              </a:rPr>
+              <a:t>The three panels the commentary needs</a:t>
+            </a:r>
+          </a:p>
+        </p:txBody>
+      </p:sp>
+      <p:sp>
+        <p:nvSpPr>
+          <p:cNvPr id="4" name="TextBox 3"/>
+          <p:cNvSpPr txBox="1"/>
+          <p:nvPr/>
+        </p:nvSpPr>
+        <p:spPr>
+          <a:xfrm>
+            <a:off x="566928" y="2331720"/>
+            <a:ext cx="4160520" cy="3840480"/>
+          </a:xfrm>
+          <a:prstGeom prst="rect">
+            <a:avLst/>
+          </a:prstGeom>
+          <a:noFill/>
+        </p:spPr>
+        <p:txBody>
+          <a:bodyPr wrap="square" lIns="0" rIns="0" tIns="0" bIns="0">
+            <a:spAutoFit/>
+          </a:bodyPr>
+          <a:lstStyle/>
+          <a:p>
+            <a:pPr>
+              <a:lnSpc>
+                <a:spcPct val="132000"/>
+              </a:lnSpc>
+              <a:spcBef>
+                <a:spcPts val="0"/>
+              </a:spcBef>
+              <a:spcAft>
+                <a:spcPts val="1100"/>
+              </a:spcAft>
+            </a:pPr>
+            <a:r>
+              <a:rPr sz="1150" b="0" i="0">
+                <a:solidFill>
+                  <a:srgbClr val="5A6068"/>
+                </a:solidFill>
+                <a:latin typeface="Calibri"/>
+              </a:rPr>
+              <a:t>Commentaries carry one or two display items, so the three results that carry the argument have to share a figure: the replicated collapse, SDG4 un-pooled, and education's signal as the unit of measurement moves from pooled indicators down to individual respondents.</a:t>
+            </a:r>
+          </a:p>
+          <a:p>
+            <a:pPr>
+              <a:lnSpc>
+                <a:spcPct val="132000"/>
+              </a:lnSpc>
+              <a:spcBef>
+                <a:spcPts val="0"/>
+              </a:spcBef>
+              <a:spcAft>
+                <a:spcPts val="1100"/>
+              </a:spcAft>
+            </a:pPr>
+            <a:r>
+              <a:rPr sz="1150" b="0" i="0">
+                <a:solidFill>
+                  <a:srgbClr val="5A6068"/>
+                </a:solidFill>
+                <a:latin typeface="Calibri"/>
+              </a:rPr>
+              <a:t>One caution to keep in the caption: panel c's rows do not share a denominator. It shows that the construct holds at every level of aggregation, not that the effect grows.</a:t>
+            </a:r>
+          </a:p>
+        </p:txBody>
+      </p:sp>
+      <p:sp>
+        <p:nvSpPr>
+          <p:cNvPr id="5" name="TextBox 4"/>
+          <p:cNvSpPr txBox="1"/>
+          <p:nvPr/>
+        </p:nvSpPr>
+        <p:spPr>
+          <a:xfrm>
+            <a:off x="11338560" y="6263640"/>
+            <a:ext cx="548640" cy="274320"/>
+          </a:xfrm>
+          <a:prstGeom prst="rect">
+            <a:avLst/>
+          </a:prstGeom>
+          <a:noFill/>
+        </p:spPr>
+        <p:txBody>
+          <a:bodyPr wrap="square" lIns="0" rIns="0" tIns="0" bIns="0">
+            <a:spAutoFit/>
+          </a:bodyPr>
+          <a:lstStyle/>
+          <a:p>
+            <a:pPr algn="r">
+              <a:spcBef>
+                <a:spcPts val="0"/>
+              </a:spcBef>
+              <a:spcAft>
+                <a:spcPts val="0"/>
+              </a:spcAft>
+            </a:pPr>
+            <a:r>
+              <a:rPr sz="1100" b="0" i="0">
+                <a:solidFill>
+                  <a:srgbClr val="868D96"/>
+                </a:solidFill>
+                <a:latin typeface="Consolas"/>
+              </a:rPr>
+              <a:t>II</a:t>
+            </a:r>
+          </a:p>
+        </p:txBody>
+      </p:sp>
+      <p:pic>
+        <p:nvPicPr>
+          <p:cNvPr id="6" name="Picture 5" descr="Figure1_commentary.png"/>
+          <p:cNvPicPr>
+            <a:picLocks noChangeAspect="1"/>
+          </p:cNvPicPr>
+          <p:nvPr/>
+        </p:nvPicPr>
+        <p:blipFill>
+          <a:blip r:embed="rId2"/>
+          <a:stretch>
+            <a:fillRect/>
+          </a:stretch>
+        </p:blipFill>
+        <p:spPr>
+          <a:xfrm>
+            <a:off x="5120640" y="808954"/>
+            <a:ext cx="6537960" cy="4773748"/>
+          </a:xfrm>
+          <a:prstGeom prst="rect">
+            <a:avLst/>
+          </a:prstGeom>
+        </p:spPr>
+      </p:pic>
+      <p:sp>
+        <p:nvSpPr>
+          <p:cNvPr id="7" name="TextBox 6"/>
+          <p:cNvSpPr txBox="1"/>
+          <p:nvPr/>
+        </p:nvSpPr>
+        <p:spPr>
+          <a:xfrm>
+            <a:off x="5120640" y="5897880"/>
+            <a:ext cx="6537960" cy="731520"/>
+          </a:xfrm>
+          <a:prstGeom prst="rect">
+            <a:avLst/>
+          </a:prstGeom>
+          <a:noFill/>
+        </p:spPr>
+        <p:txBody>
+          <a:bodyPr wrap="square" lIns="0" rIns="0" tIns="0" bIns="0">
+            <a:spAutoFit/>
+          </a:bodyPr>
+          <a:lstStyle/>
+          <a:p>
+            <a:pPr>
+              <a:lnSpc>
+                <a:spcPct val="125000"/>
+              </a:lnSpc>
+              <a:spcBef>
+                <a:spcPts val="0"/>
+              </a:spcBef>
+              <a:spcAft>
+                <a:spcPts val="0"/>
+              </a:spcAft>
+            </a:pPr>
+            <a:r>
+              <a:rPr sz="900" b="0" i="0">
+                <a:solidFill>
+                  <a:srgbClr val="868D96"/>
+                </a:solidFill>
+                <a:latin typeface="Calibri"/>
+              </a:rPr>
+              <a:t>Proposed Figure 1 for submission. Draft — panel c's denominators differ by row and are labelled at right.</a:t>
+            </a:r>
+          </a:p>
+        </p:txBody>
+      </p:sp>
+    </p:spTree>
+  </p:cSld>
+  <p:clrMapOvr>
+    <a:masterClrMapping/>
+  </p:clrMapOvr>
+</p:sld>
+</file>
+
+<file path=ppt/slides/slide17.xml><?xml version="1.0" encoding="utf-8"?>
 <p:sld xmlns:a="http://schemas.openxmlformats.org/drawingml/2006/main" xmlns:p="http://schemas.openxmlformats.org/presentationml/2006/main" xmlns:r="http://schemas.openxmlformats.org/officeDocument/2006/relationships">
   <p:cSld>
     <p:bg>
@@ -5210,7 +5669,7 @@
                 </a:solidFill>
                 <a:latin typeface="Georgia"/>
               </a:rPr>
-              <a:t>The precise claim, and the one the commentary must not overstate: education is not an exception to the differences collapse. Almost nothing is. Education is the exception in consistency — the one construct whose level signal holds across frameworks, producers, wellbeing instruments, and units of observation all the way down to the individual, and it holds only when education is measured as attainment and access.</a:t>
+              <a:t>The precise claim, and the one the commentary must not overstate: education does not escape the differences collapse. Nothing does — expected years of schooling leads that column with 7 of 150 countries, which is a lead over the composite and still a collapse. Education is the exception in consistency — the one construct whose level signal holds across frameworks, producers, wellbeing instruments, and units of observation all the way down to the individual, and it holds only when education is measured as attainment and access.</a:t>
             </a:r>
           </a:p>
         </p:txBody>
@@ -5223,7 +5682,7 @@
 </p:sld>
 </file>
 
-<file path=ppt/slides/slide17.xml><?xml version="1.0" encoding="utf-8"?>
+<file path=ppt/slides/slide18.xml><?xml version="1.0" encoding="utf-8"?>
 <p:sld xmlns:a="http://schemas.openxmlformats.org/drawingml/2006/main" xmlns:p="http://schemas.openxmlformats.org/presentationml/2006/main" xmlns:r="http://schemas.openxmlformats.org/officeDocument/2006/relationships">
   <p:cSld>
     <p:bg>
@@ -5647,275 +6106,6 @@
                 <a:latin typeface="Calibri"/>
               </a:rPr>
               <a:t>countries with a significant regional gradient</a:t>
-            </a:r>
-          </a:p>
-        </p:txBody>
-      </p:sp>
-    </p:spTree>
-  </p:cSld>
-  <p:clrMapOvr>
-    <a:masterClrMapping/>
-  </p:clrMapOvr>
-</p:sld>
-</file>
-
-<file path=ppt/slides/slide18.xml><?xml version="1.0" encoding="utf-8"?>
-<p:sld xmlns:a="http://schemas.openxmlformats.org/drawingml/2006/main" xmlns:p="http://schemas.openxmlformats.org/presentationml/2006/main" xmlns:r="http://schemas.openxmlformats.org/officeDocument/2006/relationships">
-  <p:cSld>
-    <p:bg>
-      <p:bgPr>
-        <a:solidFill>
-          <a:srgbClr val="FCFCFB"/>
-        </a:solidFill>
-        <a:effectLst/>
-      </p:bgPr>
-    </p:bg>
-    <p:spTree>
-      <p:nvGrpSpPr>
-        <p:cNvPr id="1" name=""/>
-        <p:cNvGrpSpPr/>
-        <p:nvPr/>
-      </p:nvGrpSpPr>
-      <p:grpSpPr/>
-      <p:sp>
-        <p:nvSpPr>
-          <p:cNvPr id="2" name="TextBox 1"/>
-          <p:cNvSpPr txBox="1"/>
-          <p:nvPr/>
-        </p:nvSpPr>
-        <p:spPr>
-          <a:xfrm>
-            <a:off x="566928" y="502920"/>
-            <a:ext cx="4160520" cy="274320"/>
-          </a:xfrm>
-          <a:prstGeom prst="rect">
-            <a:avLst/>
-          </a:prstGeom>
-          <a:noFill/>
-        </p:spPr>
-        <p:txBody>
-          <a:bodyPr wrap="square" lIns="0" rIns="0" tIns="0" bIns="0">
-            <a:spAutoFit/>
-          </a:bodyPr>
-          <a:lstStyle/>
-          <a:p>
-            <a:pPr>
-              <a:spcBef>
-                <a:spcPts val="0"/>
-              </a:spcBef>
-              <a:spcAft>
-                <a:spcPts val="0"/>
-              </a:spcAft>
-            </a:pPr>
-            <a:r>
-              <a:rPr sz="1000" b="0" i="0">
-                <a:solidFill>
-                  <a:srgbClr val="A63A30"/>
-                </a:solidFill>
-                <a:latin typeface="Consolas"/>
-              </a:rPr>
-              <a:t>DISPERSION</a:t>
-            </a:r>
-          </a:p>
-        </p:txBody>
-      </p:sp>
-      <p:sp>
-        <p:nvSpPr>
-          <p:cNvPr id="3" name="TextBox 2"/>
-          <p:cNvSpPr txBox="1"/>
-          <p:nvPr/>
-        </p:nvSpPr>
-        <p:spPr>
-          <a:xfrm>
-            <a:off x="566928" y="914400"/>
-            <a:ext cx="4160520" cy="1371600"/>
-          </a:xfrm>
-          <a:prstGeom prst="rect">
-            <a:avLst/>
-          </a:prstGeom>
-          <a:noFill/>
-        </p:spPr>
-        <p:txBody>
-          <a:bodyPr wrap="square" lIns="0" rIns="0" tIns="0" bIns="0">
-            <a:spAutoFit/>
-          </a:bodyPr>
-          <a:lstStyle/>
-          <a:p>
-            <a:pPr>
-              <a:lnSpc>
-                <a:spcPct val="108000"/>
-              </a:lnSpc>
-              <a:spcBef>
-                <a:spcPts val="0"/>
-              </a:spcBef>
-              <a:spcAft>
-                <a:spcPts val="0"/>
-              </a:spcAft>
-            </a:pPr>
-            <a:r>
-              <a:rPr sz="2300" b="0" i="0">
-                <a:solidFill>
-                  <a:srgbClr val="14171C"/>
-                </a:solidFill>
-                <a:latin typeface="Georgia"/>
-              </a:rPr>
-              <a:t>Below the top tier, countries contain multitudes</a:t>
-            </a:r>
-          </a:p>
-        </p:txBody>
-      </p:sp>
-      <p:sp>
-        <p:nvSpPr>
-          <p:cNvPr id="4" name="TextBox 3"/>
-          <p:cNvSpPr txBox="1"/>
-          <p:nvPr/>
-        </p:nvSpPr>
-        <p:spPr>
-          <a:xfrm>
-            <a:off x="566928" y="2331720"/>
-            <a:ext cx="4160520" cy="3840480"/>
-          </a:xfrm>
-          <a:prstGeom prst="rect">
-            <a:avLst/>
-          </a:prstGeom>
-          <a:noFill/>
-        </p:spPr>
-        <p:txBody>
-          <a:bodyPr wrap="square" lIns="0" rIns="0" tIns="0" bIns="0">
-            <a:spAutoFit/>
-          </a:bodyPr>
-          <a:lstStyle/>
-          <a:p>
-            <a:pPr>
-              <a:lnSpc>
-                <a:spcPct val="132000"/>
-              </a:lnSpc>
-              <a:spcBef>
-                <a:spcPts val="0"/>
-              </a:spcBef>
-              <a:spcAft>
-                <a:spcPts val="1100"/>
-              </a:spcAft>
-            </a:pPr>
-            <a:r>
-              <a:rPr sz="1150" b="0" i="0">
-                <a:solidFill>
-                  <a:srgbClr val="5A6068"/>
-                </a:solidFill>
-                <a:latin typeface="Calibri"/>
-              </a:rPr>
-              <a:t>Germany's regions span 0.05 of subnational HDI. China's span 0.30 and India's 0.19 — several development tiers' worth of variation inside single countries. National averages hide most of the development story precisely where development varies most.</a:t>
-            </a:r>
-          </a:p>
-        </p:txBody>
-      </p:sp>
-      <p:sp>
-        <p:nvSpPr>
-          <p:cNvPr id="5" name="TextBox 4"/>
-          <p:cNvSpPr txBox="1"/>
-          <p:nvPr/>
-        </p:nvSpPr>
-        <p:spPr>
-          <a:xfrm>
-            <a:off x="11338560" y="6263640"/>
-            <a:ext cx="548640" cy="274320"/>
-          </a:xfrm>
-          <a:prstGeom prst="rect">
-            <a:avLst/>
-          </a:prstGeom>
-          <a:noFill/>
-        </p:spPr>
-        <p:txBody>
-          <a:bodyPr wrap="square" lIns="0" rIns="0" tIns="0" bIns="0">
-            <a:spAutoFit/>
-          </a:bodyPr>
-          <a:lstStyle/>
-          <a:p>
-            <a:pPr algn="r">
-              <a:spcBef>
-                <a:spcPts val="0"/>
-              </a:spcBef>
-              <a:spcAft>
-                <a:spcPts val="0"/>
-              </a:spcAft>
-            </a:pPr>
-            <a:r>
-              <a:rPr sz="1100" b="0" i="0">
-                <a:solidFill>
-                  <a:srgbClr val="868D96"/>
-                </a:solidFill>
-                <a:latin typeface="Consolas"/>
-              </a:rPr>
-              <a:t>III</a:t>
-            </a:r>
-          </a:p>
-        </p:txBody>
-      </p:sp>
-      <p:pic>
-        <p:nvPicPr>
-          <p:cNvPr id="6" name="Picture 5" descr="shdi_within_country_spread.png"/>
-          <p:cNvPicPr>
-            <a:picLocks noChangeAspect="1"/>
-          </p:cNvPicPr>
-          <p:nvPr/>
-        </p:nvPicPr>
-        <p:blipFill>
-          <a:blip r:embed="rId2"/>
-          <a:stretch>
-            <a:fillRect/>
-          </a:stretch>
-        </p:blipFill>
-        <p:spPr>
-          <a:xfrm>
-            <a:off x="5120640" y="1068587"/>
-            <a:ext cx="6537960" cy="4254481"/>
-          </a:xfrm>
-          <a:prstGeom prst="rect">
-            <a:avLst/>
-          </a:prstGeom>
-        </p:spPr>
-      </p:pic>
-      <p:sp>
-        <p:nvSpPr>
-          <p:cNvPr id="7" name="TextBox 6"/>
-          <p:cNvSpPr txBox="1"/>
-          <p:nvPr/>
-        </p:nvSpPr>
-        <p:spPr>
-          <a:xfrm>
-            <a:off x="5120640" y="5897880"/>
-            <a:ext cx="6537960" cy="731520"/>
-          </a:xfrm>
-          <a:prstGeom prst="rect">
-            <a:avLst/>
-          </a:prstGeom>
-          <a:noFill/>
-        </p:spPr>
-        <p:txBody>
-          <a:bodyPr wrap="square" lIns="0" rIns="0" tIns="0" bIns="0">
-            <a:spAutoFit/>
-          </a:bodyPr>
-          <a:lstStyle/>
-          <a:p>
-            <a:pPr>
-              <a:lnSpc>
-                <a:spcPct val="125000"/>
-              </a:lnSpc>
-              <a:spcBef>
-                <a:spcPts val="0"/>
-              </a:spcBef>
-              <a:spcAft>
-                <a:spcPts val="0"/>
-              </a:spcAft>
-            </a:pPr>
-            <a:r>
-              <a:rPr sz="900" b="0" i="0">
-                <a:solidFill>
-                  <a:srgbClr val="868D96"/>
-                </a:solidFill>
-                <a:latin typeface="Calibri"/>
-              </a:rPr>
-              <a:t>Every region a dot, two countries per UNDP development tier, 2022.</a:t>
             </a:r>
           </a:p>
         </p:txBody>
@@ -5983,7 +6173,7 @@
                 </a:solidFill>
                 <a:latin typeface="Consolas"/>
               </a:rPr>
-              <a:t>THE NON-RESULT</a:t>
+              <a:t>DISPERSION</a:t>
             </a:r>
           </a:p>
         </p:txBody>
@@ -6028,7 +6218,7 @@
                 </a:solidFill>
                 <a:latin typeface="Georgia"/>
               </a:rPr>
-              <a:t>Development inequality mostly does not become wellbeing inequality</a:t>
+              <a:t>Below the top tier, countries contain multitudes</a:t>
             </a:r>
           </a:p>
         </p:txBody>
@@ -6073,7 +6263,7 @@
                 </a:solidFill>
                 <a:latin typeface="Calibri"/>
               </a:rPr>
-              <a:t>Holding country fixed and regressing region-mean life satisfaction on regional subnational HDI gives a significantly positive gradient in only 3 of 16 ESS countries — France, Belgium, and Germany — and the gradient is not steeper in countries with larger internal inequality. Which country's ladder you are on matters more than which rung you occupy within it.</a:t>
+              <a:t>Germany's regions span 0.05 of subnational HDI. China's span 0.30 and India's 0.19 — several development tiers' worth of variation inside single countries. National averages hide most of the development story precisely where development varies most.</a:t>
             </a:r>
           </a:p>
         </p:txBody>
@@ -6122,7 +6312,7 @@
       </p:sp>
       <p:pic>
         <p:nvPicPr>
-          <p:cNvPr id="6" name="Picture 5" descr="within_country_gradient.png"/>
+          <p:cNvPr id="6" name="Picture 5" descr="shdi_within_country_spread.png"/>
           <p:cNvPicPr>
             <a:picLocks noChangeAspect="1"/>
           </p:cNvPicPr>
@@ -6136,8 +6326,8 @@
         </p:blipFill>
         <p:spPr>
           <a:xfrm>
-            <a:off x="5120640" y="1553033"/>
-            <a:ext cx="6537960" cy="3285590"/>
+            <a:off x="5120640" y="1068587"/>
+            <a:ext cx="6537960" cy="4254481"/>
           </a:xfrm>
           <a:prstGeom prst="rect">
             <a:avLst/>
@@ -6184,7 +6374,7 @@
                 </a:solidFill>
                 <a:latin typeface="Calibri"/>
               </a:rPr>
-              <a:t>Within-country gradients of region-mean life satisfaction on regional SHDI, 16 ESS countries ordered by national HDI.</a:t>
+              <a:t>Every region a dot, two countries per UNDP development tier, 2022.</a:t>
             </a:r>
           </a:p>
         </p:txBody>
@@ -7074,7 +7264,7 @@
                 </a:solidFill>
                 <a:latin typeface="Consolas"/>
               </a:rPr>
-              <a:t>THE FLIP</a:t>
+              <a:t>THE NON-RESULT</a:t>
             </a:r>
           </a:p>
         </p:txBody>
@@ -7119,7 +7309,7 @@
                 </a:solidFill>
                 <a:latin typeface="Georgia"/>
               </a:rPr>
-              <a:t>Health and social trust do inside countries what development does between them</a:t>
+              <a:t>Development inequality mostly does not become wellbeing inequality</a:t>
             </a:r>
           </a:p>
         </p:txBody>
@@ -7164,29 +7354,7 @@
                 </a:solidFill>
                 <a:latin typeface="Calibri"/>
               </a:rPr>
-              <a:t>Between countries, development leads and the two wellbeing instruments agree almost exactly: the HDI correlates at r = +0.89 with World Happiness Report happiness and +0.87 with ESS life satisfaction, with trust and health close behind and all three positive.</a:t>
-            </a:r>
-          </a:p>
-          <a:p>
-            <a:pPr>
-              <a:lnSpc>
-                <a:spcPct val="132000"/>
-              </a:lnSpc>
-              <a:spcBef>
-                <a:spcPts val="0"/>
-              </a:spcBef>
-              <a:spcAft>
-                <a:spcPts val="1100"/>
-              </a:spcAft>
-            </a:pPr>
-            <a:r>
-              <a:rPr sz="1150" b="0" i="0">
-                <a:solidFill>
-                  <a:srgbClr val="5A6068"/>
-                </a:solidFill>
-                <a:latin typeface="Calibri"/>
-              </a:rPr>
-              <a:t>Within countries the ranking inverts. Development falls to a median regional correlation of +0.15, significant in 3 of 16 countries, while self-rated health holds at +0.51 (8 of 16) and social trust at +0.49 (6 of 16). The World Happiness Report cannot see this at all — it has no subnational values. It is the specific thing the ESS adds.</a:t>
+              <a:t>Holding country fixed and regressing region-mean life satisfaction on regional subnational HDI gives a significantly positive gradient in only 3 of 16 ESS countries — France, Belgium, and Germany — and the gradient is not steeper in countries with larger internal inequality. Which country's ladder you are on matters more than which rung you occupy within it.</a:t>
             </a:r>
           </a:p>
         </p:txBody>
@@ -7235,7 +7403,7 @@
       </p:sp>
       <p:pic>
         <p:nvPicPr>
-          <p:cNvPr id="6" name="Picture 5" descr="ranking_flip.png"/>
+          <p:cNvPr id="6" name="Picture 5" descr="within_country_gradient.png"/>
           <p:cNvPicPr>
             <a:picLocks noChangeAspect="1"/>
           </p:cNvPicPr>
@@ -7249,8 +7417,8 @@
         </p:blipFill>
         <p:spPr>
           <a:xfrm>
-            <a:off x="5120640" y="1711429"/>
-            <a:ext cx="6537960" cy="2968798"/>
+            <a:off x="5120640" y="1553033"/>
+            <a:ext cx="6537960" cy="3285590"/>
           </a:xfrm>
           <a:prstGeom prst="rect">
             <a:avLst/>
@@ -7297,7 +7465,7 @@
                 </a:solidFill>
                 <a:latin typeface="Calibri"/>
               </a:rPr>
-              <a:t>Candidate Figure 2. National correlations beside within-country regional correlations, for development, health, and trust.</a:t>
+              <a:t>Within-country gradients of region-mean life satisfaction on regional SHDI, 16 ESS countries ordered by national HDI.</a:t>
             </a:r>
           </a:p>
         </p:txBody>
@@ -7337,7 +7505,7 @@
         <p:spPr>
           <a:xfrm>
             <a:off x="566928" y="502920"/>
-            <a:ext cx="8595360" cy="274320"/>
+            <a:ext cx="4160520" cy="274320"/>
           </a:xfrm>
           <a:prstGeom prst="rect">
             <a:avLst/>
@@ -7365,7 +7533,7 @@
                 </a:solidFill>
                 <a:latin typeface="Consolas"/>
               </a:rPr>
-              <a:t>THE LIMITATION</a:t>
+              <a:t>THE FLIP</a:t>
             </a:r>
           </a:p>
         </p:txBody>
@@ -7379,7 +7547,7 @@
         <p:spPr>
           <a:xfrm>
             <a:off x="566928" y="914400"/>
-            <a:ext cx="8595360" cy="1371600"/>
+            <a:ext cx="4160520" cy="1371600"/>
           </a:xfrm>
           <a:prstGeom prst="rect">
             <a:avLst/>
@@ -7404,13 +7572,13 @@
               </a:spcAft>
             </a:pPr>
             <a:r>
-              <a:rPr sz="2700" b="0" i="0">
+              <a:rPr sz="2300" b="0" i="0">
                 <a:solidFill>
                   <a:srgbClr val="14171C"/>
                 </a:solidFill>
                 <a:latin typeface="Georgia"/>
               </a:rPr>
-              <a:t>This part of the argument is Europe-only, and has to say so</a:t>
+              <a:t>Health and social trust do inside countries what development does between them</a:t>
             </a:r>
           </a:p>
         </p:txBody>
@@ -7423,8 +7591,8 @@
         </p:nvSpPr>
         <p:spPr>
           <a:xfrm>
-            <a:off x="566928" y="2286000"/>
-            <a:ext cx="8595360" cy="3840480"/>
+            <a:off x="566928" y="2331720"/>
+            <a:ext cx="4160520" cy="3840480"/>
           </a:xfrm>
           <a:prstGeom prst="rect">
             <a:avLst/>
@@ -7449,13 +7617,35 @@
               </a:spcAft>
             </a:pPr>
             <a:r>
-              <a:rPr sz="1400" b="0" i="0">
+              <a:rPr sz="1150" b="0" i="0">
                 <a:solidFill>
                   <a:srgbClr val="5A6068"/>
                 </a:solidFill>
                 <a:latin typeface="Calibri"/>
               </a:rPr>
-              <a:t>The ESS is the only regional wellbeing source with the coverage this design needs; Gallup's subnational files are paywalled. Act III therefore generalises across 16 European countries and not beyond them. It should be stated as a scope condition in the text rather than buried in a limitations paragraph, because the flip is the most policy-relevant result in the commentary and will be the most contested.</a:t>
+              <a:t>Between countries, development leads and the two wellbeing instruments agree almost exactly: the HDI correlates at r = +0.89 with World Happiness Report happiness and +0.87 with ESS life satisfaction, with trust and health close behind and all three positive.</a:t>
+            </a:r>
+          </a:p>
+          <a:p>
+            <a:pPr>
+              <a:lnSpc>
+                <a:spcPct val="132000"/>
+              </a:lnSpc>
+              <a:spcBef>
+                <a:spcPts val="0"/>
+              </a:spcBef>
+              <a:spcAft>
+                <a:spcPts val="1100"/>
+              </a:spcAft>
+            </a:pPr>
+            <a:r>
+              <a:rPr sz="1150" b="0" i="0">
+                <a:solidFill>
+                  <a:srgbClr val="5A6068"/>
+                </a:solidFill>
+                <a:latin typeface="Calibri"/>
+              </a:rPr>
+              <a:t>Within countries the ranking inverts. Development falls to a median regional correlation of +0.15, significant in 3 of 16 countries, while self-rated health holds at +0.51 (8 of 16) and social trust at +0.49 (6 of 16). The World Happiness Report cannot see this at all — it has no subnational values. It is the specific thing the ESS adds.</a:t>
             </a:r>
           </a:p>
         </p:txBody>
@@ -7498,6 +7688,75 @@
                 <a:latin typeface="Consolas"/>
               </a:rPr>
               <a:t>III</a:t>
+            </a:r>
+          </a:p>
+        </p:txBody>
+      </p:sp>
+      <p:pic>
+        <p:nvPicPr>
+          <p:cNvPr id="6" name="Picture 5" descr="ranking_flip.png"/>
+          <p:cNvPicPr>
+            <a:picLocks noChangeAspect="1"/>
+          </p:cNvPicPr>
+          <p:nvPr/>
+        </p:nvPicPr>
+        <p:blipFill>
+          <a:blip r:embed="rId2"/>
+          <a:stretch>
+            <a:fillRect/>
+          </a:stretch>
+        </p:blipFill>
+        <p:spPr>
+          <a:xfrm>
+            <a:off x="5120640" y="1711429"/>
+            <a:ext cx="6537960" cy="2968798"/>
+          </a:xfrm>
+          <a:prstGeom prst="rect">
+            <a:avLst/>
+          </a:prstGeom>
+        </p:spPr>
+      </p:pic>
+      <p:sp>
+        <p:nvSpPr>
+          <p:cNvPr id="7" name="TextBox 6"/>
+          <p:cNvSpPr txBox="1"/>
+          <p:nvPr/>
+        </p:nvSpPr>
+        <p:spPr>
+          <a:xfrm>
+            <a:off x="5120640" y="5897880"/>
+            <a:ext cx="6537960" cy="731520"/>
+          </a:xfrm>
+          <a:prstGeom prst="rect">
+            <a:avLst/>
+          </a:prstGeom>
+          <a:noFill/>
+        </p:spPr>
+        <p:txBody>
+          <a:bodyPr wrap="square" lIns="0" rIns="0" tIns="0" bIns="0">
+            <a:spAutoFit/>
+          </a:bodyPr>
+          <a:lstStyle/>
+          <a:p>
+            <a:pPr>
+              <a:lnSpc>
+                <a:spcPct val="125000"/>
+              </a:lnSpc>
+              <a:spcBef>
+                <a:spcPts val="0"/>
+              </a:spcBef>
+              <a:spcAft>
+                <a:spcPts val="0"/>
+              </a:spcAft>
+            </a:pPr>
+            <a:r>
+              <a:rPr sz="900" b="0" i="0">
+                <a:solidFill>
+                  <a:srgbClr val="868D96"/>
+                </a:solidFill>
+                <a:latin typeface="Calibri"/>
+              </a:rPr>
+              <a:t>Candidate Figure 2. National correlations beside within-country regional correlations, for development, health, and trust.</a:t>
             </a:r>
           </a:p>
         </p:txBody>
@@ -7511,6 +7770,206 @@
 </file>
 
 <file path=ppt/slides/slide22.xml><?xml version="1.0" encoding="utf-8"?>
+<p:sld xmlns:a="http://schemas.openxmlformats.org/drawingml/2006/main" xmlns:p="http://schemas.openxmlformats.org/presentationml/2006/main" xmlns:r="http://schemas.openxmlformats.org/officeDocument/2006/relationships">
+  <p:cSld>
+    <p:bg>
+      <p:bgPr>
+        <a:solidFill>
+          <a:srgbClr val="FCFCFB"/>
+        </a:solidFill>
+        <a:effectLst/>
+      </p:bgPr>
+    </p:bg>
+    <p:spTree>
+      <p:nvGrpSpPr>
+        <p:cNvPr id="1" name=""/>
+        <p:cNvGrpSpPr/>
+        <p:nvPr/>
+      </p:nvGrpSpPr>
+      <p:grpSpPr/>
+      <p:sp>
+        <p:nvSpPr>
+          <p:cNvPr id="2" name="TextBox 1"/>
+          <p:cNvSpPr txBox="1"/>
+          <p:nvPr/>
+        </p:nvSpPr>
+        <p:spPr>
+          <a:xfrm>
+            <a:off x="566928" y="502920"/>
+            <a:ext cx="8595360" cy="274320"/>
+          </a:xfrm>
+          <a:prstGeom prst="rect">
+            <a:avLst/>
+          </a:prstGeom>
+          <a:noFill/>
+        </p:spPr>
+        <p:txBody>
+          <a:bodyPr wrap="square" lIns="0" rIns="0" tIns="0" bIns="0">
+            <a:spAutoFit/>
+          </a:bodyPr>
+          <a:lstStyle/>
+          <a:p>
+            <a:pPr>
+              <a:spcBef>
+                <a:spcPts val="0"/>
+              </a:spcBef>
+              <a:spcAft>
+                <a:spcPts val="0"/>
+              </a:spcAft>
+            </a:pPr>
+            <a:r>
+              <a:rPr sz="1000" b="0" i="0">
+                <a:solidFill>
+                  <a:srgbClr val="A63A30"/>
+                </a:solidFill>
+                <a:latin typeface="Consolas"/>
+              </a:rPr>
+              <a:t>THE LIMITATION</a:t>
+            </a:r>
+          </a:p>
+        </p:txBody>
+      </p:sp>
+      <p:sp>
+        <p:nvSpPr>
+          <p:cNvPr id="3" name="TextBox 2"/>
+          <p:cNvSpPr txBox="1"/>
+          <p:nvPr/>
+        </p:nvSpPr>
+        <p:spPr>
+          <a:xfrm>
+            <a:off x="566928" y="914400"/>
+            <a:ext cx="8595360" cy="1371600"/>
+          </a:xfrm>
+          <a:prstGeom prst="rect">
+            <a:avLst/>
+          </a:prstGeom>
+          <a:noFill/>
+        </p:spPr>
+        <p:txBody>
+          <a:bodyPr wrap="square" lIns="0" rIns="0" tIns="0" bIns="0">
+            <a:spAutoFit/>
+          </a:bodyPr>
+          <a:lstStyle/>
+          <a:p>
+            <a:pPr>
+              <a:lnSpc>
+                <a:spcPct val="108000"/>
+              </a:lnSpc>
+              <a:spcBef>
+                <a:spcPts val="0"/>
+              </a:spcBef>
+              <a:spcAft>
+                <a:spcPts val="0"/>
+              </a:spcAft>
+            </a:pPr>
+            <a:r>
+              <a:rPr sz="2700" b="0" i="0">
+                <a:solidFill>
+                  <a:srgbClr val="14171C"/>
+                </a:solidFill>
+                <a:latin typeface="Georgia"/>
+              </a:rPr>
+              <a:t>This part of the argument is Europe-only, and has to say so</a:t>
+            </a:r>
+          </a:p>
+        </p:txBody>
+      </p:sp>
+      <p:sp>
+        <p:nvSpPr>
+          <p:cNvPr id="4" name="TextBox 3"/>
+          <p:cNvSpPr txBox="1"/>
+          <p:nvPr/>
+        </p:nvSpPr>
+        <p:spPr>
+          <a:xfrm>
+            <a:off x="566928" y="2286000"/>
+            <a:ext cx="8595360" cy="3840480"/>
+          </a:xfrm>
+          <a:prstGeom prst="rect">
+            <a:avLst/>
+          </a:prstGeom>
+          <a:noFill/>
+        </p:spPr>
+        <p:txBody>
+          <a:bodyPr wrap="square" lIns="0" rIns="0" tIns="0" bIns="0">
+            <a:spAutoFit/>
+          </a:bodyPr>
+          <a:lstStyle/>
+          <a:p>
+            <a:pPr>
+              <a:lnSpc>
+                <a:spcPct val="132000"/>
+              </a:lnSpc>
+              <a:spcBef>
+                <a:spcPts val="0"/>
+              </a:spcBef>
+              <a:spcAft>
+                <a:spcPts val="1100"/>
+              </a:spcAft>
+            </a:pPr>
+            <a:r>
+              <a:rPr sz="1400" b="0" i="0">
+                <a:solidFill>
+                  <a:srgbClr val="5A6068"/>
+                </a:solidFill>
+                <a:latin typeface="Calibri"/>
+              </a:rPr>
+              <a:t>The ESS is the only regional wellbeing source with the coverage this design needs; Gallup's subnational files are paywalled. Act III therefore generalises across 16 European countries and not beyond them. It should be stated as a scope condition in the text rather than buried in a limitations paragraph, because the flip is the most policy-relevant result in the commentary and will be the most contested.</a:t>
+            </a:r>
+          </a:p>
+        </p:txBody>
+      </p:sp>
+      <p:sp>
+        <p:nvSpPr>
+          <p:cNvPr id="5" name="TextBox 4"/>
+          <p:cNvSpPr txBox="1"/>
+          <p:nvPr/>
+        </p:nvSpPr>
+        <p:spPr>
+          <a:xfrm>
+            <a:off x="11338560" y="6263640"/>
+            <a:ext cx="548640" cy="274320"/>
+          </a:xfrm>
+          <a:prstGeom prst="rect">
+            <a:avLst/>
+          </a:prstGeom>
+          <a:noFill/>
+        </p:spPr>
+        <p:txBody>
+          <a:bodyPr wrap="square" lIns="0" rIns="0" tIns="0" bIns="0">
+            <a:spAutoFit/>
+          </a:bodyPr>
+          <a:lstStyle/>
+          <a:p>
+            <a:pPr algn="r">
+              <a:spcBef>
+                <a:spcPts val="0"/>
+              </a:spcBef>
+              <a:spcAft>
+                <a:spcPts val="0"/>
+              </a:spcAft>
+            </a:pPr>
+            <a:r>
+              <a:rPr sz="1100" b="0" i="0">
+                <a:solidFill>
+                  <a:srgbClr val="868D96"/>
+                </a:solidFill>
+                <a:latin typeface="Consolas"/>
+              </a:rPr>
+              <a:t>III</a:t>
+            </a:r>
+          </a:p>
+        </p:txBody>
+      </p:sp>
+    </p:spTree>
+  </p:cSld>
+  <p:clrMapOvr>
+    <a:masterClrMapping/>
+  </p:clrMapOvr>
+</p:sld>
+</file>
+
+<file path=ppt/slides/slide23.xml><?xml version="1.0" encoding="utf-8"?>
 <p:sld xmlns:a="http://schemas.openxmlformats.org/drawingml/2006/main" xmlns:p="http://schemas.openxmlformats.org/presentationml/2006/main" xmlns:r="http://schemas.openxmlformats.org/officeDocument/2006/relationships">
   <p:cSld>
     <p:bg>
@@ -7667,7 +8126,7 @@
 </p:sld>
 </file>
 
-<file path=ppt/slides/slide23.xml><?xml version="1.0" encoding="utf-8"?>
+<file path=ppt/slides/slide24.xml><?xml version="1.0" encoding="utf-8"?>
 <p:sld xmlns:a="http://schemas.openxmlformats.org/drawingml/2006/main" xmlns:p="http://schemas.openxmlformats.org/presentationml/2006/main" xmlns:r="http://schemas.openxmlformats.org/officeDocument/2006/relationships">
   <p:cSld>
     <p:bg>
@@ -8091,228 +8550,6 @@
                 <a:latin typeface="Calibri"/>
               </a:rPr>
               <a:t>measured learning outcomes</a:t>
-            </a:r>
-          </a:p>
-        </p:txBody>
-      </p:sp>
-    </p:spTree>
-  </p:cSld>
-  <p:clrMapOvr>
-    <a:masterClrMapping/>
-  </p:clrMapOvr>
-</p:sld>
-</file>
-
-<file path=ppt/slides/slide24.xml><?xml version="1.0" encoding="utf-8"?>
-<p:sld xmlns:a="http://schemas.openxmlformats.org/drawingml/2006/main" xmlns:p="http://schemas.openxmlformats.org/presentationml/2006/main" xmlns:r="http://schemas.openxmlformats.org/officeDocument/2006/relationships">
-  <p:cSld>
-    <p:bg>
-      <p:bgPr>
-        <a:solidFill>
-          <a:srgbClr val="FCFCFB"/>
-        </a:solidFill>
-        <a:effectLst/>
-      </p:bgPr>
-    </p:bg>
-    <p:spTree>
-      <p:nvGrpSpPr>
-        <p:cNvPr id="1" name=""/>
-        <p:cNvGrpSpPr/>
-        <p:nvPr/>
-      </p:nvGrpSpPr>
-      <p:grpSpPr/>
-      <p:sp>
-        <p:nvSpPr>
-          <p:cNvPr id="2" name="TextBox 1"/>
-          <p:cNvSpPr txBox="1"/>
-          <p:nvPr/>
-        </p:nvSpPr>
-        <p:spPr>
-          <a:xfrm>
-            <a:off x="566928" y="502920"/>
-            <a:ext cx="8595360" cy="274320"/>
-          </a:xfrm>
-          <a:prstGeom prst="rect">
-            <a:avLst/>
-          </a:prstGeom>
-          <a:noFill/>
-        </p:spPr>
-        <p:txBody>
-          <a:bodyPr wrap="square" lIns="0" rIns="0" tIns="0" bIns="0">
-            <a:spAutoFit/>
-          </a:bodyPr>
-          <a:lstStyle/>
-          <a:p>
-            <a:pPr>
-              <a:spcBef>
-                <a:spcPts val="0"/>
-              </a:spcBef>
-              <a:spcAft>
-                <a:spcPts val="0"/>
-              </a:spcAft>
-            </a:pPr>
-            <a:r>
-              <a:rPr sz="1000" b="0" i="0">
-                <a:solidFill>
-                  <a:srgbClr val="A63A30"/>
-                </a:solidFill>
-                <a:latin typeface="Consolas"/>
-              </a:rPr>
-              <a:t>ON PRIORITIES</a:t>
-            </a:r>
-          </a:p>
-        </p:txBody>
-      </p:sp>
-      <p:sp>
-        <p:nvSpPr>
-          <p:cNvPr id="3" name="TextBox 2"/>
-          <p:cNvSpPr txBox="1"/>
-          <p:nvPr/>
-        </p:nvSpPr>
-        <p:spPr>
-          <a:xfrm>
-            <a:off x="566928" y="914400"/>
-            <a:ext cx="8595360" cy="1371600"/>
-          </a:xfrm>
-          <a:prstGeom prst="rect">
-            <a:avLst/>
-          </a:prstGeom>
-          <a:noFill/>
-        </p:spPr>
-        <p:txBody>
-          <a:bodyPr wrap="square" lIns="0" rIns="0" tIns="0" bIns="0">
-            <a:spAutoFit/>
-          </a:bodyPr>
-          <a:lstStyle/>
-          <a:p>
-            <a:pPr>
-              <a:lnSpc>
-                <a:spcPct val="108000"/>
-              </a:lnSpc>
-              <a:spcBef>
-                <a:spcPts val="0"/>
-              </a:spcBef>
-              <a:spcAft>
-                <a:spcPts val="0"/>
-              </a:spcAft>
-            </a:pPr>
-            <a:r>
-              <a:rPr sz="2700" b="0" i="0">
-                <a:solidFill>
-                  <a:srgbClr val="14171C"/>
-                </a:solidFill>
-                <a:latin typeface="Georgia"/>
-              </a:rPr>
-              <a:t>Indicator dashboards are not wellbeing instruments</a:t>
-            </a:r>
-          </a:p>
-        </p:txBody>
-      </p:sp>
-      <p:sp>
-        <p:nvSpPr>
-          <p:cNvPr id="4" name="TextBox 3"/>
-          <p:cNvSpPr txBox="1"/>
-          <p:nvPr/>
-        </p:nvSpPr>
-        <p:spPr>
-          <a:xfrm>
-            <a:off x="566928" y="2286000"/>
-            <a:ext cx="8595360" cy="3840480"/>
-          </a:xfrm>
-          <a:prstGeom prst="rect">
-            <a:avLst/>
-          </a:prstGeom>
-          <a:noFill/>
-        </p:spPr>
-        <p:txBody>
-          <a:bodyPr wrap="square" lIns="0" rIns="0" tIns="0" bIns="0">
-            <a:spAutoFit/>
-          </a:bodyPr>
-          <a:lstStyle/>
-          <a:p>
-            <a:pPr>
-              <a:lnSpc>
-                <a:spcPct val="132000"/>
-              </a:lnSpc>
-              <a:spcBef>
-                <a:spcPts val="0"/>
-              </a:spcBef>
-              <a:spcAft>
-                <a:spcPts val="1100"/>
-              </a:spcAft>
-            </a:pPr>
-            <a:r>
-              <a:rPr sz="1400" b="0" i="0">
-                <a:solidFill>
-                  <a:srgbClr val="5A6068"/>
-                </a:solidFill>
-                <a:latin typeface="Calibri"/>
-              </a:rPr>
-              <a:t>Development indicators tell you reliably where wellbeing is high. They tell you almost nothing about when it will rise. Across every framework tested here, year-on-year indicator movement carries essentially no wellbeing information within the measurement window — a decade or so.</a:t>
-            </a:r>
-          </a:p>
-          <a:p>
-            <a:pPr>
-              <a:lnSpc>
-                <a:spcPct val="132000"/>
-              </a:lnSpc>
-              <a:spcBef>
-                <a:spcPts val="0"/>
-              </a:spcBef>
-              <a:spcAft>
-                <a:spcPts val="1100"/>
-              </a:spcAft>
-            </a:pPr>
-            <a:r>
-              <a:rPr sz="1400" b="0" i="0">
-                <a:solidFill>
-                  <a:srgbClr val="5A6068"/>
-                </a:solidFill>
-                <a:latin typeface="Calibri"/>
-              </a:rPr>
-              <a:t>The implication is about horizon and instrument, not about whether development matters. A monitoring architecture designed to reward annual indicator movement should not be read as tracking wellbeing, and a government that improves its dashboard position in a given year should not expect a wellbeing dividend inside the same electoral cycle.</a:t>
-            </a:r>
-          </a:p>
-        </p:txBody>
-      </p:sp>
-      <p:sp>
-        <p:nvSpPr>
-          <p:cNvPr id="5" name="TextBox 4"/>
-          <p:cNvSpPr txBox="1"/>
-          <p:nvPr/>
-        </p:nvSpPr>
-        <p:spPr>
-          <a:xfrm>
-            <a:off x="11338560" y="6263640"/>
-            <a:ext cx="548640" cy="274320"/>
-          </a:xfrm>
-          <a:prstGeom prst="rect">
-            <a:avLst/>
-          </a:prstGeom>
-          <a:noFill/>
-        </p:spPr>
-        <p:txBody>
-          <a:bodyPr wrap="square" lIns="0" rIns="0" tIns="0" bIns="0">
-            <a:spAutoFit/>
-          </a:bodyPr>
-          <a:lstStyle/>
-          <a:p>
-            <a:pPr algn="r">
-              <a:spcBef>
-                <a:spcPts val="0"/>
-              </a:spcBef>
-              <a:spcAft>
-                <a:spcPts val="0"/>
-              </a:spcAft>
-            </a:pPr>
-            <a:r>
-              <a:rPr sz="1100" b="0" i="0">
-                <a:solidFill>
-                  <a:srgbClr val="868D96"/>
-                </a:solidFill>
-                <a:latin typeface="Consolas"/>
-              </a:rPr>
-              <a:t>IV</a:t>
             </a:r>
           </a:p>
         </p:txBody>
@@ -8380,7 +8617,7 @@
                 </a:solidFill>
                 <a:latin typeface="Consolas"/>
               </a:rPr>
-              <a:t>ON WHAT KIND OF EDUCATION</a:t>
+              <a:t>ON PRIORITIES</a:t>
             </a:r>
           </a:p>
         </p:txBody>
@@ -8425,7 +8662,7 @@
                 </a:solidFill>
                 <a:latin typeface="Georgia"/>
               </a:rPr>
-              <a:t>The consensus moved to learning; the wellbeing evidence points at attainment</a:t>
+              <a:t>Indicator dashboards are not wellbeing instruments</a:t>
             </a:r>
           </a:p>
         </p:txBody>
@@ -8470,7 +8707,7 @@
                 </a:solidFill>
                 <a:latin typeface="Calibri"/>
               </a:rPr>
-              <a:t>Global education policy has shifted decisively over the past decade from schooling to learning — the learning-crisis framing, learning-poverty targets, and an indicator architecture built around measured proficiency. The premise is that years in school without demonstrated learning are an empty metric.</a:t>
+              <a:t>Development indicators tell you reliably where wellbeing is high. They tell you almost nothing about when it will rise. Across every framework tested here, year-on-year indicator movement carries essentially no wellbeing information within the measurement window — a decade or so.</a:t>
             </a:r>
           </a:p>
           <a:p>
@@ -8492,7 +8729,7 @@
                 </a:solidFill>
                 <a:latin typeface="Calibri"/>
               </a:rPr>
-              <a:t>Every level of aggregation we can test points the other way. Attainment and access carry the wellbeing signal — 12.7% for SDG4 access, 34.0% and 40.7% for the HDI's schooling components, 32 of 36 countries at the individual level — while measured learning outcomes sit at 0.9% and parity ratios at 2.5%.</a:t>
+              <a:t>The implication is about horizon and instrument, not about whether development matters. A monitoring architecture designed to reward annual indicator movement should not be read as tracking wellbeing, and a government that improves its dashboard position in a given year should not expect a wellbeing dividend inside the same electoral cycle.</a:t>
             </a:r>
           </a:p>
         </p:txBody>
@@ -8602,7 +8839,7 @@
                 </a:solidFill>
                 <a:latin typeface="Consolas"/>
               </a:rPr>
-              <a:t>WHAT WE CANNOT SAY</a:t>
+              <a:t>ON WHAT KIND OF EDUCATION</a:t>
             </a:r>
           </a:p>
         </p:txBody>
@@ -8647,7 +8884,7 @@
                 </a:solidFill>
                 <a:latin typeface="Georgia"/>
               </a:rPr>
-              <a:t>Three limits that keep this a question rather than a recommendation</a:t>
+              <a:t>The consensus moved to learning; the wellbeing evidence points at attainment</a:t>
             </a:r>
           </a:p>
         </p:txBody>
@@ -8692,7 +8929,7 @@
                 </a:solidFill>
                 <a:latin typeface="Calibri"/>
               </a:rPr>
-              <a:t>None of this is causal. The design is correlational throughout, and the levels results in particular are cross-sectional comparisons between countries.</a:t>
+              <a:t>Global education policy has shifted decisively over the past decade from schooling to learning — the learning-crisis framing, learning-poverty targets, and an indicator architecture built around measured proficiency. The premise is that years in school without demonstrated learning are an empty metric.</a:t>
             </a:r>
           </a:p>
           <a:p>
@@ -8714,29 +8951,7 @@
                 </a:solidFill>
                 <a:latin typeface="Calibri"/>
               </a:rPr>
-              <a:t>Schooling cannot be separated from what schooling stands in for. Years attained proxy labour-market position, economic security, autonomy, and social standing, and this design cannot pull them apart. Individual effects are small: a median R² near 0.01.</a:t>
-            </a:r>
-          </a:p>
-          <a:p>
-            <a:pPr>
-              <a:lnSpc>
-                <a:spcPct val="132000"/>
-              </a:lnSpc>
-              <a:spcBef>
-                <a:spcPts val="0"/>
-              </a:spcBef>
-              <a:spcAft>
-                <a:spcPts val="1100"/>
-              </a:spcAft>
-            </a:pPr>
-            <a:r>
-              <a:rPr sz="1400" b="0" i="0">
-                <a:solidFill>
-                  <a:srgbClr val="5A6068"/>
-                </a:solidFill>
-                <a:latin typeface="Calibri"/>
-              </a:rPr>
-              <a:t>Some of the parity and learning indicators' weakness is coverage rather than construct — they are the youngest and thinnest series in the SDG database, and thin series fail significance tests for uninteresting reasons. The commentary should concede this explicitly and say what would settle it.</a:t>
+              <a:t>Every level of aggregation we can test points the other way. Attainment and access carry the wellbeing signal — 12.7% for SDG4 access, 34.0% and 40.7% for the HDI's schooling components, 32 of 36 countries at the individual level — while measured learning outcomes sit at 0.9% and parity ratios at 2.5%.</a:t>
             </a:r>
           </a:p>
         </p:txBody>
@@ -8846,7 +9061,7 @@
                 </a:solidFill>
                 <a:latin typeface="Consolas"/>
               </a:rPr>
-              <a:t>THE ASK</a:t>
+              <a:t>WHAT WE CANNOT SAY</a:t>
             </a:r>
           </a:p>
         </p:txBody>
@@ -8891,7 +9106,7 @@
                 </a:solidFill>
                 <a:latin typeface="Georgia"/>
               </a:rPr>
-              <a:t>Should wellbeing be a criterion for education targets after 2030?</a:t>
+              <a:t>Three limits that keep this a question rather than a recommendation</a:t>
             </a:r>
           </a:p>
         </p:txBody>
@@ -8936,7 +9151,7 @@
                 </a:solidFill>
                 <a:latin typeface="Calibri"/>
               </a:rPr>
-              <a:t>That is the question the commentary exists to pose, and it has a sharp form: we have built a global education monitoring architecture around measured learning outcomes, and the wellbeing evidence points at years attained. If both are to be kept, someone has to say what the education system is being optimised for.</a:t>
+              <a:t>None of this is causal. The design is correlational throughout, and the levels results in particular are cross-sectional comparisons between countries.</a:t>
             </a:r>
           </a:p>
           <a:p>
@@ -8958,7 +9173,29 @@
                 </a:solidFill>
                 <a:latin typeface="Calibri"/>
               </a:rPr>
-              <a:t>A commentary cannot settle that. It can put the disagreement on the record with the evidence attached, which is what the four acts are for.</a:t>
+              <a:t>Schooling cannot be separated from what schooling stands in for. Years attained proxy labour-market position, economic security, autonomy, and social standing, and this design cannot pull them apart. Individual effects are small: a median R² near 0.01.</a:t>
+            </a:r>
+          </a:p>
+          <a:p>
+            <a:pPr>
+              <a:lnSpc>
+                <a:spcPct val="132000"/>
+              </a:lnSpc>
+              <a:spcBef>
+                <a:spcPts val="0"/>
+              </a:spcBef>
+              <a:spcAft>
+                <a:spcPts val="1100"/>
+              </a:spcAft>
+            </a:pPr>
+            <a:r>
+              <a:rPr sz="1400" b="0" i="0">
+                <a:solidFill>
+                  <a:srgbClr val="5A6068"/>
+                </a:solidFill>
+                <a:latin typeface="Calibri"/>
+              </a:rPr>
+              <a:t>Some of the parity and learning indicators' weakness is coverage rather than construct — they are the youngest and thinnest series in the SDG database, and thin series fail significance tests for uninteresting reasons. The commentary should concede this explicitly and say what would settle it.</a:t>
             </a:r>
           </a:p>
         </p:txBody>
@@ -9014,6 +9251,228 @@
 </file>
 
 <file path=ppt/slides/slide28.xml><?xml version="1.0" encoding="utf-8"?>
+<p:sld xmlns:a="http://schemas.openxmlformats.org/drawingml/2006/main" xmlns:p="http://schemas.openxmlformats.org/presentationml/2006/main" xmlns:r="http://schemas.openxmlformats.org/officeDocument/2006/relationships">
+  <p:cSld>
+    <p:bg>
+      <p:bgPr>
+        <a:solidFill>
+          <a:srgbClr val="FCFCFB"/>
+        </a:solidFill>
+        <a:effectLst/>
+      </p:bgPr>
+    </p:bg>
+    <p:spTree>
+      <p:nvGrpSpPr>
+        <p:cNvPr id="1" name=""/>
+        <p:cNvGrpSpPr/>
+        <p:nvPr/>
+      </p:nvGrpSpPr>
+      <p:grpSpPr/>
+      <p:sp>
+        <p:nvSpPr>
+          <p:cNvPr id="2" name="TextBox 1"/>
+          <p:cNvSpPr txBox="1"/>
+          <p:nvPr/>
+        </p:nvSpPr>
+        <p:spPr>
+          <a:xfrm>
+            <a:off x="566928" y="502920"/>
+            <a:ext cx="8595360" cy="274320"/>
+          </a:xfrm>
+          <a:prstGeom prst="rect">
+            <a:avLst/>
+          </a:prstGeom>
+          <a:noFill/>
+        </p:spPr>
+        <p:txBody>
+          <a:bodyPr wrap="square" lIns="0" rIns="0" tIns="0" bIns="0">
+            <a:spAutoFit/>
+          </a:bodyPr>
+          <a:lstStyle/>
+          <a:p>
+            <a:pPr>
+              <a:spcBef>
+                <a:spcPts val="0"/>
+              </a:spcBef>
+              <a:spcAft>
+                <a:spcPts val="0"/>
+              </a:spcAft>
+            </a:pPr>
+            <a:r>
+              <a:rPr sz="1000" b="0" i="0">
+                <a:solidFill>
+                  <a:srgbClr val="A63A30"/>
+                </a:solidFill>
+                <a:latin typeface="Consolas"/>
+              </a:rPr>
+              <a:t>THE ASK</a:t>
+            </a:r>
+          </a:p>
+        </p:txBody>
+      </p:sp>
+      <p:sp>
+        <p:nvSpPr>
+          <p:cNvPr id="3" name="TextBox 2"/>
+          <p:cNvSpPr txBox="1"/>
+          <p:nvPr/>
+        </p:nvSpPr>
+        <p:spPr>
+          <a:xfrm>
+            <a:off x="566928" y="914400"/>
+            <a:ext cx="8595360" cy="1371600"/>
+          </a:xfrm>
+          <a:prstGeom prst="rect">
+            <a:avLst/>
+          </a:prstGeom>
+          <a:noFill/>
+        </p:spPr>
+        <p:txBody>
+          <a:bodyPr wrap="square" lIns="0" rIns="0" tIns="0" bIns="0">
+            <a:spAutoFit/>
+          </a:bodyPr>
+          <a:lstStyle/>
+          <a:p>
+            <a:pPr>
+              <a:lnSpc>
+                <a:spcPct val="108000"/>
+              </a:lnSpc>
+              <a:spcBef>
+                <a:spcPts val="0"/>
+              </a:spcBef>
+              <a:spcAft>
+                <a:spcPts val="0"/>
+              </a:spcAft>
+            </a:pPr>
+            <a:r>
+              <a:rPr sz="2700" b="0" i="0">
+                <a:solidFill>
+                  <a:srgbClr val="14171C"/>
+                </a:solidFill>
+                <a:latin typeface="Georgia"/>
+              </a:rPr>
+              <a:t>Should wellbeing be a criterion for education targets after 2030?</a:t>
+            </a:r>
+          </a:p>
+        </p:txBody>
+      </p:sp>
+      <p:sp>
+        <p:nvSpPr>
+          <p:cNvPr id="4" name="TextBox 3"/>
+          <p:cNvSpPr txBox="1"/>
+          <p:nvPr/>
+        </p:nvSpPr>
+        <p:spPr>
+          <a:xfrm>
+            <a:off x="566928" y="2286000"/>
+            <a:ext cx="8595360" cy="3840480"/>
+          </a:xfrm>
+          <a:prstGeom prst="rect">
+            <a:avLst/>
+          </a:prstGeom>
+          <a:noFill/>
+        </p:spPr>
+        <p:txBody>
+          <a:bodyPr wrap="square" lIns="0" rIns="0" tIns="0" bIns="0">
+            <a:spAutoFit/>
+          </a:bodyPr>
+          <a:lstStyle/>
+          <a:p>
+            <a:pPr>
+              <a:lnSpc>
+                <a:spcPct val="132000"/>
+              </a:lnSpc>
+              <a:spcBef>
+                <a:spcPts val="0"/>
+              </a:spcBef>
+              <a:spcAft>
+                <a:spcPts val="1100"/>
+              </a:spcAft>
+            </a:pPr>
+            <a:r>
+              <a:rPr sz="1400" b="0" i="0">
+                <a:solidFill>
+                  <a:srgbClr val="5A6068"/>
+                </a:solidFill>
+                <a:latin typeface="Calibri"/>
+              </a:rPr>
+              <a:t>That is the question the commentary exists to pose, and it has a sharp form: we have built a global education monitoring architecture around measured learning outcomes, and the wellbeing evidence points at years attained. If both are to be kept, someone has to say what the education system is being optimised for.</a:t>
+            </a:r>
+          </a:p>
+          <a:p>
+            <a:pPr>
+              <a:lnSpc>
+                <a:spcPct val="132000"/>
+              </a:lnSpc>
+              <a:spcBef>
+                <a:spcPts val="0"/>
+              </a:spcBef>
+              <a:spcAft>
+                <a:spcPts val="1100"/>
+              </a:spcAft>
+            </a:pPr>
+            <a:r>
+              <a:rPr sz="1400" b="0" i="0">
+                <a:solidFill>
+                  <a:srgbClr val="5A6068"/>
+                </a:solidFill>
+                <a:latin typeface="Calibri"/>
+              </a:rPr>
+              <a:t>A commentary cannot settle that. It can put the disagreement on the record with the evidence attached, which is what the four acts are for.</a:t>
+            </a:r>
+          </a:p>
+        </p:txBody>
+      </p:sp>
+      <p:sp>
+        <p:nvSpPr>
+          <p:cNvPr id="5" name="TextBox 4"/>
+          <p:cNvSpPr txBox="1"/>
+          <p:nvPr/>
+        </p:nvSpPr>
+        <p:spPr>
+          <a:xfrm>
+            <a:off x="11338560" y="6263640"/>
+            <a:ext cx="548640" cy="274320"/>
+          </a:xfrm>
+          <a:prstGeom prst="rect">
+            <a:avLst/>
+          </a:prstGeom>
+          <a:noFill/>
+        </p:spPr>
+        <p:txBody>
+          <a:bodyPr wrap="square" lIns="0" rIns="0" tIns="0" bIns="0">
+            <a:spAutoFit/>
+          </a:bodyPr>
+          <a:lstStyle/>
+          <a:p>
+            <a:pPr algn="r">
+              <a:spcBef>
+                <a:spcPts val="0"/>
+              </a:spcBef>
+              <a:spcAft>
+                <a:spcPts val="0"/>
+              </a:spcAft>
+            </a:pPr>
+            <a:r>
+              <a:rPr sz="1100" b="0" i="0">
+                <a:solidFill>
+                  <a:srgbClr val="868D96"/>
+                </a:solidFill>
+                <a:latin typeface="Consolas"/>
+              </a:rPr>
+              <a:t>IV</a:t>
+            </a:r>
+          </a:p>
+        </p:txBody>
+      </p:sp>
+    </p:spTree>
+  </p:cSld>
+  <p:clrMapOvr>
+    <a:masterClrMapping/>
+  </p:clrMapOvr>
+</p:sld>
+</file>
+
+<file path=ppt/slides/slide29.xml><?xml version="1.0" encoding="utf-8"?>
 <p:sld xmlns:a="http://schemas.openxmlformats.org/drawingml/2006/main" xmlns:p="http://schemas.openxmlformats.org/presentationml/2006/main" xmlns:r="http://schemas.openxmlformats.org/officeDocument/2006/relationships">
   <p:cSld>
     <p:bg>
@@ -9158,633 +9617,6 @@
                 <a:latin typeface="Georgia"/>
               </a:rPr>
               <a:t>The recommended framing for submission: lead with the education exception as the positive finding, use the generalised collapse as the backdrop that makes it surprising, and close on the target-setting question. That ordering makes Act I load-bearing without making it the story.</a:t>
-            </a:r>
-          </a:p>
-        </p:txBody>
-      </p:sp>
-    </p:spTree>
-  </p:cSld>
-  <p:clrMapOvr>
-    <a:masterClrMapping/>
-  </p:clrMapOvr>
-</p:sld>
-</file>
-
-<file path=ppt/slides/slide29.xml><?xml version="1.0" encoding="utf-8"?>
-<p:sld xmlns:a="http://schemas.openxmlformats.org/drawingml/2006/main" xmlns:p="http://schemas.openxmlformats.org/presentationml/2006/main" xmlns:r="http://schemas.openxmlformats.org/officeDocument/2006/relationships">
-  <p:cSld>
-    <p:bg>
-      <p:bgPr>
-        <a:solidFill>
-          <a:srgbClr val="FCFCFB"/>
-        </a:solidFill>
-        <a:effectLst/>
-      </p:bgPr>
-    </p:bg>
-    <p:spTree>
-      <p:nvGrpSpPr>
-        <p:cNvPr id="1" name=""/>
-        <p:cNvGrpSpPr/>
-        <p:nvPr/>
-      </p:nvGrpSpPr>
-      <p:grpSpPr/>
-      <p:sp>
-        <p:nvSpPr>
-          <p:cNvPr id="2" name="TextBox 1"/>
-          <p:cNvSpPr txBox="1"/>
-          <p:nvPr/>
-        </p:nvSpPr>
-        <p:spPr>
-          <a:xfrm>
-            <a:off x="566928" y="502920"/>
-            <a:ext cx="8229600" cy="822960"/>
-          </a:xfrm>
-          <a:prstGeom prst="rect">
-            <a:avLst/>
-          </a:prstGeom>
-          <a:noFill/>
-        </p:spPr>
-        <p:txBody>
-          <a:bodyPr wrap="square" lIns="0" rIns="0" tIns="0" bIns="0">
-            <a:spAutoFit/>
-          </a:bodyPr>
-          <a:lstStyle/>
-          <a:p>
-            <a:pPr>
-              <a:spcBef>
-                <a:spcPts val="0"/>
-              </a:spcBef>
-              <a:spcAft>
-                <a:spcPts val="600"/>
-              </a:spcAft>
-            </a:pPr>
-            <a:r>
-              <a:rPr sz="3200" b="0" i="0">
-                <a:solidFill>
-                  <a:srgbClr val="14171C"/>
-                </a:solidFill>
-                <a:latin typeface="Georgia"/>
-              </a:rPr>
-              <a:t>Decisions for the team</a:t>
-            </a:r>
-          </a:p>
-          <a:p>
-            <a:pPr>
-              <a:spcBef>
-                <a:spcPts val="0"/>
-              </a:spcBef>
-              <a:spcAft>
-                <a:spcPts val="0"/>
-              </a:spcAft>
-            </a:pPr>
-            <a:r>
-              <a:rPr sz="1300" b="0" i="0">
-                <a:solidFill>
-                  <a:srgbClr val="5A6068"/>
-                </a:solidFill>
-                <a:latin typeface="Calibri"/>
-              </a:rPr>
-              <a:t>Five things the acts do not settle, in the order they block drafting.</a:t>
-            </a:r>
-          </a:p>
-        </p:txBody>
-      </p:sp>
-      <p:sp>
-        <p:nvSpPr>
-          <p:cNvPr id="3" name="Rectangle 2"/>
-          <p:cNvSpPr/>
-          <p:nvPr/>
-        </p:nvSpPr>
-        <p:spPr>
-          <a:xfrm>
-            <a:off x="566928" y="1828800"/>
-            <a:ext cx="3472586" cy="25400"/>
-          </a:xfrm>
-          <a:prstGeom prst="rect">
-            <a:avLst/>
-          </a:prstGeom>
-          <a:solidFill>
-            <a:srgbClr val="17549E"/>
-          </a:solidFill>
-          <a:ln>
-            <a:noFill/>
-          </a:ln>
-          <a:effectLst/>
-        </p:spPr>
-        <p:style>
-          <a:lnRef idx="1">
-            <a:schemeClr val="accent1"/>
-          </a:lnRef>
-          <a:fillRef idx="3">
-            <a:schemeClr val="accent1"/>
-          </a:fillRef>
-          <a:effectRef idx="2">
-            <a:schemeClr val="accent1"/>
-          </a:effectRef>
-          <a:fontRef idx="minor">
-            <a:schemeClr val="lt1"/>
-          </a:fontRef>
-        </p:style>
-        <p:txBody>
-          <a:bodyPr rtlCol="0" anchor="ctr"/>
-          <a:lstStyle/>
-          <a:p>
-            <a:pPr algn="ctr"/>
-          </a:p>
-        </p:txBody>
-      </p:sp>
-      <p:sp>
-        <p:nvSpPr>
-          <p:cNvPr id="4" name="TextBox 3"/>
-          <p:cNvSpPr txBox="1"/>
-          <p:nvPr/>
-        </p:nvSpPr>
-        <p:spPr>
-          <a:xfrm>
-            <a:off x="566928" y="2011680"/>
-            <a:ext cx="3472586" cy="1828800"/>
-          </a:xfrm>
-          <a:prstGeom prst="rect">
-            <a:avLst/>
-          </a:prstGeom>
-          <a:noFill/>
-        </p:spPr>
-        <p:txBody>
-          <a:bodyPr wrap="square" lIns="0" rIns="0" tIns="0" bIns="0">
-            <a:spAutoFit/>
-          </a:bodyPr>
-          <a:lstStyle/>
-          <a:p>
-            <a:pPr>
-              <a:spcBef>
-                <a:spcPts val="0"/>
-              </a:spcBef>
-              <a:spcAft>
-                <a:spcPts val="700"/>
-              </a:spcAft>
-            </a:pPr>
-            <a:r>
-              <a:rPr sz="1050" b="0" i="0">
-                <a:solidFill>
-                  <a:srgbClr val="17549E"/>
-                </a:solidFill>
-                <a:latin typeface="Consolas"/>
-              </a:rPr>
-              <a:t>FRAMING</a:t>
-            </a:r>
-          </a:p>
-          <a:p>
-            <a:pPr>
-              <a:lnSpc>
-                <a:spcPct val="130000"/>
-              </a:lnSpc>
-              <a:spcBef>
-                <a:spcPts val="0"/>
-              </a:spcBef>
-              <a:spcAft>
-                <a:spcPts val="0"/>
-              </a:spcAft>
-            </a:pPr>
-            <a:r>
-              <a:rPr sz="1100" b="0" i="0">
-                <a:solidFill>
-                  <a:srgbClr val="5A6068"/>
-                </a:solidFill>
-                <a:latin typeface="Calibri"/>
-              </a:rPr>
-              <a:t>Lead with the education exception and use the generalised collapse as Act I backdrop — recommended — or lead with the robustness result and treat education as the coda. This decides title, abstract, and venue.</a:t>
-            </a:r>
-          </a:p>
-        </p:txBody>
-      </p:sp>
-      <p:sp>
-        <p:nvSpPr>
-          <p:cNvPr id="5" name="Rectangle 4"/>
-          <p:cNvSpPr/>
-          <p:nvPr/>
-        </p:nvSpPr>
-        <p:spPr>
-          <a:xfrm>
-            <a:off x="4359554" y="1828800"/>
-            <a:ext cx="3472586" cy="25400"/>
-          </a:xfrm>
-          <a:prstGeom prst="rect">
-            <a:avLst/>
-          </a:prstGeom>
-          <a:solidFill>
-            <a:srgbClr val="17549E"/>
-          </a:solidFill>
-          <a:ln>
-            <a:noFill/>
-          </a:ln>
-          <a:effectLst/>
-        </p:spPr>
-        <p:style>
-          <a:lnRef idx="1">
-            <a:schemeClr val="accent1"/>
-          </a:lnRef>
-          <a:fillRef idx="3">
-            <a:schemeClr val="accent1"/>
-          </a:fillRef>
-          <a:effectRef idx="2">
-            <a:schemeClr val="accent1"/>
-          </a:effectRef>
-          <a:fontRef idx="minor">
-            <a:schemeClr val="lt1"/>
-          </a:fontRef>
-        </p:style>
-        <p:txBody>
-          <a:bodyPr rtlCol="0" anchor="ctr"/>
-          <a:lstStyle/>
-          <a:p>
-            <a:pPr algn="ctr"/>
-          </a:p>
-        </p:txBody>
-      </p:sp>
-      <p:sp>
-        <p:nvSpPr>
-          <p:cNvPr id="6" name="TextBox 5"/>
-          <p:cNvSpPr txBox="1"/>
-          <p:nvPr/>
-        </p:nvSpPr>
-        <p:spPr>
-          <a:xfrm>
-            <a:off x="4359554" y="2011680"/>
-            <a:ext cx="3472586" cy="1828800"/>
-          </a:xfrm>
-          <a:prstGeom prst="rect">
-            <a:avLst/>
-          </a:prstGeom>
-          <a:noFill/>
-        </p:spPr>
-        <p:txBody>
-          <a:bodyPr wrap="square" lIns="0" rIns="0" tIns="0" bIns="0">
-            <a:spAutoFit/>
-          </a:bodyPr>
-          <a:lstStyle/>
-          <a:p>
-            <a:pPr>
-              <a:spcBef>
-                <a:spcPts val="0"/>
-              </a:spcBef>
-              <a:spcAft>
-                <a:spcPts val="700"/>
-              </a:spcAft>
-            </a:pPr>
-            <a:r>
-              <a:rPr sz="1050" b="0" i="0">
-                <a:solidFill>
-                  <a:srgbClr val="17549E"/>
-                </a:solidFill>
-                <a:latin typeface="Consolas"/>
-              </a:rPr>
-              <a:t>DISPLAY ITEMS</a:t>
-            </a:r>
-          </a:p>
-          <a:p>
-            <a:pPr>
-              <a:lnSpc>
-                <a:spcPct val="130000"/>
-              </a:lnSpc>
-              <a:spcBef>
-                <a:spcPts val="0"/>
-              </a:spcBef>
-              <a:spcAft>
-                <a:spcPts val="0"/>
-              </a:spcAft>
-            </a:pPr>
-            <a:r>
-              <a:rPr sz="1100" b="0" i="0">
-                <a:solidFill>
-                  <a:srgbClr val="5A6068"/>
-                </a:solidFill>
-                <a:latin typeface="Calibri"/>
-              </a:rPr>
-              <a:t>Commentaries allow one or two. Proposed: the three-panel composite as Figure 1, the ranking flip as Figure 2. Everything else moves to supplementary.</a:t>
-            </a:r>
-          </a:p>
-        </p:txBody>
-      </p:sp>
-      <p:sp>
-        <p:nvSpPr>
-          <p:cNvPr id="7" name="Rectangle 6"/>
-          <p:cNvSpPr/>
-          <p:nvPr/>
-        </p:nvSpPr>
-        <p:spPr>
-          <a:xfrm>
-            <a:off x="8152180" y="1828800"/>
-            <a:ext cx="3472586" cy="25400"/>
-          </a:xfrm>
-          <a:prstGeom prst="rect">
-            <a:avLst/>
-          </a:prstGeom>
-          <a:solidFill>
-            <a:srgbClr val="17549E"/>
-          </a:solidFill>
-          <a:ln>
-            <a:noFill/>
-          </a:ln>
-          <a:effectLst/>
-        </p:spPr>
-        <p:style>
-          <a:lnRef idx="1">
-            <a:schemeClr val="accent1"/>
-          </a:lnRef>
-          <a:fillRef idx="3">
-            <a:schemeClr val="accent1"/>
-          </a:fillRef>
-          <a:effectRef idx="2">
-            <a:schemeClr val="accent1"/>
-          </a:effectRef>
-          <a:fontRef idx="minor">
-            <a:schemeClr val="lt1"/>
-          </a:fontRef>
-        </p:style>
-        <p:txBody>
-          <a:bodyPr rtlCol="0" anchor="ctr"/>
-          <a:lstStyle/>
-          <a:p>
-            <a:pPr algn="ctr"/>
-          </a:p>
-        </p:txBody>
-      </p:sp>
-      <p:sp>
-        <p:nvSpPr>
-          <p:cNvPr id="8" name="TextBox 7"/>
-          <p:cNvSpPr txBox="1"/>
-          <p:nvPr/>
-        </p:nvSpPr>
-        <p:spPr>
-          <a:xfrm>
-            <a:off x="8152180" y="2011680"/>
-            <a:ext cx="3472586" cy="1828800"/>
-          </a:xfrm>
-          <a:prstGeom prst="rect">
-            <a:avLst/>
-          </a:prstGeom>
-          <a:noFill/>
-        </p:spPr>
-        <p:txBody>
-          <a:bodyPr wrap="square" lIns="0" rIns="0" tIns="0" bIns="0">
-            <a:spAutoFit/>
-          </a:bodyPr>
-          <a:lstStyle/>
-          <a:p>
-            <a:pPr>
-              <a:spcBef>
-                <a:spcPts val="0"/>
-              </a:spcBef>
-              <a:spcAft>
-                <a:spcPts val="700"/>
-              </a:spcAft>
-            </a:pPr>
-            <a:r>
-              <a:rPr sz="1050" b="0" i="0">
-                <a:solidFill>
-                  <a:srgbClr val="17549E"/>
-                </a:solidFill>
-                <a:latin typeface="Consolas"/>
-              </a:rPr>
-              <a:t>SCOPE OF ACT III</a:t>
-            </a:r>
-          </a:p>
-          <a:p>
-            <a:pPr>
-              <a:lnSpc>
-                <a:spcPct val="130000"/>
-              </a:lnSpc>
-              <a:spcBef>
-                <a:spcPts val="0"/>
-              </a:spcBef>
-              <a:spcAft>
-                <a:spcPts val="0"/>
-              </a:spcAft>
-            </a:pPr>
-            <a:r>
-              <a:rPr sz="1100" b="0" i="0">
-                <a:solidFill>
-                  <a:srgbClr val="5A6068"/>
-                </a:solidFill>
-                <a:latin typeface="Calibri"/>
-              </a:rPr>
-              <a:t>Does the within-country material belong in this commentary or in a third paper? It is the most policy-relevant and the most contested, and it is Europe-only.</a:t>
-            </a:r>
-          </a:p>
-        </p:txBody>
-      </p:sp>
-      <p:sp>
-        <p:nvSpPr>
-          <p:cNvPr id="9" name="Rectangle 8"/>
-          <p:cNvSpPr/>
-          <p:nvPr/>
-        </p:nvSpPr>
-        <p:spPr>
-          <a:xfrm>
-            <a:off x="566928" y="4069080"/>
-            <a:ext cx="3472586" cy="25400"/>
-          </a:xfrm>
-          <a:prstGeom prst="rect">
-            <a:avLst/>
-          </a:prstGeom>
-          <a:solidFill>
-            <a:srgbClr val="17549E"/>
-          </a:solidFill>
-          <a:ln>
-            <a:noFill/>
-          </a:ln>
-          <a:effectLst/>
-        </p:spPr>
-        <p:style>
-          <a:lnRef idx="1">
-            <a:schemeClr val="accent1"/>
-          </a:lnRef>
-          <a:fillRef idx="3">
-            <a:schemeClr val="accent1"/>
-          </a:fillRef>
-          <a:effectRef idx="2">
-            <a:schemeClr val="accent1"/>
-          </a:effectRef>
-          <a:fontRef idx="minor">
-            <a:schemeClr val="lt1"/>
-          </a:fontRef>
-        </p:style>
-        <p:txBody>
-          <a:bodyPr rtlCol="0" anchor="ctr"/>
-          <a:lstStyle/>
-          <a:p>
-            <a:pPr algn="ctr"/>
-          </a:p>
-        </p:txBody>
-      </p:sp>
-      <p:sp>
-        <p:nvSpPr>
-          <p:cNvPr id="10" name="TextBox 9"/>
-          <p:cNvSpPr txBox="1"/>
-          <p:nvPr/>
-        </p:nvSpPr>
-        <p:spPr>
-          <a:xfrm>
-            <a:off x="566928" y="4251960"/>
-            <a:ext cx="3472586" cy="1828800"/>
-          </a:xfrm>
-          <a:prstGeom prst="rect">
-            <a:avLst/>
-          </a:prstGeom>
-          <a:noFill/>
-        </p:spPr>
-        <p:txBody>
-          <a:bodyPr wrap="square" lIns="0" rIns="0" tIns="0" bIns="0">
-            <a:spAutoFit/>
-          </a:bodyPr>
-          <a:lstStyle/>
-          <a:p>
-            <a:pPr>
-              <a:spcBef>
-                <a:spcPts val="0"/>
-              </a:spcBef>
-              <a:spcAft>
-                <a:spcPts val="700"/>
-              </a:spcAft>
-            </a:pPr>
-            <a:r>
-              <a:rPr sz="1050" b="0" i="0">
-                <a:solidFill>
-                  <a:srgbClr val="17549E"/>
-                </a:solidFill>
-                <a:latin typeface="Consolas"/>
-              </a:rPr>
-              <a:t>DATA INVESTMENT</a:t>
-            </a:r>
-          </a:p>
-          <a:p>
-            <a:pPr>
-              <a:lnSpc>
-                <a:spcPct val="130000"/>
-              </a:lnSpc>
-              <a:spcBef>
-                <a:spcPts val="0"/>
-              </a:spcBef>
-              <a:spcAft>
-                <a:spcPts val="0"/>
-              </a:spcAft>
-            </a:pPr>
-            <a:r>
-              <a:rPr sz="1100" b="0" i="0">
-                <a:solidFill>
-                  <a:srgbClr val="5A6068"/>
-                </a:solidFill>
-                <a:latin typeface="Calibri"/>
-              </a:rPr>
-              <a:t>The Global Data Lab's separate Education &amp; Work dataset carries 43 subnational schooling indicators by cohort and sex. Pulling it would let us test the education finding subnationally. Before submission or after review?</a:t>
-            </a:r>
-          </a:p>
-        </p:txBody>
-      </p:sp>
-      <p:sp>
-        <p:nvSpPr>
-          <p:cNvPr id="11" name="Rectangle 10"/>
-          <p:cNvSpPr/>
-          <p:nvPr/>
-        </p:nvSpPr>
-        <p:spPr>
-          <a:xfrm>
-            <a:off x="4359554" y="4069080"/>
-            <a:ext cx="3472586" cy="25400"/>
-          </a:xfrm>
-          <a:prstGeom prst="rect">
-            <a:avLst/>
-          </a:prstGeom>
-          <a:solidFill>
-            <a:srgbClr val="17549E"/>
-          </a:solidFill>
-          <a:ln>
-            <a:noFill/>
-          </a:ln>
-          <a:effectLst/>
-        </p:spPr>
-        <p:style>
-          <a:lnRef idx="1">
-            <a:schemeClr val="accent1"/>
-          </a:lnRef>
-          <a:fillRef idx="3">
-            <a:schemeClr val="accent1"/>
-          </a:fillRef>
-          <a:effectRef idx="2">
-            <a:schemeClr val="accent1"/>
-          </a:effectRef>
-          <a:fontRef idx="minor">
-            <a:schemeClr val="lt1"/>
-          </a:fontRef>
-        </p:style>
-        <p:txBody>
-          <a:bodyPr rtlCol="0" anchor="ctr"/>
-          <a:lstStyle/>
-          <a:p>
-            <a:pPr algn="ctr"/>
-          </a:p>
-        </p:txBody>
-      </p:sp>
-      <p:sp>
-        <p:nvSpPr>
-          <p:cNvPr id="12" name="TextBox 11"/>
-          <p:cNvSpPr txBox="1"/>
-          <p:nvPr/>
-        </p:nvSpPr>
-        <p:spPr>
-          <a:xfrm>
-            <a:off x="4359554" y="4251960"/>
-            <a:ext cx="3472586" cy="1828800"/>
-          </a:xfrm>
-          <a:prstGeom prst="rect">
-            <a:avLst/>
-          </a:prstGeom>
-          <a:noFill/>
-        </p:spPr>
-        <p:txBody>
-          <a:bodyPr wrap="square" lIns="0" rIns="0" tIns="0" bIns="0">
-            <a:spAutoFit/>
-          </a:bodyPr>
-          <a:lstStyle/>
-          <a:p>
-            <a:pPr>
-              <a:spcBef>
-                <a:spcPts val="0"/>
-              </a:spcBef>
-              <a:spcAft>
-                <a:spcPts val="700"/>
-              </a:spcAft>
-            </a:pPr>
-            <a:r>
-              <a:rPr sz="1050" b="0" i="0">
-                <a:solidFill>
-                  <a:srgbClr val="17549E"/>
-                </a:solidFill>
-                <a:latin typeface="Consolas"/>
-              </a:rPr>
-              <a:t>METHODS NOTE</a:t>
-            </a:r>
-          </a:p>
-          <a:p>
-            <a:pPr>
-              <a:lnSpc>
-                <a:spcPct val="130000"/>
-              </a:lnSpc>
-              <a:spcBef>
-                <a:spcPts val="0"/>
-              </a:spcBef>
-              <a:spcAft>
-                <a:spcPts val="0"/>
-              </a:spcAft>
-            </a:pPr>
-            <a:r>
-              <a:rPr sz="1100" b="0" i="0">
-                <a:solidFill>
-                  <a:srgbClr val="5A6068"/>
-                </a:solidFill>
-                <a:latin typeface="Calibri"/>
-              </a:rPr>
-              <a:t>Pooled R² and significant-country share tell different stories at several points. Proposal: report both throughout and discuss the divergence explicitly as a secondary contribution.</a:t>
             </a:r>
           </a:p>
         </p:txBody>
@@ -10239,7 +10071,7 @@
     <p:bg>
       <p:bgPr>
         <a:solidFill>
-          <a:srgbClr val="14171C"/>
+          <a:srgbClr val="FCFCFB"/>
         </a:solidFill>
         <a:effectLst/>
       </p:bgPr>
@@ -10259,42 +10091,147 @@
         </p:nvSpPr>
         <p:spPr>
           <a:xfrm>
-            <a:off x="566928" y="2743200"/>
-            <a:ext cx="8229600" cy="1371600"/>
-          </a:xfrm>
-          <a:prstGeom prst="rect">
-            <a:avLst/>
-          </a:prstGeom>
-          <a:noFill/>
-        </p:spPr>
-        <p:txBody>
-          <a:bodyPr wrap="square" lIns="0" rIns="0" tIns="0" bIns="0">
-            <a:spAutoFit/>
-          </a:bodyPr>
-          <a:lstStyle/>
-          <a:p>
-            <a:pPr>
-              <a:spcBef>
-                <a:spcPts val="0"/>
-              </a:spcBef>
-              <a:spcAft>
-                <a:spcPts val="1000"/>
-              </a:spcAft>
-            </a:pPr>
-            <a:r>
-              <a:rPr sz="4000" b="0" i="0">
-                <a:solidFill>
-                  <a:srgbClr val="FCFCFB"/>
+            <a:off x="566928" y="502920"/>
+            <a:ext cx="8229600" cy="822960"/>
+          </a:xfrm>
+          <a:prstGeom prst="rect">
+            <a:avLst/>
+          </a:prstGeom>
+          <a:noFill/>
+        </p:spPr>
+        <p:txBody>
+          <a:bodyPr wrap="square" lIns="0" rIns="0" tIns="0" bIns="0">
+            <a:spAutoFit/>
+          </a:bodyPr>
+          <a:lstStyle/>
+          <a:p>
+            <a:pPr>
+              <a:spcBef>
+                <a:spcPts val="0"/>
+              </a:spcBef>
+              <a:spcAft>
+                <a:spcPts val="600"/>
+              </a:spcAft>
+            </a:pPr>
+            <a:r>
+              <a:rPr sz="3200" b="0" i="0">
+                <a:solidFill>
+                  <a:srgbClr val="14171C"/>
                 </a:solidFill>
                 <a:latin typeface="Georgia"/>
               </a:rPr>
-              <a:t>Evidence appendix</a:t>
+              <a:t>Decisions for the team</a:t>
+            </a:r>
+          </a:p>
+          <a:p>
+            <a:pPr>
+              <a:spcBef>
+                <a:spcPts val="0"/>
+              </a:spcBef>
+              <a:spcAft>
+                <a:spcPts val="0"/>
+              </a:spcAft>
+            </a:pPr>
+            <a:r>
+              <a:rPr sz="1300" b="0" i="0">
+                <a:solidFill>
+                  <a:srgbClr val="5A6068"/>
+                </a:solidFill>
+                <a:latin typeface="Calibri"/>
+              </a:rPr>
+              <a:t>Five things the acts do not settle, in the order they block drafting.</a:t>
+            </a:r>
+          </a:p>
+        </p:txBody>
+      </p:sp>
+      <p:sp>
+        <p:nvSpPr>
+          <p:cNvPr id="3" name="Rectangle 2"/>
+          <p:cNvSpPr/>
+          <p:nvPr/>
+        </p:nvSpPr>
+        <p:spPr>
+          <a:xfrm>
+            <a:off x="566928" y="1828800"/>
+            <a:ext cx="3472586" cy="25400"/>
+          </a:xfrm>
+          <a:prstGeom prst="rect">
+            <a:avLst/>
+          </a:prstGeom>
+          <a:solidFill>
+            <a:srgbClr val="17549E"/>
+          </a:solidFill>
+          <a:ln>
+            <a:noFill/>
+          </a:ln>
+          <a:effectLst/>
+        </p:spPr>
+        <p:style>
+          <a:lnRef idx="1">
+            <a:schemeClr val="accent1"/>
+          </a:lnRef>
+          <a:fillRef idx="3">
+            <a:schemeClr val="accent1"/>
+          </a:fillRef>
+          <a:effectRef idx="2">
+            <a:schemeClr val="accent1"/>
+          </a:effectRef>
+          <a:fontRef idx="minor">
+            <a:schemeClr val="lt1"/>
+          </a:fontRef>
+        </p:style>
+        <p:txBody>
+          <a:bodyPr rtlCol="0" anchor="ctr"/>
+          <a:lstStyle/>
+          <a:p>
+            <a:pPr algn="ctr"/>
+          </a:p>
+        </p:txBody>
+      </p:sp>
+      <p:sp>
+        <p:nvSpPr>
+          <p:cNvPr id="4" name="TextBox 3"/>
+          <p:cNvSpPr txBox="1"/>
+          <p:nvPr/>
+        </p:nvSpPr>
+        <p:spPr>
+          <a:xfrm>
+            <a:off x="566928" y="2011680"/>
+            <a:ext cx="3472586" cy="1828800"/>
+          </a:xfrm>
+          <a:prstGeom prst="rect">
+            <a:avLst/>
+          </a:prstGeom>
+          <a:noFill/>
+        </p:spPr>
+        <p:txBody>
+          <a:bodyPr wrap="square" lIns="0" rIns="0" tIns="0" bIns="0">
+            <a:spAutoFit/>
+          </a:bodyPr>
+          <a:lstStyle/>
+          <a:p>
+            <a:pPr>
+              <a:spcBef>
+                <a:spcPts val="0"/>
+              </a:spcBef>
+              <a:spcAft>
+                <a:spcPts val="700"/>
+              </a:spcAft>
+            </a:pPr>
+            <a:r>
+              <a:rPr sz="1050" b="0" i="0">
+                <a:solidFill>
+                  <a:srgbClr val="17549E"/>
+                </a:solidFill>
+                <a:latin typeface="Consolas"/>
+              </a:rPr>
+              <a:t>FRAMING</a:t>
             </a:r>
           </a:p>
           <a:p>
             <a:pPr>
               <a:lnSpc>
-                <a:spcPct val="135000"/>
+                <a:spcPct val="130000"/>
               </a:lnSpc>
               <a:spcBef>
                 <a:spcPts val="0"/>
@@ -10304,13 +10241,445 @@
               </a:spcAft>
             </a:pPr>
             <a:r>
-              <a:rPr sz="1400" b="0" i="0">
-                <a:solidFill>
-                  <a:srgbClr val="9AA4B0"/>
+              <a:rPr sz="1100" b="0" i="0">
+                <a:solidFill>
+                  <a:srgbClr val="5A6068"/>
                 </a:solidFill>
                 <a:latin typeface="Calibri"/>
               </a:rPr>
-              <a:t>Everything the four acts rest on but do not carry. In submission these become supplementary material.</a:t>
+              <a:t>Lead with the education exception and use the generalised collapse as Act I backdrop — recommended — or lead with the robustness result and treat education as the coda. This decides title, abstract, and venue.</a:t>
+            </a:r>
+          </a:p>
+        </p:txBody>
+      </p:sp>
+      <p:sp>
+        <p:nvSpPr>
+          <p:cNvPr id="5" name="Rectangle 4"/>
+          <p:cNvSpPr/>
+          <p:nvPr/>
+        </p:nvSpPr>
+        <p:spPr>
+          <a:xfrm>
+            <a:off x="4359554" y="1828800"/>
+            <a:ext cx="3472586" cy="25400"/>
+          </a:xfrm>
+          <a:prstGeom prst="rect">
+            <a:avLst/>
+          </a:prstGeom>
+          <a:solidFill>
+            <a:srgbClr val="17549E"/>
+          </a:solidFill>
+          <a:ln>
+            <a:noFill/>
+          </a:ln>
+          <a:effectLst/>
+        </p:spPr>
+        <p:style>
+          <a:lnRef idx="1">
+            <a:schemeClr val="accent1"/>
+          </a:lnRef>
+          <a:fillRef idx="3">
+            <a:schemeClr val="accent1"/>
+          </a:fillRef>
+          <a:effectRef idx="2">
+            <a:schemeClr val="accent1"/>
+          </a:effectRef>
+          <a:fontRef idx="minor">
+            <a:schemeClr val="lt1"/>
+          </a:fontRef>
+        </p:style>
+        <p:txBody>
+          <a:bodyPr rtlCol="0" anchor="ctr"/>
+          <a:lstStyle/>
+          <a:p>
+            <a:pPr algn="ctr"/>
+          </a:p>
+        </p:txBody>
+      </p:sp>
+      <p:sp>
+        <p:nvSpPr>
+          <p:cNvPr id="6" name="TextBox 5"/>
+          <p:cNvSpPr txBox="1"/>
+          <p:nvPr/>
+        </p:nvSpPr>
+        <p:spPr>
+          <a:xfrm>
+            <a:off x="4359554" y="2011680"/>
+            <a:ext cx="3472586" cy="1828800"/>
+          </a:xfrm>
+          <a:prstGeom prst="rect">
+            <a:avLst/>
+          </a:prstGeom>
+          <a:noFill/>
+        </p:spPr>
+        <p:txBody>
+          <a:bodyPr wrap="square" lIns="0" rIns="0" tIns="0" bIns="0">
+            <a:spAutoFit/>
+          </a:bodyPr>
+          <a:lstStyle/>
+          <a:p>
+            <a:pPr>
+              <a:spcBef>
+                <a:spcPts val="0"/>
+              </a:spcBef>
+              <a:spcAft>
+                <a:spcPts val="700"/>
+              </a:spcAft>
+            </a:pPr>
+            <a:r>
+              <a:rPr sz="1050" b="0" i="0">
+                <a:solidFill>
+                  <a:srgbClr val="17549E"/>
+                </a:solidFill>
+                <a:latin typeface="Consolas"/>
+              </a:rPr>
+              <a:t>DISPLAY ITEMS</a:t>
+            </a:r>
+          </a:p>
+          <a:p>
+            <a:pPr>
+              <a:lnSpc>
+                <a:spcPct val="130000"/>
+              </a:lnSpc>
+              <a:spcBef>
+                <a:spcPts val="0"/>
+              </a:spcBef>
+              <a:spcAft>
+                <a:spcPts val="0"/>
+              </a:spcAft>
+            </a:pPr>
+            <a:r>
+              <a:rPr sz="1100" b="0" i="0">
+                <a:solidFill>
+                  <a:srgbClr val="5A6068"/>
+                </a:solidFill>
+                <a:latin typeface="Calibri"/>
+              </a:rPr>
+              <a:t>Commentaries allow one or two. Proposed: the three-panel composite as Figure 1, the ranking flip as Figure 2. Everything else moves to supplementary.</a:t>
+            </a:r>
+          </a:p>
+        </p:txBody>
+      </p:sp>
+      <p:sp>
+        <p:nvSpPr>
+          <p:cNvPr id="7" name="Rectangle 6"/>
+          <p:cNvSpPr/>
+          <p:nvPr/>
+        </p:nvSpPr>
+        <p:spPr>
+          <a:xfrm>
+            <a:off x="8152180" y="1828800"/>
+            <a:ext cx="3472586" cy="25400"/>
+          </a:xfrm>
+          <a:prstGeom prst="rect">
+            <a:avLst/>
+          </a:prstGeom>
+          <a:solidFill>
+            <a:srgbClr val="17549E"/>
+          </a:solidFill>
+          <a:ln>
+            <a:noFill/>
+          </a:ln>
+          <a:effectLst/>
+        </p:spPr>
+        <p:style>
+          <a:lnRef idx="1">
+            <a:schemeClr val="accent1"/>
+          </a:lnRef>
+          <a:fillRef idx="3">
+            <a:schemeClr val="accent1"/>
+          </a:fillRef>
+          <a:effectRef idx="2">
+            <a:schemeClr val="accent1"/>
+          </a:effectRef>
+          <a:fontRef idx="minor">
+            <a:schemeClr val="lt1"/>
+          </a:fontRef>
+        </p:style>
+        <p:txBody>
+          <a:bodyPr rtlCol="0" anchor="ctr"/>
+          <a:lstStyle/>
+          <a:p>
+            <a:pPr algn="ctr"/>
+          </a:p>
+        </p:txBody>
+      </p:sp>
+      <p:sp>
+        <p:nvSpPr>
+          <p:cNvPr id="8" name="TextBox 7"/>
+          <p:cNvSpPr txBox="1"/>
+          <p:nvPr/>
+        </p:nvSpPr>
+        <p:spPr>
+          <a:xfrm>
+            <a:off x="8152180" y="2011680"/>
+            <a:ext cx="3472586" cy="1828800"/>
+          </a:xfrm>
+          <a:prstGeom prst="rect">
+            <a:avLst/>
+          </a:prstGeom>
+          <a:noFill/>
+        </p:spPr>
+        <p:txBody>
+          <a:bodyPr wrap="square" lIns="0" rIns="0" tIns="0" bIns="0">
+            <a:spAutoFit/>
+          </a:bodyPr>
+          <a:lstStyle/>
+          <a:p>
+            <a:pPr>
+              <a:spcBef>
+                <a:spcPts val="0"/>
+              </a:spcBef>
+              <a:spcAft>
+                <a:spcPts val="700"/>
+              </a:spcAft>
+            </a:pPr>
+            <a:r>
+              <a:rPr sz="1050" b="0" i="0">
+                <a:solidFill>
+                  <a:srgbClr val="17549E"/>
+                </a:solidFill>
+                <a:latin typeface="Consolas"/>
+              </a:rPr>
+              <a:t>SCOPE OF ACT III</a:t>
+            </a:r>
+          </a:p>
+          <a:p>
+            <a:pPr>
+              <a:lnSpc>
+                <a:spcPct val="130000"/>
+              </a:lnSpc>
+              <a:spcBef>
+                <a:spcPts val="0"/>
+              </a:spcBef>
+              <a:spcAft>
+                <a:spcPts val="0"/>
+              </a:spcAft>
+            </a:pPr>
+            <a:r>
+              <a:rPr sz="1100" b="0" i="0">
+                <a:solidFill>
+                  <a:srgbClr val="5A6068"/>
+                </a:solidFill>
+                <a:latin typeface="Calibri"/>
+              </a:rPr>
+              <a:t>Does the within-country material belong in this commentary or in a third paper? It is the most policy-relevant and the most contested, and it is Europe-only.</a:t>
+            </a:r>
+          </a:p>
+        </p:txBody>
+      </p:sp>
+      <p:sp>
+        <p:nvSpPr>
+          <p:cNvPr id="9" name="Rectangle 8"/>
+          <p:cNvSpPr/>
+          <p:nvPr/>
+        </p:nvSpPr>
+        <p:spPr>
+          <a:xfrm>
+            <a:off x="566928" y="4069080"/>
+            <a:ext cx="3472586" cy="25400"/>
+          </a:xfrm>
+          <a:prstGeom prst="rect">
+            <a:avLst/>
+          </a:prstGeom>
+          <a:solidFill>
+            <a:srgbClr val="17549E"/>
+          </a:solidFill>
+          <a:ln>
+            <a:noFill/>
+          </a:ln>
+          <a:effectLst/>
+        </p:spPr>
+        <p:style>
+          <a:lnRef idx="1">
+            <a:schemeClr val="accent1"/>
+          </a:lnRef>
+          <a:fillRef idx="3">
+            <a:schemeClr val="accent1"/>
+          </a:fillRef>
+          <a:effectRef idx="2">
+            <a:schemeClr val="accent1"/>
+          </a:effectRef>
+          <a:fontRef idx="minor">
+            <a:schemeClr val="lt1"/>
+          </a:fontRef>
+        </p:style>
+        <p:txBody>
+          <a:bodyPr rtlCol="0" anchor="ctr"/>
+          <a:lstStyle/>
+          <a:p>
+            <a:pPr algn="ctr"/>
+          </a:p>
+        </p:txBody>
+      </p:sp>
+      <p:sp>
+        <p:nvSpPr>
+          <p:cNvPr id="10" name="TextBox 9"/>
+          <p:cNvSpPr txBox="1"/>
+          <p:nvPr/>
+        </p:nvSpPr>
+        <p:spPr>
+          <a:xfrm>
+            <a:off x="566928" y="4251960"/>
+            <a:ext cx="3472586" cy="1828800"/>
+          </a:xfrm>
+          <a:prstGeom prst="rect">
+            <a:avLst/>
+          </a:prstGeom>
+          <a:noFill/>
+        </p:spPr>
+        <p:txBody>
+          <a:bodyPr wrap="square" lIns="0" rIns="0" tIns="0" bIns="0">
+            <a:spAutoFit/>
+          </a:bodyPr>
+          <a:lstStyle/>
+          <a:p>
+            <a:pPr>
+              <a:spcBef>
+                <a:spcPts val="0"/>
+              </a:spcBef>
+              <a:spcAft>
+                <a:spcPts val="700"/>
+              </a:spcAft>
+            </a:pPr>
+            <a:r>
+              <a:rPr sz="1050" b="0" i="0">
+                <a:solidFill>
+                  <a:srgbClr val="17549E"/>
+                </a:solidFill>
+                <a:latin typeface="Consolas"/>
+              </a:rPr>
+              <a:t>DATA INVESTMENT</a:t>
+            </a:r>
+          </a:p>
+          <a:p>
+            <a:pPr>
+              <a:lnSpc>
+                <a:spcPct val="130000"/>
+              </a:lnSpc>
+              <a:spcBef>
+                <a:spcPts val="0"/>
+              </a:spcBef>
+              <a:spcAft>
+                <a:spcPts val="0"/>
+              </a:spcAft>
+            </a:pPr>
+            <a:r>
+              <a:rPr sz="1100" b="0" i="0">
+                <a:solidFill>
+                  <a:srgbClr val="5A6068"/>
+                </a:solidFill>
+                <a:latin typeface="Calibri"/>
+              </a:rPr>
+              <a:t>The Global Data Lab's separate Education &amp; Work dataset carries 43 subnational schooling indicators by cohort and sex. Pulling it would let us test the education finding subnationally. Before submission or after review?</a:t>
+            </a:r>
+          </a:p>
+        </p:txBody>
+      </p:sp>
+      <p:sp>
+        <p:nvSpPr>
+          <p:cNvPr id="11" name="Rectangle 10"/>
+          <p:cNvSpPr/>
+          <p:nvPr/>
+        </p:nvSpPr>
+        <p:spPr>
+          <a:xfrm>
+            <a:off x="4359554" y="4069080"/>
+            <a:ext cx="3472586" cy="25400"/>
+          </a:xfrm>
+          <a:prstGeom prst="rect">
+            <a:avLst/>
+          </a:prstGeom>
+          <a:solidFill>
+            <a:srgbClr val="17549E"/>
+          </a:solidFill>
+          <a:ln>
+            <a:noFill/>
+          </a:ln>
+          <a:effectLst/>
+        </p:spPr>
+        <p:style>
+          <a:lnRef idx="1">
+            <a:schemeClr val="accent1"/>
+          </a:lnRef>
+          <a:fillRef idx="3">
+            <a:schemeClr val="accent1"/>
+          </a:fillRef>
+          <a:effectRef idx="2">
+            <a:schemeClr val="accent1"/>
+          </a:effectRef>
+          <a:fontRef idx="minor">
+            <a:schemeClr val="lt1"/>
+          </a:fontRef>
+        </p:style>
+        <p:txBody>
+          <a:bodyPr rtlCol="0" anchor="ctr"/>
+          <a:lstStyle/>
+          <a:p>
+            <a:pPr algn="ctr"/>
+          </a:p>
+        </p:txBody>
+      </p:sp>
+      <p:sp>
+        <p:nvSpPr>
+          <p:cNvPr id="12" name="TextBox 11"/>
+          <p:cNvSpPr txBox="1"/>
+          <p:nvPr/>
+        </p:nvSpPr>
+        <p:spPr>
+          <a:xfrm>
+            <a:off x="4359554" y="4251960"/>
+            <a:ext cx="3472586" cy="1828800"/>
+          </a:xfrm>
+          <a:prstGeom prst="rect">
+            <a:avLst/>
+          </a:prstGeom>
+          <a:noFill/>
+        </p:spPr>
+        <p:txBody>
+          <a:bodyPr wrap="square" lIns="0" rIns="0" tIns="0" bIns="0">
+            <a:spAutoFit/>
+          </a:bodyPr>
+          <a:lstStyle/>
+          <a:p>
+            <a:pPr>
+              <a:spcBef>
+                <a:spcPts val="0"/>
+              </a:spcBef>
+              <a:spcAft>
+                <a:spcPts val="700"/>
+              </a:spcAft>
+            </a:pPr>
+            <a:r>
+              <a:rPr sz="1050" b="0" i="0">
+                <a:solidFill>
+                  <a:srgbClr val="17549E"/>
+                </a:solidFill>
+                <a:latin typeface="Consolas"/>
+              </a:rPr>
+              <a:t>METHODS NOTE</a:t>
+            </a:r>
+          </a:p>
+          <a:p>
+            <a:pPr>
+              <a:lnSpc>
+                <a:spcPct val="130000"/>
+              </a:lnSpc>
+              <a:spcBef>
+                <a:spcPts val="0"/>
+              </a:spcBef>
+              <a:spcAft>
+                <a:spcPts val="0"/>
+              </a:spcAft>
+            </a:pPr>
+            <a:r>
+              <a:rPr sz="1100" b="0" i="0">
+                <a:solidFill>
+                  <a:srgbClr val="5A6068"/>
+                </a:solidFill>
+                <a:latin typeface="Calibri"/>
+              </a:rPr>
+              <a:t>Pooled R² and significant-country share tell different stories at several points. Proposal: report both throughout and discuss the divergence explicitly as a secondary contribution.</a:t>
             </a:r>
           </a:p>
         </p:txBody>
@@ -10329,7 +10698,7 @@
     <p:bg>
       <p:bgPr>
         <a:solidFill>
-          <a:srgbClr val="FCFCFB"/>
+          <a:srgbClr val="14171C"/>
         </a:solidFill>
         <a:effectLst/>
       </p:bgPr>
@@ -10349,107 +10718,42 @@
         </p:nvSpPr>
         <p:spPr>
           <a:xfrm>
-            <a:off x="566928" y="411480"/>
-            <a:ext cx="10515600" cy="320040"/>
-          </a:xfrm>
-          <a:prstGeom prst="rect">
-            <a:avLst/>
-          </a:prstGeom>
-          <a:noFill/>
-        </p:spPr>
-        <p:txBody>
-          <a:bodyPr wrap="square" lIns="0" rIns="0" tIns="0" bIns="0">
-            <a:spAutoFit/>
-          </a:bodyPr>
-          <a:lstStyle/>
-          <a:p>
-            <a:pPr>
-              <a:spcBef>
-                <a:spcPts val="0"/>
-              </a:spcBef>
-              <a:spcAft>
-                <a:spcPts val="0"/>
-              </a:spcAft>
-            </a:pPr>
-            <a:r>
-              <a:rPr sz="1000" b="0" i="0">
-                <a:solidFill>
-                  <a:srgbClr val="868D96"/>
-                </a:solidFill>
-                <a:latin typeface="Consolas"/>
-              </a:rPr>
-              <a:t>APPENDIX</a:t>
-            </a:r>
-          </a:p>
-        </p:txBody>
-      </p:sp>
-      <p:sp>
-        <p:nvSpPr>
-          <p:cNvPr id="3" name="TextBox 2"/>
-          <p:cNvSpPr txBox="1"/>
-          <p:nvPr/>
-        </p:nvSpPr>
-        <p:spPr>
-          <a:xfrm>
-            <a:off x="566928" y="749808"/>
-            <a:ext cx="10515600" cy="457200"/>
-          </a:xfrm>
-          <a:prstGeom prst="rect">
-            <a:avLst/>
-          </a:prstGeom>
-          <a:noFill/>
-        </p:spPr>
-        <p:txBody>
-          <a:bodyPr wrap="square" lIns="0" rIns="0" tIns="0" bIns="0">
-            <a:spAutoFit/>
-          </a:bodyPr>
-          <a:lstStyle/>
-          <a:p>
-            <a:pPr>
-              <a:spcBef>
-                <a:spcPts val="0"/>
-              </a:spcBef>
-              <a:spcAft>
-                <a:spcPts val="0"/>
-              </a:spcAft>
-            </a:pPr>
-            <a:r>
-              <a:rPr sz="2000" b="0" i="0">
-                <a:solidFill>
-                  <a:srgbClr val="14171C"/>
+            <a:off x="566928" y="2743200"/>
+            <a:ext cx="8229600" cy="1371600"/>
+          </a:xfrm>
+          <a:prstGeom prst="rect">
+            <a:avLst/>
+          </a:prstGeom>
+          <a:noFill/>
+        </p:spPr>
+        <p:txBody>
+          <a:bodyPr wrap="square" lIns="0" rIns="0" tIns="0" bIns="0">
+            <a:spAutoFit/>
+          </a:bodyPr>
+          <a:lstStyle/>
+          <a:p>
+            <a:pPr>
+              <a:spcBef>
+                <a:spcPts val="0"/>
+              </a:spcBef>
+              <a:spcAft>
+                <a:spcPts val="1000"/>
+              </a:spcAft>
+            </a:pPr>
+            <a:r>
+              <a:rPr sz="4000" b="0" i="0">
+                <a:solidFill>
+                  <a:srgbClr val="FCFCFB"/>
                 </a:solidFill>
                 <a:latin typeface="Georgia"/>
               </a:rPr>
-              <a:t>SDG significance by goal, pooled</a:t>
-            </a:r>
-          </a:p>
-        </p:txBody>
-      </p:sp>
-      <p:sp>
-        <p:nvSpPr>
-          <p:cNvPr id="4" name="TextBox 3"/>
-          <p:cNvSpPr txBox="1"/>
-          <p:nvPr/>
-        </p:nvSpPr>
-        <p:spPr>
-          <a:xfrm>
-            <a:off x="566928" y="1207008"/>
-            <a:ext cx="10515600" cy="457200"/>
-          </a:xfrm>
-          <a:prstGeom prst="rect">
-            <a:avLst/>
-          </a:prstGeom>
-          <a:noFill/>
-        </p:spPr>
-        <p:txBody>
-          <a:bodyPr wrap="square" lIns="0" rIns="0" tIns="0" bIns="0">
-            <a:spAutoFit/>
-          </a:bodyPr>
-          <a:lstStyle/>
+              <a:t>Evidence appendix</a:t>
+            </a:r>
+          </a:p>
           <a:p>
             <a:pPr>
               <a:lnSpc>
-                <a:spcPct val="128000"/>
+                <a:spcPct val="135000"/>
               </a:lnSpc>
               <a:spcBef>
                 <a:spcPts val="0"/>
@@ -10459,41 +10763,17 @@
               </a:spcAft>
             </a:pPr>
             <a:r>
-              <a:rPr sz="1100" b="0" i="0">
-                <a:solidFill>
-                  <a:srgbClr val="5A6068"/>
+              <a:rPr sz="1400" b="0" i="0">
+                <a:solidFill>
+                  <a:srgbClr val="9AA4B0"/>
                 </a:solidFill>
                 <a:latin typeface="Calibri"/>
               </a:rPr>
-              <a:t>The leading goal (Energy, 16.0%) clears FDR significance in barely one country-test in six; pooled Education ranks 12th of 17.</a:t>
-            </a:r>
-          </a:p>
-        </p:txBody>
-      </p:sp>
-      <p:pic>
-        <p:nvPicPr>
-          <p:cNvPr id="5" name="Picture 4" descr="sdg_by_goal.png"/>
-          <p:cNvPicPr>
-            <a:picLocks noChangeAspect="1"/>
-          </p:cNvPicPr>
-          <p:nvPr/>
-        </p:nvPicPr>
-        <p:blipFill>
-          <a:blip r:embed="rId2"/>
-          <a:stretch>
-            <a:fillRect/>
-          </a:stretch>
-        </p:blipFill>
-        <p:spPr>
-          <a:xfrm>
-            <a:off x="2504357" y="1965960"/>
-            <a:ext cx="7182980" cy="4480560"/>
-          </a:xfrm>
-          <a:prstGeom prst="rect">
-            <a:avLst/>
-          </a:prstGeom>
-        </p:spPr>
-      </p:pic>
+              <a:t>Everything the four acts rest on but do not carry. In submission these become supplementary material.</a:t>
+            </a:r>
+          </a:p>
+        </p:txBody>
+      </p:sp>
     </p:spTree>
   </p:cSld>
   <p:clrMapOvr>
@@ -10599,7 +10879,7 @@
                 </a:solidFill>
                 <a:latin typeface="Georgia"/>
               </a:rPr>
-              <a:t>Subnational HDI validated against the UNDP HDI</a:t>
+              <a:t>SDG significance by goal, pooled</a:t>
             </a:r>
           </a:p>
         </p:txBody>
@@ -10644,14 +10924,14 @@
                 </a:solidFill>
                 <a:latin typeface="Calibri"/>
               </a:rPr>
-              <a:t>National aggregates agree closely, which is what licenses the region-level analysis.</a:t>
+              <a:t>The leading goal (Energy, 16.0%) clears FDR significance in barely one country-test in six; pooled Education ranks 12th of 17.</a:t>
             </a:r>
           </a:p>
         </p:txBody>
       </p:sp>
       <p:pic>
         <p:nvPicPr>
-          <p:cNvPr id="5" name="Picture 4" descr="shdi_vs_hdi_validation.png"/>
+          <p:cNvPr id="5" name="Picture 4" descr="sdg_by_goal.png"/>
           <p:cNvPicPr>
             <a:picLocks noChangeAspect="1"/>
           </p:cNvPicPr>
@@ -10665,8 +10945,8 @@
         </p:blipFill>
         <p:spPr>
           <a:xfrm>
-            <a:off x="4036999" y="1965960"/>
-            <a:ext cx="4117697" cy="4480560"/>
+            <a:off x="2504357" y="1965960"/>
+            <a:ext cx="7182980" cy="4480560"/>
           </a:xfrm>
           <a:prstGeom prst="rect">
             <a:avLst/>
@@ -10778,7 +11058,7 @@
                 </a:solidFill>
                 <a:latin typeface="Georgia"/>
               </a:rPr>
-              <a:t>Subnational HDI against WHR happiness, levels</a:t>
+              <a:t>Subnational HDI validated against the UNDP HDI</a:t>
             </a:r>
           </a:p>
         </p:txBody>
@@ -10823,14 +11103,14 @@
                 </a:solidFill>
                 <a:latin typeface="Calibri"/>
               </a:rPr>
-              <a:t>The familiar development-tier gradient with SHDI in place of HDI.</a:t>
+              <a:t>National aggregates agree closely, which is what licenses the region-level analysis.</a:t>
             </a:r>
           </a:p>
         </p:txBody>
       </p:sp>
       <p:pic>
         <p:nvPicPr>
-          <p:cNvPr id="5" name="Picture 4" descr="shdi_whr_levels_scatter.png"/>
+          <p:cNvPr id="5" name="Picture 4" descr="shdi_vs_hdi_validation.png"/>
           <p:cNvPicPr>
             <a:picLocks noChangeAspect="1"/>
           </p:cNvPicPr>
@@ -10844,8 +11124,8 @@
         </p:blipFill>
         <p:spPr>
           <a:xfrm>
-            <a:off x="3508482" y="1965960"/>
-            <a:ext cx="5174731" cy="4480560"/>
+            <a:off x="4036999" y="1965960"/>
+            <a:ext cx="4117697" cy="4480560"/>
           </a:xfrm>
           <a:prstGeom prst="rect">
             <a:avLst/>
@@ -10957,7 +11237,7 @@
                 </a:solidFill>
                 <a:latin typeface="Georgia"/>
               </a:rPr>
-              <a:t>ESS coverage by country and year</a:t>
+              <a:t>Subnational HDI against WHR happiness, levels</a:t>
             </a:r>
           </a:p>
         </p:txBody>
@@ -11002,14 +11282,14 @@
                 </a:solidFill>
                 <a:latin typeface="Calibri"/>
               </a:rPr>
-              <a:t>A rotating panel: 36 countries, roughly biennial from 2010 to 2023, with 17 countries present in all seven waves. This is the power constraint behind every ESS significance test.</a:t>
+              <a:t>The familiar development-tier gradient with SHDI in place of HDI.</a:t>
             </a:r>
           </a:p>
         </p:txBody>
       </p:sp>
       <p:pic>
         <p:nvPicPr>
-          <p:cNvPr id="5" name="Picture 4" descr="ess_year_coverage.png"/>
+          <p:cNvPr id="5" name="Picture 4" descr="shdi_whr_levels_scatter.png"/>
           <p:cNvPicPr>
             <a:picLocks noChangeAspect="1"/>
           </p:cNvPicPr>
@@ -11023,8 +11303,8 @@
         </p:blipFill>
         <p:spPr>
           <a:xfrm>
-            <a:off x="4247956" y="1965960"/>
-            <a:ext cx="3695783" cy="4480560"/>
+            <a:off x="3508482" y="1965960"/>
+            <a:ext cx="5174731" cy="4480560"/>
           </a:xfrm>
           <a:prstGeom prst="rect">
             <a:avLst/>
@@ -11136,7 +11416,7 @@
                 </a:solidFill>
                 <a:latin typeface="Georgia"/>
               </a:rPr>
-              <a:t>ESS-to-SHDI region crosswalk</a:t>
+              <a:t>ESS coverage by country and year</a:t>
             </a:r>
           </a:p>
         </p:txBody>
@@ -11181,14 +11461,14 @@
                 </a:solidFill>
                 <a:latin typeface="Calibri"/>
               </a:rPr>
-              <a:t>62% of respondents, across 24 of 36 countries, matched to a subnational SHDI value through the NUTS-to-GDL crosswalk.</a:t>
+              <a:t>A rotating panel: 36 countries, roughly biennial from 2010 to 2023, with 17 countries present in all seven waves. This is the power constraint behind every ESS significance test.</a:t>
             </a:r>
           </a:p>
         </p:txBody>
       </p:sp>
       <p:pic>
         <p:nvPicPr>
-          <p:cNvPr id="5" name="Picture 4" descr="region_crosswalk_match.png"/>
+          <p:cNvPr id="5" name="Picture 4" descr="ess_year_coverage.png"/>
           <p:cNvPicPr>
             <a:picLocks noChangeAspect="1"/>
           </p:cNvPicPr>
@@ -11202,8 +11482,8 @@
         </p:blipFill>
         <p:spPr>
           <a:xfrm>
-            <a:off x="2428154" y="1965960"/>
-            <a:ext cx="7335386" cy="4480560"/>
+            <a:off x="4247956" y="1965960"/>
+            <a:ext cx="3695783" cy="4480560"/>
           </a:xfrm>
           <a:prstGeom prst="rect">
             <a:avLst/>
@@ -11315,7 +11595,7 @@
                 </a:solidFill>
                 <a:latin typeface="Georgia"/>
               </a:rPr>
-              <a:t>Country × indicator significance, ESS</a:t>
+              <a:t>ESS-to-SHDI region crosswalk</a:t>
             </a:r>
           </a:p>
         </p:txBody>
@@ -11360,14 +11640,14 @@
                 </a:solidFill>
                 <a:latin typeface="Calibri"/>
               </a:rPr>
-              <a:t>15% of levels cells and 9% of differences cells FDR-significant; direction consistent with the WHR results, power much lower.</a:t>
+              <a:t>62% of respondents, across 24 of 36 countries, matched to a subnational SHDI value through the NUTS-to-GDL crosswalk.</a:t>
             </a:r>
           </a:p>
         </p:txBody>
       </p:sp>
       <p:pic>
         <p:nvPicPr>
-          <p:cNvPr id="5" name="Picture 4" descr="hdi_ess_heatmap.png"/>
+          <p:cNvPr id="5" name="Picture 4" descr="region_crosswalk_match.png"/>
           <p:cNvPicPr>
             <a:picLocks noChangeAspect="1"/>
           </p:cNvPicPr>
@@ -11381,8 +11661,8 @@
         </p:blipFill>
         <p:spPr>
           <a:xfrm>
-            <a:off x="3601923" y="1965960"/>
-            <a:ext cx="4987848" cy="4480560"/>
+            <a:off x="2428154" y="1965960"/>
+            <a:ext cx="7335386" cy="4480560"/>
           </a:xfrm>
           <a:prstGeom prst="rect">
             <a:avLst/>
@@ -11494,7 +11774,7 @@
                 </a:solidFill>
                 <a:latin typeface="Georgia"/>
               </a:rPr>
-              <a:t>Per-country collapse, ESS</a:t>
+              <a:t>Country × indicator significance, ESS</a:t>
             </a:r>
           </a:p>
         </p:txBody>
@@ -11539,14 +11819,14 @@
                 </a:solidFill>
                 <a:latin typeface="Calibri"/>
               </a:rPr>
-              <a:t>More above-the-line exceptions than the WHR analysis shows — sparse waves cut both ways.</a:t>
+              <a:t>15% of levels cells and 9% of differences cells FDR-significant; direction consistent with the WHR results, power much lower.</a:t>
             </a:r>
           </a:p>
         </p:txBody>
       </p:sp>
       <p:pic>
         <p:nvPicPr>
-          <p:cNvPr id="5" name="Picture 4" descr="hdi_ess_collapse_scatter.png"/>
+          <p:cNvPr id="5" name="Picture 4" descr="hdi_ess_heatmap.png"/>
           <p:cNvPicPr>
             <a:picLocks noChangeAspect="1"/>
           </p:cNvPicPr>
@@ -11560,8 +11840,8 @@
         </p:blipFill>
         <p:spPr>
           <a:xfrm>
-            <a:off x="2057001" y="1965960"/>
-            <a:ext cx="8077693" cy="4480560"/>
+            <a:off x="3601923" y="1965960"/>
+            <a:ext cx="4987848" cy="4480560"/>
           </a:xfrm>
           <a:prstGeom prst="rect">
             <a:avLst/>
@@ -11673,7 +11953,7 @@
                 </a:solidFill>
                 <a:latin typeface="Georgia"/>
               </a:rPr>
-              <a:t>HDI progress against life-satisfaction trends, 2010–2023</a:t>
+              <a:t>Per-country collapse, ESS</a:t>
             </a:r>
           </a:p>
         </p:txBody>
@@ -11718,14 +11998,14 @@
                 </a:solidFill>
                 <a:latin typeface="Calibri"/>
               </a:rPr>
-              <a:t>HDI rose nearly everywhere. ESS life satisfaction rose in 19 countries and fell in 8.</a:t>
+              <a:t>More above-the-line exceptions than the WHR analysis shows — sparse waves cut both ways.</a:t>
             </a:r>
           </a:p>
         </p:txBody>
       </p:sp>
       <p:pic>
         <p:nvPicPr>
-          <p:cNvPr id="5" name="Picture 4" descr="hdi_vs_lifesat_trends.png"/>
+          <p:cNvPr id="5" name="Picture 4" descr="hdi_ess_collapse_scatter.png"/>
           <p:cNvPicPr>
             <a:picLocks noChangeAspect="1"/>
           </p:cNvPicPr>
@@ -11739,8 +12019,8 @@
         </p:blipFill>
         <p:spPr>
           <a:xfrm>
-            <a:off x="4009215" y="1965960"/>
-            <a:ext cx="4173264" cy="4480560"/>
+            <a:off x="2057001" y="1965960"/>
+            <a:ext cx="8077693" cy="4480560"/>
           </a:xfrm>
           <a:prstGeom prst="rect">
             <a:avLst/>
@@ -11852,7 +12132,7 @@
                 </a:solidFill>
                 <a:latin typeface="Georgia"/>
               </a:rPr>
-              <a:t>Region-level SHDI against life satisfaction, pooled</a:t>
+              <a:t>HDI progress against life-satisfaction trends, 2010–2023</a:t>
             </a:r>
           </a:p>
         </p:txBody>
@@ -11897,14 +12177,14 @@
                 </a:solidFill>
                 <a:latin typeface="Calibri"/>
               </a:rPr>
-              <a:t>1,313 region-years, pooled R² = 0.32 — this mixes between- and within-country variation, which the within-country panels separate.</a:t>
+              <a:t>HDI rose nearly everywhere. ESS life satisfaction rose in 19 countries and fell in 8.</a:t>
             </a:r>
           </a:p>
         </p:txBody>
       </p:sp>
       <p:pic>
         <p:nvPicPr>
-          <p:cNvPr id="5" name="Picture 4" descr="region_shdi_lifesat_pooled.png"/>
+          <p:cNvPr id="5" name="Picture 4" descr="hdi_vs_lifesat_trends.png"/>
           <p:cNvPicPr>
             <a:picLocks noChangeAspect="1"/>
           </p:cNvPicPr>
@@ -11918,8 +12198,8 @@
         </p:blipFill>
         <p:spPr>
           <a:xfrm>
-            <a:off x="3123927" y="1965960"/>
-            <a:ext cx="5943841" cy="4480560"/>
+            <a:off x="4009215" y="1965960"/>
+            <a:ext cx="4173264" cy="4480560"/>
           </a:xfrm>
           <a:prstGeom prst="rect">
             <a:avLst/>
@@ -12322,7 +12602,7 @@
                 </a:solidFill>
                 <a:latin typeface="Georgia"/>
               </a:rPr>
-              <a:t>Within-country regional gradients, small multiples</a:t>
+              <a:t>Region-level SHDI against life satisfaction, pooled</a:t>
             </a:r>
           </a:p>
         </p:txBody>
@@ -12367,14 +12647,14 @@
                 </a:solidFill>
                 <a:latin typeface="Calibri"/>
               </a:rPr>
-              <a:t>Holding country fixed, the regional development–wellbeing gradient is weak in most countries. France is the clearest exception.</a:t>
+              <a:t>1,313 region-years, pooled R² = 0.32 — this mixes between- and within-country variation, which the within-country panels separate.</a:t>
             </a:r>
           </a:p>
         </p:txBody>
       </p:sp>
       <p:pic>
         <p:nvPicPr>
-          <p:cNvPr id="5" name="Picture 4" descr="within_country_small_multiples.png"/>
+          <p:cNvPr id="5" name="Picture 4" descr="region_shdi_lifesat_pooled.png"/>
           <p:cNvPicPr>
             <a:picLocks noChangeAspect="1"/>
           </p:cNvPicPr>
@@ -12388,8 +12668,8 @@
         </p:blipFill>
         <p:spPr>
           <a:xfrm>
-            <a:off x="2779954" y="1965960"/>
-            <a:ext cx="6631787" cy="4480560"/>
+            <a:off x="3123927" y="1965960"/>
+            <a:ext cx="5943841" cy="4480560"/>
           </a:xfrm>
           <a:prstGeom prst="rect">
             <a:avLst/>
@@ -12501,7 +12781,7 @@
                 </a:solidFill>
                 <a:latin typeface="Georgia"/>
               </a:rPr>
-              <a:t>Regional SHDI spread within ESS countries</a:t>
+              <a:t>Within-country regional gradients, small multiples</a:t>
             </a:r>
           </a:p>
         </p:txBody>
@@ -12546,14 +12826,14 @@
                 </a:solidFill>
                 <a:latin typeface="Calibri"/>
               </a:rPr>
-              <a:t>Italy and Poland carry several times the internal development inequality of Germany or the Nordics.</a:t>
+              <a:t>Holding country fixed, the regional development–wellbeing gradient is weak in most countries. France is the clearest exception.</a:t>
             </a:r>
           </a:p>
         </p:txBody>
       </p:sp>
       <p:pic>
         <p:nvPicPr>
-          <p:cNvPr id="5" name="Picture 4" descr="european_regional_inequality.png"/>
+          <p:cNvPr id="5" name="Picture 4" descr="within_country_small_multiples.png"/>
           <p:cNvPicPr>
             <a:picLocks noChangeAspect="1"/>
           </p:cNvPicPr>
@@ -12567,8 +12847,8 @@
         </p:blipFill>
         <p:spPr>
           <a:xfrm>
-            <a:off x="2097774" y="1965960"/>
-            <a:ext cx="7996146" cy="4480560"/>
+            <a:off x="2779954" y="1965960"/>
+            <a:ext cx="6631787" cy="4480560"/>
           </a:xfrm>
           <a:prstGeom prst="rect">
             <a:avLst/>
@@ -12680,7 +12960,7 @@
                 </a:solidFill>
                 <a:latin typeface="Georgia"/>
               </a:rPr>
-              <a:t>Trust and health as rival predictors, nationally</a:t>
+              <a:t>Regional SHDI spread within ESS countries</a:t>
             </a:r>
           </a:p>
         </p:txBody>
@@ -12725,14 +13005,14 @@
                 </a:solidFill>
                 <a:latin typeface="Calibri"/>
               </a:rPr>
-              <a:t>Self-rated health out-predicts the HDI nationally on significant-country share, 37% against 19%.</a:t>
+              <a:t>Italy and Poland carry several times the internal development inequality of Germany or the Nordics.</a:t>
             </a:r>
           </a:p>
         </p:txBody>
       </p:sp>
       <p:pic>
         <p:nvPicPr>
-          <p:cNvPr id="5" name="Picture 4" descr="mechanisms_trust_health.png"/>
+          <p:cNvPr id="5" name="Picture 4" descr="european_regional_inequality.png"/>
           <p:cNvPicPr>
             <a:picLocks noChangeAspect="1"/>
           </p:cNvPicPr>
@@ -12746,8 +13026,8 @@
         </p:blipFill>
         <p:spPr>
           <a:xfrm>
-            <a:off x="2100069" y="1965960"/>
-            <a:ext cx="7991556" cy="4480560"/>
+            <a:off x="2097774" y="1965960"/>
+            <a:ext cx="7996146" cy="4480560"/>
           </a:xfrm>
           <a:prstGeom prst="rect">
             <a:avLst/>
@@ -12859,6 +13139,185 @@
                 </a:solidFill>
                 <a:latin typeface="Georgia"/>
               </a:rPr>
+              <a:t>Trust and health as rival predictors, nationally</a:t>
+            </a:r>
+          </a:p>
+        </p:txBody>
+      </p:sp>
+      <p:sp>
+        <p:nvSpPr>
+          <p:cNvPr id="4" name="TextBox 3"/>
+          <p:cNvSpPr txBox="1"/>
+          <p:nvPr/>
+        </p:nvSpPr>
+        <p:spPr>
+          <a:xfrm>
+            <a:off x="566928" y="1207008"/>
+            <a:ext cx="10515600" cy="457200"/>
+          </a:xfrm>
+          <a:prstGeom prst="rect">
+            <a:avLst/>
+          </a:prstGeom>
+          <a:noFill/>
+        </p:spPr>
+        <p:txBody>
+          <a:bodyPr wrap="square" lIns="0" rIns="0" tIns="0" bIns="0">
+            <a:spAutoFit/>
+          </a:bodyPr>
+          <a:lstStyle/>
+          <a:p>
+            <a:pPr>
+              <a:lnSpc>
+                <a:spcPct val="128000"/>
+              </a:lnSpc>
+              <a:spcBef>
+                <a:spcPts val="0"/>
+              </a:spcBef>
+              <a:spcAft>
+                <a:spcPts val="0"/>
+              </a:spcAft>
+            </a:pPr>
+            <a:r>
+              <a:rPr sz="1100" b="0" i="0">
+                <a:solidFill>
+                  <a:srgbClr val="5A6068"/>
+                </a:solidFill>
+                <a:latin typeface="Calibri"/>
+              </a:rPr>
+              <a:t>Self-rated health out-predicts the HDI nationally on significant-country share, 37% against 19%.</a:t>
+            </a:r>
+          </a:p>
+        </p:txBody>
+      </p:sp>
+      <p:pic>
+        <p:nvPicPr>
+          <p:cNvPr id="5" name="Picture 4" descr="mechanisms_trust_health.png"/>
+          <p:cNvPicPr>
+            <a:picLocks noChangeAspect="1"/>
+          </p:cNvPicPr>
+          <p:nvPr/>
+        </p:nvPicPr>
+        <p:blipFill>
+          <a:blip r:embed="rId2"/>
+          <a:stretch>
+            <a:fillRect/>
+          </a:stretch>
+        </p:blipFill>
+        <p:spPr>
+          <a:xfrm>
+            <a:off x="2100069" y="1965960"/>
+            <a:ext cx="7991556" cy="4480560"/>
+          </a:xfrm>
+          <a:prstGeom prst="rect">
+            <a:avLst/>
+          </a:prstGeom>
+        </p:spPr>
+      </p:pic>
+    </p:spTree>
+  </p:cSld>
+  <p:clrMapOvr>
+    <a:masterClrMapping/>
+  </p:clrMapOvr>
+</p:sld>
+</file>
+
+<file path=ppt/slides/slide44.xml><?xml version="1.0" encoding="utf-8"?>
+<p:sld xmlns:a="http://schemas.openxmlformats.org/drawingml/2006/main" xmlns:p="http://schemas.openxmlformats.org/presentationml/2006/main" xmlns:r="http://schemas.openxmlformats.org/officeDocument/2006/relationships">
+  <p:cSld>
+    <p:bg>
+      <p:bgPr>
+        <a:solidFill>
+          <a:srgbClr val="FCFCFB"/>
+        </a:solidFill>
+        <a:effectLst/>
+      </p:bgPr>
+    </p:bg>
+    <p:spTree>
+      <p:nvGrpSpPr>
+        <p:cNvPr id="1" name=""/>
+        <p:cNvGrpSpPr/>
+        <p:nvPr/>
+      </p:nvGrpSpPr>
+      <p:grpSpPr/>
+      <p:sp>
+        <p:nvSpPr>
+          <p:cNvPr id="2" name="TextBox 1"/>
+          <p:cNvSpPr txBox="1"/>
+          <p:nvPr/>
+        </p:nvSpPr>
+        <p:spPr>
+          <a:xfrm>
+            <a:off x="566928" y="411480"/>
+            <a:ext cx="10515600" cy="320040"/>
+          </a:xfrm>
+          <a:prstGeom prst="rect">
+            <a:avLst/>
+          </a:prstGeom>
+          <a:noFill/>
+        </p:spPr>
+        <p:txBody>
+          <a:bodyPr wrap="square" lIns="0" rIns="0" tIns="0" bIns="0">
+            <a:spAutoFit/>
+          </a:bodyPr>
+          <a:lstStyle/>
+          <a:p>
+            <a:pPr>
+              <a:spcBef>
+                <a:spcPts val="0"/>
+              </a:spcBef>
+              <a:spcAft>
+                <a:spcPts val="0"/>
+              </a:spcAft>
+            </a:pPr>
+            <a:r>
+              <a:rPr sz="1000" b="0" i="0">
+                <a:solidFill>
+                  <a:srgbClr val="868D96"/>
+                </a:solidFill>
+                <a:latin typeface="Consolas"/>
+              </a:rPr>
+              <a:t>APPENDIX</a:t>
+            </a:r>
+          </a:p>
+        </p:txBody>
+      </p:sp>
+      <p:sp>
+        <p:nvSpPr>
+          <p:cNvPr id="3" name="TextBox 2"/>
+          <p:cNvSpPr txBox="1"/>
+          <p:nvPr/>
+        </p:nvSpPr>
+        <p:spPr>
+          <a:xfrm>
+            <a:off x="566928" y="749808"/>
+            <a:ext cx="10515600" cy="457200"/>
+          </a:xfrm>
+          <a:prstGeom prst="rect">
+            <a:avLst/>
+          </a:prstGeom>
+          <a:noFill/>
+        </p:spPr>
+        <p:txBody>
+          <a:bodyPr wrap="square" lIns="0" rIns="0" tIns="0" bIns="0">
+            <a:spAutoFit/>
+          </a:bodyPr>
+          <a:lstStyle/>
+          <a:p>
+            <a:pPr>
+              <a:spcBef>
+                <a:spcPts val="0"/>
+              </a:spcBef>
+              <a:spcAft>
+                <a:spcPts val="0"/>
+              </a:spcAft>
+            </a:pPr>
+            <a:r>
+              <a:rPr sz="2000" b="0" i="0">
+                <a:solidFill>
+                  <a:srgbClr val="14171C"/>
+                </a:solidFill>
+                <a:latin typeface="Georgia"/>
+              </a:rPr>
               <a:t>Per-country detail behind the ranking flip</a:t>
             </a:r>
           </a:p>
@@ -12968,7 +13427,7 @@
         <p:spPr>
           <a:xfrm>
             <a:off x="566928" y="502920"/>
-            <a:ext cx="8595360" cy="274320"/>
+            <a:ext cx="4160520" cy="274320"/>
           </a:xfrm>
           <a:prstGeom prst="rect">
             <a:avLst/>
@@ -12996,7 +13455,7 @@
                 </a:solidFill>
                 <a:latin typeface="Consolas"/>
               </a:rPr>
-              <a:t>REPLICATION 2 · A SECOND PRODUCER</a:t>
+              <a:t>THE STRUCTURE UNDERNEATH</a:t>
             </a:r>
           </a:p>
         </p:txBody>
@@ -13010,7 +13469,7 @@
         <p:spPr>
           <a:xfrm>
             <a:off x="566928" y="914400"/>
-            <a:ext cx="8595360" cy="1371600"/>
+            <a:ext cx="4160520" cy="1371600"/>
           </a:xfrm>
           <a:prstGeom prst="rect">
             <a:avLst/>
@@ -13035,13 +13494,13 @@
               </a:spcAft>
             </a:pPr>
             <a:r>
-              <a:rPr sz="2700" b="0" i="0">
+              <a:rPr sz="2300" b="0" i="0">
                 <a:solidFill>
                   <a:srgbClr val="14171C"/>
                 </a:solidFill>
                 <a:latin typeface="Georgia"/>
               </a:rPr>
-              <a:t>A different institution's index, built differently, gives the same numbers</a:t>
+              <a:t>The composite is not the whole result — the five indicators behave differently</a:t>
             </a:r>
           </a:p>
         </p:txBody>
@@ -13054,8 +13513,8 @@
         </p:nvSpPr>
         <p:spPr>
           <a:xfrm>
-            <a:off x="566928" y="2286000"/>
-            <a:ext cx="8595360" cy="3840480"/>
+            <a:off x="566928" y="2331720"/>
+            <a:ext cx="4160520" cy="3840480"/>
           </a:xfrm>
           <a:prstGeom prst="rect">
             <a:avLst/>
@@ -13080,13 +13539,35 @@
               </a:spcAft>
             </a:pPr>
             <a:r>
-              <a:rPr sz="1400" b="0" i="0">
+              <a:rPr sz="1150" b="0" i="0">
                 <a:solidFill>
                   <a:srgbClr val="5A6068"/>
                 </a:solidFill>
                 <a:latin typeface="Calibri"/>
               </a:rPr>
-              <a:t>The Global Data Lab constructs its subnational HDI from household surveys rather than from the national accounts and administrative series the UNDP uses. Aggregated back to the national level it gives 66 of 148 in levels and 6 of 148 in differences — 45% down to 4%, statistically indistinguishable from the HDI's 42% down to 2%.</a:t>
+              <a:t>HappinessHDI.R reports the composite alongside its four sub-components in both specifications, and the sub-components do not simply track the composite. Mean years of schooling has the highest median R² of the five in levels (0.326) and in differences (0.069) — above the composite HDI itself (0.322 and 0.063). Income is level with it in levels and below it in differences; life expectancy is clearly weakest in levels (0.160, 30 of 151 countries).</a:t>
+            </a:r>
+          </a:p>
+          <a:p>
+            <a:pPr>
+              <a:lnSpc>
+                <a:spcPct val="132000"/>
+              </a:lnSpc>
+              <a:spcBef>
+                <a:spcPts val="0"/>
+              </a:spcBef>
+              <a:spcAft>
+                <a:spcPts val="1100"/>
+              </a:spcAft>
+            </a:pPr>
+            <a:r>
+              <a:rPr sz="1150" b="0" i="0">
+                <a:solidFill>
+                  <a:srgbClr val="5A6068"/>
+                </a:solidFill>
+                <a:latin typeface="Calibri"/>
+              </a:rPr>
+              <a:t>The result worth carrying forward is in the differences column. Expected years of schooling is significant in 7 of 150 countries — more than the composite's 3, and more than any other indicator. Seven countries is a small number and the collapse is still severe, so this is not a survival story. But it does mean the education pair leads under both specifications rather than only in the cross-section, which is the strongest form the Act II argument can take.</a:t>
             </a:r>
           </a:p>
         </p:txBody>
@@ -13129,6 +13610,75 @@
                 <a:latin typeface="Consolas"/>
               </a:rPr>
               <a:t>I</a:t>
+            </a:r>
+          </a:p>
+        </p:txBody>
+      </p:sp>
+      <p:pic>
+        <p:nvPicPr>
+          <p:cNvPr id="6" name="Picture 5" descr="hdi_full_structure.png"/>
+          <p:cNvPicPr>
+            <a:picLocks noChangeAspect="1"/>
+          </p:cNvPicPr>
+          <p:nvPr/>
+        </p:nvPicPr>
+        <p:blipFill>
+          <a:blip r:embed="rId2"/>
+          <a:stretch>
+            <a:fillRect/>
+          </a:stretch>
+        </p:blipFill>
+        <p:spPr>
+          <a:xfrm>
+            <a:off x="5120640" y="1791377"/>
+            <a:ext cx="6537960" cy="2808901"/>
+          </a:xfrm>
+          <a:prstGeom prst="rect">
+            <a:avLst/>
+          </a:prstGeom>
+        </p:spPr>
+      </p:pic>
+      <p:sp>
+        <p:nvSpPr>
+          <p:cNvPr id="7" name="TextBox 6"/>
+          <p:cNvSpPr txBox="1"/>
+          <p:nvPr/>
+        </p:nvSpPr>
+        <p:spPr>
+          <a:xfrm>
+            <a:off x="5120640" y="5897880"/>
+            <a:ext cx="6537960" cy="731520"/>
+          </a:xfrm>
+          <a:prstGeom prst="rect">
+            <a:avLst/>
+          </a:prstGeom>
+          <a:noFill/>
+        </p:spPr>
+        <p:txBody>
+          <a:bodyPr wrap="square" lIns="0" rIns="0" tIns="0" bIns="0">
+            <a:spAutoFit/>
+          </a:bodyPr>
+          <a:lstStyle/>
+          <a:p>
+            <a:pPr>
+              <a:lnSpc>
+                <a:spcPct val="125000"/>
+              </a:lnSpc>
+              <a:spcBef>
+                <a:spcPts val="0"/>
+              </a:spcBef>
+              <a:spcAft>
+                <a:spcPts val="0"/>
+              </a:spcAft>
+            </a:pPr>
+            <a:r>
+              <a:rPr sz="900" b="0" i="0">
+                <a:solidFill>
+                  <a:srgbClr val="868D96"/>
+                </a:solidFill>
+                <a:latin typeface="Calibri"/>
+              </a:rPr>
+              <a:t>The HDI composite and its four sub-components, levels and first differences. Benjamini–Hochberg corrected across the five indicators within each country.</a:t>
             </a:r>
           </a:p>
         </p:txBody>
@@ -13168,7 +13718,7 @@
         <p:spPr>
           <a:xfrm>
             <a:off x="566928" y="502920"/>
-            <a:ext cx="4160520" cy="274320"/>
+            <a:ext cx="8595360" cy="274320"/>
           </a:xfrm>
           <a:prstGeom prst="rect">
             <a:avLst/>
@@ -13196,7 +13746,7 @@
                 </a:solidFill>
                 <a:latin typeface="Consolas"/>
               </a:rPr>
-              <a:t>REPLICATION 3 · A SECOND WELLBEING INSTRUMENT</a:t>
+              <a:t>REPLICATION 2 · A SECOND PRODUCER</a:t>
             </a:r>
           </a:p>
         </p:txBody>
@@ -13210,7 +13760,7 @@
         <p:spPr>
           <a:xfrm>
             <a:off x="566928" y="914400"/>
-            <a:ext cx="4160520" cy="1371600"/>
+            <a:ext cx="8595360" cy="1371600"/>
           </a:xfrm>
           <a:prstGeom prst="rect">
             <a:avLst/>
@@ -13235,13 +13785,13 @@
               </a:spcAft>
             </a:pPr>
             <a:r>
-              <a:rPr sz="2300" b="0" i="0">
+              <a:rPr sz="2700" b="0" i="0">
                 <a:solidFill>
                   <a:srgbClr val="14171C"/>
                 </a:solidFill>
                 <a:latin typeface="Georgia"/>
               </a:rPr>
-              <a:t>It is not an artifact of the Cantril ladder either</a:t>
+              <a:t>A different institution's index, built differently, gives the same numbers</a:t>
             </a:r>
           </a:p>
         </p:txBody>
@@ -13254,8 +13804,8 @@
         </p:nvSpPr>
         <p:spPr>
           <a:xfrm>
-            <a:off x="566928" y="2331720"/>
-            <a:ext cx="4160520" cy="3840480"/>
+            <a:off x="566928" y="2286000"/>
+            <a:ext cx="8595360" cy="3840480"/>
           </a:xfrm>
           <a:prstGeom prst="rect">
             <a:avLst/>
@@ -13280,35 +13830,13 @@
               </a:spcAft>
             </a:pPr>
             <a:r>
-              <a:rPr sz="1150" b="0" i="0">
+              <a:rPr sz="1400" b="0" i="0">
                 <a:solidFill>
                   <a:srgbClr val="5A6068"/>
                 </a:solidFill>
                 <a:latin typeface="Calibri"/>
               </a:rPr>
-              <a:t>The World Happiness Report's ladder is a single self-anchoring item asked by one survey house. Replacing it with the European Social Survey's own life-satisfaction and happiness items — 36 countries, 351,023 respondents, seven roughly biennial waves from 2010 to 2023 — preserves the asymmetry.</a:t>
-            </a:r>
-          </a:p>
-          <a:p>
-            <a:pPr>
-              <a:lnSpc>
-                <a:spcPct val="132000"/>
-              </a:lnSpc>
-              <a:spcBef>
-                <a:spcPts val="0"/>
-              </a:spcBef>
-              <a:spcAft>
-                <a:spcPts val="1100"/>
-              </a:spcAft>
-            </a:pPr>
-            <a:r>
-              <a:rPr sz="1150" b="0" i="0">
-                <a:solidFill>
-                  <a:srgbClr val="5A6068"/>
-                </a:solidFill>
-                <a:latin typeface="Calibri"/>
-              </a:rPr>
-              <a:t>Statistical power is much lower here: seven biennial waves against twelve or more annual World Happiness Report years, so individual country tests are fragile and the ESS replication should be read as corroboration rather than as independent confirmation at the same strength.</a:t>
+              <a:t>The Global Data Lab constructs its subnational HDI from household surveys rather than from the national accounts and administrative series the UNDP uses. Aggregated back to the national level it gives 66 of 148 in levels and 6 of 148 in differences — 45% down to 4%, statistically indistinguishable from the HDI's 42% down to 2%.</a:t>
             </a:r>
           </a:p>
         </p:txBody>
@@ -13351,75 +13879,6 @@
                 <a:latin typeface="Consolas"/>
               </a:rPr>
               <a:t>I</a:t>
-            </a:r>
-          </a:p>
-        </p:txBody>
-      </p:sp>
-      <p:pic>
-        <p:nvPicPr>
-          <p:cNvPr id="6" name="Picture 5" descr="collapse_hdi_ess.png"/>
-          <p:cNvPicPr>
-            <a:picLocks noChangeAspect="1"/>
-          </p:cNvPicPr>
-          <p:nvPr/>
-        </p:nvPicPr>
-        <p:blipFill>
-          <a:blip r:embed="rId2"/>
-          <a:stretch>
-            <a:fillRect/>
-          </a:stretch>
-        </p:blipFill>
-        <p:spPr>
-          <a:xfrm>
-            <a:off x="5120640" y="1615563"/>
-            <a:ext cx="6537960" cy="3160530"/>
-          </a:xfrm>
-          <a:prstGeom prst="rect">
-            <a:avLst/>
-          </a:prstGeom>
-        </p:spPr>
-      </p:pic>
-      <p:sp>
-        <p:nvSpPr>
-          <p:cNvPr id="7" name="TextBox 6"/>
-          <p:cNvSpPr txBox="1"/>
-          <p:nvPr/>
-        </p:nvSpPr>
-        <p:spPr>
-          <a:xfrm>
-            <a:off x="5120640" y="5897880"/>
-            <a:ext cx="6537960" cy="731520"/>
-          </a:xfrm>
-          <a:prstGeom prst="rect">
-            <a:avLst/>
-          </a:prstGeom>
-          <a:noFill/>
-        </p:spPr>
-        <p:txBody>
-          <a:bodyPr wrap="square" lIns="0" rIns="0" tIns="0" bIns="0">
-            <a:spAutoFit/>
-          </a:bodyPr>
-          <a:lstStyle/>
-          <a:p>
-            <a:pPr>
-              <a:lnSpc>
-                <a:spcPct val="125000"/>
-              </a:lnSpc>
-              <a:spcBef>
-                <a:spcPts val="0"/>
-              </a:spcBef>
-              <a:spcAft>
-                <a:spcPts val="0"/>
-              </a:spcAft>
-            </a:pPr>
-            <a:r>
-              <a:rPr sz="900" b="0" i="0">
-                <a:solidFill>
-                  <a:srgbClr val="868D96"/>
-                </a:solidFill>
-                <a:latin typeface="Calibri"/>
-              </a:rPr>
-              <a:t>The same design with ESS life satisfaction in place of the Cantril ladder. 15% of levels cells and 9% of differences cells are FDR-significant.</a:t>
             </a:r>
           </a:p>
         </p:txBody>
@@ -13487,7 +13946,7 @@
                 </a:solidFill>
                 <a:latin typeface="Consolas"/>
               </a:rPr>
-              <a:t>REPLICATION 4 · ONE SCALE DOWN</a:t>
+              <a:t>REPLICATION 3 · A SECOND WELLBEING INSTRUMENT</a:t>
             </a:r>
           </a:p>
         </p:txBody>
@@ -13532,7 +13991,7 @@
                 </a:solidFill>
                 <a:latin typeface="Georgia"/>
               </a:rPr>
-              <a:t>And it holds across 239 European regions</a:t>
+              <a:t>It is not an artifact of the Cantril ladder either</a:t>
             </a:r>
           </a:p>
         </p:txBody>
@@ -13577,7 +14036,29 @@
                 </a:solidFill>
                 <a:latin typeface="Calibri"/>
               </a:rPr>
-              <a:t>Region-level subnational HDI against region-mean life satisfaction reproduces the same levels-over-differences pattern, noisier as expected. The result is now documented at three scales — SDG-national, HDI-national, SHDI-regional — and against two wellbeing instruments.</a:t>
+              <a:t>The World Happiness Report's ladder is a single self-anchoring item asked by one survey house. Replacing it with the European Social Survey's own life-satisfaction and happiness items — 36 countries, 351,023 respondents, seven roughly biennial waves from 2010 to 2023 — preserves the asymmetry.</a:t>
+            </a:r>
+          </a:p>
+          <a:p>
+            <a:pPr>
+              <a:lnSpc>
+                <a:spcPct val="132000"/>
+              </a:lnSpc>
+              <a:spcBef>
+                <a:spcPts val="0"/>
+              </a:spcBef>
+              <a:spcAft>
+                <a:spcPts val="1100"/>
+              </a:spcAft>
+            </a:pPr>
+            <a:r>
+              <a:rPr sz="1150" b="0" i="0">
+                <a:solidFill>
+                  <a:srgbClr val="5A6068"/>
+                </a:solidFill>
+                <a:latin typeface="Calibri"/>
+              </a:rPr>
+              <a:t>Statistical power is much lower here: seven biennial waves against twelve or more annual World Happiness Report years, so individual country tests are fragile and the ESS replication should be read as corroboration rather than as independent confirmation at the same strength.</a:t>
             </a:r>
           </a:p>
         </p:txBody>
@@ -13626,7 +14107,7 @@
       </p:sp>
       <p:pic>
         <p:nvPicPr>
-          <p:cNvPr id="6" name="Picture 5" descr="collapse_shdi_ess_regional.png"/>
+          <p:cNvPr id="6" name="Picture 5" descr="collapse_hdi_ess.png"/>
           <p:cNvPicPr>
             <a:picLocks noChangeAspect="1"/>
           </p:cNvPicPr>
@@ -13640,8 +14121,8 @@
         </p:blipFill>
         <p:spPr>
           <a:xfrm>
-            <a:off x="5546146" y="658368"/>
-            <a:ext cx="5686948" cy="5074919"/>
+            <a:off x="5120640" y="1615563"/>
+            <a:ext cx="6537960" cy="3160530"/>
           </a:xfrm>
           <a:prstGeom prst="rect">
             <a:avLst/>
@@ -13688,7 +14169,7 @@
                 </a:solidFill>
                 <a:latin typeface="Calibri"/>
               </a:rPr>
-              <a:t>Regional subnational HDI against region-mean ESS life satisfaction, 239 European regions.</a:t>
+              <a:t>The same design with ESS life satisfaction in place of the Cantril ladder. 15% of levels cells and 9% of differences cells are FDR-significant.</a:t>
             </a:r>
           </a:p>
         </p:txBody>
@@ -13702,6 +14183,275 @@
 </file>
 
 <file path=ppt/slides/slide8.xml><?xml version="1.0" encoding="utf-8"?>
+<p:sld xmlns:a="http://schemas.openxmlformats.org/drawingml/2006/main" xmlns:p="http://schemas.openxmlformats.org/presentationml/2006/main" xmlns:r="http://schemas.openxmlformats.org/officeDocument/2006/relationships">
+  <p:cSld>
+    <p:bg>
+      <p:bgPr>
+        <a:solidFill>
+          <a:srgbClr val="FCFCFB"/>
+        </a:solidFill>
+        <a:effectLst/>
+      </p:bgPr>
+    </p:bg>
+    <p:spTree>
+      <p:nvGrpSpPr>
+        <p:cNvPr id="1" name=""/>
+        <p:cNvGrpSpPr/>
+        <p:nvPr/>
+      </p:nvGrpSpPr>
+      <p:grpSpPr/>
+      <p:sp>
+        <p:nvSpPr>
+          <p:cNvPr id="2" name="TextBox 1"/>
+          <p:cNvSpPr txBox="1"/>
+          <p:nvPr/>
+        </p:nvSpPr>
+        <p:spPr>
+          <a:xfrm>
+            <a:off x="566928" y="502920"/>
+            <a:ext cx="4160520" cy="274320"/>
+          </a:xfrm>
+          <a:prstGeom prst="rect">
+            <a:avLst/>
+          </a:prstGeom>
+          <a:noFill/>
+        </p:spPr>
+        <p:txBody>
+          <a:bodyPr wrap="square" lIns="0" rIns="0" tIns="0" bIns="0">
+            <a:spAutoFit/>
+          </a:bodyPr>
+          <a:lstStyle/>
+          <a:p>
+            <a:pPr>
+              <a:spcBef>
+                <a:spcPts val="0"/>
+              </a:spcBef>
+              <a:spcAft>
+                <a:spcPts val="0"/>
+              </a:spcAft>
+            </a:pPr>
+            <a:r>
+              <a:rPr sz="1000" b="0" i="0">
+                <a:solidFill>
+                  <a:srgbClr val="A63A30"/>
+                </a:solidFill>
+                <a:latin typeface="Consolas"/>
+              </a:rPr>
+              <a:t>REPLICATION 4 · ONE SCALE DOWN</a:t>
+            </a:r>
+          </a:p>
+        </p:txBody>
+      </p:sp>
+      <p:sp>
+        <p:nvSpPr>
+          <p:cNvPr id="3" name="TextBox 2"/>
+          <p:cNvSpPr txBox="1"/>
+          <p:nvPr/>
+        </p:nvSpPr>
+        <p:spPr>
+          <a:xfrm>
+            <a:off x="566928" y="914400"/>
+            <a:ext cx="4160520" cy="1371600"/>
+          </a:xfrm>
+          <a:prstGeom prst="rect">
+            <a:avLst/>
+          </a:prstGeom>
+          <a:noFill/>
+        </p:spPr>
+        <p:txBody>
+          <a:bodyPr wrap="square" lIns="0" rIns="0" tIns="0" bIns="0">
+            <a:spAutoFit/>
+          </a:bodyPr>
+          <a:lstStyle/>
+          <a:p>
+            <a:pPr>
+              <a:lnSpc>
+                <a:spcPct val="108000"/>
+              </a:lnSpc>
+              <a:spcBef>
+                <a:spcPts val="0"/>
+              </a:spcBef>
+              <a:spcAft>
+                <a:spcPts val="0"/>
+              </a:spcAft>
+            </a:pPr>
+            <a:r>
+              <a:rPr sz="2300" b="0" i="0">
+                <a:solidFill>
+                  <a:srgbClr val="14171C"/>
+                </a:solidFill>
+                <a:latin typeface="Georgia"/>
+              </a:rPr>
+              <a:t>And it holds across 239 European regions</a:t>
+            </a:r>
+          </a:p>
+        </p:txBody>
+      </p:sp>
+      <p:sp>
+        <p:nvSpPr>
+          <p:cNvPr id="4" name="TextBox 3"/>
+          <p:cNvSpPr txBox="1"/>
+          <p:nvPr/>
+        </p:nvSpPr>
+        <p:spPr>
+          <a:xfrm>
+            <a:off x="566928" y="2331720"/>
+            <a:ext cx="4160520" cy="3840480"/>
+          </a:xfrm>
+          <a:prstGeom prst="rect">
+            <a:avLst/>
+          </a:prstGeom>
+          <a:noFill/>
+        </p:spPr>
+        <p:txBody>
+          <a:bodyPr wrap="square" lIns="0" rIns="0" tIns="0" bIns="0">
+            <a:spAutoFit/>
+          </a:bodyPr>
+          <a:lstStyle/>
+          <a:p>
+            <a:pPr>
+              <a:lnSpc>
+                <a:spcPct val="132000"/>
+              </a:lnSpc>
+              <a:spcBef>
+                <a:spcPts val="0"/>
+              </a:spcBef>
+              <a:spcAft>
+                <a:spcPts val="1100"/>
+              </a:spcAft>
+            </a:pPr>
+            <a:r>
+              <a:rPr sz="1150" b="0" i="0">
+                <a:solidFill>
+                  <a:srgbClr val="5A6068"/>
+                </a:solidFill>
+                <a:latin typeface="Calibri"/>
+              </a:rPr>
+              <a:t>Region-level subnational HDI against region-mean life satisfaction reproduces the same levels-over-differences pattern, noisier as expected. The result is now documented at three scales — SDG-national, HDI-national, SHDI-regional — and against two wellbeing instruments.</a:t>
+            </a:r>
+          </a:p>
+        </p:txBody>
+      </p:sp>
+      <p:sp>
+        <p:nvSpPr>
+          <p:cNvPr id="5" name="TextBox 4"/>
+          <p:cNvSpPr txBox="1"/>
+          <p:nvPr/>
+        </p:nvSpPr>
+        <p:spPr>
+          <a:xfrm>
+            <a:off x="11338560" y="6263640"/>
+            <a:ext cx="548640" cy="274320"/>
+          </a:xfrm>
+          <a:prstGeom prst="rect">
+            <a:avLst/>
+          </a:prstGeom>
+          <a:noFill/>
+        </p:spPr>
+        <p:txBody>
+          <a:bodyPr wrap="square" lIns="0" rIns="0" tIns="0" bIns="0">
+            <a:spAutoFit/>
+          </a:bodyPr>
+          <a:lstStyle/>
+          <a:p>
+            <a:pPr algn="r">
+              <a:spcBef>
+                <a:spcPts val="0"/>
+              </a:spcBef>
+              <a:spcAft>
+                <a:spcPts val="0"/>
+              </a:spcAft>
+            </a:pPr>
+            <a:r>
+              <a:rPr sz="1100" b="0" i="0">
+                <a:solidFill>
+                  <a:srgbClr val="868D96"/>
+                </a:solidFill>
+                <a:latin typeface="Consolas"/>
+              </a:rPr>
+              <a:t>I</a:t>
+            </a:r>
+          </a:p>
+        </p:txBody>
+      </p:sp>
+      <p:pic>
+        <p:nvPicPr>
+          <p:cNvPr id="6" name="Picture 5" descr="collapse_shdi_ess_regional.png"/>
+          <p:cNvPicPr>
+            <a:picLocks noChangeAspect="1"/>
+          </p:cNvPicPr>
+          <p:nvPr/>
+        </p:nvPicPr>
+        <p:blipFill>
+          <a:blip r:embed="rId2"/>
+          <a:stretch>
+            <a:fillRect/>
+          </a:stretch>
+        </p:blipFill>
+        <p:spPr>
+          <a:xfrm>
+            <a:off x="5546146" y="658368"/>
+            <a:ext cx="5686948" cy="5074919"/>
+          </a:xfrm>
+          <a:prstGeom prst="rect">
+            <a:avLst/>
+          </a:prstGeom>
+        </p:spPr>
+      </p:pic>
+      <p:sp>
+        <p:nvSpPr>
+          <p:cNvPr id="7" name="TextBox 6"/>
+          <p:cNvSpPr txBox="1"/>
+          <p:nvPr/>
+        </p:nvSpPr>
+        <p:spPr>
+          <a:xfrm>
+            <a:off x="5120640" y="5897880"/>
+            <a:ext cx="6537960" cy="731520"/>
+          </a:xfrm>
+          <a:prstGeom prst="rect">
+            <a:avLst/>
+          </a:prstGeom>
+          <a:noFill/>
+        </p:spPr>
+        <p:txBody>
+          <a:bodyPr wrap="square" lIns="0" rIns="0" tIns="0" bIns="0">
+            <a:spAutoFit/>
+          </a:bodyPr>
+          <a:lstStyle/>
+          <a:p>
+            <a:pPr>
+              <a:lnSpc>
+                <a:spcPct val="125000"/>
+              </a:lnSpc>
+              <a:spcBef>
+                <a:spcPts val="0"/>
+              </a:spcBef>
+              <a:spcAft>
+                <a:spcPts val="0"/>
+              </a:spcAft>
+            </a:pPr>
+            <a:r>
+              <a:rPr sz="900" b="0" i="0">
+                <a:solidFill>
+                  <a:srgbClr val="868D96"/>
+                </a:solidFill>
+                <a:latin typeface="Calibri"/>
+              </a:rPr>
+              <a:t>Regional subnational HDI against region-mean ESS life satisfaction, 239 European regions.</a:t>
+            </a:r>
+          </a:p>
+        </p:txBody>
+      </p:sp>
+    </p:spTree>
+  </p:cSld>
+  <p:clrMapOvr>
+    <a:masterClrMapping/>
+  </p:clrMapOvr>
+</p:sld>
+</file>
+
+<file path=ppt/slides/slide9.xml><?xml version="1.0" encoding="utf-8"?>
 <p:sld xmlns:a="http://schemas.openxmlformats.org/drawingml/2006/main" xmlns:p="http://schemas.openxmlformats.org/presentationml/2006/main" xmlns:r="http://schemas.openxmlformats.org/officeDocument/2006/relationships">
   <p:cSld>
     <p:bg>
@@ -13846,442 +14596,6 @@
                 <a:latin typeface="Georgia"/>
               </a:rPr>
               <a:t>The commentary can therefore state the asymmetry as a property of the development–wellbeing relationship rather than of any particular index, and move on to the question that actually matters: given that almost nothing survives the move to within-country change, what carries the level signal?</a:t>
-            </a:r>
-          </a:p>
-        </p:txBody>
-      </p:sp>
-    </p:spTree>
-  </p:cSld>
-  <p:clrMapOvr>
-    <a:masterClrMapping/>
-  </p:clrMapOvr>
-</p:sld>
-</file>
-
-<file path=ppt/slides/slide9.xml><?xml version="1.0" encoding="utf-8"?>
-<p:sld xmlns:a="http://schemas.openxmlformats.org/drawingml/2006/main" xmlns:p="http://schemas.openxmlformats.org/presentationml/2006/main" xmlns:r="http://schemas.openxmlformats.org/officeDocument/2006/relationships">
-  <p:cSld>
-    <p:bg>
-      <p:bgPr>
-        <a:solidFill>
-          <a:srgbClr val="14171C"/>
-        </a:solidFill>
-        <a:effectLst/>
-      </p:bgPr>
-    </p:bg>
-    <p:spTree>
-      <p:nvGrpSpPr>
-        <p:cNvPr id="1" name=""/>
-        <p:cNvGrpSpPr/>
-        <p:nvPr/>
-      </p:nvGrpSpPr>
-      <p:grpSpPr/>
-      <p:sp>
-        <p:nvSpPr>
-          <p:cNvPr id="2" name="TextBox 1"/>
-          <p:cNvSpPr txBox="1"/>
-          <p:nvPr/>
-        </p:nvSpPr>
-        <p:spPr>
-          <a:xfrm>
-            <a:off x="8229600" y="822960"/>
-            <a:ext cx="3291840" cy="4114800"/>
-          </a:xfrm>
-          <a:prstGeom prst="rect">
-            <a:avLst/>
-          </a:prstGeom>
-          <a:noFill/>
-        </p:spPr>
-        <p:txBody>
-          <a:bodyPr wrap="square" lIns="0" rIns="0" tIns="0" bIns="0">
-            <a:spAutoFit/>
-          </a:bodyPr>
-          <a:lstStyle/>
-          <a:p>
-            <a:pPr algn="r">
-              <a:spcBef>
-                <a:spcPts val="0"/>
-              </a:spcBef>
-              <a:spcAft>
-                <a:spcPts val="0"/>
-              </a:spcAft>
-            </a:pPr>
-            <a:r>
-              <a:rPr sz="20000" b="0" i="0">
-                <a:solidFill>
-                  <a:srgbClr val="2A3340"/>
-                </a:solidFill>
-                <a:latin typeface="Georgia"/>
-              </a:rPr>
-              <a:t>II</a:t>
-            </a:r>
-          </a:p>
-        </p:txBody>
-      </p:sp>
-      <p:sp>
-        <p:nvSpPr>
-          <p:cNvPr id="3" name="Rectangle 2"/>
-          <p:cNvSpPr/>
-          <p:nvPr/>
-        </p:nvSpPr>
-        <p:spPr>
-          <a:xfrm>
-            <a:off x="566928" y="1371600"/>
-            <a:ext cx="7315200" cy="25400"/>
-          </a:xfrm>
-          <a:prstGeom prst="rect">
-            <a:avLst/>
-          </a:prstGeom>
-          <a:solidFill>
-            <a:srgbClr val="C9D8EC"/>
-          </a:solidFill>
-          <a:ln>
-            <a:noFill/>
-          </a:ln>
-          <a:effectLst/>
-        </p:spPr>
-        <p:style>
-          <a:lnRef idx="1">
-            <a:schemeClr val="accent1"/>
-          </a:lnRef>
-          <a:fillRef idx="3">
-            <a:schemeClr val="accent1"/>
-          </a:fillRef>
-          <a:effectRef idx="2">
-            <a:schemeClr val="accent1"/>
-          </a:effectRef>
-          <a:fontRef idx="minor">
-            <a:schemeClr val="lt1"/>
-          </a:fontRef>
-        </p:style>
-        <p:txBody>
-          <a:bodyPr rtlCol="0" anchor="ctr"/>
-          <a:lstStyle/>
-          <a:p>
-            <a:pPr algn="ctr"/>
-          </a:p>
-        </p:txBody>
-      </p:sp>
-      <p:sp>
-        <p:nvSpPr>
-          <p:cNvPr id="4" name="TextBox 3"/>
-          <p:cNvSpPr txBox="1"/>
-          <p:nvPr/>
-        </p:nvSpPr>
-        <p:spPr>
-          <a:xfrm>
-            <a:off x="566928" y="960120"/>
-            <a:ext cx="5486400" cy="274320"/>
-          </a:xfrm>
-          <a:prstGeom prst="rect">
-            <a:avLst/>
-          </a:prstGeom>
-          <a:noFill/>
-        </p:spPr>
-        <p:txBody>
-          <a:bodyPr wrap="square" lIns="0" rIns="0" tIns="0" bIns="0">
-            <a:spAutoFit/>
-          </a:bodyPr>
-          <a:lstStyle/>
-          <a:p>
-            <a:pPr>
-              <a:spcBef>
-                <a:spcPts val="0"/>
-              </a:spcBef>
-              <a:spcAft>
-                <a:spcPts val="0"/>
-              </a:spcAft>
-            </a:pPr>
-            <a:r>
-              <a:rPr sz="1100" b="0" i="0">
-                <a:solidFill>
-                  <a:srgbClr val="C9D8EC"/>
-                </a:solidFill>
-                <a:latin typeface="Consolas"/>
-              </a:rPr>
-              <a:t>ACT II</a:t>
-            </a:r>
-          </a:p>
-        </p:txBody>
-      </p:sp>
-      <p:sp>
-        <p:nvSpPr>
-          <p:cNvPr id="5" name="TextBox 4"/>
-          <p:cNvSpPr txBox="1"/>
-          <p:nvPr/>
-        </p:nvSpPr>
-        <p:spPr>
-          <a:xfrm>
-            <a:off x="566928" y="1783080"/>
-            <a:ext cx="7223760" cy="1828800"/>
-          </a:xfrm>
-          <a:prstGeom prst="rect">
-            <a:avLst/>
-          </a:prstGeom>
-          <a:noFill/>
-        </p:spPr>
-        <p:txBody>
-          <a:bodyPr wrap="square" lIns="0" rIns="0" tIns="0" bIns="0">
-            <a:spAutoFit/>
-          </a:bodyPr>
-          <a:lstStyle/>
-          <a:p>
-            <a:pPr>
-              <a:lnSpc>
-                <a:spcPct val="102000"/>
-              </a:lnSpc>
-              <a:spcBef>
-                <a:spcPts val="0"/>
-              </a:spcBef>
-              <a:spcAft>
-                <a:spcPts val="0"/>
-              </a:spcAft>
-            </a:pPr>
-            <a:r>
-              <a:rPr sz="4000" b="0" i="0">
-                <a:solidFill>
-                  <a:srgbClr val="FCFCFB"/>
-                </a:solidFill>
-                <a:latin typeface="Georgia"/>
-              </a:rPr>
-              <a:t>Education is the odd one out — under one specific measurement</a:t>
-            </a:r>
-          </a:p>
-        </p:txBody>
-      </p:sp>
-      <p:sp>
-        <p:nvSpPr>
-          <p:cNvPr id="6" name="TextBox 5"/>
-          <p:cNvSpPr txBox="1"/>
-          <p:nvPr/>
-        </p:nvSpPr>
-        <p:spPr>
-          <a:xfrm>
-            <a:off x="566928" y="3886200"/>
-            <a:ext cx="6766560" cy="1463040"/>
-          </a:xfrm>
-          <a:prstGeom prst="rect">
-            <a:avLst/>
-          </a:prstGeom>
-          <a:noFill/>
-        </p:spPr>
-        <p:txBody>
-          <a:bodyPr wrap="square" lIns="0" rIns="0" tIns="0" bIns="0">
-            <a:spAutoFit/>
-          </a:bodyPr>
-          <a:lstStyle/>
-          <a:p>
-            <a:pPr>
-              <a:lnSpc>
-                <a:spcPct val="135000"/>
-              </a:lnSpc>
-              <a:spcBef>
-                <a:spcPts val="0"/>
-              </a:spcBef>
-              <a:spcAft>
-                <a:spcPts val="0"/>
-              </a:spcAft>
-            </a:pPr>
-            <a:r>
-              <a:rPr sz="1600" b="0" i="1">
-                <a:solidFill>
-                  <a:srgbClr val="9AA4B0"/>
-                </a:solidFill>
-                <a:latin typeface="Georgia"/>
-              </a:rPr>
-              <a:t>Ranked indicator by indicator, what predicts happiness in levels is survival and basic infrastructure. Education looks like the SDG framework's weakest domain and the HDI's strongest. Both readings are correct, because the two frameworks are not measuring the same thing.</a:t>
-            </a:r>
-          </a:p>
-        </p:txBody>
-      </p:sp>
-      <p:sp>
-        <p:nvSpPr>
-          <p:cNvPr id="7" name="TextBox 6"/>
-          <p:cNvSpPr txBox="1"/>
-          <p:nvPr/>
-        </p:nvSpPr>
-        <p:spPr>
-          <a:xfrm>
-            <a:off x="566928" y="5623560"/>
-            <a:ext cx="3503066" cy="914400"/>
-          </a:xfrm>
-          <a:prstGeom prst="rect">
-            <a:avLst/>
-          </a:prstGeom>
-          <a:noFill/>
-        </p:spPr>
-        <p:txBody>
-          <a:bodyPr wrap="square" lIns="0" rIns="0" tIns="0" bIns="0">
-            <a:spAutoFit/>
-          </a:bodyPr>
-          <a:lstStyle/>
-          <a:p>
-            <a:pPr>
-              <a:spcBef>
-                <a:spcPts val="0"/>
-              </a:spcBef>
-              <a:spcAft>
-                <a:spcPts val="400"/>
-              </a:spcAft>
-            </a:pPr>
-            <a:r>
-              <a:rPr sz="2200" b="0" i="0">
-                <a:solidFill>
-                  <a:srgbClr val="FCFCFB"/>
-                </a:solidFill>
-                <a:latin typeface="Consolas"/>
-              </a:rPr>
-              <a:t>12.7%</a:t>
-            </a:r>
-          </a:p>
-          <a:p>
-            <a:pPr>
-              <a:lnSpc>
-                <a:spcPct val="120000"/>
-              </a:lnSpc>
-              <a:spcBef>
-                <a:spcPts val="0"/>
-              </a:spcBef>
-              <a:spcAft>
-                <a:spcPts val="0"/>
-              </a:spcAft>
-            </a:pPr>
-            <a:r>
-              <a:rPr sz="1000" b="0" i="0">
-                <a:solidFill>
-                  <a:srgbClr val="8A94A0"/>
-                </a:solidFill>
-                <a:latin typeface="Calibri"/>
-              </a:rPr>
-              <a:t>SDG4 access &amp; participation, un-pooled from 3.3%</a:t>
-            </a:r>
-          </a:p>
-        </p:txBody>
-      </p:sp>
-      <p:sp>
-        <p:nvSpPr>
-          <p:cNvPr id="8" name="TextBox 7"/>
-          <p:cNvSpPr txBox="1"/>
-          <p:nvPr/>
-        </p:nvSpPr>
-        <p:spPr>
-          <a:xfrm>
-            <a:off x="4344314" y="5623560"/>
-            <a:ext cx="3503066" cy="914400"/>
-          </a:xfrm>
-          <a:prstGeom prst="rect">
-            <a:avLst/>
-          </a:prstGeom>
-          <a:noFill/>
-        </p:spPr>
-        <p:txBody>
-          <a:bodyPr wrap="square" lIns="0" rIns="0" tIns="0" bIns="0">
-            <a:spAutoFit/>
-          </a:bodyPr>
-          <a:lstStyle/>
-          <a:p>
-            <a:pPr>
-              <a:spcBef>
-                <a:spcPts val="0"/>
-              </a:spcBef>
-              <a:spcAft>
-                <a:spcPts val="400"/>
-              </a:spcAft>
-            </a:pPr>
-            <a:r>
-              <a:rPr sz="2200" b="0" i="0">
-                <a:solidFill>
-                  <a:srgbClr val="FCFCFB"/>
-                </a:solidFill>
-                <a:latin typeface="Consolas"/>
-              </a:rPr>
-              <a:t>40.9%</a:t>
-            </a:r>
-          </a:p>
-          <a:p>
-            <a:pPr>
-              <a:lnSpc>
-                <a:spcPct val="120000"/>
-              </a:lnSpc>
-              <a:spcBef>
-                <a:spcPts val="0"/>
-              </a:spcBef>
-              <a:spcAft>
-                <a:spcPts val="0"/>
-              </a:spcAft>
-            </a:pPr>
-            <a:r>
-              <a:rPr sz="1000" b="0" i="0">
-                <a:solidFill>
-                  <a:srgbClr val="8A94A0"/>
-                </a:solidFill>
-                <a:latin typeface="Calibri"/>
-              </a:rPr>
-              <a:t>of countries, HDI mean years of schooling</a:t>
-            </a:r>
-          </a:p>
-        </p:txBody>
-      </p:sp>
-      <p:sp>
-        <p:nvSpPr>
-          <p:cNvPr id="9" name="TextBox 8"/>
-          <p:cNvSpPr txBox="1"/>
-          <p:nvPr/>
-        </p:nvSpPr>
-        <p:spPr>
-          <a:xfrm>
-            <a:off x="8121700" y="5623560"/>
-            <a:ext cx="3503066" cy="914400"/>
-          </a:xfrm>
-          <a:prstGeom prst="rect">
-            <a:avLst/>
-          </a:prstGeom>
-          <a:noFill/>
-        </p:spPr>
-        <p:txBody>
-          <a:bodyPr wrap="square" lIns="0" rIns="0" tIns="0" bIns="0">
-            <a:spAutoFit/>
-          </a:bodyPr>
-          <a:lstStyle/>
-          <a:p>
-            <a:pPr>
-              <a:spcBef>
-                <a:spcPts val="0"/>
-              </a:spcBef>
-              <a:spcAft>
-                <a:spcPts val="400"/>
-              </a:spcAft>
-            </a:pPr>
-            <a:r>
-              <a:rPr sz="2200" b="0" i="0">
-                <a:solidFill>
-                  <a:srgbClr val="FCFCFB"/>
-                </a:solidFill>
-                <a:latin typeface="Consolas"/>
-              </a:rPr>
-              <a:t>32 / 36</a:t>
-            </a:r>
-          </a:p>
-          <a:p>
-            <a:pPr>
-              <a:lnSpc>
-                <a:spcPct val="120000"/>
-              </a:lnSpc>
-              <a:spcBef>
-                <a:spcPts val="0"/>
-              </a:spcBef>
-              <a:spcAft>
-                <a:spcPts val="0"/>
-              </a:spcAft>
-            </a:pPr>
-            <a:r>
-              <a:rPr sz="1000" b="0" i="0">
-                <a:solidFill>
-                  <a:srgbClr val="8A94A0"/>
-                </a:solidFill>
-                <a:latin typeface="Calibri"/>
-              </a:rPr>
-              <a:t>countries, ESS respondents' own attainment</a:t>
             </a:r>
           </a:p>
         </p:txBody>

--- a/deck/The_Education_Exception.pptx
+++ b/deck/The_Education_Exception.pptx
@@ -46,9 +46,6 @@
     <p:sldId id="294" r:id="rId45"/>
     <p:sldId id="295" r:id="rId46"/>
     <p:sldId id="296" r:id="rId47"/>
-    <p:sldId id="297" r:id="rId48"/>
-    <p:sldId id="298" r:id="rId49"/>
-    <p:sldId id="299" r:id="rId50"/>
   </p:sldIdLst>
   <p:sldSz cx="12191695" cy="6858000" type="screen4x3"/>
   <p:notesSz cx="6858000" cy="9144000"/>
@@ -3310,7 +3307,7 @@
                 </a:solidFill>
                 <a:latin typeface="Georgia"/>
               </a:rPr>
-              <a:t>A commentary in four acts, on why development predicts where wellbeing is high but not when it rises — and on the one construct that behaves differently</a:t>
+              <a:t>A commentary in three acts, on why development predicts where wellbeing is high but not when it rises — and on the one construct that behaves differently</a:t>
             </a:r>
           </a:p>
         </p:txBody>
@@ -3573,7 +3570,7 @@
                 </a:solidFill>
                 <a:latin typeface="Georgia"/>
               </a:rPr>
-              <a:t>Education is the odd one out — under one specific measurement</a:t>
+              <a:t>So what is it about education?</a:t>
             </a:r>
           </a:p>
         </p:txBody>
@@ -5868,7 +5865,7 @@
                 </a:solidFill>
                 <a:latin typeface="Georgia"/>
               </a:rPr>
-              <a:t>Scale changes which lever matters</a:t>
+              <a:t>Priorities, and what kind of education</a:t>
             </a:r>
           </a:p>
         </p:txBody>
@@ -5913,7 +5910,7 @@
                 </a:solidFill>
                 <a:latin typeface="Georgia"/>
               </a:rPr>
-              <a:t>Everything above compares countries. Inside countries the ordering of predictors is different — which matters, because most education and health policy is made at the subnational scale.</a:t>
+              <a:t>Two questions follow. Where should the lever be pulled — which turns on scale, because the ordering of predictors inverts inside countries. And what kind of education, because the wellbeing signal sits with attainment and access rather than with the measured learning the post-2030 architecture is built around.</a:t>
             </a:r>
           </a:p>
         </p:txBody>
@@ -6019,7 +6016,7 @@
                 </a:solidFill>
                 <a:latin typeface="Consolas"/>
               </a:rPr>
-              <a:t>+0.51</a:t>
+              <a:t>12.7%</a:t>
             </a:r>
           </a:p>
           <a:p>
@@ -6041,7 +6038,7 @@
                 </a:solidFill>
                 <a:latin typeface="Calibri"/>
               </a:rPr>
-              <a:t>self-rated health, within countries</a:t>
+              <a:t>access &amp; participation</a:t>
             </a:r>
           </a:p>
         </p:txBody>
@@ -6083,7 +6080,7 @@
                 </a:solidFill>
                 <a:latin typeface="Consolas"/>
               </a:rPr>
-              <a:t>3 / 16</a:t>
+              <a:t>0.9%</a:t>
             </a:r>
           </a:p>
           <a:p>
@@ -6105,7 +6102,7 @@
                 </a:solidFill>
                 <a:latin typeface="Calibri"/>
               </a:rPr>
-              <a:t>countries with a significant regional gradient</a:t>
+              <a:t>measured learning outcomes</a:t>
             </a:r>
           </a:p>
         </p:txBody>
@@ -6173,7 +6170,7 @@
                 </a:solidFill>
                 <a:latin typeface="Consolas"/>
               </a:rPr>
-              <a:t>DISPERSION</a:t>
+              <a:t>WHERE THE LEVER IS</a:t>
             </a:r>
           </a:p>
         </p:txBody>
@@ -6218,7 +6215,7 @@
                 </a:solidFill>
                 <a:latin typeface="Georgia"/>
               </a:rPr>
-              <a:t>Below the top tier, countries contain multitudes</a:t>
+              <a:t>Development inequality inside countries mostly does not become wellbeing inequality</a:t>
             </a:r>
           </a:p>
         </p:txBody>
@@ -6263,7 +6260,29 @@
                 </a:solidFill>
                 <a:latin typeface="Calibri"/>
               </a:rPr>
-              <a:t>Germany's regions span 0.05 of subnational HDI. China's span 0.30 and India's 0.19 — several development tiers' worth of variation inside single countries. National averages hide most of the development story precisely where development varies most.</a:t>
+              <a:t>Below the Very High tier, countries contain multitudes. Germany's regions span 0.05 of subnational HDI; China's span 0.30 and India's 0.19 — several development tiers' worth of variation inside single countries. If regional development drove regional wellbeing, this is where it would show.</a:t>
+            </a:r>
+          </a:p>
+          <a:p>
+            <a:pPr>
+              <a:lnSpc>
+                <a:spcPct val="132000"/>
+              </a:lnSpc>
+              <a:spcBef>
+                <a:spcPts val="0"/>
+              </a:spcBef>
+              <a:spcAft>
+                <a:spcPts val="1100"/>
+              </a:spcAft>
+            </a:pPr>
+            <a:r>
+              <a:rPr sz="1150" b="0" i="0">
+                <a:solidFill>
+                  <a:srgbClr val="5A6068"/>
+                </a:solidFill>
+                <a:latin typeface="Calibri"/>
+              </a:rPr>
+              <a:t>It mostly doesn't. Holding country fixed and regressing region-mean life satisfaction on regional subnational HDI gives a significantly positive gradient in only 3 of 16 ESS countries — France, Belgium, and Germany — and the gradient is not steeper where internal inequality is larger. Which country's ladder you are on matters more than which rung you occupy within it.</a:t>
             </a:r>
           </a:p>
         </p:txBody>
@@ -6312,7 +6331,7 @@
       </p:sp>
       <p:pic>
         <p:nvPicPr>
-          <p:cNvPr id="6" name="Picture 5" descr="shdi_within_country_spread.png"/>
+          <p:cNvPr id="6" name="Picture 5" descr="within_country_gradient.png"/>
           <p:cNvPicPr>
             <a:picLocks noChangeAspect="1"/>
           </p:cNvPicPr>
@@ -6326,8 +6345,8 @@
         </p:blipFill>
         <p:spPr>
           <a:xfrm>
-            <a:off x="5120640" y="1068587"/>
-            <a:ext cx="6537960" cy="4254481"/>
+            <a:off x="5120640" y="1553033"/>
+            <a:ext cx="6537960" cy="3285590"/>
           </a:xfrm>
           <a:prstGeom prst="rect">
             <a:avLst/>
@@ -6374,7 +6393,7 @@
                 </a:solidFill>
                 <a:latin typeface="Calibri"/>
               </a:rPr>
-              <a:t>Every region a dot, two countries per UNDP development tier, 2022.</a:t>
+              <a:t>Within-country gradients of region-mean life satisfaction on regional SHDI, 16 ESS countries ordered by national HDI.</a:t>
             </a:r>
           </a:p>
         </p:txBody>
@@ -6724,7 +6743,7 @@
                 </a:solidFill>
                 <a:latin typeface="Calibri"/>
               </a:rPr>
-              <a:t>The collapse is not about the SDGs.</a:t>
+              <a:t>We replicate the SDG result outside the SDGs.</a:t>
             </a:r>
           </a:p>
           <a:p>
@@ -6746,7 +6765,7 @@
                 </a:solidFill>
                 <a:latin typeface="Calibri"/>
               </a:rPr>
-              <a:t>Same design, three development frameworks, two spatial scales, two wellbeing instruments. It replicates every time.</a:t>
+              <a:t>The same design on the HDI, on the subnational HDI, and against a second wellbeing survey. It collapses every time.</a:t>
             </a:r>
           </a:p>
         </p:txBody>
@@ -6874,7 +6893,7 @@
                 </a:solidFill>
                 <a:latin typeface="Calibri"/>
               </a:rPr>
-              <a:t>Something is different about education.</a:t>
+              <a:t>So what is it about education?</a:t>
             </a:r>
           </a:p>
           <a:p>
@@ -6896,7 +6915,7 @@
                 </a:solidFill>
                 <a:latin typeface="Calibri"/>
               </a:rPr>
-              <a:t>But only when education is measured as attainment and access — not as parity, and not as measured learning.</a:t>
+              <a:t>It is the one construct that holds at every level of aggregation — but only measured as attainment and access, not parity or measured learning.</a:t>
             </a:r>
           </a:p>
         </p:txBody>
@@ -7024,7 +7043,7 @@
                 </a:solidFill>
                 <a:latin typeface="Calibri"/>
               </a:rPr>
-              <a:t>The lever changes when the scale changes.</a:t>
+              <a:t>Which makes the policy question unavoidable.</a:t>
             </a:r>
           </a:p>
           <a:p>
@@ -7046,157 +7065,7 @@
                 </a:solidFill>
                 <a:latin typeface="Calibri"/>
               </a:rPr>
-              <a:t>Between countries, development leads. Inside them, health and trust do the work and development flattens.</a:t>
-            </a:r>
-          </a:p>
-        </p:txBody>
-      </p:sp>
-      <p:sp>
-        <p:nvSpPr>
-          <p:cNvPr id="15" name="Rectangle 14"/>
-          <p:cNvSpPr/>
-          <p:nvPr/>
-        </p:nvSpPr>
-        <p:spPr>
-          <a:xfrm>
-            <a:off x="6720840" y="5001768"/>
-            <a:ext cx="4846320" cy="9525"/>
-          </a:xfrm>
-          <a:prstGeom prst="rect">
-            <a:avLst/>
-          </a:prstGeom>
-          <a:solidFill>
-            <a:srgbClr val="CDD3DB"/>
-          </a:solidFill>
-          <a:ln>
-            <a:noFill/>
-          </a:ln>
-          <a:effectLst/>
-        </p:spPr>
-        <p:style>
-          <a:lnRef idx="1">
-            <a:schemeClr val="accent1"/>
-          </a:lnRef>
-          <a:fillRef idx="3">
-            <a:schemeClr val="accent1"/>
-          </a:fillRef>
-          <a:effectRef idx="2">
-            <a:schemeClr val="accent1"/>
-          </a:effectRef>
-          <a:fontRef idx="minor">
-            <a:schemeClr val="lt1"/>
-          </a:fontRef>
-        </p:style>
-        <p:txBody>
-          <a:bodyPr rtlCol="0" anchor="ctr"/>
-          <a:lstStyle/>
-          <a:p>
-            <a:pPr algn="ctr"/>
-          </a:p>
-        </p:txBody>
-      </p:sp>
-      <p:sp>
-        <p:nvSpPr>
-          <p:cNvPr id="16" name="TextBox 15"/>
-          <p:cNvSpPr txBox="1"/>
-          <p:nvPr/>
-        </p:nvSpPr>
-        <p:spPr>
-          <a:xfrm>
-            <a:off x="6720840" y="5148072"/>
-            <a:ext cx="502920" cy="457200"/>
-          </a:xfrm>
-          <a:prstGeom prst="rect">
-            <a:avLst/>
-          </a:prstGeom>
-          <a:noFill/>
-        </p:spPr>
-        <p:txBody>
-          <a:bodyPr wrap="square" lIns="0" rIns="0" tIns="0" bIns="0">
-            <a:spAutoFit/>
-          </a:bodyPr>
-          <a:lstStyle/>
-          <a:p>
-            <a:pPr>
-              <a:spcBef>
-                <a:spcPts val="0"/>
-              </a:spcBef>
-              <a:spcAft>
-                <a:spcPts val="0"/>
-              </a:spcAft>
-            </a:pPr>
-            <a:r>
-              <a:rPr sz="2000" b="0" i="0">
-                <a:solidFill>
-                  <a:srgbClr val="17549E"/>
-                </a:solidFill>
-                <a:latin typeface="Georgia"/>
-              </a:rPr>
-              <a:t>IV</a:t>
-            </a:r>
-          </a:p>
-        </p:txBody>
-      </p:sp>
-      <p:sp>
-        <p:nvSpPr>
-          <p:cNvPr id="17" name="TextBox 16"/>
-          <p:cNvSpPr txBox="1"/>
-          <p:nvPr/>
-        </p:nvSpPr>
-        <p:spPr>
-          <a:xfrm>
-            <a:off x="7360920" y="5148072"/>
-            <a:ext cx="4206240" cy="1097280"/>
-          </a:xfrm>
-          <a:prstGeom prst="rect">
-            <a:avLst/>
-          </a:prstGeom>
-          <a:noFill/>
-        </p:spPr>
-        <p:txBody>
-          <a:bodyPr wrap="square" lIns="0" rIns="0" tIns="0" bIns="0">
-            <a:spAutoFit/>
-          </a:bodyPr>
-          <a:lstStyle/>
-          <a:p>
-            <a:pPr>
-              <a:spcBef>
-                <a:spcPts val="0"/>
-              </a:spcBef>
-              <a:spcAft>
-                <a:spcPts val="300"/>
-              </a:spcAft>
-            </a:pPr>
-            <a:r>
-              <a:rPr sz="1350" b="1" i="0">
-                <a:solidFill>
-                  <a:srgbClr val="14171C"/>
-                </a:solidFill>
-                <a:latin typeface="Calibri"/>
-              </a:rPr>
-              <a:t>So we put a question to the field.</a:t>
-            </a:r>
-          </a:p>
-          <a:p>
-            <a:pPr>
-              <a:lnSpc>
-                <a:spcPct val="125000"/>
-              </a:lnSpc>
-              <a:spcBef>
-                <a:spcPts val="0"/>
-              </a:spcBef>
-              <a:spcAft>
-                <a:spcPts val="0"/>
-              </a:spcAft>
-            </a:pPr>
-            <a:r>
-              <a:rPr sz="1100" b="0" i="0">
-                <a:solidFill>
-                  <a:srgbClr val="5A6068"/>
-                </a:solidFill>
-                <a:latin typeface="Calibri"/>
-              </a:rPr>
-              <a:t>The global education architecture is built around learning outcomes. The wellbeing evidence points at attainment.</a:t>
+              <a:t>What this means for priorities, what kind of education it points at, and the question we are putting to the field.</a:t>
             </a:r>
           </a:p>
         </p:txBody>
@@ -7264,7 +7133,7 @@
                 </a:solidFill>
                 <a:latin typeface="Consolas"/>
               </a:rPr>
-              <a:t>THE NON-RESULT</a:t>
+              <a:t>THE FLIP</a:t>
             </a:r>
           </a:p>
         </p:txBody>
@@ -7309,7 +7178,7 @@
                 </a:solidFill>
                 <a:latin typeface="Georgia"/>
               </a:rPr>
-              <a:t>Development inequality mostly does not become wellbeing inequality</a:t>
+              <a:t>Health and social trust do inside countries what development does between them</a:t>
             </a:r>
           </a:p>
         </p:txBody>
@@ -7354,7 +7223,29 @@
                 </a:solidFill>
                 <a:latin typeface="Calibri"/>
               </a:rPr>
-              <a:t>Holding country fixed and regressing region-mean life satisfaction on regional subnational HDI gives a significantly positive gradient in only 3 of 16 ESS countries — France, Belgium, and Germany — and the gradient is not steeper in countries with larger internal inequality. Which country's ladder you are on matters more than which rung you occupy within it.</a:t>
+              <a:t>Between countries, development leads and the two wellbeing instruments agree almost exactly: the HDI correlates at r = +0.89 with World Happiness Report happiness and +0.87 with ESS life satisfaction, with trust and health close behind and all three positive.</a:t>
+            </a:r>
+          </a:p>
+          <a:p>
+            <a:pPr>
+              <a:lnSpc>
+                <a:spcPct val="132000"/>
+              </a:lnSpc>
+              <a:spcBef>
+                <a:spcPts val="0"/>
+              </a:spcBef>
+              <a:spcAft>
+                <a:spcPts val="1100"/>
+              </a:spcAft>
+            </a:pPr>
+            <a:r>
+              <a:rPr sz="1150" b="0" i="0">
+                <a:solidFill>
+                  <a:srgbClr val="5A6068"/>
+                </a:solidFill>
+                <a:latin typeface="Calibri"/>
+              </a:rPr>
+              <a:t>Within countries the ranking inverts. Development falls to a median regional correlation of +0.15, significant in 3 of 16 countries, while self-rated health holds at +0.51 (8 of 16) and social trust at +0.49 (6 of 16). The World Happiness Report cannot see this at all — it has no subnational values. It is the specific thing the ESS adds.</a:t>
             </a:r>
           </a:p>
         </p:txBody>
@@ -7403,7 +7294,7 @@
       </p:sp>
       <p:pic>
         <p:nvPicPr>
-          <p:cNvPr id="6" name="Picture 5" descr="within_country_gradient.png"/>
+          <p:cNvPr id="6" name="Picture 5" descr="ranking_flip.png"/>
           <p:cNvPicPr>
             <a:picLocks noChangeAspect="1"/>
           </p:cNvPicPr>
@@ -7417,8 +7308,8 @@
         </p:blipFill>
         <p:spPr>
           <a:xfrm>
-            <a:off x="5120640" y="1553033"/>
-            <a:ext cx="6537960" cy="3285590"/>
+            <a:off x="5120640" y="1711429"/>
+            <a:ext cx="6537960" cy="2968798"/>
           </a:xfrm>
           <a:prstGeom prst="rect">
             <a:avLst/>
@@ -7465,7 +7356,7 @@
                 </a:solidFill>
                 <a:latin typeface="Calibri"/>
               </a:rPr>
-              <a:t>Within-country gradients of region-mean life satisfaction on regional SHDI, 16 ESS countries ordered by national HDI.</a:t>
+              <a:t>Candidate Figure 2. National correlations beside within-country regional correlations, for development, health, and trust.</a:t>
             </a:r>
           </a:p>
         </p:txBody>
@@ -7505,7 +7396,7 @@
         <p:spPr>
           <a:xfrm>
             <a:off x="566928" y="502920"/>
-            <a:ext cx="4160520" cy="274320"/>
+            <a:ext cx="8595360" cy="274320"/>
           </a:xfrm>
           <a:prstGeom prst="rect">
             <a:avLst/>
@@ -7533,7 +7424,7 @@
                 </a:solidFill>
                 <a:latin typeface="Consolas"/>
               </a:rPr>
-              <a:t>THE FLIP</a:t>
+              <a:t>ON PRIORITIES</a:t>
             </a:r>
           </a:p>
         </p:txBody>
@@ -7547,7 +7438,7 @@
         <p:spPr>
           <a:xfrm>
             <a:off x="566928" y="914400"/>
-            <a:ext cx="4160520" cy="1371600"/>
+            <a:ext cx="8595360" cy="1371600"/>
           </a:xfrm>
           <a:prstGeom prst="rect">
             <a:avLst/>
@@ -7572,13 +7463,13 @@
               </a:spcAft>
             </a:pPr>
             <a:r>
-              <a:rPr sz="2300" b="0" i="0">
+              <a:rPr sz="2700" b="0" i="0">
                 <a:solidFill>
                   <a:srgbClr val="14171C"/>
                 </a:solidFill>
                 <a:latin typeface="Georgia"/>
               </a:rPr>
-              <a:t>Health and social trust do inside countries what development does between them</a:t>
+              <a:t>Indicator dashboards are not wellbeing instruments</a:t>
             </a:r>
           </a:p>
         </p:txBody>
@@ -7591,8 +7482,8 @@
         </p:nvSpPr>
         <p:spPr>
           <a:xfrm>
-            <a:off x="566928" y="2331720"/>
-            <a:ext cx="4160520" cy="3840480"/>
+            <a:off x="566928" y="2286000"/>
+            <a:ext cx="8595360" cy="3840480"/>
           </a:xfrm>
           <a:prstGeom prst="rect">
             <a:avLst/>
@@ -7617,13 +7508,13 @@
               </a:spcAft>
             </a:pPr>
             <a:r>
-              <a:rPr sz="1150" b="0" i="0">
+              <a:rPr sz="1400" b="0" i="0">
                 <a:solidFill>
                   <a:srgbClr val="5A6068"/>
                 </a:solidFill>
                 <a:latin typeface="Calibri"/>
               </a:rPr>
-              <a:t>Between countries, development leads and the two wellbeing instruments agree almost exactly: the HDI correlates at r = +0.89 with World Happiness Report happiness and +0.87 with ESS life satisfaction, with trust and health close behind and all three positive.</a:t>
+              <a:t>Development indicators tell you reliably where wellbeing is high. They tell you almost nothing about when it will rise. Across every framework tested here, year-on-year indicator movement carries essentially no wellbeing information within the measurement window — a decade or so.</a:t>
             </a:r>
           </a:p>
           <a:p>
@@ -7639,13 +7530,13 @@
               </a:spcAft>
             </a:pPr>
             <a:r>
-              <a:rPr sz="1150" b="0" i="0">
+              <a:rPr sz="1400" b="0" i="0">
                 <a:solidFill>
                   <a:srgbClr val="5A6068"/>
                 </a:solidFill>
                 <a:latin typeface="Calibri"/>
               </a:rPr>
-              <a:t>Within countries the ranking inverts. Development falls to a median regional correlation of +0.15, significant in 3 of 16 countries, while self-rated health holds at +0.51 (8 of 16) and social trust at +0.49 (6 of 16). The World Happiness Report cannot see this at all — it has no subnational values. It is the specific thing the ESS adds.</a:t>
+              <a:t>The implication is about horizon and instrument, not about whether development matters. A monitoring architecture designed to reward annual indicator movement should not be read as tracking wellbeing, and a government that improves its dashboard position in a given year should not expect a wellbeing dividend inside the same electoral cycle.</a:t>
             </a:r>
           </a:p>
         </p:txBody>
@@ -7688,75 +7579,6 @@
                 <a:latin typeface="Consolas"/>
               </a:rPr>
               <a:t>III</a:t>
-            </a:r>
-          </a:p>
-        </p:txBody>
-      </p:sp>
-      <p:pic>
-        <p:nvPicPr>
-          <p:cNvPr id="6" name="Picture 5" descr="ranking_flip.png"/>
-          <p:cNvPicPr>
-            <a:picLocks noChangeAspect="1"/>
-          </p:cNvPicPr>
-          <p:nvPr/>
-        </p:nvPicPr>
-        <p:blipFill>
-          <a:blip r:embed="rId2"/>
-          <a:stretch>
-            <a:fillRect/>
-          </a:stretch>
-        </p:blipFill>
-        <p:spPr>
-          <a:xfrm>
-            <a:off x="5120640" y="1711429"/>
-            <a:ext cx="6537960" cy="2968798"/>
-          </a:xfrm>
-          <a:prstGeom prst="rect">
-            <a:avLst/>
-          </a:prstGeom>
-        </p:spPr>
-      </p:pic>
-      <p:sp>
-        <p:nvSpPr>
-          <p:cNvPr id="7" name="TextBox 6"/>
-          <p:cNvSpPr txBox="1"/>
-          <p:nvPr/>
-        </p:nvSpPr>
-        <p:spPr>
-          <a:xfrm>
-            <a:off x="5120640" y="5897880"/>
-            <a:ext cx="6537960" cy="731520"/>
-          </a:xfrm>
-          <a:prstGeom prst="rect">
-            <a:avLst/>
-          </a:prstGeom>
-          <a:noFill/>
-        </p:spPr>
-        <p:txBody>
-          <a:bodyPr wrap="square" lIns="0" rIns="0" tIns="0" bIns="0">
-            <a:spAutoFit/>
-          </a:bodyPr>
-          <a:lstStyle/>
-          <a:p>
-            <a:pPr>
-              <a:lnSpc>
-                <a:spcPct val="125000"/>
-              </a:lnSpc>
-              <a:spcBef>
-                <a:spcPts val="0"/>
-              </a:spcBef>
-              <a:spcAft>
-                <a:spcPts val="0"/>
-              </a:spcAft>
-            </a:pPr>
-            <a:r>
-              <a:rPr sz="900" b="0" i="0">
-                <a:solidFill>
-                  <a:srgbClr val="868D96"/>
-                </a:solidFill>
-                <a:latin typeface="Calibri"/>
-              </a:rPr>
-              <a:t>Candidate Figure 2. National correlations beside within-country regional correlations, for development, health, and trust.</a:t>
             </a:r>
           </a:p>
         </p:txBody>
@@ -7824,7 +7646,7 @@
                 </a:solidFill>
                 <a:latin typeface="Consolas"/>
               </a:rPr>
-              <a:t>THE LIMITATION</a:t>
+              <a:t>ON WHAT KIND OF EDUCATION</a:t>
             </a:r>
           </a:p>
         </p:txBody>
@@ -7869,7 +7691,7 @@
                 </a:solidFill>
                 <a:latin typeface="Georgia"/>
               </a:rPr>
-              <a:t>This part of the argument is Europe-only, and has to say so</a:t>
+              <a:t>The consensus moved to learning; the wellbeing evidence points at attainment</a:t>
             </a:r>
           </a:p>
         </p:txBody>
@@ -7914,7 +7736,29 @@
                 </a:solidFill>
                 <a:latin typeface="Calibri"/>
               </a:rPr>
-              <a:t>The ESS is the only regional wellbeing source with the coverage this design needs; Gallup's subnational files are paywalled. Act III therefore generalises across 16 European countries and not beyond them. It should be stated as a scope condition in the text rather than buried in a limitations paragraph, because the flip is the most policy-relevant result in the commentary and will be the most contested.</a:t>
+              <a:t>Global education policy has shifted decisively over the past decade from schooling to learning — the learning-crisis framing, learning-poverty targets, and an indicator architecture built around measured proficiency. The premise is that years in school without demonstrated learning are an empty metric.</a:t>
+            </a:r>
+          </a:p>
+          <a:p>
+            <a:pPr>
+              <a:lnSpc>
+                <a:spcPct val="132000"/>
+              </a:lnSpc>
+              <a:spcBef>
+                <a:spcPts val="0"/>
+              </a:spcBef>
+              <a:spcAft>
+                <a:spcPts val="1100"/>
+              </a:spcAft>
+            </a:pPr>
+            <a:r>
+              <a:rPr sz="1400" b="0" i="0">
+                <a:solidFill>
+                  <a:srgbClr val="5A6068"/>
+                </a:solidFill>
+                <a:latin typeface="Calibri"/>
+              </a:rPr>
+              <a:t>Every level of aggregation we can test points the other way. Attainment and access carry the wellbeing signal — 12.7% for SDG4 access, 34.0% and 40.7% for the HDI's schooling components, 32 of 36 countries at the individual level — while measured learning outcomes sit at 0.9% and parity ratios at 2.5%.</a:t>
             </a:r>
           </a:p>
         </p:txBody>
@@ -7970,6 +7814,494 @@
 </file>
 
 <file path=ppt/slides/slide23.xml><?xml version="1.0" encoding="utf-8"?>
+<p:sld xmlns:a="http://schemas.openxmlformats.org/drawingml/2006/main" xmlns:p="http://schemas.openxmlformats.org/presentationml/2006/main" xmlns:r="http://schemas.openxmlformats.org/officeDocument/2006/relationships">
+  <p:cSld>
+    <p:bg>
+      <p:bgPr>
+        <a:solidFill>
+          <a:srgbClr val="FCFCFB"/>
+        </a:solidFill>
+        <a:effectLst/>
+      </p:bgPr>
+    </p:bg>
+    <p:spTree>
+      <p:nvGrpSpPr>
+        <p:cNvPr id="1" name=""/>
+        <p:cNvGrpSpPr/>
+        <p:nvPr/>
+      </p:nvGrpSpPr>
+      <p:grpSpPr/>
+      <p:sp>
+        <p:nvSpPr>
+          <p:cNvPr id="2" name="TextBox 1"/>
+          <p:cNvSpPr txBox="1"/>
+          <p:nvPr/>
+        </p:nvSpPr>
+        <p:spPr>
+          <a:xfrm>
+            <a:off x="566928" y="502920"/>
+            <a:ext cx="8595360" cy="274320"/>
+          </a:xfrm>
+          <a:prstGeom prst="rect">
+            <a:avLst/>
+          </a:prstGeom>
+          <a:noFill/>
+        </p:spPr>
+        <p:txBody>
+          <a:bodyPr wrap="square" lIns="0" rIns="0" tIns="0" bIns="0">
+            <a:spAutoFit/>
+          </a:bodyPr>
+          <a:lstStyle/>
+          <a:p>
+            <a:pPr>
+              <a:spcBef>
+                <a:spcPts val="0"/>
+              </a:spcBef>
+              <a:spcAft>
+                <a:spcPts val="0"/>
+              </a:spcAft>
+            </a:pPr>
+            <a:r>
+              <a:rPr sz="1000" b="0" i="0">
+                <a:solidFill>
+                  <a:srgbClr val="A63A30"/>
+                </a:solidFill>
+                <a:latin typeface="Consolas"/>
+              </a:rPr>
+              <a:t>WHAT WE CANNOT SAY</a:t>
+            </a:r>
+          </a:p>
+        </p:txBody>
+      </p:sp>
+      <p:sp>
+        <p:nvSpPr>
+          <p:cNvPr id="3" name="TextBox 2"/>
+          <p:cNvSpPr txBox="1"/>
+          <p:nvPr/>
+        </p:nvSpPr>
+        <p:spPr>
+          <a:xfrm>
+            <a:off x="566928" y="914400"/>
+            <a:ext cx="8595360" cy="1371600"/>
+          </a:xfrm>
+          <a:prstGeom prst="rect">
+            <a:avLst/>
+          </a:prstGeom>
+          <a:noFill/>
+        </p:spPr>
+        <p:txBody>
+          <a:bodyPr wrap="square" lIns="0" rIns="0" tIns="0" bIns="0">
+            <a:spAutoFit/>
+          </a:bodyPr>
+          <a:lstStyle/>
+          <a:p>
+            <a:pPr>
+              <a:lnSpc>
+                <a:spcPct val="108000"/>
+              </a:lnSpc>
+              <a:spcBef>
+                <a:spcPts val="0"/>
+              </a:spcBef>
+              <a:spcAft>
+                <a:spcPts val="0"/>
+              </a:spcAft>
+            </a:pPr>
+            <a:r>
+              <a:rPr sz="2700" b="0" i="0">
+                <a:solidFill>
+                  <a:srgbClr val="14171C"/>
+                </a:solidFill>
+                <a:latin typeface="Georgia"/>
+              </a:rPr>
+              <a:t>Three limits that keep this a question rather than a recommendation</a:t>
+            </a:r>
+          </a:p>
+        </p:txBody>
+      </p:sp>
+      <p:sp>
+        <p:nvSpPr>
+          <p:cNvPr id="4" name="TextBox 3"/>
+          <p:cNvSpPr txBox="1"/>
+          <p:nvPr/>
+        </p:nvSpPr>
+        <p:spPr>
+          <a:xfrm>
+            <a:off x="566928" y="2286000"/>
+            <a:ext cx="8595360" cy="3840480"/>
+          </a:xfrm>
+          <a:prstGeom prst="rect">
+            <a:avLst/>
+          </a:prstGeom>
+          <a:noFill/>
+        </p:spPr>
+        <p:txBody>
+          <a:bodyPr wrap="square" lIns="0" rIns="0" tIns="0" bIns="0">
+            <a:spAutoFit/>
+          </a:bodyPr>
+          <a:lstStyle/>
+          <a:p>
+            <a:pPr>
+              <a:lnSpc>
+                <a:spcPct val="132000"/>
+              </a:lnSpc>
+              <a:spcBef>
+                <a:spcPts val="0"/>
+              </a:spcBef>
+              <a:spcAft>
+                <a:spcPts val="1100"/>
+              </a:spcAft>
+            </a:pPr>
+            <a:r>
+              <a:rPr sz="1400" b="0" i="0">
+                <a:solidFill>
+                  <a:srgbClr val="5A6068"/>
+                </a:solidFill>
+                <a:latin typeface="Calibri"/>
+              </a:rPr>
+              <a:t>None of this is causal. The design is correlational throughout, and the levels results in particular are cross-sectional comparisons between countries.</a:t>
+            </a:r>
+          </a:p>
+          <a:p>
+            <a:pPr>
+              <a:lnSpc>
+                <a:spcPct val="132000"/>
+              </a:lnSpc>
+              <a:spcBef>
+                <a:spcPts val="0"/>
+              </a:spcBef>
+              <a:spcAft>
+                <a:spcPts val="1100"/>
+              </a:spcAft>
+            </a:pPr>
+            <a:r>
+              <a:rPr sz="1400" b="0" i="0">
+                <a:solidFill>
+                  <a:srgbClr val="5A6068"/>
+                </a:solidFill>
+                <a:latin typeface="Calibri"/>
+              </a:rPr>
+              <a:t>Schooling cannot be separated from what schooling stands in for. Years attained proxy labour-market position, economic security, autonomy, and social standing, and this design cannot pull them apart. Individual effects are small: a median R² near 0.01.</a:t>
+            </a:r>
+          </a:p>
+          <a:p>
+            <a:pPr>
+              <a:lnSpc>
+                <a:spcPct val="132000"/>
+              </a:lnSpc>
+              <a:spcBef>
+                <a:spcPts val="0"/>
+              </a:spcBef>
+              <a:spcAft>
+                <a:spcPts val="1100"/>
+              </a:spcAft>
+            </a:pPr>
+            <a:r>
+              <a:rPr sz="1400" b="0" i="0">
+                <a:solidFill>
+                  <a:srgbClr val="5A6068"/>
+                </a:solidFill>
+                <a:latin typeface="Calibri"/>
+              </a:rPr>
+              <a:t>The within-country results are Europe-only. The ESS is the only regional wellbeing source with the coverage this design needs — Gallup's subnational files are paywalled — so the priorities argument generalises across 16 European countries and not beyond them. That belongs in the text as a scope condition, not buried in a limitations paragraph, because the ranking flip is the most policy-relevant result here and will be the most contested.</a:t>
+            </a:r>
+          </a:p>
+          <a:p>
+            <a:pPr>
+              <a:lnSpc>
+                <a:spcPct val="132000"/>
+              </a:lnSpc>
+              <a:spcBef>
+                <a:spcPts val="0"/>
+              </a:spcBef>
+              <a:spcAft>
+                <a:spcPts val="1100"/>
+              </a:spcAft>
+            </a:pPr>
+            <a:r>
+              <a:rPr sz="1400" b="0" i="0">
+                <a:solidFill>
+                  <a:srgbClr val="5A6068"/>
+                </a:solidFill>
+                <a:latin typeface="Calibri"/>
+              </a:rPr>
+              <a:t>Some of the parity and learning indicators' weakness is coverage rather than construct — they are the youngest and thinnest series in the SDG database, and thin series fail significance tests for uninteresting reasons. The commentary should concede this explicitly and say what would settle it.</a:t>
+            </a:r>
+          </a:p>
+        </p:txBody>
+      </p:sp>
+      <p:sp>
+        <p:nvSpPr>
+          <p:cNvPr id="5" name="TextBox 4"/>
+          <p:cNvSpPr txBox="1"/>
+          <p:nvPr/>
+        </p:nvSpPr>
+        <p:spPr>
+          <a:xfrm>
+            <a:off x="11338560" y="6263640"/>
+            <a:ext cx="548640" cy="274320"/>
+          </a:xfrm>
+          <a:prstGeom prst="rect">
+            <a:avLst/>
+          </a:prstGeom>
+          <a:noFill/>
+        </p:spPr>
+        <p:txBody>
+          <a:bodyPr wrap="square" lIns="0" rIns="0" tIns="0" bIns="0">
+            <a:spAutoFit/>
+          </a:bodyPr>
+          <a:lstStyle/>
+          <a:p>
+            <a:pPr algn="r">
+              <a:spcBef>
+                <a:spcPts val="0"/>
+              </a:spcBef>
+              <a:spcAft>
+                <a:spcPts val="0"/>
+              </a:spcAft>
+            </a:pPr>
+            <a:r>
+              <a:rPr sz="1100" b="0" i="0">
+                <a:solidFill>
+                  <a:srgbClr val="868D96"/>
+                </a:solidFill>
+                <a:latin typeface="Consolas"/>
+              </a:rPr>
+              <a:t>III</a:t>
+            </a:r>
+          </a:p>
+        </p:txBody>
+      </p:sp>
+    </p:spTree>
+  </p:cSld>
+  <p:clrMapOvr>
+    <a:masterClrMapping/>
+  </p:clrMapOvr>
+</p:sld>
+</file>
+
+<file path=ppt/slides/slide24.xml><?xml version="1.0" encoding="utf-8"?>
+<p:sld xmlns:a="http://schemas.openxmlformats.org/drawingml/2006/main" xmlns:p="http://schemas.openxmlformats.org/presentationml/2006/main" xmlns:r="http://schemas.openxmlformats.org/officeDocument/2006/relationships">
+  <p:cSld>
+    <p:bg>
+      <p:bgPr>
+        <a:solidFill>
+          <a:srgbClr val="FCFCFB"/>
+        </a:solidFill>
+        <a:effectLst/>
+      </p:bgPr>
+    </p:bg>
+    <p:spTree>
+      <p:nvGrpSpPr>
+        <p:cNvPr id="1" name=""/>
+        <p:cNvGrpSpPr/>
+        <p:nvPr/>
+      </p:nvGrpSpPr>
+      <p:grpSpPr/>
+      <p:sp>
+        <p:nvSpPr>
+          <p:cNvPr id="2" name="TextBox 1"/>
+          <p:cNvSpPr txBox="1"/>
+          <p:nvPr/>
+        </p:nvSpPr>
+        <p:spPr>
+          <a:xfrm>
+            <a:off x="566928" y="502920"/>
+            <a:ext cx="8595360" cy="274320"/>
+          </a:xfrm>
+          <a:prstGeom prst="rect">
+            <a:avLst/>
+          </a:prstGeom>
+          <a:noFill/>
+        </p:spPr>
+        <p:txBody>
+          <a:bodyPr wrap="square" lIns="0" rIns="0" tIns="0" bIns="0">
+            <a:spAutoFit/>
+          </a:bodyPr>
+          <a:lstStyle/>
+          <a:p>
+            <a:pPr>
+              <a:spcBef>
+                <a:spcPts val="0"/>
+              </a:spcBef>
+              <a:spcAft>
+                <a:spcPts val="0"/>
+              </a:spcAft>
+            </a:pPr>
+            <a:r>
+              <a:rPr sz="1000" b="0" i="0">
+                <a:solidFill>
+                  <a:srgbClr val="A63A30"/>
+                </a:solidFill>
+                <a:latin typeface="Consolas"/>
+              </a:rPr>
+              <a:t>THE ASK</a:t>
+            </a:r>
+          </a:p>
+        </p:txBody>
+      </p:sp>
+      <p:sp>
+        <p:nvSpPr>
+          <p:cNvPr id="3" name="TextBox 2"/>
+          <p:cNvSpPr txBox="1"/>
+          <p:nvPr/>
+        </p:nvSpPr>
+        <p:spPr>
+          <a:xfrm>
+            <a:off x="566928" y="914400"/>
+            <a:ext cx="8595360" cy="1371600"/>
+          </a:xfrm>
+          <a:prstGeom prst="rect">
+            <a:avLst/>
+          </a:prstGeom>
+          <a:noFill/>
+        </p:spPr>
+        <p:txBody>
+          <a:bodyPr wrap="square" lIns="0" rIns="0" tIns="0" bIns="0">
+            <a:spAutoFit/>
+          </a:bodyPr>
+          <a:lstStyle/>
+          <a:p>
+            <a:pPr>
+              <a:lnSpc>
+                <a:spcPct val="108000"/>
+              </a:lnSpc>
+              <a:spcBef>
+                <a:spcPts val="0"/>
+              </a:spcBef>
+              <a:spcAft>
+                <a:spcPts val="0"/>
+              </a:spcAft>
+            </a:pPr>
+            <a:r>
+              <a:rPr sz="2700" b="0" i="0">
+                <a:solidFill>
+                  <a:srgbClr val="14171C"/>
+                </a:solidFill>
+                <a:latin typeface="Georgia"/>
+              </a:rPr>
+              <a:t>Should wellbeing be a criterion for education targets after 2030?</a:t>
+            </a:r>
+          </a:p>
+        </p:txBody>
+      </p:sp>
+      <p:sp>
+        <p:nvSpPr>
+          <p:cNvPr id="4" name="TextBox 3"/>
+          <p:cNvSpPr txBox="1"/>
+          <p:nvPr/>
+        </p:nvSpPr>
+        <p:spPr>
+          <a:xfrm>
+            <a:off x="566928" y="2286000"/>
+            <a:ext cx="8595360" cy="3840480"/>
+          </a:xfrm>
+          <a:prstGeom prst="rect">
+            <a:avLst/>
+          </a:prstGeom>
+          <a:noFill/>
+        </p:spPr>
+        <p:txBody>
+          <a:bodyPr wrap="square" lIns="0" rIns="0" tIns="0" bIns="0">
+            <a:spAutoFit/>
+          </a:bodyPr>
+          <a:lstStyle/>
+          <a:p>
+            <a:pPr>
+              <a:lnSpc>
+                <a:spcPct val="132000"/>
+              </a:lnSpc>
+              <a:spcBef>
+                <a:spcPts val="0"/>
+              </a:spcBef>
+              <a:spcAft>
+                <a:spcPts val="1100"/>
+              </a:spcAft>
+            </a:pPr>
+            <a:r>
+              <a:rPr sz="1400" b="0" i="0">
+                <a:solidFill>
+                  <a:srgbClr val="5A6068"/>
+                </a:solidFill>
+                <a:latin typeface="Calibri"/>
+              </a:rPr>
+              <a:t>That is the question the commentary exists to pose, and it has a sharp form: we have built a global education monitoring architecture around measured learning outcomes, and the wellbeing evidence points at years attained. If both are to be kept, someone has to say what the education system is being optimised for.</a:t>
+            </a:r>
+          </a:p>
+          <a:p>
+            <a:pPr>
+              <a:lnSpc>
+                <a:spcPct val="132000"/>
+              </a:lnSpc>
+              <a:spcBef>
+                <a:spcPts val="0"/>
+              </a:spcBef>
+              <a:spcAft>
+                <a:spcPts val="1100"/>
+              </a:spcAft>
+            </a:pPr>
+            <a:r>
+              <a:rPr sz="1400" b="0" i="0">
+                <a:solidFill>
+                  <a:srgbClr val="5A6068"/>
+                </a:solidFill>
+                <a:latin typeface="Calibri"/>
+              </a:rPr>
+              <a:t>A commentary cannot settle that. It can put the disagreement on the record with the evidence attached, which is what the three acts are for.</a:t>
+            </a:r>
+          </a:p>
+        </p:txBody>
+      </p:sp>
+      <p:sp>
+        <p:nvSpPr>
+          <p:cNvPr id="5" name="TextBox 4"/>
+          <p:cNvSpPr txBox="1"/>
+          <p:nvPr/>
+        </p:nvSpPr>
+        <p:spPr>
+          <a:xfrm>
+            <a:off x="11338560" y="6263640"/>
+            <a:ext cx="548640" cy="274320"/>
+          </a:xfrm>
+          <a:prstGeom prst="rect">
+            <a:avLst/>
+          </a:prstGeom>
+          <a:noFill/>
+        </p:spPr>
+        <p:txBody>
+          <a:bodyPr wrap="square" lIns="0" rIns="0" tIns="0" bIns="0">
+            <a:spAutoFit/>
+          </a:bodyPr>
+          <a:lstStyle/>
+          <a:p>
+            <a:pPr algn="r">
+              <a:spcBef>
+                <a:spcPts val="0"/>
+              </a:spcBef>
+              <a:spcAft>
+                <a:spcPts val="0"/>
+              </a:spcAft>
+            </a:pPr>
+            <a:r>
+              <a:rPr sz="1100" b="0" i="0">
+                <a:solidFill>
+                  <a:srgbClr val="868D96"/>
+                </a:solidFill>
+                <a:latin typeface="Consolas"/>
+              </a:rPr>
+              <a:t>III</a:t>
+            </a:r>
+          </a:p>
+        </p:txBody>
+      </p:sp>
+    </p:spTree>
+  </p:cSld>
+  <p:clrMapOvr>
+    <a:masterClrMapping/>
+  </p:clrMapOvr>
+</p:sld>
+</file>
+
+<file path=ppt/slides/slide25.xml><?xml version="1.0" encoding="utf-8"?>
 <p:sld xmlns:a="http://schemas.openxmlformats.org/drawingml/2006/main" xmlns:p="http://schemas.openxmlformats.org/presentationml/2006/main" xmlns:r="http://schemas.openxmlformats.org/officeDocument/2006/relationships">
   <p:cSld>
     <p:bg>
@@ -8113,665 +8445,7 @@
                 </a:solidFill>
                 <a:latin typeface="Georgia"/>
               </a:rPr>
-              <a:t>Two different policy readings follow depending on scale, and the commentary should say both. Between countries, raising human development is where wellbeing differences live. Inside a country, equalising regional development is not obviously a wellbeing lever, while health and social connection are.</a:t>
-            </a:r>
-          </a:p>
-        </p:txBody>
-      </p:sp>
-    </p:spTree>
-  </p:cSld>
-  <p:clrMapOvr>
-    <a:masterClrMapping/>
-  </p:clrMapOvr>
-</p:sld>
-</file>
-
-<file path=ppt/slides/slide24.xml><?xml version="1.0" encoding="utf-8"?>
-<p:sld xmlns:a="http://schemas.openxmlformats.org/drawingml/2006/main" xmlns:p="http://schemas.openxmlformats.org/presentationml/2006/main" xmlns:r="http://schemas.openxmlformats.org/officeDocument/2006/relationships">
-  <p:cSld>
-    <p:bg>
-      <p:bgPr>
-        <a:solidFill>
-          <a:srgbClr val="14171C"/>
-        </a:solidFill>
-        <a:effectLst/>
-      </p:bgPr>
-    </p:bg>
-    <p:spTree>
-      <p:nvGrpSpPr>
-        <p:cNvPr id="1" name=""/>
-        <p:cNvGrpSpPr/>
-        <p:nvPr/>
-      </p:nvGrpSpPr>
-      <p:grpSpPr/>
-      <p:sp>
-        <p:nvSpPr>
-          <p:cNvPr id="2" name="TextBox 1"/>
-          <p:cNvSpPr txBox="1"/>
-          <p:nvPr/>
-        </p:nvSpPr>
-        <p:spPr>
-          <a:xfrm>
-            <a:off x="8229600" y="822960"/>
-            <a:ext cx="3291840" cy="4114800"/>
-          </a:xfrm>
-          <a:prstGeom prst="rect">
-            <a:avLst/>
-          </a:prstGeom>
-          <a:noFill/>
-        </p:spPr>
-        <p:txBody>
-          <a:bodyPr wrap="square" lIns="0" rIns="0" tIns="0" bIns="0">
-            <a:spAutoFit/>
-          </a:bodyPr>
-          <a:lstStyle/>
-          <a:p>
-            <a:pPr algn="r">
-              <a:spcBef>
-                <a:spcPts val="0"/>
-              </a:spcBef>
-              <a:spcAft>
-                <a:spcPts val="0"/>
-              </a:spcAft>
-            </a:pPr>
-            <a:r>
-              <a:rPr sz="20000" b="0" i="0">
-                <a:solidFill>
-                  <a:srgbClr val="2A3340"/>
-                </a:solidFill>
-                <a:latin typeface="Georgia"/>
-              </a:rPr>
-              <a:t>IV</a:t>
-            </a:r>
-          </a:p>
-        </p:txBody>
-      </p:sp>
-      <p:sp>
-        <p:nvSpPr>
-          <p:cNvPr id="3" name="Rectangle 2"/>
-          <p:cNvSpPr/>
-          <p:nvPr/>
-        </p:nvSpPr>
-        <p:spPr>
-          <a:xfrm>
-            <a:off x="566928" y="1371600"/>
-            <a:ext cx="7315200" cy="25400"/>
-          </a:xfrm>
-          <a:prstGeom prst="rect">
-            <a:avLst/>
-          </a:prstGeom>
-          <a:solidFill>
-            <a:srgbClr val="C9D8EC"/>
-          </a:solidFill>
-          <a:ln>
-            <a:noFill/>
-          </a:ln>
-          <a:effectLst/>
-        </p:spPr>
-        <p:style>
-          <a:lnRef idx="1">
-            <a:schemeClr val="accent1"/>
-          </a:lnRef>
-          <a:fillRef idx="3">
-            <a:schemeClr val="accent1"/>
-          </a:fillRef>
-          <a:effectRef idx="2">
-            <a:schemeClr val="accent1"/>
-          </a:effectRef>
-          <a:fontRef idx="minor">
-            <a:schemeClr val="lt1"/>
-          </a:fontRef>
-        </p:style>
-        <p:txBody>
-          <a:bodyPr rtlCol="0" anchor="ctr"/>
-          <a:lstStyle/>
-          <a:p>
-            <a:pPr algn="ctr"/>
-          </a:p>
-        </p:txBody>
-      </p:sp>
-      <p:sp>
-        <p:nvSpPr>
-          <p:cNvPr id="4" name="TextBox 3"/>
-          <p:cNvSpPr txBox="1"/>
-          <p:nvPr/>
-        </p:nvSpPr>
-        <p:spPr>
-          <a:xfrm>
-            <a:off x="566928" y="960120"/>
-            <a:ext cx="5486400" cy="274320"/>
-          </a:xfrm>
-          <a:prstGeom prst="rect">
-            <a:avLst/>
-          </a:prstGeom>
-          <a:noFill/>
-        </p:spPr>
-        <p:txBody>
-          <a:bodyPr wrap="square" lIns="0" rIns="0" tIns="0" bIns="0">
-            <a:spAutoFit/>
-          </a:bodyPr>
-          <a:lstStyle/>
-          <a:p>
-            <a:pPr>
-              <a:spcBef>
-                <a:spcPts val="0"/>
-              </a:spcBef>
-              <a:spcAft>
-                <a:spcPts val="0"/>
-              </a:spcAft>
-            </a:pPr>
-            <a:r>
-              <a:rPr sz="1100" b="0" i="0">
-                <a:solidFill>
-                  <a:srgbClr val="C9D8EC"/>
-                </a:solidFill>
-                <a:latin typeface="Consolas"/>
-              </a:rPr>
-              <a:t>ACT IV</a:t>
-            </a:r>
-          </a:p>
-        </p:txBody>
-      </p:sp>
-      <p:sp>
-        <p:nvSpPr>
-          <p:cNvPr id="5" name="TextBox 4"/>
-          <p:cNvSpPr txBox="1"/>
-          <p:nvPr/>
-        </p:nvSpPr>
-        <p:spPr>
-          <a:xfrm>
-            <a:off x="566928" y="1783080"/>
-            <a:ext cx="7223760" cy="1828800"/>
-          </a:xfrm>
-          <a:prstGeom prst="rect">
-            <a:avLst/>
-          </a:prstGeom>
-          <a:noFill/>
-        </p:spPr>
-        <p:txBody>
-          <a:bodyPr wrap="square" lIns="0" rIns="0" tIns="0" bIns="0">
-            <a:spAutoFit/>
-          </a:bodyPr>
-          <a:lstStyle/>
-          <a:p>
-            <a:pPr>
-              <a:lnSpc>
-                <a:spcPct val="102000"/>
-              </a:lnSpc>
-              <a:spcBef>
-                <a:spcPts val="0"/>
-              </a:spcBef>
-              <a:spcAft>
-                <a:spcPts val="0"/>
-              </a:spcAft>
-            </a:pPr>
-            <a:r>
-              <a:rPr sz="4000" b="0" i="0">
-                <a:solidFill>
-                  <a:srgbClr val="FCFCFB"/>
-                </a:solidFill>
-                <a:latin typeface="Georgia"/>
-              </a:rPr>
-              <a:t>The question we are putting to the field</a:t>
-            </a:r>
-          </a:p>
-        </p:txBody>
-      </p:sp>
-      <p:sp>
-        <p:nvSpPr>
-          <p:cNvPr id="6" name="TextBox 5"/>
-          <p:cNvSpPr txBox="1"/>
-          <p:nvPr/>
-        </p:nvSpPr>
-        <p:spPr>
-          <a:xfrm>
-            <a:off x="566928" y="3886200"/>
-            <a:ext cx="6766560" cy="1463040"/>
-          </a:xfrm>
-          <a:prstGeom prst="rect">
-            <a:avLst/>
-          </a:prstGeom>
-          <a:noFill/>
-        </p:spPr>
-        <p:txBody>
-          <a:bodyPr wrap="square" lIns="0" rIns="0" tIns="0" bIns="0">
-            <a:spAutoFit/>
-          </a:bodyPr>
-          <a:lstStyle/>
-          <a:p>
-            <a:pPr>
-              <a:lnSpc>
-                <a:spcPct val="135000"/>
-              </a:lnSpc>
-              <a:spcBef>
-                <a:spcPts val="0"/>
-              </a:spcBef>
-              <a:spcAft>
-                <a:spcPts val="0"/>
-              </a:spcAft>
-            </a:pPr>
-            <a:r>
-              <a:rPr sz="1600" b="0" i="1">
-                <a:solidFill>
-                  <a:srgbClr val="9AA4B0"/>
-                </a:solidFill>
-                <a:latin typeface="Georgia"/>
-              </a:rPr>
-              <a:t>If the wellbeing return to education runs through attainment and access rather than through measured learning, then either the post-2030 education architecture is optimising for the wrong outcome, or wellbeing is the wrong outcome to hold it to. The field should have to say which.</a:t>
-            </a:r>
-          </a:p>
-        </p:txBody>
-      </p:sp>
-      <p:sp>
-        <p:nvSpPr>
-          <p:cNvPr id="7" name="TextBox 6"/>
-          <p:cNvSpPr txBox="1"/>
-          <p:nvPr/>
-        </p:nvSpPr>
-        <p:spPr>
-          <a:xfrm>
-            <a:off x="566928" y="5623560"/>
-            <a:ext cx="3503066" cy="914400"/>
-          </a:xfrm>
-          <a:prstGeom prst="rect">
-            <a:avLst/>
-          </a:prstGeom>
-          <a:noFill/>
-        </p:spPr>
-        <p:txBody>
-          <a:bodyPr wrap="square" lIns="0" rIns="0" tIns="0" bIns="0">
-            <a:spAutoFit/>
-          </a:bodyPr>
-          <a:lstStyle/>
-          <a:p>
-            <a:pPr>
-              <a:spcBef>
-                <a:spcPts val="0"/>
-              </a:spcBef>
-              <a:spcAft>
-                <a:spcPts val="400"/>
-              </a:spcAft>
-            </a:pPr>
-            <a:r>
-              <a:rPr sz="2200" b="0" i="0">
-                <a:solidFill>
-                  <a:srgbClr val="FCFCFB"/>
-                </a:solidFill>
-                <a:latin typeface="Consolas"/>
-              </a:rPr>
-              <a:t>12.7%</a:t>
-            </a:r>
-          </a:p>
-          <a:p>
-            <a:pPr>
-              <a:lnSpc>
-                <a:spcPct val="120000"/>
-              </a:lnSpc>
-              <a:spcBef>
-                <a:spcPts val="0"/>
-              </a:spcBef>
-              <a:spcAft>
-                <a:spcPts val="0"/>
-              </a:spcAft>
-            </a:pPr>
-            <a:r>
-              <a:rPr sz="1000" b="0" i="0">
-                <a:solidFill>
-                  <a:srgbClr val="8A94A0"/>
-                </a:solidFill>
-                <a:latin typeface="Calibri"/>
-              </a:rPr>
-              <a:t>access &amp; participation</a:t>
-            </a:r>
-          </a:p>
-        </p:txBody>
-      </p:sp>
-      <p:sp>
-        <p:nvSpPr>
-          <p:cNvPr id="8" name="TextBox 7"/>
-          <p:cNvSpPr txBox="1"/>
-          <p:nvPr/>
-        </p:nvSpPr>
-        <p:spPr>
-          <a:xfrm>
-            <a:off x="4344314" y="5623560"/>
-            <a:ext cx="3503066" cy="914400"/>
-          </a:xfrm>
-          <a:prstGeom prst="rect">
-            <a:avLst/>
-          </a:prstGeom>
-          <a:noFill/>
-        </p:spPr>
-        <p:txBody>
-          <a:bodyPr wrap="square" lIns="0" rIns="0" tIns="0" bIns="0">
-            <a:spAutoFit/>
-          </a:bodyPr>
-          <a:lstStyle/>
-          <a:p>
-            <a:pPr>
-              <a:spcBef>
-                <a:spcPts val="0"/>
-              </a:spcBef>
-              <a:spcAft>
-                <a:spcPts val="400"/>
-              </a:spcAft>
-            </a:pPr>
-            <a:r>
-              <a:rPr sz="2200" b="0" i="0">
-                <a:solidFill>
-                  <a:srgbClr val="FCFCFB"/>
-                </a:solidFill>
-                <a:latin typeface="Consolas"/>
-              </a:rPr>
-              <a:t>2.5%</a:t>
-            </a:r>
-          </a:p>
-          <a:p>
-            <a:pPr>
-              <a:lnSpc>
-                <a:spcPct val="120000"/>
-              </a:lnSpc>
-              <a:spcBef>
-                <a:spcPts val="0"/>
-              </a:spcBef>
-              <a:spcAft>
-                <a:spcPts val="0"/>
-              </a:spcAft>
-            </a:pPr>
-            <a:r>
-              <a:rPr sz="1000" b="0" i="0">
-                <a:solidFill>
-                  <a:srgbClr val="8A94A0"/>
-                </a:solidFill>
-                <a:latin typeface="Calibri"/>
-              </a:rPr>
-              <a:t>equity / parity ratios</a:t>
-            </a:r>
-          </a:p>
-        </p:txBody>
-      </p:sp>
-      <p:sp>
-        <p:nvSpPr>
-          <p:cNvPr id="9" name="TextBox 8"/>
-          <p:cNvSpPr txBox="1"/>
-          <p:nvPr/>
-        </p:nvSpPr>
-        <p:spPr>
-          <a:xfrm>
-            <a:off x="8121700" y="5623560"/>
-            <a:ext cx="3503066" cy="914400"/>
-          </a:xfrm>
-          <a:prstGeom prst="rect">
-            <a:avLst/>
-          </a:prstGeom>
-          <a:noFill/>
-        </p:spPr>
-        <p:txBody>
-          <a:bodyPr wrap="square" lIns="0" rIns="0" tIns="0" bIns="0">
-            <a:spAutoFit/>
-          </a:bodyPr>
-          <a:lstStyle/>
-          <a:p>
-            <a:pPr>
-              <a:spcBef>
-                <a:spcPts val="0"/>
-              </a:spcBef>
-              <a:spcAft>
-                <a:spcPts val="400"/>
-              </a:spcAft>
-            </a:pPr>
-            <a:r>
-              <a:rPr sz="2200" b="0" i="0">
-                <a:solidFill>
-                  <a:srgbClr val="FCFCFB"/>
-                </a:solidFill>
-                <a:latin typeface="Consolas"/>
-              </a:rPr>
-              <a:t>0.9%</a:t>
-            </a:r>
-          </a:p>
-          <a:p>
-            <a:pPr>
-              <a:lnSpc>
-                <a:spcPct val="120000"/>
-              </a:lnSpc>
-              <a:spcBef>
-                <a:spcPts val="0"/>
-              </a:spcBef>
-              <a:spcAft>
-                <a:spcPts val="0"/>
-              </a:spcAft>
-            </a:pPr>
-            <a:r>
-              <a:rPr sz="1000" b="0" i="0">
-                <a:solidFill>
-                  <a:srgbClr val="8A94A0"/>
-                </a:solidFill>
-                <a:latin typeface="Calibri"/>
-              </a:rPr>
-              <a:t>measured learning outcomes</a:t>
-            </a:r>
-          </a:p>
-        </p:txBody>
-      </p:sp>
-    </p:spTree>
-  </p:cSld>
-  <p:clrMapOvr>
-    <a:masterClrMapping/>
-  </p:clrMapOvr>
-</p:sld>
-</file>
-
-<file path=ppt/slides/slide25.xml><?xml version="1.0" encoding="utf-8"?>
-<p:sld xmlns:a="http://schemas.openxmlformats.org/drawingml/2006/main" xmlns:p="http://schemas.openxmlformats.org/presentationml/2006/main" xmlns:r="http://schemas.openxmlformats.org/officeDocument/2006/relationships">
-  <p:cSld>
-    <p:bg>
-      <p:bgPr>
-        <a:solidFill>
-          <a:srgbClr val="FCFCFB"/>
-        </a:solidFill>
-        <a:effectLst/>
-      </p:bgPr>
-    </p:bg>
-    <p:spTree>
-      <p:nvGrpSpPr>
-        <p:cNvPr id="1" name=""/>
-        <p:cNvGrpSpPr/>
-        <p:nvPr/>
-      </p:nvGrpSpPr>
-      <p:grpSpPr/>
-      <p:sp>
-        <p:nvSpPr>
-          <p:cNvPr id="2" name="TextBox 1"/>
-          <p:cNvSpPr txBox="1"/>
-          <p:nvPr/>
-        </p:nvSpPr>
-        <p:spPr>
-          <a:xfrm>
-            <a:off x="566928" y="502920"/>
-            <a:ext cx="8595360" cy="274320"/>
-          </a:xfrm>
-          <a:prstGeom prst="rect">
-            <a:avLst/>
-          </a:prstGeom>
-          <a:noFill/>
-        </p:spPr>
-        <p:txBody>
-          <a:bodyPr wrap="square" lIns="0" rIns="0" tIns="0" bIns="0">
-            <a:spAutoFit/>
-          </a:bodyPr>
-          <a:lstStyle/>
-          <a:p>
-            <a:pPr>
-              <a:spcBef>
-                <a:spcPts val="0"/>
-              </a:spcBef>
-              <a:spcAft>
-                <a:spcPts val="0"/>
-              </a:spcAft>
-            </a:pPr>
-            <a:r>
-              <a:rPr sz="1000" b="0" i="0">
-                <a:solidFill>
-                  <a:srgbClr val="A63A30"/>
-                </a:solidFill>
-                <a:latin typeface="Consolas"/>
-              </a:rPr>
-              <a:t>ON PRIORITIES</a:t>
-            </a:r>
-          </a:p>
-        </p:txBody>
-      </p:sp>
-      <p:sp>
-        <p:nvSpPr>
-          <p:cNvPr id="3" name="TextBox 2"/>
-          <p:cNvSpPr txBox="1"/>
-          <p:nvPr/>
-        </p:nvSpPr>
-        <p:spPr>
-          <a:xfrm>
-            <a:off x="566928" y="914400"/>
-            <a:ext cx="8595360" cy="1371600"/>
-          </a:xfrm>
-          <a:prstGeom prst="rect">
-            <a:avLst/>
-          </a:prstGeom>
-          <a:noFill/>
-        </p:spPr>
-        <p:txBody>
-          <a:bodyPr wrap="square" lIns="0" rIns="0" tIns="0" bIns="0">
-            <a:spAutoFit/>
-          </a:bodyPr>
-          <a:lstStyle/>
-          <a:p>
-            <a:pPr>
-              <a:lnSpc>
-                <a:spcPct val="108000"/>
-              </a:lnSpc>
-              <a:spcBef>
-                <a:spcPts val="0"/>
-              </a:spcBef>
-              <a:spcAft>
-                <a:spcPts val="0"/>
-              </a:spcAft>
-            </a:pPr>
-            <a:r>
-              <a:rPr sz="2700" b="0" i="0">
-                <a:solidFill>
-                  <a:srgbClr val="14171C"/>
-                </a:solidFill>
-                <a:latin typeface="Georgia"/>
-              </a:rPr>
-              <a:t>Indicator dashboards are not wellbeing instruments</a:t>
-            </a:r>
-          </a:p>
-        </p:txBody>
-      </p:sp>
-      <p:sp>
-        <p:nvSpPr>
-          <p:cNvPr id="4" name="TextBox 3"/>
-          <p:cNvSpPr txBox="1"/>
-          <p:nvPr/>
-        </p:nvSpPr>
-        <p:spPr>
-          <a:xfrm>
-            <a:off x="566928" y="2286000"/>
-            <a:ext cx="8595360" cy="3840480"/>
-          </a:xfrm>
-          <a:prstGeom prst="rect">
-            <a:avLst/>
-          </a:prstGeom>
-          <a:noFill/>
-        </p:spPr>
-        <p:txBody>
-          <a:bodyPr wrap="square" lIns="0" rIns="0" tIns="0" bIns="0">
-            <a:spAutoFit/>
-          </a:bodyPr>
-          <a:lstStyle/>
-          <a:p>
-            <a:pPr>
-              <a:lnSpc>
-                <a:spcPct val="132000"/>
-              </a:lnSpc>
-              <a:spcBef>
-                <a:spcPts val="0"/>
-              </a:spcBef>
-              <a:spcAft>
-                <a:spcPts val="1100"/>
-              </a:spcAft>
-            </a:pPr>
-            <a:r>
-              <a:rPr sz="1400" b="0" i="0">
-                <a:solidFill>
-                  <a:srgbClr val="5A6068"/>
-                </a:solidFill>
-                <a:latin typeface="Calibri"/>
-              </a:rPr>
-              <a:t>Development indicators tell you reliably where wellbeing is high. They tell you almost nothing about when it will rise. Across every framework tested here, year-on-year indicator movement carries essentially no wellbeing information within the measurement window — a decade or so.</a:t>
-            </a:r>
-          </a:p>
-          <a:p>
-            <a:pPr>
-              <a:lnSpc>
-                <a:spcPct val="132000"/>
-              </a:lnSpc>
-              <a:spcBef>
-                <a:spcPts val="0"/>
-              </a:spcBef>
-              <a:spcAft>
-                <a:spcPts val="1100"/>
-              </a:spcAft>
-            </a:pPr>
-            <a:r>
-              <a:rPr sz="1400" b="0" i="0">
-                <a:solidFill>
-                  <a:srgbClr val="5A6068"/>
-                </a:solidFill>
-                <a:latin typeface="Calibri"/>
-              </a:rPr>
-              <a:t>The implication is about horizon and instrument, not about whether development matters. A monitoring architecture designed to reward annual indicator movement should not be read as tracking wellbeing, and a government that improves its dashboard position in a given year should not expect a wellbeing dividend inside the same electoral cycle.</a:t>
-            </a:r>
-          </a:p>
-        </p:txBody>
-      </p:sp>
-      <p:sp>
-        <p:nvSpPr>
-          <p:cNvPr id="5" name="TextBox 4"/>
-          <p:cNvSpPr txBox="1"/>
-          <p:nvPr/>
-        </p:nvSpPr>
-        <p:spPr>
-          <a:xfrm>
-            <a:off x="11338560" y="6263640"/>
-            <a:ext cx="548640" cy="274320"/>
-          </a:xfrm>
-          <a:prstGeom prst="rect">
-            <a:avLst/>
-          </a:prstGeom>
-          <a:noFill/>
-        </p:spPr>
-        <p:txBody>
-          <a:bodyPr wrap="square" lIns="0" rIns="0" tIns="0" bIns="0">
-            <a:spAutoFit/>
-          </a:bodyPr>
-          <a:lstStyle/>
-          <a:p>
-            <a:pPr algn="r">
-              <a:spcBef>
-                <a:spcPts val="0"/>
-              </a:spcBef>
-              <a:spcAft>
-                <a:spcPts val="0"/>
-              </a:spcAft>
-            </a:pPr>
-            <a:r>
-              <a:rPr sz="1100" b="0" i="0">
-                <a:solidFill>
-                  <a:srgbClr val="868D96"/>
-                </a:solidFill>
-                <a:latin typeface="Consolas"/>
-              </a:rPr>
-              <a:t>IV</a:t>
+              <a:t>The recommended framing for submission: lead with the education exception as the positive finding, use the generalised collapse as the backdrop that makes it surprising, and close on the target-setting question. That ordering makes Act I load-bearing without making it the story.</a:t>
             </a:r>
           </a:p>
         </p:txBody>
@@ -8811,64 +8485,146 @@
         <p:spPr>
           <a:xfrm>
             <a:off x="566928" y="502920"/>
-            <a:ext cx="8595360" cy="274320"/>
-          </a:xfrm>
-          <a:prstGeom prst="rect">
-            <a:avLst/>
-          </a:prstGeom>
-          <a:noFill/>
-        </p:spPr>
-        <p:txBody>
-          <a:bodyPr wrap="square" lIns="0" rIns="0" tIns="0" bIns="0">
-            <a:spAutoFit/>
-          </a:bodyPr>
-          <a:lstStyle/>
-          <a:p>
-            <a:pPr>
-              <a:spcBef>
-                <a:spcPts val="0"/>
-              </a:spcBef>
-              <a:spcAft>
-                <a:spcPts val="0"/>
-              </a:spcAft>
-            </a:pPr>
-            <a:r>
-              <a:rPr sz="1000" b="0" i="0">
-                <a:solidFill>
-                  <a:srgbClr val="A63A30"/>
+            <a:ext cx="8229600" cy="822960"/>
+          </a:xfrm>
+          <a:prstGeom prst="rect">
+            <a:avLst/>
+          </a:prstGeom>
+          <a:noFill/>
+        </p:spPr>
+        <p:txBody>
+          <a:bodyPr wrap="square" lIns="0" rIns="0" tIns="0" bIns="0">
+            <a:spAutoFit/>
+          </a:bodyPr>
+          <a:lstStyle/>
+          <a:p>
+            <a:pPr>
+              <a:spcBef>
+                <a:spcPts val="0"/>
+              </a:spcBef>
+              <a:spcAft>
+                <a:spcPts val="600"/>
+              </a:spcAft>
+            </a:pPr>
+            <a:r>
+              <a:rPr sz="3200" b="0" i="0">
+                <a:solidFill>
+                  <a:srgbClr val="14171C"/>
+                </a:solidFill>
+                <a:latin typeface="Georgia"/>
+              </a:rPr>
+              <a:t>Decisions for the team</a:t>
+            </a:r>
+          </a:p>
+          <a:p>
+            <a:pPr>
+              <a:spcBef>
+                <a:spcPts val="0"/>
+              </a:spcBef>
+              <a:spcAft>
+                <a:spcPts val="0"/>
+              </a:spcAft>
+            </a:pPr>
+            <a:r>
+              <a:rPr sz="1300" b="0" i="0">
+                <a:solidFill>
+                  <a:srgbClr val="5A6068"/>
+                </a:solidFill>
+                <a:latin typeface="Calibri"/>
+              </a:rPr>
+              <a:t>Five things the acts do not settle, in the order they block drafting.</a:t>
+            </a:r>
+          </a:p>
+        </p:txBody>
+      </p:sp>
+      <p:sp>
+        <p:nvSpPr>
+          <p:cNvPr id="3" name="Rectangle 2"/>
+          <p:cNvSpPr/>
+          <p:nvPr/>
+        </p:nvSpPr>
+        <p:spPr>
+          <a:xfrm>
+            <a:off x="566928" y="1828800"/>
+            <a:ext cx="3472586" cy="25400"/>
+          </a:xfrm>
+          <a:prstGeom prst="rect">
+            <a:avLst/>
+          </a:prstGeom>
+          <a:solidFill>
+            <a:srgbClr val="17549E"/>
+          </a:solidFill>
+          <a:ln>
+            <a:noFill/>
+          </a:ln>
+          <a:effectLst/>
+        </p:spPr>
+        <p:style>
+          <a:lnRef idx="1">
+            <a:schemeClr val="accent1"/>
+          </a:lnRef>
+          <a:fillRef idx="3">
+            <a:schemeClr val="accent1"/>
+          </a:fillRef>
+          <a:effectRef idx="2">
+            <a:schemeClr val="accent1"/>
+          </a:effectRef>
+          <a:fontRef idx="minor">
+            <a:schemeClr val="lt1"/>
+          </a:fontRef>
+        </p:style>
+        <p:txBody>
+          <a:bodyPr rtlCol="0" anchor="ctr"/>
+          <a:lstStyle/>
+          <a:p>
+            <a:pPr algn="ctr"/>
+          </a:p>
+        </p:txBody>
+      </p:sp>
+      <p:sp>
+        <p:nvSpPr>
+          <p:cNvPr id="4" name="TextBox 3"/>
+          <p:cNvSpPr txBox="1"/>
+          <p:nvPr/>
+        </p:nvSpPr>
+        <p:spPr>
+          <a:xfrm>
+            <a:off x="566928" y="2011680"/>
+            <a:ext cx="3472586" cy="1828800"/>
+          </a:xfrm>
+          <a:prstGeom prst="rect">
+            <a:avLst/>
+          </a:prstGeom>
+          <a:noFill/>
+        </p:spPr>
+        <p:txBody>
+          <a:bodyPr wrap="square" lIns="0" rIns="0" tIns="0" bIns="0">
+            <a:spAutoFit/>
+          </a:bodyPr>
+          <a:lstStyle/>
+          <a:p>
+            <a:pPr>
+              <a:spcBef>
+                <a:spcPts val="0"/>
+              </a:spcBef>
+              <a:spcAft>
+                <a:spcPts val="700"/>
+              </a:spcAft>
+            </a:pPr>
+            <a:r>
+              <a:rPr sz="1050" b="0" i="0">
+                <a:solidFill>
+                  <a:srgbClr val="17549E"/>
                 </a:solidFill>
                 <a:latin typeface="Consolas"/>
               </a:rPr>
-              <a:t>ON WHAT KIND OF EDUCATION</a:t>
-            </a:r>
-          </a:p>
-        </p:txBody>
-      </p:sp>
-      <p:sp>
-        <p:nvSpPr>
-          <p:cNvPr id="3" name="TextBox 2"/>
-          <p:cNvSpPr txBox="1"/>
-          <p:nvPr/>
-        </p:nvSpPr>
-        <p:spPr>
-          <a:xfrm>
-            <a:off x="566928" y="914400"/>
-            <a:ext cx="8595360" cy="1371600"/>
-          </a:xfrm>
-          <a:prstGeom prst="rect">
-            <a:avLst/>
-          </a:prstGeom>
-          <a:noFill/>
-        </p:spPr>
-        <p:txBody>
-          <a:bodyPr wrap="square" lIns="0" rIns="0" tIns="0" bIns="0">
-            <a:spAutoFit/>
-          </a:bodyPr>
-          <a:lstStyle/>
+              <a:t>FRAMING</a:t>
+            </a:r>
+          </a:p>
           <a:p>
             <a:pPr>
               <a:lnSpc>
-                <a:spcPct val="108000"/>
+                <a:spcPct val="130000"/>
               </a:lnSpc>
               <a:spcBef>
                 <a:spcPts val="0"/>
@@ -8878,107 +8634,322 @@
               </a:spcAft>
             </a:pPr>
             <a:r>
-              <a:rPr sz="2700" b="0" i="0">
-                <a:solidFill>
-                  <a:srgbClr val="14171C"/>
-                </a:solidFill>
-                <a:latin typeface="Georgia"/>
-              </a:rPr>
-              <a:t>The consensus moved to learning; the wellbeing evidence points at attainment</a:t>
-            </a:r>
-          </a:p>
-        </p:txBody>
-      </p:sp>
-      <p:sp>
-        <p:nvSpPr>
-          <p:cNvPr id="4" name="TextBox 3"/>
-          <p:cNvSpPr txBox="1"/>
-          <p:nvPr/>
-        </p:nvSpPr>
-        <p:spPr>
-          <a:xfrm>
-            <a:off x="566928" y="2286000"/>
-            <a:ext cx="8595360" cy="3840480"/>
-          </a:xfrm>
-          <a:prstGeom prst="rect">
-            <a:avLst/>
-          </a:prstGeom>
-          <a:noFill/>
-        </p:spPr>
-        <p:txBody>
-          <a:bodyPr wrap="square" lIns="0" rIns="0" tIns="0" bIns="0">
-            <a:spAutoFit/>
-          </a:bodyPr>
-          <a:lstStyle/>
+              <a:rPr sz="1100" b="0" i="0">
+                <a:solidFill>
+                  <a:srgbClr val="5A6068"/>
+                </a:solidFill>
+                <a:latin typeface="Calibri"/>
+              </a:rPr>
+              <a:t>Lead with the education exception and use the generalised collapse as Act I backdrop — recommended — or lead with the robustness result and treat education as the coda. This decides title, abstract, and venue.</a:t>
+            </a:r>
+          </a:p>
+        </p:txBody>
+      </p:sp>
+      <p:sp>
+        <p:nvSpPr>
+          <p:cNvPr id="5" name="Rectangle 4"/>
+          <p:cNvSpPr/>
+          <p:nvPr/>
+        </p:nvSpPr>
+        <p:spPr>
+          <a:xfrm>
+            <a:off x="4359554" y="1828800"/>
+            <a:ext cx="3472586" cy="25400"/>
+          </a:xfrm>
+          <a:prstGeom prst="rect">
+            <a:avLst/>
+          </a:prstGeom>
+          <a:solidFill>
+            <a:srgbClr val="17549E"/>
+          </a:solidFill>
+          <a:ln>
+            <a:noFill/>
+          </a:ln>
+          <a:effectLst/>
+        </p:spPr>
+        <p:style>
+          <a:lnRef idx="1">
+            <a:schemeClr val="accent1"/>
+          </a:lnRef>
+          <a:fillRef idx="3">
+            <a:schemeClr val="accent1"/>
+          </a:fillRef>
+          <a:effectRef idx="2">
+            <a:schemeClr val="accent1"/>
+          </a:effectRef>
+          <a:fontRef idx="minor">
+            <a:schemeClr val="lt1"/>
+          </a:fontRef>
+        </p:style>
+        <p:txBody>
+          <a:bodyPr rtlCol="0" anchor="ctr"/>
+          <a:lstStyle/>
+          <a:p>
+            <a:pPr algn="ctr"/>
+          </a:p>
+        </p:txBody>
+      </p:sp>
+      <p:sp>
+        <p:nvSpPr>
+          <p:cNvPr id="6" name="TextBox 5"/>
+          <p:cNvSpPr txBox="1"/>
+          <p:nvPr/>
+        </p:nvSpPr>
+        <p:spPr>
+          <a:xfrm>
+            <a:off x="4359554" y="2011680"/>
+            <a:ext cx="3472586" cy="1828800"/>
+          </a:xfrm>
+          <a:prstGeom prst="rect">
+            <a:avLst/>
+          </a:prstGeom>
+          <a:noFill/>
+        </p:spPr>
+        <p:txBody>
+          <a:bodyPr wrap="square" lIns="0" rIns="0" tIns="0" bIns="0">
+            <a:spAutoFit/>
+          </a:bodyPr>
+          <a:lstStyle/>
+          <a:p>
+            <a:pPr>
+              <a:spcBef>
+                <a:spcPts val="0"/>
+              </a:spcBef>
+              <a:spcAft>
+                <a:spcPts val="700"/>
+              </a:spcAft>
+            </a:pPr>
+            <a:r>
+              <a:rPr sz="1050" b="0" i="0">
+                <a:solidFill>
+                  <a:srgbClr val="17549E"/>
+                </a:solidFill>
+                <a:latin typeface="Consolas"/>
+              </a:rPr>
+              <a:t>DISPLAY ITEMS</a:t>
+            </a:r>
+          </a:p>
           <a:p>
             <a:pPr>
               <a:lnSpc>
-                <a:spcPct val="132000"/>
+                <a:spcPct val="130000"/>
               </a:lnSpc>
               <a:spcBef>
                 <a:spcPts val="0"/>
               </a:spcBef>
               <a:spcAft>
-                <a:spcPts val="1100"/>
-              </a:spcAft>
-            </a:pPr>
-            <a:r>
-              <a:rPr sz="1400" b="0" i="0">
+                <a:spcPts val="0"/>
+              </a:spcAft>
+            </a:pPr>
+            <a:r>
+              <a:rPr sz="1100" b="0" i="0">
                 <a:solidFill>
                   <a:srgbClr val="5A6068"/>
                 </a:solidFill>
                 <a:latin typeface="Calibri"/>
               </a:rPr>
-              <a:t>Global education policy has shifted decisively over the past decade from schooling to learning — the learning-crisis framing, learning-poverty targets, and an indicator architecture built around measured proficiency. The premise is that years in school without demonstrated learning are an empty metric.</a:t>
+              <a:t>Commentaries allow one or two. Proposed: the three-panel composite as Figure 1, the ranking flip as Figure 2. Everything else moves to supplementary.</a:t>
+            </a:r>
+          </a:p>
+        </p:txBody>
+      </p:sp>
+      <p:sp>
+        <p:nvSpPr>
+          <p:cNvPr id="7" name="Rectangle 6"/>
+          <p:cNvSpPr/>
+          <p:nvPr/>
+        </p:nvSpPr>
+        <p:spPr>
+          <a:xfrm>
+            <a:off x="8152180" y="1828800"/>
+            <a:ext cx="3472586" cy="25400"/>
+          </a:xfrm>
+          <a:prstGeom prst="rect">
+            <a:avLst/>
+          </a:prstGeom>
+          <a:solidFill>
+            <a:srgbClr val="17549E"/>
+          </a:solidFill>
+          <a:ln>
+            <a:noFill/>
+          </a:ln>
+          <a:effectLst/>
+        </p:spPr>
+        <p:style>
+          <a:lnRef idx="1">
+            <a:schemeClr val="accent1"/>
+          </a:lnRef>
+          <a:fillRef idx="3">
+            <a:schemeClr val="accent1"/>
+          </a:fillRef>
+          <a:effectRef idx="2">
+            <a:schemeClr val="accent1"/>
+          </a:effectRef>
+          <a:fontRef idx="minor">
+            <a:schemeClr val="lt1"/>
+          </a:fontRef>
+        </p:style>
+        <p:txBody>
+          <a:bodyPr rtlCol="0" anchor="ctr"/>
+          <a:lstStyle/>
+          <a:p>
+            <a:pPr algn="ctr"/>
+          </a:p>
+        </p:txBody>
+      </p:sp>
+      <p:sp>
+        <p:nvSpPr>
+          <p:cNvPr id="8" name="TextBox 7"/>
+          <p:cNvSpPr txBox="1"/>
+          <p:nvPr/>
+        </p:nvSpPr>
+        <p:spPr>
+          <a:xfrm>
+            <a:off x="8152180" y="2011680"/>
+            <a:ext cx="3472586" cy="1828800"/>
+          </a:xfrm>
+          <a:prstGeom prst="rect">
+            <a:avLst/>
+          </a:prstGeom>
+          <a:noFill/>
+        </p:spPr>
+        <p:txBody>
+          <a:bodyPr wrap="square" lIns="0" rIns="0" tIns="0" bIns="0">
+            <a:spAutoFit/>
+          </a:bodyPr>
+          <a:lstStyle/>
+          <a:p>
+            <a:pPr>
+              <a:spcBef>
+                <a:spcPts val="0"/>
+              </a:spcBef>
+              <a:spcAft>
+                <a:spcPts val="700"/>
+              </a:spcAft>
+            </a:pPr>
+            <a:r>
+              <a:rPr sz="1050" b="0" i="0">
+                <a:solidFill>
+                  <a:srgbClr val="17549E"/>
+                </a:solidFill>
+                <a:latin typeface="Consolas"/>
+              </a:rPr>
+              <a:t>SCOPE OF THE WITHIN-COUNTRY WORK</a:t>
             </a:r>
           </a:p>
           <a:p>
             <a:pPr>
               <a:lnSpc>
-                <a:spcPct val="132000"/>
+                <a:spcPct val="130000"/>
               </a:lnSpc>
               <a:spcBef>
                 <a:spcPts val="0"/>
               </a:spcBef>
               <a:spcAft>
-                <a:spcPts val="1100"/>
-              </a:spcAft>
-            </a:pPr>
-            <a:r>
-              <a:rPr sz="1400" b="0" i="0">
+                <a:spcPts val="0"/>
+              </a:spcAft>
+            </a:pPr>
+            <a:r>
+              <a:rPr sz="1100" b="0" i="0">
                 <a:solidFill>
                   <a:srgbClr val="5A6068"/>
                 </a:solidFill>
                 <a:latin typeface="Calibri"/>
               </a:rPr>
-              <a:t>Every level of aggregation we can test points the other way. Attainment and access carry the wellbeing signal — 12.7% for SDG4 access, 34.0% and 40.7% for the HDI's schooling components, 32 of 36 countries at the individual level — while measured learning outcomes sit at 0.9% and parity ratios at 2.5%.</a:t>
-            </a:r>
-          </a:p>
-        </p:txBody>
-      </p:sp>
-      <p:sp>
-        <p:nvSpPr>
-          <p:cNvPr id="5" name="TextBox 4"/>
-          <p:cNvSpPr txBox="1"/>
-          <p:nvPr/>
-        </p:nvSpPr>
-        <p:spPr>
-          <a:xfrm>
-            <a:off x="11338560" y="6263640"/>
-            <a:ext cx="548640" cy="274320"/>
-          </a:xfrm>
-          <a:prstGeom prst="rect">
-            <a:avLst/>
-          </a:prstGeom>
-          <a:noFill/>
-        </p:spPr>
-        <p:txBody>
-          <a:bodyPr wrap="square" lIns="0" rIns="0" tIns="0" bIns="0">
-            <a:spAutoFit/>
-          </a:bodyPr>
-          <a:lstStyle/>
-          <a:p>
-            <a:pPr algn="r">
+              <a:t>It now sits inside Act III as the evidence on priorities. Does it belong there, or in a third paper? It is the most policy-relevant and the most contested result we have, and it is Europe-only.</a:t>
+            </a:r>
+          </a:p>
+        </p:txBody>
+      </p:sp>
+      <p:sp>
+        <p:nvSpPr>
+          <p:cNvPr id="9" name="Rectangle 8"/>
+          <p:cNvSpPr/>
+          <p:nvPr/>
+        </p:nvSpPr>
+        <p:spPr>
+          <a:xfrm>
+            <a:off x="566928" y="4069080"/>
+            <a:ext cx="3472586" cy="25400"/>
+          </a:xfrm>
+          <a:prstGeom prst="rect">
+            <a:avLst/>
+          </a:prstGeom>
+          <a:solidFill>
+            <a:srgbClr val="17549E"/>
+          </a:solidFill>
+          <a:ln>
+            <a:noFill/>
+          </a:ln>
+          <a:effectLst/>
+        </p:spPr>
+        <p:style>
+          <a:lnRef idx="1">
+            <a:schemeClr val="accent1"/>
+          </a:lnRef>
+          <a:fillRef idx="3">
+            <a:schemeClr val="accent1"/>
+          </a:fillRef>
+          <a:effectRef idx="2">
+            <a:schemeClr val="accent1"/>
+          </a:effectRef>
+          <a:fontRef idx="minor">
+            <a:schemeClr val="lt1"/>
+          </a:fontRef>
+        </p:style>
+        <p:txBody>
+          <a:bodyPr rtlCol="0" anchor="ctr"/>
+          <a:lstStyle/>
+          <a:p>
+            <a:pPr algn="ctr"/>
+          </a:p>
+        </p:txBody>
+      </p:sp>
+      <p:sp>
+        <p:nvSpPr>
+          <p:cNvPr id="10" name="TextBox 9"/>
+          <p:cNvSpPr txBox="1"/>
+          <p:nvPr/>
+        </p:nvSpPr>
+        <p:spPr>
+          <a:xfrm>
+            <a:off x="566928" y="4251960"/>
+            <a:ext cx="3472586" cy="1828800"/>
+          </a:xfrm>
+          <a:prstGeom prst="rect">
+            <a:avLst/>
+          </a:prstGeom>
+          <a:noFill/>
+        </p:spPr>
+        <p:txBody>
+          <a:bodyPr wrap="square" lIns="0" rIns="0" tIns="0" bIns="0">
+            <a:spAutoFit/>
+          </a:bodyPr>
+          <a:lstStyle/>
+          <a:p>
+            <a:pPr>
+              <a:spcBef>
+                <a:spcPts val="0"/>
+              </a:spcBef>
+              <a:spcAft>
+                <a:spcPts val="700"/>
+              </a:spcAft>
+            </a:pPr>
+            <a:r>
+              <a:rPr sz="1050" b="0" i="0">
+                <a:solidFill>
+                  <a:srgbClr val="17549E"/>
+                </a:solidFill>
+                <a:latin typeface="Consolas"/>
+              </a:rPr>
+              <a:t>DATA INVESTMENT</a:t>
+            </a:r>
+          </a:p>
+          <a:p>
+            <a:pPr>
+              <a:lnSpc>
+                <a:spcPct val="130000"/>
+              </a:lnSpc>
               <a:spcBef>
                 <a:spcPts val="0"/>
               </a:spcBef>
@@ -8989,11 +8960,119 @@
             <a:r>
               <a:rPr sz="1100" b="0" i="0">
                 <a:solidFill>
-                  <a:srgbClr val="868D96"/>
+                  <a:srgbClr val="5A6068"/>
+                </a:solidFill>
+                <a:latin typeface="Calibri"/>
+              </a:rPr>
+              <a:t>The Global Data Lab's separate Education &amp; Work dataset carries 43 subnational schooling indicators by cohort and sex. Pulling it would let us test the education finding subnationally. Before submission or after review?</a:t>
+            </a:r>
+          </a:p>
+        </p:txBody>
+      </p:sp>
+      <p:sp>
+        <p:nvSpPr>
+          <p:cNvPr id="11" name="Rectangle 10"/>
+          <p:cNvSpPr/>
+          <p:nvPr/>
+        </p:nvSpPr>
+        <p:spPr>
+          <a:xfrm>
+            <a:off x="4359554" y="4069080"/>
+            <a:ext cx="3472586" cy="25400"/>
+          </a:xfrm>
+          <a:prstGeom prst="rect">
+            <a:avLst/>
+          </a:prstGeom>
+          <a:solidFill>
+            <a:srgbClr val="17549E"/>
+          </a:solidFill>
+          <a:ln>
+            <a:noFill/>
+          </a:ln>
+          <a:effectLst/>
+        </p:spPr>
+        <p:style>
+          <a:lnRef idx="1">
+            <a:schemeClr val="accent1"/>
+          </a:lnRef>
+          <a:fillRef idx="3">
+            <a:schemeClr val="accent1"/>
+          </a:fillRef>
+          <a:effectRef idx="2">
+            <a:schemeClr val="accent1"/>
+          </a:effectRef>
+          <a:fontRef idx="minor">
+            <a:schemeClr val="lt1"/>
+          </a:fontRef>
+        </p:style>
+        <p:txBody>
+          <a:bodyPr rtlCol="0" anchor="ctr"/>
+          <a:lstStyle/>
+          <a:p>
+            <a:pPr algn="ctr"/>
+          </a:p>
+        </p:txBody>
+      </p:sp>
+      <p:sp>
+        <p:nvSpPr>
+          <p:cNvPr id="12" name="TextBox 11"/>
+          <p:cNvSpPr txBox="1"/>
+          <p:nvPr/>
+        </p:nvSpPr>
+        <p:spPr>
+          <a:xfrm>
+            <a:off x="4359554" y="4251960"/>
+            <a:ext cx="3472586" cy="1828800"/>
+          </a:xfrm>
+          <a:prstGeom prst="rect">
+            <a:avLst/>
+          </a:prstGeom>
+          <a:noFill/>
+        </p:spPr>
+        <p:txBody>
+          <a:bodyPr wrap="square" lIns="0" rIns="0" tIns="0" bIns="0">
+            <a:spAutoFit/>
+          </a:bodyPr>
+          <a:lstStyle/>
+          <a:p>
+            <a:pPr>
+              <a:spcBef>
+                <a:spcPts val="0"/>
+              </a:spcBef>
+              <a:spcAft>
+                <a:spcPts val="700"/>
+              </a:spcAft>
+            </a:pPr>
+            <a:r>
+              <a:rPr sz="1050" b="0" i="0">
+                <a:solidFill>
+                  <a:srgbClr val="17549E"/>
                 </a:solidFill>
                 <a:latin typeface="Consolas"/>
               </a:rPr>
-              <a:t>IV</a:t>
+              <a:t>METHODS NOTE</a:t>
+            </a:r>
+          </a:p>
+          <a:p>
+            <a:pPr>
+              <a:lnSpc>
+                <a:spcPct val="130000"/>
+              </a:lnSpc>
+              <a:spcBef>
+                <a:spcPts val="0"/>
+              </a:spcBef>
+              <a:spcAft>
+                <a:spcPts val="0"/>
+              </a:spcAft>
+            </a:pPr>
+            <a:r>
+              <a:rPr sz="1100" b="0" i="0">
+                <a:solidFill>
+                  <a:srgbClr val="5A6068"/>
+                </a:solidFill>
+                <a:latin typeface="Calibri"/>
+              </a:rPr>
+              <a:t>Pooled R² and significant-country share tell different stories at several points. Proposal: report both throughout and discuss the divergence explicitly as a secondary contribution.</a:t>
             </a:r>
           </a:p>
         </p:txBody>
@@ -9012,7 +9091,7 @@
     <p:bg>
       <p:bgPr>
         <a:solidFill>
-          <a:srgbClr val="FCFCFB"/>
+          <a:srgbClr val="14171C"/>
         </a:solidFill>
         <a:effectLst/>
       </p:bgPr>
@@ -9032,65 +9111,42 @@
         </p:nvSpPr>
         <p:spPr>
           <a:xfrm>
-            <a:off x="566928" y="502920"/>
-            <a:ext cx="8595360" cy="274320"/>
-          </a:xfrm>
-          <a:prstGeom prst="rect">
-            <a:avLst/>
-          </a:prstGeom>
-          <a:noFill/>
-        </p:spPr>
-        <p:txBody>
-          <a:bodyPr wrap="square" lIns="0" rIns="0" tIns="0" bIns="0">
-            <a:spAutoFit/>
-          </a:bodyPr>
-          <a:lstStyle/>
-          <a:p>
-            <a:pPr>
-              <a:spcBef>
-                <a:spcPts val="0"/>
-              </a:spcBef>
-              <a:spcAft>
-                <a:spcPts val="0"/>
-              </a:spcAft>
-            </a:pPr>
-            <a:r>
-              <a:rPr sz="1000" b="0" i="0">
-                <a:solidFill>
-                  <a:srgbClr val="A63A30"/>
-                </a:solidFill>
-                <a:latin typeface="Consolas"/>
-              </a:rPr>
-              <a:t>WHAT WE CANNOT SAY</a:t>
-            </a:r>
-          </a:p>
-        </p:txBody>
-      </p:sp>
-      <p:sp>
-        <p:nvSpPr>
-          <p:cNvPr id="3" name="TextBox 2"/>
-          <p:cNvSpPr txBox="1"/>
-          <p:nvPr/>
-        </p:nvSpPr>
-        <p:spPr>
-          <a:xfrm>
-            <a:off x="566928" y="914400"/>
-            <a:ext cx="8595360" cy="1371600"/>
-          </a:xfrm>
-          <a:prstGeom prst="rect">
-            <a:avLst/>
-          </a:prstGeom>
-          <a:noFill/>
-        </p:spPr>
-        <p:txBody>
-          <a:bodyPr wrap="square" lIns="0" rIns="0" tIns="0" bIns="0">
-            <a:spAutoFit/>
-          </a:bodyPr>
-          <a:lstStyle/>
+            <a:off x="566928" y="2743200"/>
+            <a:ext cx="8229600" cy="1371600"/>
+          </a:xfrm>
+          <a:prstGeom prst="rect">
+            <a:avLst/>
+          </a:prstGeom>
+          <a:noFill/>
+        </p:spPr>
+        <p:txBody>
+          <a:bodyPr wrap="square" lIns="0" rIns="0" tIns="0" bIns="0">
+            <a:spAutoFit/>
+          </a:bodyPr>
+          <a:lstStyle/>
+          <a:p>
+            <a:pPr>
+              <a:spcBef>
+                <a:spcPts val="0"/>
+              </a:spcBef>
+              <a:spcAft>
+                <a:spcPts val="1000"/>
+              </a:spcAft>
+            </a:pPr>
+            <a:r>
+              <a:rPr sz="4000" b="0" i="0">
+                <a:solidFill>
+                  <a:srgbClr val="FCFCFB"/>
+                </a:solidFill>
+                <a:latin typeface="Georgia"/>
+              </a:rPr>
+              <a:t>Evidence appendix</a:t>
+            </a:r>
+          </a:p>
           <a:p>
             <a:pPr>
               <a:lnSpc>
-                <a:spcPct val="108000"/>
+                <a:spcPct val="135000"/>
               </a:lnSpc>
               <a:spcBef>
                 <a:spcPts val="0"/>
@@ -9100,144 +9156,13 @@
               </a:spcAft>
             </a:pPr>
             <a:r>
-              <a:rPr sz="2700" b="0" i="0">
-                <a:solidFill>
-                  <a:srgbClr val="14171C"/>
-                </a:solidFill>
-                <a:latin typeface="Georgia"/>
-              </a:rPr>
-              <a:t>Three limits that keep this a question rather than a recommendation</a:t>
-            </a:r>
-          </a:p>
-        </p:txBody>
-      </p:sp>
-      <p:sp>
-        <p:nvSpPr>
-          <p:cNvPr id="4" name="TextBox 3"/>
-          <p:cNvSpPr txBox="1"/>
-          <p:nvPr/>
-        </p:nvSpPr>
-        <p:spPr>
-          <a:xfrm>
-            <a:off x="566928" y="2286000"/>
-            <a:ext cx="8595360" cy="3840480"/>
-          </a:xfrm>
-          <a:prstGeom prst="rect">
-            <a:avLst/>
-          </a:prstGeom>
-          <a:noFill/>
-        </p:spPr>
-        <p:txBody>
-          <a:bodyPr wrap="square" lIns="0" rIns="0" tIns="0" bIns="0">
-            <a:spAutoFit/>
-          </a:bodyPr>
-          <a:lstStyle/>
-          <a:p>
-            <a:pPr>
-              <a:lnSpc>
-                <a:spcPct val="132000"/>
-              </a:lnSpc>
-              <a:spcBef>
-                <a:spcPts val="0"/>
-              </a:spcBef>
-              <a:spcAft>
-                <a:spcPts val="1100"/>
-              </a:spcAft>
-            </a:pPr>
-            <a:r>
               <a:rPr sz="1400" b="0" i="0">
                 <a:solidFill>
-                  <a:srgbClr val="5A6068"/>
+                  <a:srgbClr val="9AA4B0"/>
                 </a:solidFill>
                 <a:latin typeface="Calibri"/>
               </a:rPr>
-              <a:t>None of this is causal. The design is correlational throughout, and the levels results in particular are cross-sectional comparisons between countries.</a:t>
-            </a:r>
-          </a:p>
-          <a:p>
-            <a:pPr>
-              <a:lnSpc>
-                <a:spcPct val="132000"/>
-              </a:lnSpc>
-              <a:spcBef>
-                <a:spcPts val="0"/>
-              </a:spcBef>
-              <a:spcAft>
-                <a:spcPts val="1100"/>
-              </a:spcAft>
-            </a:pPr>
-            <a:r>
-              <a:rPr sz="1400" b="0" i="0">
-                <a:solidFill>
-                  <a:srgbClr val="5A6068"/>
-                </a:solidFill>
-                <a:latin typeface="Calibri"/>
-              </a:rPr>
-              <a:t>Schooling cannot be separated from what schooling stands in for. Years attained proxy labour-market position, economic security, autonomy, and social standing, and this design cannot pull them apart. Individual effects are small: a median R² near 0.01.</a:t>
-            </a:r>
-          </a:p>
-          <a:p>
-            <a:pPr>
-              <a:lnSpc>
-                <a:spcPct val="132000"/>
-              </a:lnSpc>
-              <a:spcBef>
-                <a:spcPts val="0"/>
-              </a:spcBef>
-              <a:spcAft>
-                <a:spcPts val="1100"/>
-              </a:spcAft>
-            </a:pPr>
-            <a:r>
-              <a:rPr sz="1400" b="0" i="0">
-                <a:solidFill>
-                  <a:srgbClr val="5A6068"/>
-                </a:solidFill>
-                <a:latin typeface="Calibri"/>
-              </a:rPr>
-              <a:t>Some of the parity and learning indicators' weakness is coverage rather than construct — they are the youngest and thinnest series in the SDG database, and thin series fail significance tests for uninteresting reasons. The commentary should concede this explicitly and say what would settle it.</a:t>
-            </a:r>
-          </a:p>
-        </p:txBody>
-      </p:sp>
-      <p:sp>
-        <p:nvSpPr>
-          <p:cNvPr id="5" name="TextBox 4"/>
-          <p:cNvSpPr txBox="1"/>
-          <p:nvPr/>
-        </p:nvSpPr>
-        <p:spPr>
-          <a:xfrm>
-            <a:off x="11338560" y="6263640"/>
-            <a:ext cx="548640" cy="274320"/>
-          </a:xfrm>
-          <a:prstGeom prst="rect">
-            <a:avLst/>
-          </a:prstGeom>
-          <a:noFill/>
-        </p:spPr>
-        <p:txBody>
-          <a:bodyPr wrap="square" lIns="0" rIns="0" tIns="0" bIns="0">
-            <a:spAutoFit/>
-          </a:bodyPr>
-          <a:lstStyle/>
-          <a:p>
-            <a:pPr algn="r">
-              <a:spcBef>
-                <a:spcPts val="0"/>
-              </a:spcBef>
-              <a:spcAft>
-                <a:spcPts val="0"/>
-              </a:spcAft>
-            </a:pPr>
-            <a:r>
-              <a:rPr sz="1100" b="0" i="0">
-                <a:solidFill>
-                  <a:srgbClr val="868D96"/>
-                </a:solidFill>
-                <a:latin typeface="Consolas"/>
-              </a:rPr>
-              <a:t>IV</a:t>
+              <a:t>Everything the three acts rest on but do not carry. In submission these become supplementary material.</a:t>
             </a:r>
           </a:p>
         </p:txBody>
@@ -9276,8 +9201,8 @@
         </p:nvSpPr>
         <p:spPr>
           <a:xfrm>
-            <a:off x="566928" y="502920"/>
-            <a:ext cx="8595360" cy="274320"/>
+            <a:off x="566928" y="411480"/>
+            <a:ext cx="10515600" cy="320040"/>
           </a:xfrm>
           <a:prstGeom prst="rect">
             <a:avLst/>
@@ -9301,11 +9226,11 @@
             <a:r>
               <a:rPr sz="1000" b="0" i="0">
                 <a:solidFill>
-                  <a:srgbClr val="A63A30"/>
+                  <a:srgbClr val="868D96"/>
                 </a:solidFill>
                 <a:latin typeface="Consolas"/>
               </a:rPr>
-              <a:t>THE ASK</a:t>
+              <a:t>APPENDIX</a:t>
             </a:r>
           </a:p>
         </p:txBody>
@@ -9318,8 +9243,50 @@
         </p:nvSpPr>
         <p:spPr>
           <a:xfrm>
-            <a:off x="566928" y="914400"/>
-            <a:ext cx="8595360" cy="1371600"/>
+            <a:off x="566928" y="749808"/>
+            <a:ext cx="10515600" cy="457200"/>
+          </a:xfrm>
+          <a:prstGeom prst="rect">
+            <a:avLst/>
+          </a:prstGeom>
+          <a:noFill/>
+        </p:spPr>
+        <p:txBody>
+          <a:bodyPr wrap="square" lIns="0" rIns="0" tIns="0" bIns="0">
+            <a:spAutoFit/>
+          </a:bodyPr>
+          <a:lstStyle/>
+          <a:p>
+            <a:pPr>
+              <a:spcBef>
+                <a:spcPts val="0"/>
+              </a:spcBef>
+              <a:spcAft>
+                <a:spcPts val="0"/>
+              </a:spcAft>
+            </a:pPr>
+            <a:r>
+              <a:rPr sz="2000" b="0" i="0">
+                <a:solidFill>
+                  <a:srgbClr val="14171C"/>
+                </a:solidFill>
+                <a:latin typeface="Georgia"/>
+              </a:rPr>
+              <a:t>Regional development spread within countries</a:t>
+            </a:r>
+          </a:p>
+        </p:txBody>
+      </p:sp>
+      <p:sp>
+        <p:nvSpPr>
+          <p:cNvPr id="4" name="TextBox 3"/>
+          <p:cNvSpPr txBox="1"/>
+          <p:nvPr/>
+        </p:nvSpPr>
+        <p:spPr>
+          <a:xfrm>
+            <a:off x="566928" y="1207008"/>
+            <a:ext cx="10515600" cy="457200"/>
           </a:xfrm>
           <a:prstGeom prst="rect">
             <a:avLst/>
@@ -9334,7 +9301,7 @@
           <a:p>
             <a:pPr>
               <a:lnSpc>
-                <a:spcPct val="108000"/>
+                <a:spcPct val="128000"/>
               </a:lnSpc>
               <a:spcBef>
                 <a:spcPts val="0"/>
@@ -9344,126 +9311,41 @@
               </a:spcAft>
             </a:pPr>
             <a:r>
-              <a:rPr sz="2700" b="0" i="0">
-                <a:solidFill>
-                  <a:srgbClr val="14171C"/>
-                </a:solidFill>
-                <a:latin typeface="Georgia"/>
-              </a:rPr>
-              <a:t>Should wellbeing be a criterion for education targets after 2030?</a:t>
-            </a:r>
-          </a:p>
-        </p:txBody>
-      </p:sp>
-      <p:sp>
-        <p:nvSpPr>
-          <p:cNvPr id="4" name="TextBox 3"/>
-          <p:cNvSpPr txBox="1"/>
-          <p:nvPr/>
-        </p:nvSpPr>
-        <p:spPr>
-          <a:xfrm>
-            <a:off x="566928" y="2286000"/>
-            <a:ext cx="8595360" cy="3840480"/>
-          </a:xfrm>
-          <a:prstGeom prst="rect">
-            <a:avLst/>
-          </a:prstGeom>
-          <a:noFill/>
-        </p:spPr>
-        <p:txBody>
-          <a:bodyPr wrap="square" lIns="0" rIns="0" tIns="0" bIns="0">
-            <a:spAutoFit/>
-          </a:bodyPr>
-          <a:lstStyle/>
-          <a:p>
-            <a:pPr>
-              <a:lnSpc>
-                <a:spcPct val="132000"/>
-              </a:lnSpc>
-              <a:spcBef>
-                <a:spcPts val="0"/>
-              </a:spcBef>
-              <a:spcAft>
-                <a:spcPts val="1100"/>
-              </a:spcAft>
-            </a:pPr>
-            <a:r>
-              <a:rPr sz="1400" b="0" i="0">
+              <a:rPr sz="1100" b="0" i="0">
                 <a:solidFill>
                   <a:srgbClr val="5A6068"/>
                 </a:solidFill>
                 <a:latin typeface="Calibri"/>
               </a:rPr>
-              <a:t>That is the question the commentary exists to pose, and it has a sharp form: we have built a global education monitoring architecture around measured learning outcomes, and the wellbeing evidence points at years attained. If both are to be kept, someone has to say what the education system is being optimised for.</a:t>
-            </a:r>
-          </a:p>
-          <a:p>
-            <a:pPr>
-              <a:lnSpc>
-                <a:spcPct val="132000"/>
-              </a:lnSpc>
-              <a:spcBef>
-                <a:spcPts val="0"/>
-              </a:spcBef>
-              <a:spcAft>
-                <a:spcPts val="1100"/>
-              </a:spcAft>
-            </a:pPr>
-            <a:r>
-              <a:rPr sz="1400" b="0" i="0">
-                <a:solidFill>
-                  <a:srgbClr val="5A6068"/>
-                </a:solidFill>
-                <a:latin typeface="Calibri"/>
-              </a:rPr>
-              <a:t>A commentary cannot settle that. It can put the disagreement on the record with the evidence attached, which is what the four acts are for.</a:t>
-            </a:r>
-          </a:p>
-        </p:txBody>
-      </p:sp>
-      <p:sp>
-        <p:nvSpPr>
-          <p:cNvPr id="5" name="TextBox 4"/>
-          <p:cNvSpPr txBox="1"/>
-          <p:nvPr/>
-        </p:nvSpPr>
-        <p:spPr>
-          <a:xfrm>
-            <a:off x="11338560" y="6263640"/>
-            <a:ext cx="548640" cy="274320"/>
-          </a:xfrm>
-          <a:prstGeom prst="rect">
-            <a:avLst/>
-          </a:prstGeom>
-          <a:noFill/>
-        </p:spPr>
-        <p:txBody>
-          <a:bodyPr wrap="square" lIns="0" rIns="0" tIns="0" bIns="0">
-            <a:spAutoFit/>
-          </a:bodyPr>
-          <a:lstStyle/>
-          <a:p>
-            <a:pPr algn="r">
-              <a:spcBef>
-                <a:spcPts val="0"/>
-              </a:spcBef>
-              <a:spcAft>
-                <a:spcPts val="0"/>
-              </a:spcAft>
-            </a:pPr>
-            <a:r>
-              <a:rPr sz="1100" b="0" i="0">
-                <a:solidFill>
-                  <a:srgbClr val="868D96"/>
-                </a:solidFill>
-                <a:latin typeface="Consolas"/>
-              </a:rPr>
-              <a:t>IV</a:t>
-            </a:r>
-          </a:p>
-        </p:txBody>
-      </p:sp>
+              <a:t>Every region a dot, two countries per UNDP development tier, 2022. Germany's regions span 0.05 of SHDI; China's span 0.30, India's 0.19.</a:t>
+            </a:r>
+          </a:p>
+        </p:txBody>
+      </p:sp>
+      <p:pic>
+        <p:nvPicPr>
+          <p:cNvPr id="5" name="Picture 4" descr="shdi_within_country_spread.png"/>
+          <p:cNvPicPr>
+            <a:picLocks noChangeAspect="1"/>
+          </p:cNvPicPr>
+          <p:nvPr/>
+        </p:nvPicPr>
+        <p:blipFill>
+          <a:blip r:embed="rId2"/>
+          <a:stretch>
+            <a:fillRect/>
+          </a:stretch>
+        </p:blipFill>
+        <p:spPr>
+          <a:xfrm>
+            <a:off x="2653157" y="1965960"/>
+            <a:ext cx="6885380" cy="4480560"/>
+          </a:xfrm>
+          <a:prstGeom prst="rect">
+            <a:avLst/>
+          </a:prstGeom>
+        </p:spPr>
+      </p:pic>
     </p:spTree>
   </p:cSld>
   <p:clrMapOvr>
@@ -9478,7 +9360,7 @@
     <p:bg>
       <p:bgPr>
         <a:solidFill>
-          <a:srgbClr val="E8EBEF"/>
+          <a:srgbClr val="FCFCFB"/>
         </a:solidFill>
         <a:effectLst/>
       </p:bgPr>
@@ -9492,45 +9374,43 @@
       <p:grpSpPr/>
       <p:sp>
         <p:nvSpPr>
-          <p:cNvPr id="2" name="Rectangle 1"/>
-          <p:cNvSpPr/>
-          <p:nvPr/>
-        </p:nvSpPr>
-        <p:spPr>
-          <a:xfrm>
-            <a:off x="566928" y="2103120"/>
-            <a:ext cx="54864" cy="2377440"/>
-          </a:xfrm>
-          <a:prstGeom prst="rect">
-            <a:avLst/>
-          </a:prstGeom>
-          <a:solidFill>
-            <a:srgbClr val="17549E"/>
-          </a:solidFill>
-          <a:ln>
-            <a:noFill/>
-          </a:ln>
-          <a:effectLst/>
-        </p:spPr>
-        <p:style>
-          <a:lnRef idx="1">
-            <a:schemeClr val="accent1"/>
-          </a:lnRef>
-          <a:fillRef idx="3">
-            <a:schemeClr val="accent1"/>
-          </a:fillRef>
-          <a:effectRef idx="2">
-            <a:schemeClr val="accent1"/>
-          </a:effectRef>
-          <a:fontRef idx="minor">
-            <a:schemeClr val="lt1"/>
-          </a:fontRef>
-        </p:style>
-        <p:txBody>
-          <a:bodyPr rtlCol="0" anchor="ctr"/>
-          <a:lstStyle/>
-          <a:p>
-            <a:pPr algn="ctr"/>
+          <p:cNvPr id="2" name="TextBox 1"/>
+          <p:cNvSpPr txBox="1"/>
+          <p:nvPr/>
+        </p:nvSpPr>
+        <p:spPr>
+          <a:xfrm>
+            <a:off x="566928" y="411480"/>
+            <a:ext cx="10515600" cy="320040"/>
+          </a:xfrm>
+          <a:prstGeom prst="rect">
+            <a:avLst/>
+          </a:prstGeom>
+          <a:noFill/>
+        </p:spPr>
+        <p:txBody>
+          <a:bodyPr wrap="square" lIns="0" rIns="0" tIns="0" bIns="0">
+            <a:spAutoFit/>
+          </a:bodyPr>
+          <a:lstStyle/>
+          <a:p>
+            <a:pPr>
+              <a:spcBef>
+                <a:spcPts val="0"/>
+              </a:spcBef>
+              <a:spcAft>
+                <a:spcPts val="0"/>
+              </a:spcAft>
+            </a:pPr>
+            <a:r>
+              <a:rPr sz="1000" b="0" i="0">
+                <a:solidFill>
+                  <a:srgbClr val="868D96"/>
+                </a:solidFill>
+                <a:latin typeface="Consolas"/>
+              </a:rPr>
+              <a:t>APPENDIX</a:t>
+            </a:r>
           </a:p>
         </p:txBody>
       </p:sp>
@@ -9542,21 +9422,66 @@
         </p:nvSpPr>
         <p:spPr>
           <a:xfrm>
-            <a:off x="914400" y="1600200"/>
-            <a:ext cx="8686800" cy="274320"/>
-          </a:xfrm>
-          <a:prstGeom prst="rect">
-            <a:avLst/>
-          </a:prstGeom>
-          <a:noFill/>
-        </p:spPr>
-        <p:txBody>
-          <a:bodyPr wrap="square" lIns="0" rIns="0" tIns="0" bIns="0">
-            <a:spAutoFit/>
-          </a:bodyPr>
-          <a:lstStyle/>
-          <a:p>
-            <a:pPr>
+            <a:off x="566928" y="749808"/>
+            <a:ext cx="10515600" cy="457200"/>
+          </a:xfrm>
+          <a:prstGeom prst="rect">
+            <a:avLst/>
+          </a:prstGeom>
+          <a:noFill/>
+        </p:spPr>
+        <p:txBody>
+          <a:bodyPr wrap="square" lIns="0" rIns="0" tIns="0" bIns="0">
+            <a:spAutoFit/>
+          </a:bodyPr>
+          <a:lstStyle/>
+          <a:p>
+            <a:pPr>
+              <a:spcBef>
+                <a:spcPts val="0"/>
+              </a:spcBef>
+              <a:spcAft>
+                <a:spcPts val="0"/>
+              </a:spcAft>
+            </a:pPr>
+            <a:r>
+              <a:rPr sz="2000" b="0" i="0">
+                <a:solidFill>
+                  <a:srgbClr val="14171C"/>
+                </a:solidFill>
+                <a:latin typeface="Georgia"/>
+              </a:rPr>
+              <a:t>SDG significance by goal, pooled</a:t>
+            </a:r>
+          </a:p>
+        </p:txBody>
+      </p:sp>
+      <p:sp>
+        <p:nvSpPr>
+          <p:cNvPr id="4" name="TextBox 3"/>
+          <p:cNvSpPr txBox="1"/>
+          <p:nvPr/>
+        </p:nvSpPr>
+        <p:spPr>
+          <a:xfrm>
+            <a:off x="566928" y="1207008"/>
+            <a:ext cx="10515600" cy="457200"/>
+          </a:xfrm>
+          <a:prstGeom prst="rect">
+            <a:avLst/>
+          </a:prstGeom>
+          <a:noFill/>
+        </p:spPr>
+        <p:txBody>
+          <a:bodyPr wrap="square" lIns="0" rIns="0" tIns="0" bIns="0">
+            <a:spAutoFit/>
+          </a:bodyPr>
+          <a:lstStyle/>
+          <a:p>
+            <a:pPr>
+              <a:lnSpc>
+                <a:spcPct val="128000"/>
+              </a:lnSpc>
               <a:spcBef>
                 <a:spcPts val="0"/>
               </a:spcBef>
@@ -9567,60 +9492,39 @@
             <a:r>
               <a:rPr sz="1100" b="0" i="0">
                 <a:solidFill>
-                  <a:srgbClr val="17549E"/>
-                </a:solidFill>
-                <a:latin typeface="Consolas"/>
-              </a:rPr>
-              <a:t>WHERE ACT IV LEAVES US</a:t>
-            </a:r>
-          </a:p>
-        </p:txBody>
-      </p:sp>
-      <p:sp>
-        <p:nvSpPr>
-          <p:cNvPr id="4" name="TextBox 3"/>
-          <p:cNvSpPr txBox="1"/>
-          <p:nvPr/>
-        </p:nvSpPr>
-        <p:spPr>
-          <a:xfrm>
-            <a:off x="914400" y="2148840"/>
-            <a:ext cx="9509760" cy="2926080"/>
-          </a:xfrm>
-          <a:prstGeom prst="rect">
-            <a:avLst/>
-          </a:prstGeom>
-          <a:noFill/>
-        </p:spPr>
-        <p:txBody>
-          <a:bodyPr wrap="square" lIns="0" rIns="0" tIns="0" bIns="0">
-            <a:spAutoFit/>
-          </a:bodyPr>
-          <a:lstStyle/>
-          <a:p>
-            <a:pPr>
-              <a:lnSpc>
-                <a:spcPct val="135000"/>
-              </a:lnSpc>
-              <a:spcBef>
-                <a:spcPts val="0"/>
-              </a:spcBef>
-              <a:spcAft>
-                <a:spcPts val="0"/>
-              </a:spcAft>
-            </a:pPr>
-            <a:r>
-              <a:rPr sz="2100" b="0" i="0">
-                <a:solidFill>
-                  <a:srgbClr val="14171C"/>
-                </a:solidFill>
-                <a:latin typeface="Georgia"/>
-              </a:rPr>
-              <a:t>The recommended framing for submission: lead with the education exception as the positive finding, use the generalised collapse as the backdrop that makes it surprising, and close on the target-setting question. That ordering makes Act I load-bearing without making it the story.</a:t>
-            </a:r>
-          </a:p>
-        </p:txBody>
-      </p:sp>
+                  <a:srgbClr val="5A6068"/>
+                </a:solidFill>
+                <a:latin typeface="Calibri"/>
+              </a:rPr>
+              <a:t>The leading goal (Energy, 16.0%) clears FDR significance in barely one country-test in six; pooled Education ranks 12th of 17.</a:t>
+            </a:r>
+          </a:p>
+        </p:txBody>
+      </p:sp>
+      <p:pic>
+        <p:nvPicPr>
+          <p:cNvPr id="5" name="Picture 4" descr="sdg_by_goal.png"/>
+          <p:cNvPicPr>
+            <a:picLocks noChangeAspect="1"/>
+          </p:cNvPicPr>
+          <p:nvPr/>
+        </p:nvPicPr>
+        <p:blipFill>
+          <a:blip r:embed="rId2"/>
+          <a:stretch>
+            <a:fillRect/>
+          </a:stretch>
+        </p:blipFill>
+        <p:spPr>
+          <a:xfrm>
+            <a:off x="2504357" y="1965960"/>
+            <a:ext cx="7182980" cy="4480560"/>
+          </a:xfrm>
+          <a:prstGeom prst="rect">
+            <a:avLst/>
+          </a:prstGeom>
+        </p:spPr>
+      </p:pic>
     </p:spTree>
   </p:cSld>
   <p:clrMapOvr>
@@ -9815,7 +9719,7 @@
                 </a:solidFill>
                 <a:latin typeface="Georgia"/>
               </a:rPr>
-              <a:t>The collapse is a property, not an artifact</a:t>
+              <a:t>Replicating the collapse beyond the SDGs</a:t>
             </a:r>
           </a:p>
         </p:txBody>
@@ -10091,599 +9995,151 @@
         </p:nvSpPr>
         <p:spPr>
           <a:xfrm>
-            <a:off x="566928" y="502920"/>
-            <a:ext cx="8229600" cy="822960"/>
-          </a:xfrm>
-          <a:prstGeom prst="rect">
-            <a:avLst/>
-          </a:prstGeom>
-          <a:noFill/>
-        </p:spPr>
-        <p:txBody>
-          <a:bodyPr wrap="square" lIns="0" rIns="0" tIns="0" bIns="0">
-            <a:spAutoFit/>
-          </a:bodyPr>
-          <a:lstStyle/>
-          <a:p>
-            <a:pPr>
-              <a:spcBef>
-                <a:spcPts val="0"/>
-              </a:spcBef>
-              <a:spcAft>
-                <a:spcPts val="600"/>
-              </a:spcAft>
-            </a:pPr>
-            <a:r>
-              <a:rPr sz="3200" b="0" i="0">
+            <a:off x="566928" y="411480"/>
+            <a:ext cx="10515600" cy="320040"/>
+          </a:xfrm>
+          <a:prstGeom prst="rect">
+            <a:avLst/>
+          </a:prstGeom>
+          <a:noFill/>
+        </p:spPr>
+        <p:txBody>
+          <a:bodyPr wrap="square" lIns="0" rIns="0" tIns="0" bIns="0">
+            <a:spAutoFit/>
+          </a:bodyPr>
+          <a:lstStyle/>
+          <a:p>
+            <a:pPr>
+              <a:spcBef>
+                <a:spcPts val="0"/>
+              </a:spcBef>
+              <a:spcAft>
+                <a:spcPts val="0"/>
+              </a:spcAft>
+            </a:pPr>
+            <a:r>
+              <a:rPr sz="1000" b="0" i="0">
+                <a:solidFill>
+                  <a:srgbClr val="868D96"/>
+                </a:solidFill>
+                <a:latin typeface="Consolas"/>
+              </a:rPr>
+              <a:t>APPENDIX</a:t>
+            </a:r>
+          </a:p>
+        </p:txBody>
+      </p:sp>
+      <p:sp>
+        <p:nvSpPr>
+          <p:cNvPr id="3" name="TextBox 2"/>
+          <p:cNvSpPr txBox="1"/>
+          <p:nvPr/>
+        </p:nvSpPr>
+        <p:spPr>
+          <a:xfrm>
+            <a:off x="566928" y="749808"/>
+            <a:ext cx="10515600" cy="457200"/>
+          </a:xfrm>
+          <a:prstGeom prst="rect">
+            <a:avLst/>
+          </a:prstGeom>
+          <a:noFill/>
+        </p:spPr>
+        <p:txBody>
+          <a:bodyPr wrap="square" lIns="0" rIns="0" tIns="0" bIns="0">
+            <a:spAutoFit/>
+          </a:bodyPr>
+          <a:lstStyle/>
+          <a:p>
+            <a:pPr>
+              <a:spcBef>
+                <a:spcPts val="0"/>
+              </a:spcBef>
+              <a:spcAft>
+                <a:spcPts val="0"/>
+              </a:spcAft>
+            </a:pPr>
+            <a:r>
+              <a:rPr sz="2000" b="0" i="0">
                 <a:solidFill>
                   <a:srgbClr val="14171C"/>
                 </a:solidFill>
                 <a:latin typeface="Georgia"/>
               </a:rPr>
-              <a:t>Decisions for the team</a:t>
-            </a:r>
-          </a:p>
-          <a:p>
-            <a:pPr>
-              <a:spcBef>
-                <a:spcPts val="0"/>
-              </a:spcBef>
-              <a:spcAft>
-                <a:spcPts val="0"/>
-              </a:spcAft>
-            </a:pPr>
-            <a:r>
-              <a:rPr sz="1300" b="0" i="0">
+              <a:t>Subnational HDI validated against the UNDP HDI</a:t>
+            </a:r>
+          </a:p>
+        </p:txBody>
+      </p:sp>
+      <p:sp>
+        <p:nvSpPr>
+          <p:cNvPr id="4" name="TextBox 3"/>
+          <p:cNvSpPr txBox="1"/>
+          <p:nvPr/>
+        </p:nvSpPr>
+        <p:spPr>
+          <a:xfrm>
+            <a:off x="566928" y="1207008"/>
+            <a:ext cx="10515600" cy="457200"/>
+          </a:xfrm>
+          <a:prstGeom prst="rect">
+            <a:avLst/>
+          </a:prstGeom>
+          <a:noFill/>
+        </p:spPr>
+        <p:txBody>
+          <a:bodyPr wrap="square" lIns="0" rIns="0" tIns="0" bIns="0">
+            <a:spAutoFit/>
+          </a:bodyPr>
+          <a:lstStyle/>
+          <a:p>
+            <a:pPr>
+              <a:lnSpc>
+                <a:spcPct val="128000"/>
+              </a:lnSpc>
+              <a:spcBef>
+                <a:spcPts val="0"/>
+              </a:spcBef>
+              <a:spcAft>
+                <a:spcPts val="0"/>
+              </a:spcAft>
+            </a:pPr>
+            <a:r>
+              <a:rPr sz="1100" b="0" i="0">
                 <a:solidFill>
                   <a:srgbClr val="5A6068"/>
                 </a:solidFill>
                 <a:latin typeface="Calibri"/>
               </a:rPr>
-              <a:t>Five things the acts do not settle, in the order they block drafting.</a:t>
-            </a:r>
-          </a:p>
-        </p:txBody>
-      </p:sp>
-      <p:sp>
-        <p:nvSpPr>
-          <p:cNvPr id="3" name="Rectangle 2"/>
-          <p:cNvSpPr/>
-          <p:nvPr/>
-        </p:nvSpPr>
-        <p:spPr>
-          <a:xfrm>
-            <a:off x="566928" y="1828800"/>
-            <a:ext cx="3472586" cy="25400"/>
-          </a:xfrm>
-          <a:prstGeom prst="rect">
-            <a:avLst/>
-          </a:prstGeom>
-          <a:solidFill>
-            <a:srgbClr val="17549E"/>
-          </a:solidFill>
-          <a:ln>
-            <a:noFill/>
-          </a:ln>
-          <a:effectLst/>
-        </p:spPr>
-        <p:style>
-          <a:lnRef idx="1">
-            <a:schemeClr val="accent1"/>
-          </a:lnRef>
-          <a:fillRef idx="3">
-            <a:schemeClr val="accent1"/>
-          </a:fillRef>
-          <a:effectRef idx="2">
-            <a:schemeClr val="accent1"/>
-          </a:effectRef>
-          <a:fontRef idx="minor">
-            <a:schemeClr val="lt1"/>
-          </a:fontRef>
-        </p:style>
-        <p:txBody>
-          <a:bodyPr rtlCol="0" anchor="ctr"/>
-          <a:lstStyle/>
-          <a:p>
-            <a:pPr algn="ctr"/>
-          </a:p>
-        </p:txBody>
-      </p:sp>
-      <p:sp>
-        <p:nvSpPr>
-          <p:cNvPr id="4" name="TextBox 3"/>
-          <p:cNvSpPr txBox="1"/>
-          <p:nvPr/>
-        </p:nvSpPr>
-        <p:spPr>
-          <a:xfrm>
-            <a:off x="566928" y="2011680"/>
-            <a:ext cx="3472586" cy="1828800"/>
-          </a:xfrm>
-          <a:prstGeom prst="rect">
-            <a:avLst/>
-          </a:prstGeom>
-          <a:noFill/>
-        </p:spPr>
-        <p:txBody>
-          <a:bodyPr wrap="square" lIns="0" rIns="0" tIns="0" bIns="0">
-            <a:spAutoFit/>
-          </a:bodyPr>
-          <a:lstStyle/>
-          <a:p>
-            <a:pPr>
-              <a:spcBef>
-                <a:spcPts val="0"/>
-              </a:spcBef>
-              <a:spcAft>
-                <a:spcPts val="700"/>
-              </a:spcAft>
-            </a:pPr>
-            <a:r>
-              <a:rPr sz="1050" b="0" i="0">
-                <a:solidFill>
-                  <a:srgbClr val="17549E"/>
-                </a:solidFill>
-                <a:latin typeface="Consolas"/>
-              </a:rPr>
-              <a:t>FRAMING</a:t>
-            </a:r>
-          </a:p>
-          <a:p>
-            <a:pPr>
-              <a:lnSpc>
-                <a:spcPct val="130000"/>
-              </a:lnSpc>
-              <a:spcBef>
-                <a:spcPts val="0"/>
-              </a:spcBef>
-              <a:spcAft>
-                <a:spcPts val="0"/>
-              </a:spcAft>
-            </a:pPr>
-            <a:r>
-              <a:rPr sz="1100" b="0" i="0">
-                <a:solidFill>
-                  <a:srgbClr val="5A6068"/>
-                </a:solidFill>
-                <a:latin typeface="Calibri"/>
-              </a:rPr>
-              <a:t>Lead with the education exception and use the generalised collapse as Act I backdrop — recommended — or lead with the robustness result and treat education as the coda. This decides title, abstract, and venue.</a:t>
-            </a:r>
-          </a:p>
-        </p:txBody>
-      </p:sp>
-      <p:sp>
-        <p:nvSpPr>
-          <p:cNvPr id="5" name="Rectangle 4"/>
-          <p:cNvSpPr/>
-          <p:nvPr/>
-        </p:nvSpPr>
-        <p:spPr>
-          <a:xfrm>
-            <a:off x="4359554" y="1828800"/>
-            <a:ext cx="3472586" cy="25400"/>
-          </a:xfrm>
-          <a:prstGeom prst="rect">
-            <a:avLst/>
-          </a:prstGeom>
-          <a:solidFill>
-            <a:srgbClr val="17549E"/>
-          </a:solidFill>
-          <a:ln>
-            <a:noFill/>
-          </a:ln>
-          <a:effectLst/>
-        </p:spPr>
-        <p:style>
-          <a:lnRef idx="1">
-            <a:schemeClr val="accent1"/>
-          </a:lnRef>
-          <a:fillRef idx="3">
-            <a:schemeClr val="accent1"/>
-          </a:fillRef>
-          <a:effectRef idx="2">
-            <a:schemeClr val="accent1"/>
-          </a:effectRef>
-          <a:fontRef idx="minor">
-            <a:schemeClr val="lt1"/>
-          </a:fontRef>
-        </p:style>
-        <p:txBody>
-          <a:bodyPr rtlCol="0" anchor="ctr"/>
-          <a:lstStyle/>
-          <a:p>
-            <a:pPr algn="ctr"/>
-          </a:p>
-        </p:txBody>
-      </p:sp>
-      <p:sp>
-        <p:nvSpPr>
-          <p:cNvPr id="6" name="TextBox 5"/>
-          <p:cNvSpPr txBox="1"/>
-          <p:nvPr/>
-        </p:nvSpPr>
-        <p:spPr>
-          <a:xfrm>
-            <a:off x="4359554" y="2011680"/>
-            <a:ext cx="3472586" cy="1828800"/>
-          </a:xfrm>
-          <a:prstGeom prst="rect">
-            <a:avLst/>
-          </a:prstGeom>
-          <a:noFill/>
-        </p:spPr>
-        <p:txBody>
-          <a:bodyPr wrap="square" lIns="0" rIns="0" tIns="0" bIns="0">
-            <a:spAutoFit/>
-          </a:bodyPr>
-          <a:lstStyle/>
-          <a:p>
-            <a:pPr>
-              <a:spcBef>
-                <a:spcPts val="0"/>
-              </a:spcBef>
-              <a:spcAft>
-                <a:spcPts val="700"/>
-              </a:spcAft>
-            </a:pPr>
-            <a:r>
-              <a:rPr sz="1050" b="0" i="0">
-                <a:solidFill>
-                  <a:srgbClr val="17549E"/>
-                </a:solidFill>
-                <a:latin typeface="Consolas"/>
-              </a:rPr>
-              <a:t>DISPLAY ITEMS</a:t>
-            </a:r>
-          </a:p>
-          <a:p>
-            <a:pPr>
-              <a:lnSpc>
-                <a:spcPct val="130000"/>
-              </a:lnSpc>
-              <a:spcBef>
-                <a:spcPts val="0"/>
-              </a:spcBef>
-              <a:spcAft>
-                <a:spcPts val="0"/>
-              </a:spcAft>
-            </a:pPr>
-            <a:r>
-              <a:rPr sz="1100" b="0" i="0">
-                <a:solidFill>
-                  <a:srgbClr val="5A6068"/>
-                </a:solidFill>
-                <a:latin typeface="Calibri"/>
-              </a:rPr>
-              <a:t>Commentaries allow one or two. Proposed: the three-panel composite as Figure 1, the ranking flip as Figure 2. Everything else moves to supplementary.</a:t>
-            </a:r>
-          </a:p>
-        </p:txBody>
-      </p:sp>
-      <p:sp>
-        <p:nvSpPr>
-          <p:cNvPr id="7" name="Rectangle 6"/>
-          <p:cNvSpPr/>
-          <p:nvPr/>
-        </p:nvSpPr>
-        <p:spPr>
-          <a:xfrm>
-            <a:off x="8152180" y="1828800"/>
-            <a:ext cx="3472586" cy="25400"/>
-          </a:xfrm>
-          <a:prstGeom prst="rect">
-            <a:avLst/>
-          </a:prstGeom>
-          <a:solidFill>
-            <a:srgbClr val="17549E"/>
-          </a:solidFill>
-          <a:ln>
-            <a:noFill/>
-          </a:ln>
-          <a:effectLst/>
-        </p:spPr>
-        <p:style>
-          <a:lnRef idx="1">
-            <a:schemeClr val="accent1"/>
-          </a:lnRef>
-          <a:fillRef idx="3">
-            <a:schemeClr val="accent1"/>
-          </a:fillRef>
-          <a:effectRef idx="2">
-            <a:schemeClr val="accent1"/>
-          </a:effectRef>
-          <a:fontRef idx="minor">
-            <a:schemeClr val="lt1"/>
-          </a:fontRef>
-        </p:style>
-        <p:txBody>
-          <a:bodyPr rtlCol="0" anchor="ctr"/>
-          <a:lstStyle/>
-          <a:p>
-            <a:pPr algn="ctr"/>
-          </a:p>
-        </p:txBody>
-      </p:sp>
-      <p:sp>
-        <p:nvSpPr>
-          <p:cNvPr id="8" name="TextBox 7"/>
-          <p:cNvSpPr txBox="1"/>
-          <p:nvPr/>
-        </p:nvSpPr>
-        <p:spPr>
-          <a:xfrm>
-            <a:off x="8152180" y="2011680"/>
-            <a:ext cx="3472586" cy="1828800"/>
-          </a:xfrm>
-          <a:prstGeom prst="rect">
-            <a:avLst/>
-          </a:prstGeom>
-          <a:noFill/>
-        </p:spPr>
-        <p:txBody>
-          <a:bodyPr wrap="square" lIns="0" rIns="0" tIns="0" bIns="0">
-            <a:spAutoFit/>
-          </a:bodyPr>
-          <a:lstStyle/>
-          <a:p>
-            <a:pPr>
-              <a:spcBef>
-                <a:spcPts val="0"/>
-              </a:spcBef>
-              <a:spcAft>
-                <a:spcPts val="700"/>
-              </a:spcAft>
-            </a:pPr>
-            <a:r>
-              <a:rPr sz="1050" b="0" i="0">
-                <a:solidFill>
-                  <a:srgbClr val="17549E"/>
-                </a:solidFill>
-                <a:latin typeface="Consolas"/>
-              </a:rPr>
-              <a:t>SCOPE OF ACT III</a:t>
-            </a:r>
-          </a:p>
-          <a:p>
-            <a:pPr>
-              <a:lnSpc>
-                <a:spcPct val="130000"/>
-              </a:lnSpc>
-              <a:spcBef>
-                <a:spcPts val="0"/>
-              </a:spcBef>
-              <a:spcAft>
-                <a:spcPts val="0"/>
-              </a:spcAft>
-            </a:pPr>
-            <a:r>
-              <a:rPr sz="1100" b="0" i="0">
-                <a:solidFill>
-                  <a:srgbClr val="5A6068"/>
-                </a:solidFill>
-                <a:latin typeface="Calibri"/>
-              </a:rPr>
-              <a:t>Does the within-country material belong in this commentary or in a third paper? It is the most policy-relevant and the most contested, and it is Europe-only.</a:t>
-            </a:r>
-          </a:p>
-        </p:txBody>
-      </p:sp>
-      <p:sp>
-        <p:nvSpPr>
-          <p:cNvPr id="9" name="Rectangle 8"/>
-          <p:cNvSpPr/>
-          <p:nvPr/>
-        </p:nvSpPr>
-        <p:spPr>
-          <a:xfrm>
-            <a:off x="566928" y="4069080"/>
-            <a:ext cx="3472586" cy="25400"/>
-          </a:xfrm>
-          <a:prstGeom prst="rect">
-            <a:avLst/>
-          </a:prstGeom>
-          <a:solidFill>
-            <a:srgbClr val="17549E"/>
-          </a:solidFill>
-          <a:ln>
-            <a:noFill/>
-          </a:ln>
-          <a:effectLst/>
-        </p:spPr>
-        <p:style>
-          <a:lnRef idx="1">
-            <a:schemeClr val="accent1"/>
-          </a:lnRef>
-          <a:fillRef idx="3">
-            <a:schemeClr val="accent1"/>
-          </a:fillRef>
-          <a:effectRef idx="2">
-            <a:schemeClr val="accent1"/>
-          </a:effectRef>
-          <a:fontRef idx="minor">
-            <a:schemeClr val="lt1"/>
-          </a:fontRef>
-        </p:style>
-        <p:txBody>
-          <a:bodyPr rtlCol="0" anchor="ctr"/>
-          <a:lstStyle/>
-          <a:p>
-            <a:pPr algn="ctr"/>
-          </a:p>
-        </p:txBody>
-      </p:sp>
-      <p:sp>
-        <p:nvSpPr>
-          <p:cNvPr id="10" name="TextBox 9"/>
-          <p:cNvSpPr txBox="1"/>
-          <p:nvPr/>
-        </p:nvSpPr>
-        <p:spPr>
-          <a:xfrm>
-            <a:off x="566928" y="4251960"/>
-            <a:ext cx="3472586" cy="1828800"/>
-          </a:xfrm>
-          <a:prstGeom prst="rect">
-            <a:avLst/>
-          </a:prstGeom>
-          <a:noFill/>
-        </p:spPr>
-        <p:txBody>
-          <a:bodyPr wrap="square" lIns="0" rIns="0" tIns="0" bIns="0">
-            <a:spAutoFit/>
-          </a:bodyPr>
-          <a:lstStyle/>
-          <a:p>
-            <a:pPr>
-              <a:spcBef>
-                <a:spcPts val="0"/>
-              </a:spcBef>
-              <a:spcAft>
-                <a:spcPts val="700"/>
-              </a:spcAft>
-            </a:pPr>
-            <a:r>
-              <a:rPr sz="1050" b="0" i="0">
-                <a:solidFill>
-                  <a:srgbClr val="17549E"/>
-                </a:solidFill>
-                <a:latin typeface="Consolas"/>
-              </a:rPr>
-              <a:t>DATA INVESTMENT</a:t>
-            </a:r>
-          </a:p>
-          <a:p>
-            <a:pPr>
-              <a:lnSpc>
-                <a:spcPct val="130000"/>
-              </a:lnSpc>
-              <a:spcBef>
-                <a:spcPts val="0"/>
-              </a:spcBef>
-              <a:spcAft>
-                <a:spcPts val="0"/>
-              </a:spcAft>
-            </a:pPr>
-            <a:r>
-              <a:rPr sz="1100" b="0" i="0">
-                <a:solidFill>
-                  <a:srgbClr val="5A6068"/>
-                </a:solidFill>
-                <a:latin typeface="Calibri"/>
-              </a:rPr>
-              <a:t>The Global Data Lab's separate Education &amp; Work dataset carries 43 subnational schooling indicators by cohort and sex. Pulling it would let us test the education finding subnationally. Before submission or after review?</a:t>
-            </a:r>
-          </a:p>
-        </p:txBody>
-      </p:sp>
-      <p:sp>
-        <p:nvSpPr>
-          <p:cNvPr id="11" name="Rectangle 10"/>
-          <p:cNvSpPr/>
-          <p:nvPr/>
-        </p:nvSpPr>
-        <p:spPr>
-          <a:xfrm>
-            <a:off x="4359554" y="4069080"/>
-            <a:ext cx="3472586" cy="25400"/>
-          </a:xfrm>
-          <a:prstGeom prst="rect">
-            <a:avLst/>
-          </a:prstGeom>
-          <a:solidFill>
-            <a:srgbClr val="17549E"/>
-          </a:solidFill>
-          <a:ln>
-            <a:noFill/>
-          </a:ln>
-          <a:effectLst/>
-        </p:spPr>
-        <p:style>
-          <a:lnRef idx="1">
-            <a:schemeClr val="accent1"/>
-          </a:lnRef>
-          <a:fillRef idx="3">
-            <a:schemeClr val="accent1"/>
-          </a:fillRef>
-          <a:effectRef idx="2">
-            <a:schemeClr val="accent1"/>
-          </a:effectRef>
-          <a:fontRef idx="minor">
-            <a:schemeClr val="lt1"/>
-          </a:fontRef>
-        </p:style>
-        <p:txBody>
-          <a:bodyPr rtlCol="0" anchor="ctr"/>
-          <a:lstStyle/>
-          <a:p>
-            <a:pPr algn="ctr"/>
-          </a:p>
-        </p:txBody>
-      </p:sp>
-      <p:sp>
-        <p:nvSpPr>
-          <p:cNvPr id="12" name="TextBox 11"/>
-          <p:cNvSpPr txBox="1"/>
-          <p:nvPr/>
-        </p:nvSpPr>
-        <p:spPr>
-          <a:xfrm>
-            <a:off x="4359554" y="4251960"/>
-            <a:ext cx="3472586" cy="1828800"/>
-          </a:xfrm>
-          <a:prstGeom prst="rect">
-            <a:avLst/>
-          </a:prstGeom>
-          <a:noFill/>
-        </p:spPr>
-        <p:txBody>
-          <a:bodyPr wrap="square" lIns="0" rIns="0" tIns="0" bIns="0">
-            <a:spAutoFit/>
-          </a:bodyPr>
-          <a:lstStyle/>
-          <a:p>
-            <a:pPr>
-              <a:spcBef>
-                <a:spcPts val="0"/>
-              </a:spcBef>
-              <a:spcAft>
-                <a:spcPts val="700"/>
-              </a:spcAft>
-            </a:pPr>
-            <a:r>
-              <a:rPr sz="1050" b="0" i="0">
-                <a:solidFill>
-                  <a:srgbClr val="17549E"/>
-                </a:solidFill>
-                <a:latin typeface="Consolas"/>
-              </a:rPr>
-              <a:t>METHODS NOTE</a:t>
-            </a:r>
-          </a:p>
-          <a:p>
-            <a:pPr>
-              <a:lnSpc>
-                <a:spcPct val="130000"/>
-              </a:lnSpc>
-              <a:spcBef>
-                <a:spcPts val="0"/>
-              </a:spcBef>
-              <a:spcAft>
-                <a:spcPts val="0"/>
-              </a:spcAft>
-            </a:pPr>
-            <a:r>
-              <a:rPr sz="1100" b="0" i="0">
-                <a:solidFill>
-                  <a:srgbClr val="5A6068"/>
-                </a:solidFill>
-                <a:latin typeface="Calibri"/>
-              </a:rPr>
-              <a:t>Pooled R² and significant-country share tell different stories at several points. Proposal: report both throughout and discuss the divergence explicitly as a secondary contribution.</a:t>
-            </a:r>
-          </a:p>
-        </p:txBody>
-      </p:sp>
+              <a:t>National aggregates agree closely, which is what licenses the region-level analysis.</a:t>
+            </a:r>
+          </a:p>
+        </p:txBody>
+      </p:sp>
+      <p:pic>
+        <p:nvPicPr>
+          <p:cNvPr id="5" name="Picture 4" descr="shdi_vs_hdi_validation.png"/>
+          <p:cNvPicPr>
+            <a:picLocks noChangeAspect="1"/>
+          </p:cNvPicPr>
+          <p:nvPr/>
+        </p:nvPicPr>
+        <p:blipFill>
+          <a:blip r:embed="rId2"/>
+          <a:stretch>
+            <a:fillRect/>
+          </a:stretch>
+        </p:blipFill>
+        <p:spPr>
+          <a:xfrm>
+            <a:off x="4036999" y="1965960"/>
+            <a:ext cx="4117697" cy="4480560"/>
+          </a:xfrm>
+          <a:prstGeom prst="rect">
+            <a:avLst/>
+          </a:prstGeom>
+        </p:spPr>
+      </p:pic>
     </p:spTree>
   </p:cSld>
   <p:clrMapOvr>
@@ -10698,7 +10154,7 @@
     <p:bg>
       <p:bgPr>
         <a:solidFill>
-          <a:srgbClr val="14171C"/>
+          <a:srgbClr val="FCFCFB"/>
         </a:solidFill>
         <a:effectLst/>
       </p:bgPr>
@@ -10718,42 +10174,107 @@
         </p:nvSpPr>
         <p:spPr>
           <a:xfrm>
-            <a:off x="566928" y="2743200"/>
-            <a:ext cx="8229600" cy="1371600"/>
-          </a:xfrm>
-          <a:prstGeom prst="rect">
-            <a:avLst/>
-          </a:prstGeom>
-          <a:noFill/>
-        </p:spPr>
-        <p:txBody>
-          <a:bodyPr wrap="square" lIns="0" rIns="0" tIns="0" bIns="0">
-            <a:spAutoFit/>
-          </a:bodyPr>
-          <a:lstStyle/>
-          <a:p>
-            <a:pPr>
-              <a:spcBef>
-                <a:spcPts val="0"/>
-              </a:spcBef>
-              <a:spcAft>
-                <a:spcPts val="1000"/>
-              </a:spcAft>
-            </a:pPr>
-            <a:r>
-              <a:rPr sz="4000" b="0" i="0">
-                <a:solidFill>
-                  <a:srgbClr val="FCFCFB"/>
+            <a:off x="566928" y="411480"/>
+            <a:ext cx="10515600" cy="320040"/>
+          </a:xfrm>
+          <a:prstGeom prst="rect">
+            <a:avLst/>
+          </a:prstGeom>
+          <a:noFill/>
+        </p:spPr>
+        <p:txBody>
+          <a:bodyPr wrap="square" lIns="0" rIns="0" tIns="0" bIns="0">
+            <a:spAutoFit/>
+          </a:bodyPr>
+          <a:lstStyle/>
+          <a:p>
+            <a:pPr>
+              <a:spcBef>
+                <a:spcPts val="0"/>
+              </a:spcBef>
+              <a:spcAft>
+                <a:spcPts val="0"/>
+              </a:spcAft>
+            </a:pPr>
+            <a:r>
+              <a:rPr sz="1000" b="0" i="0">
+                <a:solidFill>
+                  <a:srgbClr val="868D96"/>
+                </a:solidFill>
+                <a:latin typeface="Consolas"/>
+              </a:rPr>
+              <a:t>APPENDIX</a:t>
+            </a:r>
+          </a:p>
+        </p:txBody>
+      </p:sp>
+      <p:sp>
+        <p:nvSpPr>
+          <p:cNvPr id="3" name="TextBox 2"/>
+          <p:cNvSpPr txBox="1"/>
+          <p:nvPr/>
+        </p:nvSpPr>
+        <p:spPr>
+          <a:xfrm>
+            <a:off x="566928" y="749808"/>
+            <a:ext cx="10515600" cy="457200"/>
+          </a:xfrm>
+          <a:prstGeom prst="rect">
+            <a:avLst/>
+          </a:prstGeom>
+          <a:noFill/>
+        </p:spPr>
+        <p:txBody>
+          <a:bodyPr wrap="square" lIns="0" rIns="0" tIns="0" bIns="0">
+            <a:spAutoFit/>
+          </a:bodyPr>
+          <a:lstStyle/>
+          <a:p>
+            <a:pPr>
+              <a:spcBef>
+                <a:spcPts val="0"/>
+              </a:spcBef>
+              <a:spcAft>
+                <a:spcPts val="0"/>
+              </a:spcAft>
+            </a:pPr>
+            <a:r>
+              <a:rPr sz="2000" b="0" i="0">
+                <a:solidFill>
+                  <a:srgbClr val="14171C"/>
                 </a:solidFill>
                 <a:latin typeface="Georgia"/>
               </a:rPr>
-              <a:t>Evidence appendix</a:t>
-            </a:r>
-          </a:p>
+              <a:t>Subnational HDI against WHR happiness, levels</a:t>
+            </a:r>
+          </a:p>
+        </p:txBody>
+      </p:sp>
+      <p:sp>
+        <p:nvSpPr>
+          <p:cNvPr id="4" name="TextBox 3"/>
+          <p:cNvSpPr txBox="1"/>
+          <p:nvPr/>
+        </p:nvSpPr>
+        <p:spPr>
+          <a:xfrm>
+            <a:off x="566928" y="1207008"/>
+            <a:ext cx="10515600" cy="457200"/>
+          </a:xfrm>
+          <a:prstGeom prst="rect">
+            <a:avLst/>
+          </a:prstGeom>
+          <a:noFill/>
+        </p:spPr>
+        <p:txBody>
+          <a:bodyPr wrap="square" lIns="0" rIns="0" tIns="0" bIns="0">
+            <a:spAutoFit/>
+          </a:bodyPr>
+          <a:lstStyle/>
           <a:p>
             <a:pPr>
               <a:lnSpc>
-                <a:spcPct val="135000"/>
+                <a:spcPct val="128000"/>
               </a:lnSpc>
               <a:spcBef>
                 <a:spcPts val="0"/>
@@ -10763,17 +10284,41 @@
               </a:spcAft>
             </a:pPr>
             <a:r>
-              <a:rPr sz="1400" b="0" i="0">
-                <a:solidFill>
-                  <a:srgbClr val="9AA4B0"/>
+              <a:rPr sz="1100" b="0" i="0">
+                <a:solidFill>
+                  <a:srgbClr val="5A6068"/>
                 </a:solidFill>
                 <a:latin typeface="Calibri"/>
               </a:rPr>
-              <a:t>Everything the four acts rest on but do not carry. In submission these become supplementary material.</a:t>
-            </a:r>
-          </a:p>
-        </p:txBody>
-      </p:sp>
+              <a:t>The familiar development-tier gradient with SHDI in place of HDI.</a:t>
+            </a:r>
+          </a:p>
+        </p:txBody>
+      </p:sp>
+      <p:pic>
+        <p:nvPicPr>
+          <p:cNvPr id="5" name="Picture 4" descr="shdi_whr_levels_scatter.png"/>
+          <p:cNvPicPr>
+            <a:picLocks noChangeAspect="1"/>
+          </p:cNvPicPr>
+          <p:nvPr/>
+        </p:nvPicPr>
+        <p:blipFill>
+          <a:blip r:embed="rId2"/>
+          <a:stretch>
+            <a:fillRect/>
+          </a:stretch>
+        </p:blipFill>
+        <p:spPr>
+          <a:xfrm>
+            <a:off x="3508482" y="1965960"/>
+            <a:ext cx="5174731" cy="4480560"/>
+          </a:xfrm>
+          <a:prstGeom prst="rect">
+            <a:avLst/>
+          </a:prstGeom>
+        </p:spPr>
+      </p:pic>
     </p:spTree>
   </p:cSld>
   <p:clrMapOvr>
@@ -10879,7 +10424,7 @@
                 </a:solidFill>
                 <a:latin typeface="Georgia"/>
               </a:rPr>
-              <a:t>SDG significance by goal, pooled</a:t>
+              <a:t>ESS coverage by country and year</a:t>
             </a:r>
           </a:p>
         </p:txBody>
@@ -10924,14 +10469,14 @@
                 </a:solidFill>
                 <a:latin typeface="Calibri"/>
               </a:rPr>
-              <a:t>The leading goal (Energy, 16.0%) clears FDR significance in barely one country-test in six; pooled Education ranks 12th of 17.</a:t>
+              <a:t>A rotating panel: 36 countries, roughly biennial from 2010 to 2023, with 17 countries present in all seven waves. This is the power constraint behind every ESS significance test.</a:t>
             </a:r>
           </a:p>
         </p:txBody>
       </p:sp>
       <p:pic>
         <p:nvPicPr>
-          <p:cNvPr id="5" name="Picture 4" descr="sdg_by_goal.png"/>
+          <p:cNvPr id="5" name="Picture 4" descr="ess_year_coverage.png"/>
           <p:cNvPicPr>
             <a:picLocks noChangeAspect="1"/>
           </p:cNvPicPr>
@@ -10945,8 +10490,8 @@
         </p:blipFill>
         <p:spPr>
           <a:xfrm>
-            <a:off x="2504357" y="1965960"/>
-            <a:ext cx="7182980" cy="4480560"/>
+            <a:off x="4247956" y="1965960"/>
+            <a:ext cx="3695783" cy="4480560"/>
           </a:xfrm>
           <a:prstGeom prst="rect">
             <a:avLst/>
@@ -11058,7 +10603,7 @@
                 </a:solidFill>
                 <a:latin typeface="Georgia"/>
               </a:rPr>
-              <a:t>Subnational HDI validated against the UNDP HDI</a:t>
+              <a:t>ESS-to-SHDI region crosswalk</a:t>
             </a:r>
           </a:p>
         </p:txBody>
@@ -11103,14 +10648,14 @@
                 </a:solidFill>
                 <a:latin typeface="Calibri"/>
               </a:rPr>
-              <a:t>National aggregates agree closely, which is what licenses the region-level analysis.</a:t>
+              <a:t>62% of respondents, across 24 of 36 countries, matched to a subnational SHDI value through the NUTS-to-GDL crosswalk.</a:t>
             </a:r>
           </a:p>
         </p:txBody>
       </p:sp>
       <p:pic>
         <p:nvPicPr>
-          <p:cNvPr id="5" name="Picture 4" descr="shdi_vs_hdi_validation.png"/>
+          <p:cNvPr id="5" name="Picture 4" descr="region_crosswalk_match.png"/>
           <p:cNvPicPr>
             <a:picLocks noChangeAspect="1"/>
           </p:cNvPicPr>
@@ -11124,8 +10669,8 @@
         </p:blipFill>
         <p:spPr>
           <a:xfrm>
-            <a:off x="4036999" y="1965960"/>
-            <a:ext cx="4117697" cy="4480560"/>
+            <a:off x="2428154" y="1965960"/>
+            <a:ext cx="7335386" cy="4480560"/>
           </a:xfrm>
           <a:prstGeom prst="rect">
             <a:avLst/>
@@ -11237,7 +10782,7 @@
                 </a:solidFill>
                 <a:latin typeface="Georgia"/>
               </a:rPr>
-              <a:t>Subnational HDI against WHR happiness, levels</a:t>
+              <a:t>Country × indicator significance, ESS</a:t>
             </a:r>
           </a:p>
         </p:txBody>
@@ -11282,14 +10827,14 @@
                 </a:solidFill>
                 <a:latin typeface="Calibri"/>
               </a:rPr>
-              <a:t>The familiar development-tier gradient with SHDI in place of HDI.</a:t>
+              <a:t>15% of levels cells and 9% of differences cells FDR-significant; direction consistent with the WHR results, power much lower.</a:t>
             </a:r>
           </a:p>
         </p:txBody>
       </p:sp>
       <p:pic>
         <p:nvPicPr>
-          <p:cNvPr id="5" name="Picture 4" descr="shdi_whr_levels_scatter.png"/>
+          <p:cNvPr id="5" name="Picture 4" descr="hdi_ess_heatmap.png"/>
           <p:cNvPicPr>
             <a:picLocks noChangeAspect="1"/>
           </p:cNvPicPr>
@@ -11303,8 +10848,8 @@
         </p:blipFill>
         <p:spPr>
           <a:xfrm>
-            <a:off x="3508482" y="1965960"/>
-            <a:ext cx="5174731" cy="4480560"/>
+            <a:off x="3601923" y="1965960"/>
+            <a:ext cx="4987848" cy="4480560"/>
           </a:xfrm>
           <a:prstGeom prst="rect">
             <a:avLst/>
@@ -11416,7 +10961,7 @@
                 </a:solidFill>
                 <a:latin typeface="Georgia"/>
               </a:rPr>
-              <a:t>ESS coverage by country and year</a:t>
+              <a:t>Per-country collapse, ESS</a:t>
             </a:r>
           </a:p>
         </p:txBody>
@@ -11461,14 +11006,14 @@
                 </a:solidFill>
                 <a:latin typeface="Calibri"/>
               </a:rPr>
-              <a:t>A rotating panel: 36 countries, roughly biennial from 2010 to 2023, with 17 countries present in all seven waves. This is the power constraint behind every ESS significance test.</a:t>
+              <a:t>More above-the-line exceptions than the WHR analysis shows — sparse waves cut both ways.</a:t>
             </a:r>
           </a:p>
         </p:txBody>
       </p:sp>
       <p:pic>
         <p:nvPicPr>
-          <p:cNvPr id="5" name="Picture 4" descr="ess_year_coverage.png"/>
+          <p:cNvPr id="5" name="Picture 4" descr="hdi_ess_collapse_scatter.png"/>
           <p:cNvPicPr>
             <a:picLocks noChangeAspect="1"/>
           </p:cNvPicPr>
@@ -11482,8 +11027,8 @@
         </p:blipFill>
         <p:spPr>
           <a:xfrm>
-            <a:off x="4247956" y="1965960"/>
-            <a:ext cx="3695783" cy="4480560"/>
+            <a:off x="2057001" y="1965960"/>
+            <a:ext cx="8077693" cy="4480560"/>
           </a:xfrm>
           <a:prstGeom prst="rect">
             <a:avLst/>
@@ -11595,7 +11140,7 @@
                 </a:solidFill>
                 <a:latin typeface="Georgia"/>
               </a:rPr>
-              <a:t>ESS-to-SHDI region crosswalk</a:t>
+              <a:t>HDI progress against life-satisfaction trends, 2010–2023</a:t>
             </a:r>
           </a:p>
         </p:txBody>
@@ -11640,14 +11185,14 @@
                 </a:solidFill>
                 <a:latin typeface="Calibri"/>
               </a:rPr>
-              <a:t>62% of respondents, across 24 of 36 countries, matched to a subnational SHDI value through the NUTS-to-GDL crosswalk.</a:t>
+              <a:t>HDI rose nearly everywhere. ESS life satisfaction rose in 19 countries and fell in 8.</a:t>
             </a:r>
           </a:p>
         </p:txBody>
       </p:sp>
       <p:pic>
         <p:nvPicPr>
-          <p:cNvPr id="5" name="Picture 4" descr="region_crosswalk_match.png"/>
+          <p:cNvPr id="5" name="Picture 4" descr="hdi_vs_lifesat_trends.png"/>
           <p:cNvPicPr>
             <a:picLocks noChangeAspect="1"/>
           </p:cNvPicPr>
@@ -11661,8 +11206,8 @@
         </p:blipFill>
         <p:spPr>
           <a:xfrm>
-            <a:off x="2428154" y="1965960"/>
-            <a:ext cx="7335386" cy="4480560"/>
+            <a:off x="4009215" y="1965960"/>
+            <a:ext cx="4173264" cy="4480560"/>
           </a:xfrm>
           <a:prstGeom prst="rect">
             <a:avLst/>
@@ -11774,7 +11319,7 @@
                 </a:solidFill>
                 <a:latin typeface="Georgia"/>
               </a:rPr>
-              <a:t>Country × indicator significance, ESS</a:t>
+              <a:t>Region-level SHDI against life satisfaction, pooled</a:t>
             </a:r>
           </a:p>
         </p:txBody>
@@ -11819,14 +11364,14 @@
                 </a:solidFill>
                 <a:latin typeface="Calibri"/>
               </a:rPr>
-              <a:t>15% of levels cells and 9% of differences cells FDR-significant; direction consistent with the WHR results, power much lower.</a:t>
+              <a:t>1,313 region-years, pooled R² = 0.32 — this mixes between- and within-country variation, which the within-country panels separate.</a:t>
             </a:r>
           </a:p>
         </p:txBody>
       </p:sp>
       <p:pic>
         <p:nvPicPr>
-          <p:cNvPr id="5" name="Picture 4" descr="hdi_ess_heatmap.png"/>
+          <p:cNvPr id="5" name="Picture 4" descr="region_shdi_lifesat_pooled.png"/>
           <p:cNvPicPr>
             <a:picLocks noChangeAspect="1"/>
           </p:cNvPicPr>
@@ -11840,8 +11385,8 @@
         </p:blipFill>
         <p:spPr>
           <a:xfrm>
-            <a:off x="3601923" y="1965960"/>
-            <a:ext cx="4987848" cy="4480560"/>
+            <a:off x="3123927" y="1965960"/>
+            <a:ext cx="5943841" cy="4480560"/>
           </a:xfrm>
           <a:prstGeom prst="rect">
             <a:avLst/>
@@ -11953,7 +11498,7 @@
                 </a:solidFill>
                 <a:latin typeface="Georgia"/>
               </a:rPr>
-              <a:t>Per-country collapse, ESS</a:t>
+              <a:t>Within-country regional gradients, small multiples</a:t>
             </a:r>
           </a:p>
         </p:txBody>
@@ -11998,14 +11543,14 @@
                 </a:solidFill>
                 <a:latin typeface="Calibri"/>
               </a:rPr>
-              <a:t>More above-the-line exceptions than the WHR analysis shows — sparse waves cut both ways.</a:t>
+              <a:t>Holding country fixed, the regional development–wellbeing gradient is weak in most countries. France is the clearest exception.</a:t>
             </a:r>
           </a:p>
         </p:txBody>
       </p:sp>
       <p:pic>
         <p:nvPicPr>
-          <p:cNvPr id="5" name="Picture 4" descr="hdi_ess_collapse_scatter.png"/>
+          <p:cNvPr id="5" name="Picture 4" descr="within_country_small_multiples.png"/>
           <p:cNvPicPr>
             <a:picLocks noChangeAspect="1"/>
           </p:cNvPicPr>
@@ -12019,8 +11564,8 @@
         </p:blipFill>
         <p:spPr>
           <a:xfrm>
-            <a:off x="2057001" y="1965960"/>
-            <a:ext cx="8077693" cy="4480560"/>
+            <a:off x="2779954" y="1965960"/>
+            <a:ext cx="6631787" cy="4480560"/>
           </a:xfrm>
           <a:prstGeom prst="rect">
             <a:avLst/>
@@ -12132,7 +11677,7 @@
                 </a:solidFill>
                 <a:latin typeface="Georgia"/>
               </a:rPr>
-              <a:t>HDI progress against life-satisfaction trends, 2010–2023</a:t>
+              <a:t>Regional SHDI spread within ESS countries</a:t>
             </a:r>
           </a:p>
         </p:txBody>
@@ -12177,14 +11722,14 @@
                 </a:solidFill>
                 <a:latin typeface="Calibri"/>
               </a:rPr>
-              <a:t>HDI rose nearly everywhere. ESS life satisfaction rose in 19 countries and fell in 8.</a:t>
+              <a:t>Italy and Poland carry several times the internal development inequality of Germany or the Nordics.</a:t>
             </a:r>
           </a:p>
         </p:txBody>
       </p:sp>
       <p:pic>
         <p:nvPicPr>
-          <p:cNvPr id="5" name="Picture 4" descr="hdi_vs_lifesat_trends.png"/>
+          <p:cNvPr id="5" name="Picture 4" descr="european_regional_inequality.png"/>
           <p:cNvPicPr>
             <a:picLocks noChangeAspect="1"/>
           </p:cNvPicPr>
@@ -12198,8 +11743,8 @@
         </p:blipFill>
         <p:spPr>
           <a:xfrm>
-            <a:off x="4009215" y="1965960"/>
-            <a:ext cx="4173264" cy="4480560"/>
+            <a:off x="2097774" y="1965960"/>
+            <a:ext cx="7996146" cy="4480560"/>
           </a:xfrm>
           <a:prstGeom prst="rect">
             <a:avLst/>
@@ -12602,7 +12147,7 @@
                 </a:solidFill>
                 <a:latin typeface="Georgia"/>
               </a:rPr>
-              <a:t>Region-level SHDI against life satisfaction, pooled</a:t>
+              <a:t>Trust and health as rival predictors, nationally</a:t>
             </a:r>
           </a:p>
         </p:txBody>
@@ -12647,14 +12192,14 @@
                 </a:solidFill>
                 <a:latin typeface="Calibri"/>
               </a:rPr>
-              <a:t>1,313 region-years, pooled R² = 0.32 — this mixes between- and within-country variation, which the within-country panels separate.</a:t>
+              <a:t>Self-rated health out-predicts the HDI nationally on significant-country share, 37% against 19%.</a:t>
             </a:r>
           </a:p>
         </p:txBody>
       </p:sp>
       <p:pic>
         <p:nvPicPr>
-          <p:cNvPr id="5" name="Picture 4" descr="region_shdi_lifesat_pooled.png"/>
+          <p:cNvPr id="5" name="Picture 4" descr="mechanisms_trust_health.png"/>
           <p:cNvPicPr>
             <a:picLocks noChangeAspect="1"/>
           </p:cNvPicPr>
@@ -12668,8 +12213,8 @@
         </p:blipFill>
         <p:spPr>
           <a:xfrm>
-            <a:off x="3123927" y="1965960"/>
-            <a:ext cx="5943841" cy="4480560"/>
+            <a:off x="2100069" y="1965960"/>
+            <a:ext cx="7991556" cy="4480560"/>
           </a:xfrm>
           <a:prstGeom prst="rect">
             <a:avLst/>
@@ -12685,543 +12230,6 @@
 </file>
 
 <file path=ppt/slides/slide41.xml><?xml version="1.0" encoding="utf-8"?>
-<p:sld xmlns:a="http://schemas.openxmlformats.org/drawingml/2006/main" xmlns:p="http://schemas.openxmlformats.org/presentationml/2006/main" xmlns:r="http://schemas.openxmlformats.org/officeDocument/2006/relationships">
-  <p:cSld>
-    <p:bg>
-      <p:bgPr>
-        <a:solidFill>
-          <a:srgbClr val="FCFCFB"/>
-        </a:solidFill>
-        <a:effectLst/>
-      </p:bgPr>
-    </p:bg>
-    <p:spTree>
-      <p:nvGrpSpPr>
-        <p:cNvPr id="1" name=""/>
-        <p:cNvGrpSpPr/>
-        <p:nvPr/>
-      </p:nvGrpSpPr>
-      <p:grpSpPr/>
-      <p:sp>
-        <p:nvSpPr>
-          <p:cNvPr id="2" name="TextBox 1"/>
-          <p:cNvSpPr txBox="1"/>
-          <p:nvPr/>
-        </p:nvSpPr>
-        <p:spPr>
-          <a:xfrm>
-            <a:off x="566928" y="411480"/>
-            <a:ext cx="10515600" cy="320040"/>
-          </a:xfrm>
-          <a:prstGeom prst="rect">
-            <a:avLst/>
-          </a:prstGeom>
-          <a:noFill/>
-        </p:spPr>
-        <p:txBody>
-          <a:bodyPr wrap="square" lIns="0" rIns="0" tIns="0" bIns="0">
-            <a:spAutoFit/>
-          </a:bodyPr>
-          <a:lstStyle/>
-          <a:p>
-            <a:pPr>
-              <a:spcBef>
-                <a:spcPts val="0"/>
-              </a:spcBef>
-              <a:spcAft>
-                <a:spcPts val="0"/>
-              </a:spcAft>
-            </a:pPr>
-            <a:r>
-              <a:rPr sz="1000" b="0" i="0">
-                <a:solidFill>
-                  <a:srgbClr val="868D96"/>
-                </a:solidFill>
-                <a:latin typeface="Consolas"/>
-              </a:rPr>
-              <a:t>APPENDIX</a:t>
-            </a:r>
-          </a:p>
-        </p:txBody>
-      </p:sp>
-      <p:sp>
-        <p:nvSpPr>
-          <p:cNvPr id="3" name="TextBox 2"/>
-          <p:cNvSpPr txBox="1"/>
-          <p:nvPr/>
-        </p:nvSpPr>
-        <p:spPr>
-          <a:xfrm>
-            <a:off x="566928" y="749808"/>
-            <a:ext cx="10515600" cy="457200"/>
-          </a:xfrm>
-          <a:prstGeom prst="rect">
-            <a:avLst/>
-          </a:prstGeom>
-          <a:noFill/>
-        </p:spPr>
-        <p:txBody>
-          <a:bodyPr wrap="square" lIns="0" rIns="0" tIns="0" bIns="0">
-            <a:spAutoFit/>
-          </a:bodyPr>
-          <a:lstStyle/>
-          <a:p>
-            <a:pPr>
-              <a:spcBef>
-                <a:spcPts val="0"/>
-              </a:spcBef>
-              <a:spcAft>
-                <a:spcPts val="0"/>
-              </a:spcAft>
-            </a:pPr>
-            <a:r>
-              <a:rPr sz="2000" b="0" i="0">
-                <a:solidFill>
-                  <a:srgbClr val="14171C"/>
-                </a:solidFill>
-                <a:latin typeface="Georgia"/>
-              </a:rPr>
-              <a:t>Within-country regional gradients, small multiples</a:t>
-            </a:r>
-          </a:p>
-        </p:txBody>
-      </p:sp>
-      <p:sp>
-        <p:nvSpPr>
-          <p:cNvPr id="4" name="TextBox 3"/>
-          <p:cNvSpPr txBox="1"/>
-          <p:nvPr/>
-        </p:nvSpPr>
-        <p:spPr>
-          <a:xfrm>
-            <a:off x="566928" y="1207008"/>
-            <a:ext cx="10515600" cy="457200"/>
-          </a:xfrm>
-          <a:prstGeom prst="rect">
-            <a:avLst/>
-          </a:prstGeom>
-          <a:noFill/>
-        </p:spPr>
-        <p:txBody>
-          <a:bodyPr wrap="square" lIns="0" rIns="0" tIns="0" bIns="0">
-            <a:spAutoFit/>
-          </a:bodyPr>
-          <a:lstStyle/>
-          <a:p>
-            <a:pPr>
-              <a:lnSpc>
-                <a:spcPct val="128000"/>
-              </a:lnSpc>
-              <a:spcBef>
-                <a:spcPts val="0"/>
-              </a:spcBef>
-              <a:spcAft>
-                <a:spcPts val="0"/>
-              </a:spcAft>
-            </a:pPr>
-            <a:r>
-              <a:rPr sz="1100" b="0" i="0">
-                <a:solidFill>
-                  <a:srgbClr val="5A6068"/>
-                </a:solidFill>
-                <a:latin typeface="Calibri"/>
-              </a:rPr>
-              <a:t>Holding country fixed, the regional development–wellbeing gradient is weak in most countries. France is the clearest exception.</a:t>
-            </a:r>
-          </a:p>
-        </p:txBody>
-      </p:sp>
-      <p:pic>
-        <p:nvPicPr>
-          <p:cNvPr id="5" name="Picture 4" descr="within_country_small_multiples.png"/>
-          <p:cNvPicPr>
-            <a:picLocks noChangeAspect="1"/>
-          </p:cNvPicPr>
-          <p:nvPr/>
-        </p:nvPicPr>
-        <p:blipFill>
-          <a:blip r:embed="rId2"/>
-          <a:stretch>
-            <a:fillRect/>
-          </a:stretch>
-        </p:blipFill>
-        <p:spPr>
-          <a:xfrm>
-            <a:off x="2779954" y="1965960"/>
-            <a:ext cx="6631787" cy="4480560"/>
-          </a:xfrm>
-          <a:prstGeom prst="rect">
-            <a:avLst/>
-          </a:prstGeom>
-        </p:spPr>
-      </p:pic>
-    </p:spTree>
-  </p:cSld>
-  <p:clrMapOvr>
-    <a:masterClrMapping/>
-  </p:clrMapOvr>
-</p:sld>
-</file>
-
-<file path=ppt/slides/slide42.xml><?xml version="1.0" encoding="utf-8"?>
-<p:sld xmlns:a="http://schemas.openxmlformats.org/drawingml/2006/main" xmlns:p="http://schemas.openxmlformats.org/presentationml/2006/main" xmlns:r="http://schemas.openxmlformats.org/officeDocument/2006/relationships">
-  <p:cSld>
-    <p:bg>
-      <p:bgPr>
-        <a:solidFill>
-          <a:srgbClr val="FCFCFB"/>
-        </a:solidFill>
-        <a:effectLst/>
-      </p:bgPr>
-    </p:bg>
-    <p:spTree>
-      <p:nvGrpSpPr>
-        <p:cNvPr id="1" name=""/>
-        <p:cNvGrpSpPr/>
-        <p:nvPr/>
-      </p:nvGrpSpPr>
-      <p:grpSpPr/>
-      <p:sp>
-        <p:nvSpPr>
-          <p:cNvPr id="2" name="TextBox 1"/>
-          <p:cNvSpPr txBox="1"/>
-          <p:nvPr/>
-        </p:nvSpPr>
-        <p:spPr>
-          <a:xfrm>
-            <a:off x="566928" y="411480"/>
-            <a:ext cx="10515600" cy="320040"/>
-          </a:xfrm>
-          <a:prstGeom prst="rect">
-            <a:avLst/>
-          </a:prstGeom>
-          <a:noFill/>
-        </p:spPr>
-        <p:txBody>
-          <a:bodyPr wrap="square" lIns="0" rIns="0" tIns="0" bIns="0">
-            <a:spAutoFit/>
-          </a:bodyPr>
-          <a:lstStyle/>
-          <a:p>
-            <a:pPr>
-              <a:spcBef>
-                <a:spcPts val="0"/>
-              </a:spcBef>
-              <a:spcAft>
-                <a:spcPts val="0"/>
-              </a:spcAft>
-            </a:pPr>
-            <a:r>
-              <a:rPr sz="1000" b="0" i="0">
-                <a:solidFill>
-                  <a:srgbClr val="868D96"/>
-                </a:solidFill>
-                <a:latin typeface="Consolas"/>
-              </a:rPr>
-              <a:t>APPENDIX</a:t>
-            </a:r>
-          </a:p>
-        </p:txBody>
-      </p:sp>
-      <p:sp>
-        <p:nvSpPr>
-          <p:cNvPr id="3" name="TextBox 2"/>
-          <p:cNvSpPr txBox="1"/>
-          <p:nvPr/>
-        </p:nvSpPr>
-        <p:spPr>
-          <a:xfrm>
-            <a:off x="566928" y="749808"/>
-            <a:ext cx="10515600" cy="457200"/>
-          </a:xfrm>
-          <a:prstGeom prst="rect">
-            <a:avLst/>
-          </a:prstGeom>
-          <a:noFill/>
-        </p:spPr>
-        <p:txBody>
-          <a:bodyPr wrap="square" lIns="0" rIns="0" tIns="0" bIns="0">
-            <a:spAutoFit/>
-          </a:bodyPr>
-          <a:lstStyle/>
-          <a:p>
-            <a:pPr>
-              <a:spcBef>
-                <a:spcPts val="0"/>
-              </a:spcBef>
-              <a:spcAft>
-                <a:spcPts val="0"/>
-              </a:spcAft>
-            </a:pPr>
-            <a:r>
-              <a:rPr sz="2000" b="0" i="0">
-                <a:solidFill>
-                  <a:srgbClr val="14171C"/>
-                </a:solidFill>
-                <a:latin typeface="Georgia"/>
-              </a:rPr>
-              <a:t>Regional SHDI spread within ESS countries</a:t>
-            </a:r>
-          </a:p>
-        </p:txBody>
-      </p:sp>
-      <p:sp>
-        <p:nvSpPr>
-          <p:cNvPr id="4" name="TextBox 3"/>
-          <p:cNvSpPr txBox="1"/>
-          <p:nvPr/>
-        </p:nvSpPr>
-        <p:spPr>
-          <a:xfrm>
-            <a:off x="566928" y="1207008"/>
-            <a:ext cx="10515600" cy="457200"/>
-          </a:xfrm>
-          <a:prstGeom prst="rect">
-            <a:avLst/>
-          </a:prstGeom>
-          <a:noFill/>
-        </p:spPr>
-        <p:txBody>
-          <a:bodyPr wrap="square" lIns="0" rIns="0" tIns="0" bIns="0">
-            <a:spAutoFit/>
-          </a:bodyPr>
-          <a:lstStyle/>
-          <a:p>
-            <a:pPr>
-              <a:lnSpc>
-                <a:spcPct val="128000"/>
-              </a:lnSpc>
-              <a:spcBef>
-                <a:spcPts val="0"/>
-              </a:spcBef>
-              <a:spcAft>
-                <a:spcPts val="0"/>
-              </a:spcAft>
-            </a:pPr>
-            <a:r>
-              <a:rPr sz="1100" b="0" i="0">
-                <a:solidFill>
-                  <a:srgbClr val="5A6068"/>
-                </a:solidFill>
-                <a:latin typeface="Calibri"/>
-              </a:rPr>
-              <a:t>Italy and Poland carry several times the internal development inequality of Germany or the Nordics.</a:t>
-            </a:r>
-          </a:p>
-        </p:txBody>
-      </p:sp>
-      <p:pic>
-        <p:nvPicPr>
-          <p:cNvPr id="5" name="Picture 4" descr="european_regional_inequality.png"/>
-          <p:cNvPicPr>
-            <a:picLocks noChangeAspect="1"/>
-          </p:cNvPicPr>
-          <p:nvPr/>
-        </p:nvPicPr>
-        <p:blipFill>
-          <a:blip r:embed="rId2"/>
-          <a:stretch>
-            <a:fillRect/>
-          </a:stretch>
-        </p:blipFill>
-        <p:spPr>
-          <a:xfrm>
-            <a:off x="2097774" y="1965960"/>
-            <a:ext cx="7996146" cy="4480560"/>
-          </a:xfrm>
-          <a:prstGeom prst="rect">
-            <a:avLst/>
-          </a:prstGeom>
-        </p:spPr>
-      </p:pic>
-    </p:spTree>
-  </p:cSld>
-  <p:clrMapOvr>
-    <a:masterClrMapping/>
-  </p:clrMapOvr>
-</p:sld>
-</file>
-
-<file path=ppt/slides/slide43.xml><?xml version="1.0" encoding="utf-8"?>
-<p:sld xmlns:a="http://schemas.openxmlformats.org/drawingml/2006/main" xmlns:p="http://schemas.openxmlformats.org/presentationml/2006/main" xmlns:r="http://schemas.openxmlformats.org/officeDocument/2006/relationships">
-  <p:cSld>
-    <p:bg>
-      <p:bgPr>
-        <a:solidFill>
-          <a:srgbClr val="FCFCFB"/>
-        </a:solidFill>
-        <a:effectLst/>
-      </p:bgPr>
-    </p:bg>
-    <p:spTree>
-      <p:nvGrpSpPr>
-        <p:cNvPr id="1" name=""/>
-        <p:cNvGrpSpPr/>
-        <p:nvPr/>
-      </p:nvGrpSpPr>
-      <p:grpSpPr/>
-      <p:sp>
-        <p:nvSpPr>
-          <p:cNvPr id="2" name="TextBox 1"/>
-          <p:cNvSpPr txBox="1"/>
-          <p:nvPr/>
-        </p:nvSpPr>
-        <p:spPr>
-          <a:xfrm>
-            <a:off x="566928" y="411480"/>
-            <a:ext cx="10515600" cy="320040"/>
-          </a:xfrm>
-          <a:prstGeom prst="rect">
-            <a:avLst/>
-          </a:prstGeom>
-          <a:noFill/>
-        </p:spPr>
-        <p:txBody>
-          <a:bodyPr wrap="square" lIns="0" rIns="0" tIns="0" bIns="0">
-            <a:spAutoFit/>
-          </a:bodyPr>
-          <a:lstStyle/>
-          <a:p>
-            <a:pPr>
-              <a:spcBef>
-                <a:spcPts val="0"/>
-              </a:spcBef>
-              <a:spcAft>
-                <a:spcPts val="0"/>
-              </a:spcAft>
-            </a:pPr>
-            <a:r>
-              <a:rPr sz="1000" b="0" i="0">
-                <a:solidFill>
-                  <a:srgbClr val="868D96"/>
-                </a:solidFill>
-                <a:latin typeface="Consolas"/>
-              </a:rPr>
-              <a:t>APPENDIX</a:t>
-            </a:r>
-          </a:p>
-        </p:txBody>
-      </p:sp>
-      <p:sp>
-        <p:nvSpPr>
-          <p:cNvPr id="3" name="TextBox 2"/>
-          <p:cNvSpPr txBox="1"/>
-          <p:nvPr/>
-        </p:nvSpPr>
-        <p:spPr>
-          <a:xfrm>
-            <a:off x="566928" y="749808"/>
-            <a:ext cx="10515600" cy="457200"/>
-          </a:xfrm>
-          <a:prstGeom prst="rect">
-            <a:avLst/>
-          </a:prstGeom>
-          <a:noFill/>
-        </p:spPr>
-        <p:txBody>
-          <a:bodyPr wrap="square" lIns="0" rIns="0" tIns="0" bIns="0">
-            <a:spAutoFit/>
-          </a:bodyPr>
-          <a:lstStyle/>
-          <a:p>
-            <a:pPr>
-              <a:spcBef>
-                <a:spcPts val="0"/>
-              </a:spcBef>
-              <a:spcAft>
-                <a:spcPts val="0"/>
-              </a:spcAft>
-            </a:pPr>
-            <a:r>
-              <a:rPr sz="2000" b="0" i="0">
-                <a:solidFill>
-                  <a:srgbClr val="14171C"/>
-                </a:solidFill>
-                <a:latin typeface="Georgia"/>
-              </a:rPr>
-              <a:t>Trust and health as rival predictors, nationally</a:t>
-            </a:r>
-          </a:p>
-        </p:txBody>
-      </p:sp>
-      <p:sp>
-        <p:nvSpPr>
-          <p:cNvPr id="4" name="TextBox 3"/>
-          <p:cNvSpPr txBox="1"/>
-          <p:nvPr/>
-        </p:nvSpPr>
-        <p:spPr>
-          <a:xfrm>
-            <a:off x="566928" y="1207008"/>
-            <a:ext cx="10515600" cy="457200"/>
-          </a:xfrm>
-          <a:prstGeom prst="rect">
-            <a:avLst/>
-          </a:prstGeom>
-          <a:noFill/>
-        </p:spPr>
-        <p:txBody>
-          <a:bodyPr wrap="square" lIns="0" rIns="0" tIns="0" bIns="0">
-            <a:spAutoFit/>
-          </a:bodyPr>
-          <a:lstStyle/>
-          <a:p>
-            <a:pPr>
-              <a:lnSpc>
-                <a:spcPct val="128000"/>
-              </a:lnSpc>
-              <a:spcBef>
-                <a:spcPts val="0"/>
-              </a:spcBef>
-              <a:spcAft>
-                <a:spcPts val="0"/>
-              </a:spcAft>
-            </a:pPr>
-            <a:r>
-              <a:rPr sz="1100" b="0" i="0">
-                <a:solidFill>
-                  <a:srgbClr val="5A6068"/>
-                </a:solidFill>
-                <a:latin typeface="Calibri"/>
-              </a:rPr>
-              <a:t>Self-rated health out-predicts the HDI nationally on significant-country share, 37% against 19%.</a:t>
-            </a:r>
-          </a:p>
-        </p:txBody>
-      </p:sp>
-      <p:pic>
-        <p:nvPicPr>
-          <p:cNvPr id="5" name="Picture 4" descr="mechanisms_trust_health.png"/>
-          <p:cNvPicPr>
-            <a:picLocks noChangeAspect="1"/>
-          </p:cNvPicPr>
-          <p:nvPr/>
-        </p:nvPicPr>
-        <p:blipFill>
-          <a:blip r:embed="rId2"/>
-          <a:stretch>
-            <a:fillRect/>
-          </a:stretch>
-        </p:blipFill>
-        <p:spPr>
-          <a:xfrm>
-            <a:off x="2100069" y="1965960"/>
-            <a:ext cx="7991556" cy="4480560"/>
-          </a:xfrm>
-          <a:prstGeom prst="rect">
-            <a:avLst/>
-          </a:prstGeom>
-        </p:spPr>
-      </p:pic>
-    </p:spTree>
-  </p:cSld>
-  <p:clrMapOvr>
-    <a:masterClrMapping/>
-  </p:clrMapOvr>
-</p:sld>
-</file>
-
-<file path=ppt/slides/slide44.xml><?xml version="1.0" encoding="utf-8"?>
 <p:sld xmlns:a="http://schemas.openxmlformats.org/drawingml/2006/main" xmlns:p="http://schemas.openxmlformats.org/presentationml/2006/main" xmlns:r="http://schemas.openxmlformats.org/officeDocument/2006/relationships">
   <p:cSld>
     <p:bg>

--- a/deck/The_Education_Exception.pptx
+++ b/deck/The_Education_Exception.pptx
@@ -3371,7 +3371,7 @@
                 </a:solidFill>
                 <a:latin typeface="Consolas"/>
               </a:rPr>
-              <a:t>SDG: 42 countries, 661 series · HDI &amp; SHDI × World Happiness Report: 148–151 countries, 2011–2023 · European Social Survey: 36 countries, 351,023 respondents, rounds 5–11 (2010–2023)</a:t>
+              <a:t>SDG: 42 countries, 661 series · HDI × World Happiness Report: 151 countries, 2011–2023 · Subnational HDI: 239 regions · European Social Survey: 36 countries, 351,023 respondents, rounds 5–11 (2010–2023)</a:t>
             </a:r>
           </a:p>
         </p:txBody>
@@ -3965,7 +3965,7 @@
                 </a:solidFill>
                 <a:latin typeface="Calibri"/>
               </a:rPr>
-              <a:t>Ranking the 632 SDG series with usable coverage by the share of countries in which they are FDR-significant puts child mortality, stunting, water and sanitation, and access to financial services at the top. These are survival and basic infrastructure — the steep part of the development curve, not the 2030 Agenda's institutional superstructure.</a:t>
+              <a:t>Ranking the 609 SDG series measured in at least 8 countries by the share of countries in which they are FDR-significant puts child mortality, stunting, water and sanitation, and access to financial services at the top. These are survival and basic infrastructure — the steep part of the development curve, not the 2030 Agenda's institutional superstructure.</a:t>
             </a:r>
           </a:p>
           <a:p>
@@ -3987,7 +3987,7 @@
                 </a:solidFill>
                 <a:latin typeface="Calibri"/>
               </a:rPr>
-              <a:t>The best-performing education indicator ranks about 101st of 632 — and it is participation in organized learning before primary entry, an access measure, which is the same construct Act II turns on. In first differences, only 9 of the 661 series have even one significant country, which is why there is no differences ranking to report at all.</a:t>
+              <a:t>The best-performing education indicator ranks about 100th of 609 — and it is participation in organized learning before primary entry, an access measure, which is the same construct Act II turns on. In first differences, only 9 of the 661 series have even one significant country, which is why there is no differences ranking to report at all.</a:t>
             </a:r>
           </a:p>
         </p:txBody>
@@ -4098,7 +4098,7 @@
                 </a:solidFill>
                 <a:latin typeface="Calibri"/>
               </a:rPr>
-              <a:t>The 20 highest-ranking SDG series of 632, by share of countries FDR-significant in levels.</a:t>
+              <a:t>The 20 highest-ranking SDG series of 609, by share of countries FDR-significant in levels.</a:t>
             </a:r>
           </a:p>
         </p:txBody>
@@ -4901,8 +4901,8 @@
         </p:blipFill>
         <p:spPr>
           <a:xfrm>
-            <a:off x="5120640" y="1213595"/>
-            <a:ext cx="6537960" cy="3964465"/>
+            <a:off x="5120640" y="1214810"/>
+            <a:ext cx="6537960" cy="3962035"/>
           </a:xfrm>
           <a:prstGeom prst="rect">
             <a:avLst/>
@@ -5107,7 +5107,29 @@
                 </a:solidFill>
                 <a:latin typeface="Calibri"/>
               </a:rPr>
-              <a:t>Aggregating ESS respondents' reported years of schooling to the country level and regressing World Happiness Report happiness on it gives R² = 0.308, against 0.326 for the HDI's own mean-years-of-schooling series. Changing both the education source and the wellbeing outcome leaves the relationship essentially where it was.</a:t>
+              <a:t>Aggregating ESS respondents' reported years of schooling to the country level and regressing World Happiness Report happiness on it gives R² = 0.308 across 189 country-rounds. The HDI's own mean-years-of-schooling series, on exactly the same cells and the same outcome, gives 0.161. An independently measured schooling variable does not merely reproduce the HDI's — it roughly doubles it.</a:t>
+            </a:r>
+          </a:p>
+          <a:p>
+            <a:pPr>
+              <a:lnSpc>
+                <a:spcPct val="132000"/>
+              </a:lnSpc>
+              <a:spcBef>
+                <a:spcPts val="0"/>
+              </a:spcBef>
+              <a:spcAft>
+                <a:spcPts val="1100"/>
+              </a:spcAft>
+            </a:pPr>
+            <a:r>
+              <a:rPr sz="1150" b="0" i="0">
+                <a:solidFill>
+                  <a:srgbClr val="5A6068"/>
+                </a:solidFill>
+                <a:latin typeface="Calibri"/>
+              </a:rPr>
+              <a:t>An earlier draft compared 0.308 against 0.326 and called them near-identical. That was an error: 0.326 is the median within-country time-series R² from HappinessHDI.R, not a cross-country figure, so the two were never comparable. The corrected comparison is stronger, not weaker.</a:t>
             </a:r>
           </a:p>
         </p:txBody>
@@ -5170,8 +5192,8 @@
         </p:blipFill>
         <p:spPr>
           <a:xfrm>
-            <a:off x="5120640" y="1993514"/>
-            <a:ext cx="6537960" cy="2404627"/>
+            <a:off x="5120640" y="2300998"/>
+            <a:ext cx="6537960" cy="1789660"/>
           </a:xfrm>
           <a:prstGeom prst="rect">
             <a:avLst/>
@@ -6765,7 +6787,7 @@
                 </a:solidFill>
                 <a:latin typeface="Calibri"/>
               </a:rPr>
-              <a:t>The same design on the HDI, on the subnational HDI, and against a second wellbeing survey. It collapses every time.</a:t>
+              <a:t>The same design on the HDI, against a second wellbeing survey, and one spatial scale down. It collapses every time.</a:t>
             </a:r>
           </a:p>
         </p:txBody>
@@ -9764,7 +9786,7 @@
                 </a:solidFill>
                 <a:latin typeface="Georgia"/>
               </a:rPr>
-              <a:t>Run the original design on three unrelated development frameworks, at two spatial scales, against two independent wellbeing instruments. The levels-to-differences collapse appears in all of them.</a:t>
+              <a:t>Run the original design on a second development framework, against a second wellbeing instrument, and one spatial scale down. The levels-to-differences collapse appears every time. The subnational HDI plays a different role: it asks whether the national pattern survives disaggregation.</a:t>
             </a:r>
           </a:p>
         </p:txBody>
@@ -9934,7 +9956,7 @@
                 </a:solidFill>
                 <a:latin typeface="Consolas"/>
               </a:rPr>
-              <a:t>45% → 4%</a:t>
+              <a:t>15% → 9%</a:t>
             </a:r>
           </a:p>
           <a:p>
@@ -9956,7 +9978,7 @@
                 </a:solidFill>
                 <a:latin typeface="Calibri"/>
               </a:rPr>
-              <a:t>and under the subnational HDI</a:t>
+              <a:t>of cells, against a second wellbeing survey (ESS)</a:t>
             </a:r>
           </a:p>
         </p:txBody>
@@ -10066,7 +10088,7 @@
                 </a:solidFill>
                 <a:latin typeface="Georgia"/>
               </a:rPr>
-              <a:t>Subnational HDI validated against the UNDP HDI</a:t>
+              <a:t>GDL national SHDI against the UNDP HDI</a:t>
             </a:r>
           </a:p>
         </p:txBody>
@@ -10111,7 +10133,7 @@
                 </a:solidFill>
                 <a:latin typeface="Calibri"/>
               </a:rPr>
-              <a:t>National aggregates agree closely, which is what licenses the region-level analysis.</a:t>
+              <a:t>The two are the same series — R² = 1.000, every country-year identical, because GDL derives the national figure from the UNDP index. Retained to document the check, not as validation: agreement here says nothing about the subnational disaggregation, which is where GDL's own data begins.</a:t>
             </a:r>
           </a:p>
         </p:txBody>
@@ -12037,7 +12059,7 @@
                 </a:solidFill>
                 <a:latin typeface="Calibri"/>
               </a:rPr>
-              <a:t>Countries with an FDR-significant development–happiness association, levels versus first differences, for the HDI and for the Global Data Lab's subnational HDI aggregated to the national level. One test per country per index.</a:t>
+              <a:t>Countries with an FDR-significant development–happiness association, levels versus first differences, under the SDG framework and under the HDI composite.</a:t>
             </a:r>
           </a:p>
         </p:txBody>
@@ -12213,8 +12235,8 @@
         </p:blipFill>
         <p:spPr>
           <a:xfrm>
-            <a:off x="2100069" y="1965960"/>
-            <a:ext cx="7991556" cy="4480560"/>
+            <a:off x="3617081" y="1965960"/>
+            <a:ext cx="4957532" cy="4480560"/>
           </a:xfrm>
           <a:prstGeom prst="rect">
             <a:avLst/>
@@ -12754,7 +12776,7 @@
                 </a:solidFill>
                 <a:latin typeface="Consolas"/>
               </a:rPr>
-              <a:t>REPLICATION 2 · A SECOND PRODUCER</a:t>
+              <a:t>WHAT THE SUBNATIONAL HDI IS FOR</a:t>
             </a:r>
           </a:p>
         </p:txBody>
@@ -12799,7 +12821,7 @@
                 </a:solidFill>
                 <a:latin typeface="Georgia"/>
               </a:rPr>
-              <a:t>A different institution's index, built differently, gives the same numbers</a:t>
+              <a:t>Not a second producer — a test of whether the national pattern holds inside countries</a:t>
             </a:r>
           </a:p>
         </p:txBody>
@@ -12844,7 +12866,29 @@
                 </a:solidFill>
                 <a:latin typeface="Calibri"/>
               </a:rPr>
-              <a:t>The Global Data Lab constructs its subnational HDI from household surveys rather than from the national accounts and administrative series the UNDP uses. Aggregated back to the national level it gives 66 of 148 in levels and 6 of 148 in differences — 45% down to 4%, statistically indistinguishable from the HDI's 42% down to 2%.</a:t>
+              <a:t>The Global Data Lab's SHDI cannot serve as an independent replication, and the commentary should not present it as one. At national level it is numerically identical to the UNDP HDI: all 1,696 overlapping country-years agree exactly, because GDL derives the national figure from the UNDP series. Running the collapse design on it reproduces the HDI result by construction rather than by corroboration.</a:t>
+            </a:r>
+          </a:p>
+          <a:p>
+            <a:pPr>
+              <a:lnSpc>
+                <a:spcPct val="132000"/>
+              </a:lnSpc>
+              <a:spcBef>
+                <a:spcPts val="0"/>
+              </a:spcBef>
+              <a:spcAft>
+                <a:spcPts val="1100"/>
+              </a:spcAft>
+            </a:pPr>
+            <a:r>
+              <a:rPr sz="1400" b="0" i="0">
+                <a:solidFill>
+                  <a:srgbClr val="5A6068"/>
+                </a:solidFill>
+                <a:latin typeface="Calibri"/>
+              </a:rPr>
+              <a:t>Its actual value is disaggregation. GDL's region-level values are its own — only 655 of 58,224 region-years coincide with their country's national figure — so the SHDI is what lets us ask whether the national development–wellbeing relationship holds at subnational level, and where it does not. That question is the subject of Act III, and the answer turns out to be the most policy-relevant result in the commentary.</a:t>
             </a:r>
           </a:p>
         </p:txBody>
@@ -13603,7 +13647,7 @@
                 </a:solidFill>
                 <a:latin typeface="Georgia"/>
               </a:rPr>
-              <a:t>The commentary can therefore state the asymmetry as a property of the development–wellbeing relationship rather than of any particular index, and move on to the question that actually matters: given that almost nothing survives the move to within-country change, what carries the level signal?</a:t>
+              <a:t>Two independent replications and one scale test. The commentary can therefore state the asymmetry as a property of the development–wellbeing relationship rather than of any particular index, and move on to the question that actually matters: given that almost nothing survives the move to within-country change, what carries the level signal?</a:t>
             </a:r>
           </a:p>
         </p:txBody>

--- a/deck/The_Education_Exception.pptx
+++ b/deck/The_Education_Exception.pptx
@@ -5974,7 +5974,7 @@
                 </a:solidFill>
                 <a:latin typeface="Consolas"/>
               </a:rPr>
-              <a:t>+0.89 → +0.15</a:t>
+              <a:t>+0.87 → +0.12</a:t>
             </a:r>
           </a:p>
           <a:p>
@@ -7267,7 +7267,29 @@
                 </a:solidFill>
                 <a:latin typeface="Calibri"/>
               </a:rPr>
-              <a:t>Within countries the ranking inverts. Development falls to a median regional correlation of +0.15, significant in 3 of 16 countries, while self-rated health holds at +0.51 (8 of 16) and social trust at +0.49 (6 of 16). The World Happiness Report cannot see this at all — it has no subnational values. It is the specific thing the ESS adds.</a:t>
+              <a:t>Within countries the ranking inverts. Development falls to a median regional correlation of +0.12, significant in 3 of 16 countries, while self-rated health holds at +0.51 (8 of 16) and social trust at +0.49 (6 of 16). The World Happiness Report cannot see this at all — it has no subnational values. It is the specific thing the ESS adds.</a:t>
+            </a:r>
+          </a:p>
+          <a:p>
+            <a:pPr>
+              <a:lnSpc>
+                <a:spcPct val="132000"/>
+              </a:lnSpc>
+              <a:spcBef>
+                <a:spcPts val="0"/>
+              </a:spcBef>
+              <a:spcAft>
+                <a:spcPts val="1100"/>
+              </a:spcAft>
+            </a:pPr>
+            <a:r>
+              <a:rPr sz="1150" b="0" i="0">
+                <a:solidFill>
+                  <a:srgbClr val="5A6068"/>
+                </a:solidFill>
+                <a:latin typeface="Calibri"/>
+              </a:rPr>
+              <a:t>Two cautions on the detail. The health-versus-trust ordering is not stable: aggregating region means across waves rather than within them reverses it, putting trust at +0.57 and health at +0.50. What is stable, under every specification we tried, is that both sit near +0.5 while development sits near zero. And per-country coverage varies sharply — Italy matches only 30% of respondents to a region, Sweden 57%, Croatia 69%, against 91–100% elsewhere. Dropping those three, or dropping regions built on fewer than 200 respondents, leaves the flip intact.</a:t>
             </a:r>
           </a:p>
         </p:txBody>
@@ -12393,7 +12415,7 @@
                 </a:solidFill>
                 <a:latin typeface="Calibri"/>
               </a:rPr>
-              <a:t>Signed within-country regional correlations for all 16 countries; filled markers are p &lt; .05. Sweden is the odd one out, negative on all three.</a:t>
+              <a:t>Signed within-country regional correlations for all 16 countries; filled markers are p &lt; .05. Sweden reads negative on all three, but only 57% of Swedish respondents carry a usable region code, so that result should not be interpreted.</a:t>
             </a:r>
           </a:p>
         </p:txBody>
